--- a/Presentation1.pptx
+++ b/Presentation1.pptx
@@ -6,14 +6,18 @@
   </p:sldMasterIdLst>
   <p:sldIdLst>
     <p:sldId id="256" r:id="rId2"/>
-    <p:sldId id="260" r:id="rId3"/>
-    <p:sldId id="257" r:id="rId4"/>
-    <p:sldId id="258" r:id="rId5"/>
-    <p:sldId id="259" r:id="rId6"/>
-    <p:sldId id="261" r:id="rId7"/>
-    <p:sldId id="262" r:id="rId8"/>
-    <p:sldId id="263" r:id="rId9"/>
-    <p:sldId id="264" r:id="rId10"/>
+    <p:sldId id="265" r:id="rId3"/>
+    <p:sldId id="260" r:id="rId4"/>
+    <p:sldId id="257" r:id="rId5"/>
+    <p:sldId id="266" r:id="rId6"/>
+    <p:sldId id="258" r:id="rId7"/>
+    <p:sldId id="267" r:id="rId8"/>
+    <p:sldId id="268" r:id="rId9"/>
+    <p:sldId id="270" r:id="rId10"/>
+    <p:sldId id="261" r:id="rId11"/>
+    <p:sldId id="262" r:id="rId12"/>
+    <p:sldId id="263" r:id="rId13"/>
+    <p:sldId id="264" r:id="rId14"/>
   </p:sldIdLst>
   <p:sldSz cx="12192000" cy="6858000"/>
   <p:notesSz cx="6858000" cy="9144000"/>
@@ -3955,7 +3959,706 @@
 </p:sld>
 </file>
 
+<file path=ppt/slides/slide10.xml><?xml version="1.0" encoding="utf-8"?>
+<p:sld xmlns:a="http://schemas.openxmlformats.org/drawingml/2006/main" xmlns:r="http://schemas.openxmlformats.org/officeDocument/2006/relationships" xmlns:p="http://schemas.openxmlformats.org/presentationml/2006/main">
+  <p:cSld>
+    <p:spTree>
+      <p:nvGrpSpPr>
+        <p:cNvPr id="1" name=""/>
+        <p:cNvGrpSpPr/>
+        <p:nvPr/>
+      </p:nvGrpSpPr>
+      <p:grpSpPr>
+        <a:xfrm>
+          <a:off x="0" y="0"/>
+          <a:ext cx="0" cy="0"/>
+          <a:chOff x="0" y="0"/>
+          <a:chExt cx="0" cy="0"/>
+        </a:xfrm>
+      </p:grpSpPr>
+      <p:sp>
+        <p:nvSpPr>
+          <p:cNvPr id="2" name="Title 1">
+            <a:extLst>
+              <a:ext uri="{FF2B5EF4-FFF2-40B4-BE49-F238E27FC236}">
+                <a16:creationId xmlns:a16="http://schemas.microsoft.com/office/drawing/2014/main" id="{515984D7-D2CE-D5F3-4D33-71550CF3C5CB}"/>
+              </a:ext>
+            </a:extLst>
+          </p:cNvPr>
+          <p:cNvSpPr>
+            <a:spLocks noGrp="1"/>
+          </p:cNvSpPr>
+          <p:nvPr>
+            <p:ph type="title"/>
+          </p:nvPr>
+        </p:nvSpPr>
+        <p:spPr/>
+        <p:txBody>
+          <a:bodyPr/>
+          <a:lstStyle/>
+          <a:p>
+            <a:r>
+              <a:rPr lang="en-US" dirty="0"/>
+              <a:t>Results at Re=100, 400, 800</a:t>
+            </a:r>
+          </a:p>
+        </p:txBody>
+      </p:sp>
+      <p:sp>
+        <p:nvSpPr>
+          <p:cNvPr id="3" name="Content Placeholder 2">
+            <a:extLst>
+              <a:ext uri="{FF2B5EF4-FFF2-40B4-BE49-F238E27FC236}">
+                <a16:creationId xmlns:a16="http://schemas.microsoft.com/office/drawing/2014/main" id="{885C0D54-99DD-E31E-26DB-A88D993E79D8}"/>
+              </a:ext>
+            </a:extLst>
+          </p:cNvPr>
+          <p:cNvSpPr>
+            <a:spLocks noGrp="1"/>
+          </p:cNvSpPr>
+          <p:nvPr>
+            <p:ph idx="1"/>
+          </p:nvPr>
+        </p:nvSpPr>
+        <p:spPr/>
+        <p:txBody>
+          <a:bodyPr/>
+          <a:lstStyle/>
+          <a:p>
+            <a:endParaRPr lang="en-US" dirty="0"/>
+          </a:p>
+        </p:txBody>
+      </p:sp>
+    </p:spTree>
+    <p:extLst>
+      <p:ext uri="{BB962C8B-B14F-4D97-AF65-F5344CB8AC3E}">
+        <p14:creationId xmlns:p14="http://schemas.microsoft.com/office/powerpoint/2010/main" val="1095544334"/>
+      </p:ext>
+    </p:extLst>
+  </p:cSld>
+  <p:clrMapOvr>
+    <a:masterClrMapping/>
+  </p:clrMapOvr>
+</p:sld>
+</file>
+
+<file path=ppt/slides/slide11.xml><?xml version="1.0" encoding="utf-8"?>
+<p:sld xmlns:a="http://schemas.openxmlformats.org/drawingml/2006/main" xmlns:r="http://schemas.openxmlformats.org/officeDocument/2006/relationships" xmlns:p="http://schemas.openxmlformats.org/presentationml/2006/main">
+  <p:cSld>
+    <p:spTree>
+      <p:nvGrpSpPr>
+        <p:cNvPr id="1" name=""/>
+        <p:cNvGrpSpPr/>
+        <p:nvPr/>
+      </p:nvGrpSpPr>
+      <p:grpSpPr>
+        <a:xfrm>
+          <a:off x="0" y="0"/>
+          <a:ext cx="0" cy="0"/>
+          <a:chOff x="0" y="0"/>
+          <a:chExt cx="0" cy="0"/>
+        </a:xfrm>
+      </p:grpSpPr>
+      <p:sp>
+        <p:nvSpPr>
+          <p:cNvPr id="2" name="Title 1">
+            <a:extLst>
+              <a:ext uri="{FF2B5EF4-FFF2-40B4-BE49-F238E27FC236}">
+                <a16:creationId xmlns:a16="http://schemas.microsoft.com/office/drawing/2014/main" id="{FB2E32BB-25E9-27ED-B610-6A5E47A250EA}"/>
+              </a:ext>
+            </a:extLst>
+          </p:cNvPr>
+          <p:cNvSpPr>
+            <a:spLocks noGrp="1"/>
+          </p:cNvSpPr>
+          <p:nvPr>
+            <p:ph type="title"/>
+          </p:nvPr>
+        </p:nvSpPr>
+        <p:spPr/>
+        <p:txBody>
+          <a:bodyPr/>
+          <a:lstStyle/>
+          <a:p>
+            <a:r>
+              <a:rPr lang="en-US" dirty="0"/>
+              <a:t>Strengths and Limitations</a:t>
+            </a:r>
+          </a:p>
+        </p:txBody>
+      </p:sp>
+      <p:sp>
+        <p:nvSpPr>
+          <p:cNvPr id="3" name="Content Placeholder 2">
+            <a:extLst>
+              <a:ext uri="{FF2B5EF4-FFF2-40B4-BE49-F238E27FC236}">
+                <a16:creationId xmlns:a16="http://schemas.microsoft.com/office/drawing/2014/main" id="{17574145-5798-88A0-0DA9-018F8901AD84}"/>
+              </a:ext>
+            </a:extLst>
+          </p:cNvPr>
+          <p:cNvSpPr>
+            <a:spLocks noGrp="1"/>
+          </p:cNvSpPr>
+          <p:nvPr>
+            <p:ph idx="1"/>
+          </p:nvPr>
+        </p:nvSpPr>
+        <p:spPr/>
+        <p:txBody>
+          <a:bodyPr/>
+          <a:lstStyle/>
+          <a:p>
+            <a:endParaRPr lang="en-US"/>
+          </a:p>
+        </p:txBody>
+      </p:sp>
+    </p:spTree>
+    <p:extLst>
+      <p:ext uri="{BB962C8B-B14F-4D97-AF65-F5344CB8AC3E}">
+        <p14:creationId xmlns:p14="http://schemas.microsoft.com/office/powerpoint/2010/main" val="505740524"/>
+      </p:ext>
+    </p:extLst>
+  </p:cSld>
+  <p:clrMapOvr>
+    <a:masterClrMapping/>
+  </p:clrMapOvr>
+</p:sld>
+</file>
+
+<file path=ppt/slides/slide12.xml><?xml version="1.0" encoding="utf-8"?>
+<p:sld xmlns:a="http://schemas.openxmlformats.org/drawingml/2006/main" xmlns:r="http://schemas.openxmlformats.org/officeDocument/2006/relationships" xmlns:p="http://schemas.openxmlformats.org/presentationml/2006/main">
+  <p:cSld>
+    <p:spTree>
+      <p:nvGrpSpPr>
+        <p:cNvPr id="1" name=""/>
+        <p:cNvGrpSpPr/>
+        <p:nvPr/>
+      </p:nvGrpSpPr>
+      <p:grpSpPr>
+        <a:xfrm>
+          <a:off x="0" y="0"/>
+          <a:ext cx="0" cy="0"/>
+          <a:chOff x="0" y="0"/>
+          <a:chExt cx="0" cy="0"/>
+        </a:xfrm>
+      </p:grpSpPr>
+      <p:sp>
+        <p:nvSpPr>
+          <p:cNvPr id="2" name="Title 1">
+            <a:extLst>
+              <a:ext uri="{FF2B5EF4-FFF2-40B4-BE49-F238E27FC236}">
+                <a16:creationId xmlns:a16="http://schemas.microsoft.com/office/drawing/2014/main" id="{028621CC-814A-D7A9-4BBC-27FE0D235955}"/>
+              </a:ext>
+            </a:extLst>
+          </p:cNvPr>
+          <p:cNvSpPr>
+            <a:spLocks noGrp="1"/>
+          </p:cNvSpPr>
+          <p:nvPr>
+            <p:ph type="title"/>
+          </p:nvPr>
+        </p:nvSpPr>
+        <p:spPr/>
+        <p:txBody>
+          <a:bodyPr/>
+          <a:lstStyle/>
+          <a:p>
+            <a:r>
+              <a:rPr lang="en-US" dirty="0"/>
+              <a:t>Where PINNs Have the Edge?</a:t>
+            </a:r>
+          </a:p>
+        </p:txBody>
+      </p:sp>
+      <p:sp>
+        <p:nvSpPr>
+          <p:cNvPr id="3" name="Content Placeholder 2">
+            <a:extLst>
+              <a:ext uri="{FF2B5EF4-FFF2-40B4-BE49-F238E27FC236}">
+                <a16:creationId xmlns:a16="http://schemas.microsoft.com/office/drawing/2014/main" id="{D76CBFE0-BFB3-7819-271F-24A0845F1D80}"/>
+              </a:ext>
+            </a:extLst>
+          </p:cNvPr>
+          <p:cNvSpPr>
+            <a:spLocks noGrp="1"/>
+          </p:cNvSpPr>
+          <p:nvPr>
+            <p:ph idx="1"/>
+          </p:nvPr>
+        </p:nvSpPr>
+        <p:spPr/>
+        <p:txBody>
+          <a:bodyPr/>
+          <a:lstStyle/>
+          <a:p>
+            <a:endParaRPr lang="en-US"/>
+          </a:p>
+        </p:txBody>
+      </p:sp>
+    </p:spTree>
+    <p:extLst>
+      <p:ext uri="{BB962C8B-B14F-4D97-AF65-F5344CB8AC3E}">
+        <p14:creationId xmlns:p14="http://schemas.microsoft.com/office/powerpoint/2010/main" val="1861428453"/>
+      </p:ext>
+    </p:extLst>
+  </p:cSld>
+  <p:clrMapOvr>
+    <a:masterClrMapping/>
+  </p:clrMapOvr>
+</p:sld>
+</file>
+
+<file path=ppt/slides/slide13.xml><?xml version="1.0" encoding="utf-8"?>
+<p:sld xmlns:a="http://schemas.openxmlformats.org/drawingml/2006/main" xmlns:r="http://schemas.openxmlformats.org/officeDocument/2006/relationships" xmlns:p="http://schemas.openxmlformats.org/presentationml/2006/main">
+  <p:cSld>
+    <p:spTree>
+      <p:nvGrpSpPr>
+        <p:cNvPr id="1" name=""/>
+        <p:cNvGrpSpPr/>
+        <p:nvPr/>
+      </p:nvGrpSpPr>
+      <p:grpSpPr>
+        <a:xfrm>
+          <a:off x="0" y="0"/>
+          <a:ext cx="0" cy="0"/>
+          <a:chOff x="0" y="0"/>
+          <a:chExt cx="0" cy="0"/>
+        </a:xfrm>
+      </p:grpSpPr>
+      <p:sp>
+        <p:nvSpPr>
+          <p:cNvPr id="2" name="Title 1">
+            <a:extLst>
+              <a:ext uri="{FF2B5EF4-FFF2-40B4-BE49-F238E27FC236}">
+                <a16:creationId xmlns:a16="http://schemas.microsoft.com/office/drawing/2014/main" id="{94E9AA2D-D8BC-9FBA-568C-9089539EAC82}"/>
+              </a:ext>
+            </a:extLst>
+          </p:cNvPr>
+          <p:cNvSpPr>
+            <a:spLocks noGrp="1"/>
+          </p:cNvSpPr>
+          <p:nvPr>
+            <p:ph type="title"/>
+          </p:nvPr>
+        </p:nvSpPr>
+        <p:spPr/>
+        <p:txBody>
+          <a:bodyPr/>
+          <a:lstStyle/>
+          <a:p>
+            <a:r>
+              <a:rPr lang="en-US" dirty="0"/>
+              <a:t>Collaboration Results</a:t>
+            </a:r>
+          </a:p>
+        </p:txBody>
+      </p:sp>
+      <p:sp>
+        <p:nvSpPr>
+          <p:cNvPr id="3" name="Content Placeholder 2">
+            <a:extLst>
+              <a:ext uri="{FF2B5EF4-FFF2-40B4-BE49-F238E27FC236}">
+                <a16:creationId xmlns:a16="http://schemas.microsoft.com/office/drawing/2014/main" id="{06747A52-6C3E-D967-E643-A05597C6FEC8}"/>
+              </a:ext>
+            </a:extLst>
+          </p:cNvPr>
+          <p:cNvSpPr>
+            <a:spLocks noGrp="1"/>
+          </p:cNvSpPr>
+          <p:nvPr>
+            <p:ph idx="1"/>
+          </p:nvPr>
+        </p:nvSpPr>
+        <p:spPr/>
+        <p:txBody>
+          <a:bodyPr/>
+          <a:lstStyle/>
+          <a:p>
+            <a:endParaRPr lang="en-US"/>
+          </a:p>
+        </p:txBody>
+      </p:sp>
+    </p:spTree>
+    <p:extLst>
+      <p:ext uri="{BB962C8B-B14F-4D97-AF65-F5344CB8AC3E}">
+        <p14:creationId xmlns:p14="http://schemas.microsoft.com/office/powerpoint/2010/main" val="120589493"/>
+      </p:ext>
+    </p:extLst>
+  </p:cSld>
+  <p:clrMapOvr>
+    <a:masterClrMapping/>
+  </p:clrMapOvr>
+</p:sld>
+</file>
+
 <file path=ppt/slides/slide2.xml><?xml version="1.0" encoding="utf-8"?>
+<p:sld xmlns:a="http://schemas.openxmlformats.org/drawingml/2006/main" xmlns:r="http://schemas.openxmlformats.org/officeDocument/2006/relationships" xmlns:p="http://schemas.openxmlformats.org/presentationml/2006/main">
+  <p:cSld>
+    <p:spTree>
+      <p:nvGrpSpPr>
+        <p:cNvPr id="1" name=""/>
+        <p:cNvGrpSpPr/>
+        <p:nvPr/>
+      </p:nvGrpSpPr>
+      <p:grpSpPr>
+        <a:xfrm>
+          <a:off x="0" y="0"/>
+          <a:ext cx="0" cy="0"/>
+          <a:chOff x="0" y="0"/>
+          <a:chExt cx="0" cy="0"/>
+        </a:xfrm>
+      </p:grpSpPr>
+      <p:sp>
+        <p:nvSpPr>
+          <p:cNvPr id="2" name="Title 1">
+            <a:extLst>
+              <a:ext uri="{FF2B5EF4-FFF2-40B4-BE49-F238E27FC236}">
+                <a16:creationId xmlns:a16="http://schemas.microsoft.com/office/drawing/2014/main" id="{48FFA5AD-57F9-048D-4E4C-6A7F8C59FB06}"/>
+              </a:ext>
+            </a:extLst>
+          </p:cNvPr>
+          <p:cNvSpPr>
+            <a:spLocks noGrp="1"/>
+          </p:cNvSpPr>
+          <p:nvPr>
+            <p:ph type="title"/>
+          </p:nvPr>
+        </p:nvSpPr>
+        <p:spPr/>
+        <p:txBody>
+          <a:bodyPr/>
+          <a:lstStyle/>
+          <a:p>
+            <a:r>
+              <a:rPr lang="en-US" dirty="0"/>
+              <a:t>Governing Equations</a:t>
+            </a:r>
+          </a:p>
+        </p:txBody>
+      </p:sp>
+      <mc:AlternateContent xmlns:mc="http://schemas.openxmlformats.org/markup-compatibility/2006">
+        <mc:Choice xmlns:a14="http://schemas.microsoft.com/office/drawing/2010/main" Requires="a14">
+          <p:sp>
+            <p:nvSpPr>
+              <p:cNvPr id="3" name="Content Placeholder 2">
+                <a:extLst>
+                  <a:ext uri="{FF2B5EF4-FFF2-40B4-BE49-F238E27FC236}">
+                    <a16:creationId xmlns:a16="http://schemas.microsoft.com/office/drawing/2014/main" id="{8F1F6078-B32A-E9E8-4975-AF0B0A992896}"/>
+                  </a:ext>
+                </a:extLst>
+              </p:cNvPr>
+              <p:cNvSpPr>
+                <a:spLocks noGrp="1"/>
+              </p:cNvSpPr>
+              <p:nvPr>
+                <p:ph idx="1"/>
+              </p:nvPr>
+            </p:nvSpPr>
+            <p:spPr/>
+            <p:txBody>
+              <a:bodyPr/>
+              <a:lstStyle/>
+              <a:p>
+                <a:r>
+                  <a:rPr lang="en-US" b="1" u="sng" dirty="0"/>
+                  <a:t>Incompressible Navier Stokes equation:</a:t>
+                </a:r>
+              </a:p>
+              <a:p>
+                <a:pPr marL="742950" lvl="1" indent="-285750"/>
+                <a:r>
+                  <a:rPr lang="en-US" dirty="0" err="1"/>
+                  <a:t>Momemtum</a:t>
+                </a:r>
+                <a:r>
+                  <a:rPr lang="en-US" dirty="0"/>
+                  <a:t> equation:</a:t>
+                </a:r>
+              </a:p>
+              <a:p>
+                <a:pPr marL="1200150" lvl="2" indent="-285750"/>
+                <a14:m>
+                  <m:oMath xmlns:m="http://schemas.openxmlformats.org/officeDocument/2006/math">
+                    <m:r>
+                      <a:rPr lang="nb-NO" i="1">
+                        <a:latin typeface="Cambria Math" panose="02040503050406030204" pitchFamily="18" charset="0"/>
+                      </a:rPr>
+                      <m:t>𝜌</m:t>
+                    </m:r>
+                    <m:d>
+                      <m:dPr>
+                        <m:ctrlPr>
+                          <a:rPr lang="nb-NO" i="1">
+                            <a:latin typeface="Cambria Math" panose="02040503050406030204" pitchFamily="18" charset="0"/>
+                          </a:rPr>
+                        </m:ctrlPr>
+                      </m:dPr>
+                      <m:e>
+                        <m:f>
+                          <m:fPr>
+                            <m:ctrlPr>
+                              <a:rPr lang="nb-NO" i="1">
+                                <a:latin typeface="Cambria Math" panose="02040503050406030204" pitchFamily="18" charset="0"/>
+                              </a:rPr>
+                            </m:ctrlPr>
+                          </m:fPr>
+                          <m:num>
+                            <m:r>
+                              <a:rPr lang="nb-NO" i="1">
+                                <a:latin typeface="Cambria Math" panose="02040503050406030204" pitchFamily="18" charset="0"/>
+                              </a:rPr>
+                              <m:t>𝜕</m:t>
+                            </m:r>
+                            <m:r>
+                              <a:rPr lang="nb-NO" i="1">
+                                <a:latin typeface="Cambria Math" panose="02040503050406030204" pitchFamily="18" charset="0"/>
+                              </a:rPr>
+                              <m:t>𝐮</m:t>
+                            </m:r>
+                          </m:num>
+                          <m:den>
+                            <m:r>
+                              <a:rPr lang="nb-NO" i="1">
+                                <a:latin typeface="Cambria Math" panose="02040503050406030204" pitchFamily="18" charset="0"/>
+                              </a:rPr>
+                              <m:t>𝜕</m:t>
+                            </m:r>
+                            <m:r>
+                              <a:rPr lang="nb-NO" i="1">
+                                <a:latin typeface="Cambria Math" panose="02040503050406030204" pitchFamily="18" charset="0"/>
+                              </a:rPr>
+                              <m:t>𝑡</m:t>
+                            </m:r>
+                          </m:den>
+                        </m:f>
+                        <m:r>
+                          <a:rPr lang="nb-NO" i="1">
+                            <a:latin typeface="Cambria Math" panose="02040503050406030204" pitchFamily="18" charset="0"/>
+                          </a:rPr>
+                          <m:t>+</m:t>
+                        </m:r>
+                        <m:r>
+                          <a:rPr lang="nb-NO" i="1">
+                            <a:latin typeface="Cambria Math" panose="02040503050406030204" pitchFamily="18" charset="0"/>
+                          </a:rPr>
+                          <m:t>𝐮</m:t>
+                        </m:r>
+                        <m:r>
+                          <a:rPr lang="nb-NO" i="1">
+                            <a:latin typeface="Cambria Math" panose="02040503050406030204" pitchFamily="18" charset="0"/>
+                          </a:rPr>
+                          <m:t>⋅</m:t>
+                        </m:r>
+                        <m:r>
+                          <m:rPr>
+                            <m:sty m:val="p"/>
+                          </m:rPr>
+                          <a:rPr lang="nb-NO">
+                            <a:latin typeface="Cambria Math" panose="02040503050406030204" pitchFamily="18" charset="0"/>
+                          </a:rPr>
+                          <m:t>∇</m:t>
+                        </m:r>
+                        <m:r>
+                          <a:rPr lang="nb-NO" i="1">
+                            <a:latin typeface="Cambria Math" panose="02040503050406030204" pitchFamily="18" charset="0"/>
+                          </a:rPr>
+                          <m:t>𝐮</m:t>
+                        </m:r>
+                      </m:e>
+                    </m:d>
+                    <m:r>
+                      <a:rPr lang="nb-NO" i="1">
+                        <a:latin typeface="Cambria Math" panose="02040503050406030204" pitchFamily="18" charset="0"/>
+                      </a:rPr>
+                      <m:t>=−</m:t>
+                    </m:r>
+                    <m:r>
+                      <m:rPr>
+                        <m:sty m:val="p"/>
+                      </m:rPr>
+                      <a:rPr lang="nb-NO">
+                        <a:latin typeface="Cambria Math" panose="02040503050406030204" pitchFamily="18" charset="0"/>
+                      </a:rPr>
+                      <m:t>∇</m:t>
+                    </m:r>
+                    <m:r>
+                      <m:rPr>
+                        <m:sty m:val="p"/>
+                      </m:rPr>
+                      <a:rPr lang="nb-NO" i="1">
+                        <a:latin typeface="Cambria Math" panose="02040503050406030204" pitchFamily="18" charset="0"/>
+                      </a:rPr>
+                      <m:t>p</m:t>
+                    </m:r>
+                    <m:r>
+                      <a:rPr lang="nb-NO" i="1">
+                        <a:latin typeface="Cambria Math" panose="02040503050406030204" pitchFamily="18" charset="0"/>
+                      </a:rPr>
+                      <m:t>+</m:t>
+                    </m:r>
+                    <m:r>
+                      <a:rPr lang="nb-NO" i="1">
+                        <a:latin typeface="Cambria Math" panose="02040503050406030204" pitchFamily="18" charset="0"/>
+                      </a:rPr>
+                      <m:t>𝜇</m:t>
+                    </m:r>
+                    <m:sSup>
+                      <m:sSupPr>
+                        <m:ctrlPr>
+                          <a:rPr lang="nb-NO" i="1">
+                            <a:latin typeface="Cambria Math" panose="02040503050406030204" pitchFamily="18" charset="0"/>
+                          </a:rPr>
+                        </m:ctrlPr>
+                      </m:sSupPr>
+                      <m:e>
+                        <m:r>
+                          <m:rPr>
+                            <m:sty m:val="p"/>
+                          </m:rPr>
+                          <a:rPr lang="nb-NO">
+                            <a:latin typeface="Cambria Math" panose="02040503050406030204" pitchFamily="18" charset="0"/>
+                          </a:rPr>
+                          <m:t>∇</m:t>
+                        </m:r>
+                      </m:e>
+                      <m:sup>
+                        <m:r>
+                          <a:rPr lang="nb-NO" i="1">
+                            <a:latin typeface="Cambria Math" panose="02040503050406030204" pitchFamily="18" charset="0"/>
+                          </a:rPr>
+                          <m:t>2</m:t>
+                        </m:r>
+                      </m:sup>
+                    </m:sSup>
+                    <m:r>
+                      <a:rPr lang="nb-NO" i="1">
+                        <a:latin typeface="Cambria Math" panose="02040503050406030204" pitchFamily="18" charset="0"/>
+                      </a:rPr>
+                      <m:t>𝐮</m:t>
+                    </m:r>
+                  </m:oMath>
+                </a14:m>
+                <a:endParaRPr lang="en-US" dirty="0"/>
+              </a:p>
+              <a:p>
+                <a:pPr marL="742950" lvl="1" indent="-285750"/>
+                <a:r>
+                  <a:rPr lang="nb-NO" dirty="0" err="1">
+                    <a:latin typeface="Cambria Math" panose="02040503050406030204" pitchFamily="18" charset="0"/>
+                  </a:rPr>
+                  <a:t>Continuity</a:t>
+                </a:r>
+                <a:r>
+                  <a:rPr lang="nb-NO" dirty="0">
+                    <a:latin typeface="Cambria Math" panose="02040503050406030204" pitchFamily="18" charset="0"/>
+                  </a:rPr>
+                  <a:t> </a:t>
+                </a:r>
+                <a:r>
+                  <a:rPr lang="nb-NO" dirty="0" err="1">
+                    <a:latin typeface="Cambria Math" panose="02040503050406030204" pitchFamily="18" charset="0"/>
+                  </a:rPr>
+                  <a:t>equation</a:t>
+                </a:r>
+                <a:r>
+                  <a:rPr lang="nb-NO" dirty="0">
+                    <a:latin typeface="Cambria Math" panose="02040503050406030204" pitchFamily="18" charset="0"/>
+                  </a:rPr>
+                  <a:t>:</a:t>
+                </a:r>
+              </a:p>
+              <a:p>
+                <a:pPr marL="1200150" lvl="2" indent="-285750"/>
+                <a14:m>
+                  <m:oMath xmlns:m="http://schemas.openxmlformats.org/officeDocument/2006/math">
+                    <m:r>
+                      <m:rPr>
+                        <m:sty m:val="p"/>
+                      </m:rPr>
+                      <a:rPr lang="nb-NO">
+                        <a:latin typeface="Cambria Math" panose="02040503050406030204" pitchFamily="18" charset="0"/>
+                      </a:rPr>
+                      <m:t>∇</m:t>
+                    </m:r>
+                    <m:r>
+                      <a:rPr lang="nb-NO" i="1">
+                        <a:latin typeface="Cambria Math" panose="02040503050406030204" pitchFamily="18" charset="0"/>
+                      </a:rPr>
+                      <m:t>⋅</m:t>
+                    </m:r>
+                    <m:r>
+                      <a:rPr lang="nb-NO" i="1">
+                        <a:latin typeface="Cambria Math" panose="02040503050406030204" pitchFamily="18" charset="0"/>
+                      </a:rPr>
+                      <m:t>𝐮</m:t>
+                    </m:r>
+                    <m:r>
+                      <a:rPr lang="nb-NO" i="1">
+                        <a:latin typeface="Cambria Math" panose="02040503050406030204" pitchFamily="18" charset="0"/>
+                      </a:rPr>
+                      <m:t>=0</m:t>
+                    </m:r>
+                  </m:oMath>
+                </a14:m>
+                <a:endParaRPr lang="en-US" dirty="0"/>
+              </a:p>
+            </p:txBody>
+          </p:sp>
+        </mc:Choice>
+        <mc:Fallback>
+          <p:sp>
+            <p:nvSpPr>
+              <p:cNvPr id="3" name="Content Placeholder 2">
+                <a:extLst>
+                  <a:ext uri="{FF2B5EF4-FFF2-40B4-BE49-F238E27FC236}">
+                    <a16:creationId xmlns:a16="http://schemas.microsoft.com/office/drawing/2014/main" id="{8F1F6078-B32A-E9E8-4975-AF0B0A992896}"/>
+                  </a:ext>
+                </a:extLst>
+              </p:cNvPr>
+              <p:cNvSpPr>
+                <a:spLocks noGrp="1" noRot="1" noChangeAspect="1" noMove="1" noResize="1" noEditPoints="1" noAdjustHandles="1" noChangeArrowheads="1" noChangeShapeType="1" noTextEdit="1"/>
+              </p:cNvSpPr>
+              <p:nvPr>
+                <p:ph idx="1"/>
+              </p:nvPr>
+            </p:nvSpPr>
+            <p:spPr>
+              <a:blipFill>
+                <a:blip r:embed="rId2"/>
+                <a:stretch>
+                  <a:fillRect l="-233"/>
+                </a:stretch>
+              </a:blipFill>
+            </p:spPr>
+            <p:txBody>
+              <a:bodyPr/>
+              <a:lstStyle/>
+              <a:p>
+                <a:r>
+                  <a:rPr lang="en-US">
+                    <a:noFill/>
+                  </a:rPr>
+                  <a:t> </a:t>
+                </a:r>
+              </a:p>
+            </p:txBody>
+          </p:sp>
+        </mc:Fallback>
+      </mc:AlternateContent>
+    </p:spTree>
+    <p:extLst>
+      <p:ext uri="{BB962C8B-B14F-4D97-AF65-F5344CB8AC3E}">
+        <p14:creationId xmlns:p14="http://schemas.microsoft.com/office/powerpoint/2010/main" val="3069239637"/>
+      </p:ext>
+    </p:extLst>
+  </p:cSld>
+  <p:clrMapOvr>
+    <a:masterClrMapping/>
+  </p:clrMapOvr>
+</p:sld>
+</file>
+
+<file path=ppt/slides/slide3.xml><?xml version="1.0" encoding="utf-8"?>
 <p:sld xmlns:a="http://schemas.openxmlformats.org/drawingml/2006/main" xmlns:r="http://schemas.openxmlformats.org/officeDocument/2006/relationships" xmlns:p="http://schemas.openxmlformats.org/presentationml/2006/main">
   <p:cSld>
     <p:spTree>
@@ -4630,349 +5333,6 @@
           </p:sp>
         </mc:Fallback>
       </mc:AlternateContent>
-      <mc:AlternateContent xmlns:mc="http://schemas.openxmlformats.org/markup-compatibility/2006">
-        <mc:Choice xmlns:a14="http://schemas.microsoft.com/office/drawing/2010/main" Requires="a14">
-          <p:sp>
-            <p:nvSpPr>
-              <p:cNvPr id="4" name="TextBox 3">
-                <a:extLst>
-                  <a:ext uri="{FF2B5EF4-FFF2-40B4-BE49-F238E27FC236}">
-                    <a16:creationId xmlns:a16="http://schemas.microsoft.com/office/drawing/2014/main" id="{139D16DC-7C6B-3BBB-4B58-F5254E726C74}"/>
-                  </a:ext>
-                </a:extLst>
-              </p:cNvPr>
-              <p:cNvSpPr txBox="1"/>
-              <p:nvPr/>
-            </p:nvSpPr>
-            <p:spPr>
-              <a:xfrm>
-                <a:off x="6085543" y="1349754"/>
-                <a:ext cx="4921686" cy="1891865"/>
-              </a:xfrm>
-              <a:prstGeom prst="rect">
-                <a:avLst/>
-              </a:prstGeom>
-              <a:noFill/>
-            </p:spPr>
-            <p:txBody>
-              <a:bodyPr wrap="square" rtlCol="0">
-                <a:spAutoFit/>
-              </a:bodyPr>
-              <a:lstStyle/>
-              <a:p>
-                <a:r>
-                  <a:rPr lang="en-US" b="1" u="sng" dirty="0"/>
-                  <a:t>Incompressible Navier Stokes equation:</a:t>
-                </a:r>
-              </a:p>
-              <a:p>
-                <a:pPr marL="742950" lvl="1" indent="-285750">
-                  <a:buFont typeface="Arial" panose="020B0604020202020204" pitchFamily="34" charset="0"/>
-                  <a:buChar char="•"/>
-                </a:pPr>
-                <a:r>
-                  <a:rPr lang="en-US" dirty="0" err="1"/>
-                  <a:t>Momemtum</a:t>
-                </a:r>
-                <a:r>
-                  <a:rPr lang="en-US" dirty="0"/>
-                  <a:t> equation:</a:t>
-                </a:r>
-              </a:p>
-              <a:p>
-                <a:pPr marL="1200150" lvl="2" indent="-285750">
-                  <a:buFont typeface="Arial" panose="020B0604020202020204" pitchFamily="34" charset="0"/>
-                  <a:buChar char="•"/>
-                </a:pPr>
-                <a14:m>
-                  <m:oMath xmlns:m="http://schemas.openxmlformats.org/officeDocument/2006/math">
-                    <m:r>
-                      <a:rPr lang="nb-NO" b="0" i="1" smtClean="0">
-                        <a:latin typeface="Cambria Math" panose="02040503050406030204" pitchFamily="18" charset="0"/>
-                      </a:rPr>
-                      <m:t>𝜌</m:t>
-                    </m:r>
-                    <m:d>
-                      <m:dPr>
-                        <m:ctrlPr>
-                          <a:rPr lang="nb-NO" b="0" i="1" smtClean="0">
-                            <a:latin typeface="Cambria Math" panose="02040503050406030204" pitchFamily="18" charset="0"/>
-                          </a:rPr>
-                        </m:ctrlPr>
-                      </m:dPr>
-                      <m:e>
-                        <m:f>
-                          <m:fPr>
-                            <m:ctrlPr>
-                              <a:rPr lang="nb-NO" b="0" i="1" smtClean="0">
-                                <a:latin typeface="Cambria Math" panose="02040503050406030204" pitchFamily="18" charset="0"/>
-                              </a:rPr>
-                            </m:ctrlPr>
-                          </m:fPr>
-                          <m:num>
-                            <m:r>
-                              <a:rPr lang="nb-NO" b="0" i="1" smtClean="0">
-                                <a:latin typeface="Cambria Math" panose="02040503050406030204" pitchFamily="18" charset="0"/>
-                              </a:rPr>
-                              <m:t>𝜕</m:t>
-                            </m:r>
-                            <m:r>
-                              <a:rPr lang="nb-NO" b="0" i="1" smtClean="0">
-                                <a:latin typeface="Cambria Math" panose="02040503050406030204" pitchFamily="18" charset="0"/>
-                              </a:rPr>
-                              <m:t>𝐮</m:t>
-                            </m:r>
-                          </m:num>
-                          <m:den>
-                            <m:r>
-                              <a:rPr lang="nb-NO" b="0" i="1" smtClean="0">
-                                <a:latin typeface="Cambria Math" panose="02040503050406030204" pitchFamily="18" charset="0"/>
-                              </a:rPr>
-                              <m:t>𝜕</m:t>
-                            </m:r>
-                            <m:r>
-                              <a:rPr lang="nb-NO" b="0" i="1" smtClean="0">
-                                <a:latin typeface="Cambria Math" panose="02040503050406030204" pitchFamily="18" charset="0"/>
-                              </a:rPr>
-                              <m:t>𝑡</m:t>
-                            </m:r>
-                          </m:den>
-                        </m:f>
-                        <m:r>
-                          <a:rPr lang="nb-NO" b="0" i="1" smtClean="0">
-                            <a:latin typeface="Cambria Math" panose="02040503050406030204" pitchFamily="18" charset="0"/>
-                          </a:rPr>
-                          <m:t>+</m:t>
-                        </m:r>
-                        <m:r>
-                          <a:rPr lang="nb-NO" b="0" i="1" smtClean="0">
-                            <a:latin typeface="Cambria Math" panose="02040503050406030204" pitchFamily="18" charset="0"/>
-                          </a:rPr>
-                          <m:t>𝐮</m:t>
-                        </m:r>
-                        <m:r>
-                          <a:rPr lang="nb-NO" b="0" i="1" smtClean="0">
-                            <a:latin typeface="Cambria Math" panose="02040503050406030204" pitchFamily="18" charset="0"/>
-                          </a:rPr>
-                          <m:t>⋅</m:t>
-                        </m:r>
-                        <m:r>
-                          <m:rPr>
-                            <m:sty m:val="p"/>
-                          </m:rPr>
-                          <a:rPr lang="nb-NO" b="0" i="0" smtClean="0">
-                            <a:latin typeface="Cambria Math" panose="02040503050406030204" pitchFamily="18" charset="0"/>
-                          </a:rPr>
-                          <m:t>∇</m:t>
-                        </m:r>
-                        <m:r>
-                          <a:rPr lang="nb-NO" b="0" i="1" smtClean="0">
-                            <a:latin typeface="Cambria Math" panose="02040503050406030204" pitchFamily="18" charset="0"/>
-                          </a:rPr>
-                          <m:t>𝐮</m:t>
-                        </m:r>
-                      </m:e>
-                    </m:d>
-                    <m:r>
-                      <a:rPr lang="nb-NO" b="0" i="1" smtClean="0">
-                        <a:latin typeface="Cambria Math" panose="02040503050406030204" pitchFamily="18" charset="0"/>
-                      </a:rPr>
-                      <m:t>=−</m:t>
-                    </m:r>
-                    <m:r>
-                      <m:rPr>
-                        <m:sty m:val="p"/>
-                      </m:rPr>
-                      <a:rPr lang="nb-NO" b="0" i="0" smtClean="0">
-                        <a:latin typeface="Cambria Math" panose="02040503050406030204" pitchFamily="18" charset="0"/>
-                      </a:rPr>
-                      <m:t>∇</m:t>
-                    </m:r>
-                    <m:r>
-                      <m:rPr>
-                        <m:sty m:val="p"/>
-                      </m:rPr>
-                      <a:rPr lang="nb-NO" b="0" i="1" smtClean="0">
-                        <a:latin typeface="Cambria Math" panose="02040503050406030204" pitchFamily="18" charset="0"/>
-                      </a:rPr>
-                      <m:t>p</m:t>
-                    </m:r>
-                    <m:r>
-                      <a:rPr lang="nb-NO" b="0" i="1" smtClean="0">
-                        <a:latin typeface="Cambria Math" panose="02040503050406030204" pitchFamily="18" charset="0"/>
-                      </a:rPr>
-                      <m:t>+</m:t>
-                    </m:r>
-                    <m:r>
-                      <a:rPr lang="nb-NO" b="0" i="1" smtClean="0">
-                        <a:latin typeface="Cambria Math" panose="02040503050406030204" pitchFamily="18" charset="0"/>
-                      </a:rPr>
-                      <m:t>𝜇</m:t>
-                    </m:r>
-                    <m:sSup>
-                      <m:sSupPr>
-                        <m:ctrlPr>
-                          <a:rPr lang="nb-NO" b="0" i="1" smtClean="0">
-                            <a:latin typeface="Cambria Math" panose="02040503050406030204" pitchFamily="18" charset="0"/>
-                          </a:rPr>
-                        </m:ctrlPr>
-                      </m:sSupPr>
-                      <m:e>
-                        <m:r>
-                          <m:rPr>
-                            <m:sty m:val="p"/>
-                          </m:rPr>
-                          <a:rPr lang="nb-NO" b="0" i="0" smtClean="0">
-                            <a:latin typeface="Cambria Math" panose="02040503050406030204" pitchFamily="18" charset="0"/>
-                          </a:rPr>
-                          <m:t>∇</m:t>
-                        </m:r>
-                      </m:e>
-                      <m:sup>
-                        <m:r>
-                          <a:rPr lang="nb-NO" b="0" i="1" smtClean="0">
-                            <a:latin typeface="Cambria Math" panose="02040503050406030204" pitchFamily="18" charset="0"/>
-                          </a:rPr>
-                          <m:t>2</m:t>
-                        </m:r>
-                      </m:sup>
-                    </m:sSup>
-                    <m:r>
-                      <a:rPr lang="nb-NO" b="0" i="1" smtClean="0">
-                        <a:latin typeface="Cambria Math" panose="02040503050406030204" pitchFamily="18" charset="0"/>
-                      </a:rPr>
-                      <m:t>𝐮</m:t>
-                    </m:r>
-                  </m:oMath>
-                </a14:m>
-                <a:endParaRPr lang="en-US" dirty="0"/>
-              </a:p>
-              <a:p>
-                <a:pPr marL="742950" lvl="1" indent="-285750">
-                  <a:buFont typeface="Arial" panose="020B0604020202020204" pitchFamily="34" charset="0"/>
-                  <a:buChar char="•"/>
-                </a:pPr>
-                <a:r>
-                  <a:rPr lang="nb-NO" b="0" i="0" dirty="0" err="1">
-                    <a:latin typeface="Cambria Math" panose="02040503050406030204" pitchFamily="18" charset="0"/>
-                  </a:rPr>
-                  <a:t>Continuity</a:t>
-                </a:r>
-                <a:r>
-                  <a:rPr lang="nb-NO" b="0" i="0" dirty="0">
-                    <a:latin typeface="Cambria Math" panose="02040503050406030204" pitchFamily="18" charset="0"/>
-                  </a:rPr>
-                  <a:t> </a:t>
-                </a:r>
-                <a:r>
-                  <a:rPr lang="nb-NO" b="0" i="0" dirty="0" err="1">
-                    <a:latin typeface="Cambria Math" panose="02040503050406030204" pitchFamily="18" charset="0"/>
-                  </a:rPr>
-                  <a:t>equation</a:t>
-                </a:r>
-                <a:r>
-                  <a:rPr lang="nb-NO" b="0" i="0" dirty="0">
-                    <a:latin typeface="Cambria Math" panose="02040503050406030204" pitchFamily="18" charset="0"/>
-                  </a:rPr>
-                  <a:t>:</a:t>
-                </a:r>
-              </a:p>
-              <a:p>
-                <a:pPr marL="1200150" lvl="2" indent="-285750">
-                  <a:buFont typeface="Arial" panose="020B0604020202020204" pitchFamily="34" charset="0"/>
-                  <a:buChar char="•"/>
-                </a:pPr>
-                <a14:m>
-                  <m:oMath xmlns:m="http://schemas.openxmlformats.org/officeDocument/2006/math">
-                    <m:r>
-                      <m:rPr>
-                        <m:sty m:val="p"/>
-                      </m:rPr>
-                      <a:rPr lang="nb-NO" b="0" i="0" smtClean="0">
-                        <a:latin typeface="Cambria Math" panose="02040503050406030204" pitchFamily="18" charset="0"/>
-                      </a:rPr>
-                      <m:t>∇</m:t>
-                    </m:r>
-                    <m:r>
-                      <a:rPr lang="nb-NO" b="0" i="1" smtClean="0">
-                        <a:latin typeface="Cambria Math" panose="02040503050406030204" pitchFamily="18" charset="0"/>
-                      </a:rPr>
-                      <m:t>⋅</m:t>
-                    </m:r>
-                    <m:r>
-                      <a:rPr lang="nb-NO" b="0" i="1" smtClean="0">
-                        <a:latin typeface="Cambria Math" panose="02040503050406030204" pitchFamily="18" charset="0"/>
-                      </a:rPr>
-                      <m:t>𝐮</m:t>
-                    </m:r>
-                    <m:r>
-                      <a:rPr lang="nb-NO" b="0" i="1" smtClean="0">
-                        <a:latin typeface="Cambria Math" panose="02040503050406030204" pitchFamily="18" charset="0"/>
-                      </a:rPr>
-                      <m:t>=0</m:t>
-                    </m:r>
-                  </m:oMath>
-                </a14:m>
-                <a:r>
-                  <a:rPr lang="en-US" dirty="0"/>
-                  <a:t>	</a:t>
-                </a:r>
-              </a:p>
-              <a:p>
-                <a:pPr marL="742950" lvl="1" indent="-285750">
-                  <a:buFont typeface="Arial" panose="020B0604020202020204" pitchFamily="34" charset="0"/>
-                  <a:buChar char="•"/>
-                </a:pPr>
-                <a:endParaRPr lang="en-US" dirty="0"/>
-              </a:p>
-            </p:txBody>
-          </p:sp>
-        </mc:Choice>
-        <mc:Fallback>
-          <p:sp>
-            <p:nvSpPr>
-              <p:cNvPr id="4" name="TextBox 3">
-                <a:extLst>
-                  <a:ext uri="{FF2B5EF4-FFF2-40B4-BE49-F238E27FC236}">
-                    <a16:creationId xmlns:a16="http://schemas.microsoft.com/office/drawing/2014/main" id="{139D16DC-7C6B-3BBB-4B58-F5254E726C74}"/>
-                  </a:ext>
-                </a:extLst>
-              </p:cNvPr>
-              <p:cNvSpPr txBox="1">
-                <a:spLocks noRot="1" noChangeAspect="1" noMove="1" noResize="1" noEditPoints="1" noAdjustHandles="1" noChangeArrowheads="1" noChangeShapeType="1" noTextEdit="1"/>
-              </p:cNvSpPr>
-              <p:nvPr/>
-            </p:nvSpPr>
-            <p:spPr>
-              <a:xfrm>
-                <a:off x="6085543" y="1349754"/>
-                <a:ext cx="4921686" cy="1891865"/>
-              </a:xfrm>
-              <a:prstGeom prst="rect">
-                <a:avLst/>
-              </a:prstGeom>
-              <a:blipFill>
-                <a:blip r:embed="rId3"/>
-                <a:stretch>
-                  <a:fillRect l="-1031" t="-1333"/>
-                </a:stretch>
-              </a:blipFill>
-            </p:spPr>
-            <p:txBody>
-              <a:bodyPr/>
-              <a:lstStyle/>
-              <a:p>
-                <a:r>
-                  <a:rPr lang="en-US">
-                    <a:noFill/>
-                  </a:rPr>
-                  <a:t> </a:t>
-                </a:r>
-              </a:p>
-            </p:txBody>
-          </p:sp>
-        </mc:Fallback>
-      </mc:AlternateContent>
       <p:sp>
         <p:nvSpPr>
           <p:cNvPr id="8" name="TextBox 7">
@@ -4987,7 +5347,7 @@
         </p:nvSpPr>
         <p:spPr>
           <a:xfrm>
-            <a:off x="6023428" y="3788229"/>
+            <a:off x="5399313" y="3730752"/>
             <a:ext cx="1681871" cy="369332"/>
           </a:xfrm>
           <a:prstGeom prst="rect">
@@ -5008,111 +5368,45 @@
           </a:p>
         </p:txBody>
       </p:sp>
+      <p:sp>
+        <p:nvSpPr>
+          <p:cNvPr id="9" name="TextBox 8">
+            <a:extLst>
+              <a:ext uri="{FF2B5EF4-FFF2-40B4-BE49-F238E27FC236}">
+                <a16:creationId xmlns:a16="http://schemas.microsoft.com/office/drawing/2014/main" id="{D985A21F-05D6-70D7-2FC3-9BB837CD769E}"/>
+              </a:ext>
+            </a:extLst>
+          </p:cNvPr>
+          <p:cNvSpPr txBox="1"/>
+          <p:nvPr/>
+        </p:nvSpPr>
+        <p:spPr>
+          <a:xfrm>
+            <a:off x="8418443" y="3730752"/>
+            <a:ext cx="3339548" cy="369332"/>
+          </a:xfrm>
+          <a:prstGeom prst="rect">
+            <a:avLst/>
+          </a:prstGeom>
+          <a:noFill/>
+        </p:spPr>
+        <p:txBody>
+          <a:bodyPr wrap="square" rtlCol="0">
+            <a:spAutoFit/>
+          </a:bodyPr>
+          <a:lstStyle/>
+          <a:p>
+            <a:r>
+              <a:rPr lang="en-US" dirty="0"/>
+              <a:t>Inverse problem</a:t>
+            </a:r>
+          </a:p>
+        </p:txBody>
+      </p:sp>
     </p:spTree>
     <p:extLst>
       <p:ext uri="{BB962C8B-B14F-4D97-AF65-F5344CB8AC3E}">
         <p14:creationId xmlns:p14="http://schemas.microsoft.com/office/powerpoint/2010/main" val="2604914428"/>
-      </p:ext>
-    </p:extLst>
-  </p:cSld>
-  <p:clrMapOvr>
-    <a:masterClrMapping/>
-  </p:clrMapOvr>
-</p:sld>
-</file>
-
-<file path=ppt/slides/slide3.xml><?xml version="1.0" encoding="utf-8"?>
-<p:sld xmlns:a="http://schemas.openxmlformats.org/drawingml/2006/main" xmlns:r="http://schemas.openxmlformats.org/officeDocument/2006/relationships" xmlns:p="http://schemas.openxmlformats.org/presentationml/2006/main">
-  <p:cSld>
-    <p:spTree>
-      <p:nvGrpSpPr>
-        <p:cNvPr id="1" name=""/>
-        <p:cNvGrpSpPr/>
-        <p:nvPr/>
-      </p:nvGrpSpPr>
-      <p:grpSpPr>
-        <a:xfrm>
-          <a:off x="0" y="0"/>
-          <a:ext cx="0" cy="0"/>
-          <a:chOff x="0" y="0"/>
-          <a:chExt cx="0" cy="0"/>
-        </a:xfrm>
-      </p:grpSpPr>
-      <p:sp>
-        <p:nvSpPr>
-          <p:cNvPr id="2" name="Title 1">
-            <a:extLst>
-              <a:ext uri="{FF2B5EF4-FFF2-40B4-BE49-F238E27FC236}">
-                <a16:creationId xmlns:a16="http://schemas.microsoft.com/office/drawing/2014/main" id="{1FF187FB-3826-A13A-27DE-1AD08BEE92BE}"/>
-              </a:ext>
-            </a:extLst>
-          </p:cNvPr>
-          <p:cNvSpPr>
-            <a:spLocks noGrp="1"/>
-          </p:cNvSpPr>
-          <p:nvPr>
-            <p:ph type="title"/>
-          </p:nvPr>
-        </p:nvSpPr>
-        <p:spPr/>
-        <p:txBody>
-          <a:bodyPr/>
-          <a:lstStyle/>
-          <a:p>
-            <a:r>
-              <a:rPr lang="en-US" dirty="0"/>
-              <a:t>Solver 1: Finite Volume Method (</a:t>
-            </a:r>
-            <a:r>
-              <a:rPr lang="en-US" dirty="0" err="1"/>
-              <a:t>openFoam</a:t>
-            </a:r>
-            <a:r>
-              <a:rPr lang="en-US" dirty="0"/>
-              <a:t>)</a:t>
-            </a:r>
-          </a:p>
-        </p:txBody>
-      </p:sp>
-      <p:sp>
-        <p:nvSpPr>
-          <p:cNvPr id="3" name="Content Placeholder 2">
-            <a:extLst>
-              <a:ext uri="{FF2B5EF4-FFF2-40B4-BE49-F238E27FC236}">
-                <a16:creationId xmlns:a16="http://schemas.microsoft.com/office/drawing/2014/main" id="{B7736C5A-0001-B896-535C-4B88340099F2}"/>
-              </a:ext>
-            </a:extLst>
-          </p:cNvPr>
-          <p:cNvSpPr>
-            <a:spLocks noGrp="1"/>
-          </p:cNvSpPr>
-          <p:nvPr>
-            <p:ph idx="1"/>
-          </p:nvPr>
-        </p:nvSpPr>
-        <p:spPr/>
-        <p:txBody>
-          <a:bodyPr/>
-          <a:lstStyle/>
-          <a:p>
-            <a:r>
-              <a:rPr lang="en-US" dirty="0"/>
-              <a:t>Uses </a:t>
-            </a:r>
-            <a:r>
-              <a:rPr lang="en-US"/>
-              <a:t>Piso algorithm</a:t>
-            </a:r>
-          </a:p>
-          <a:p>
-            <a:endParaRPr lang="en-US"/>
-          </a:p>
-        </p:txBody>
-      </p:sp>
-    </p:spTree>
-    <p:extLst>
-      <p:ext uri="{BB962C8B-B14F-4D97-AF65-F5344CB8AC3E}">
-        <p14:creationId xmlns:p14="http://schemas.microsoft.com/office/powerpoint/2010/main" val="1463697046"/>
       </p:ext>
     </p:extLst>
   </p:cSld>
@@ -5144,7 +5438,7 @@
           <p:cNvPr id="2" name="Title 1">
             <a:extLst>
               <a:ext uri="{FF2B5EF4-FFF2-40B4-BE49-F238E27FC236}">
-                <a16:creationId xmlns:a16="http://schemas.microsoft.com/office/drawing/2014/main" id="{93D60F15-EB9B-302A-A859-87B8B6C516A4}"/>
+                <a16:creationId xmlns:a16="http://schemas.microsoft.com/office/drawing/2014/main" id="{1FF187FB-3826-A13A-27DE-1AD08BEE92BE}"/>
               </a:ext>
             </a:extLst>
           </p:cNvPr>
@@ -5162,8 +5456,65 @@
           <a:p>
             <a:r>
               <a:rPr lang="en-US" dirty="0"/>
-              <a:t>Solver 2: Physics-Informed Neural Networks</a:t>
-            </a:r>
+              <a:t>Solver 1: </a:t>
+            </a:r>
+            <a:r>
+              <a:rPr lang="en-US" dirty="0" err="1"/>
+              <a:t>OpenFoam</a:t>
+            </a:r>
+            <a:endParaRPr lang="en-US" dirty="0"/>
+          </a:p>
+        </p:txBody>
+      </p:sp>
+      <p:sp>
+        <p:nvSpPr>
+          <p:cNvPr id="9" name="Rectangle 8">
+            <a:extLst>
+              <a:ext uri="{FF2B5EF4-FFF2-40B4-BE49-F238E27FC236}">
+                <a16:creationId xmlns:a16="http://schemas.microsoft.com/office/drawing/2014/main" id="{CA2C8DE6-7EF3-0AEF-CD88-CD8C02BCA828}"/>
+              </a:ext>
+            </a:extLst>
+          </p:cNvPr>
+          <p:cNvSpPr/>
+          <p:nvPr/>
+        </p:nvSpPr>
+        <p:spPr>
+          <a:xfrm>
+            <a:off x="1301069" y="3840479"/>
+            <a:ext cx="10890931" cy="2550382"/>
+          </a:xfrm>
+          <a:prstGeom prst="rect">
+            <a:avLst/>
+          </a:prstGeom>
+          <a:solidFill>
+            <a:schemeClr val="tx2">
+              <a:lumMod val="25000"/>
+              <a:lumOff val="75000"/>
+            </a:schemeClr>
+          </a:solidFill>
+        </p:spPr>
+        <p:style>
+          <a:lnRef idx="2">
+            <a:schemeClr val="accent1">
+              <a:shade val="15000"/>
+            </a:schemeClr>
+          </a:lnRef>
+          <a:fillRef idx="1">
+            <a:schemeClr val="accent1"/>
+          </a:fillRef>
+          <a:effectRef idx="0">
+            <a:schemeClr val="accent1"/>
+          </a:effectRef>
+          <a:fontRef idx="minor">
+            <a:schemeClr val="lt1"/>
+          </a:fontRef>
+        </p:style>
+        <p:txBody>
+          <a:bodyPr rtlCol="0" anchor="ctr"/>
+          <a:lstStyle/>
+          <a:p>
+            <a:pPr algn="ctr"/>
+            <a:endParaRPr lang="en-US" dirty="0"/>
           </a:p>
         </p:txBody>
       </p:sp>
@@ -5172,7 +5523,7 @@
           <p:cNvPr id="3" name="Content Placeholder 2">
             <a:extLst>
               <a:ext uri="{FF2B5EF4-FFF2-40B4-BE49-F238E27FC236}">
-                <a16:creationId xmlns:a16="http://schemas.microsoft.com/office/drawing/2014/main" id="{B9E74C17-3885-BB6C-CBC1-19540CA9777A}"/>
+                <a16:creationId xmlns:a16="http://schemas.microsoft.com/office/drawing/2014/main" id="{B7736C5A-0001-B896-535C-4B88340099F2}"/>
               </a:ext>
             </a:extLst>
           </p:cNvPr>
@@ -5183,19 +5534,363 @@
             <p:ph idx="1"/>
           </p:nvPr>
         </p:nvSpPr>
-        <p:spPr/>
-        <p:txBody>
-          <a:bodyPr/>
-          <a:lstStyle/>
-          <a:p>
+        <p:spPr>
+          <a:xfrm>
+            <a:off x="1301069" y="4434839"/>
+            <a:ext cx="10890929" cy="1886448"/>
+          </a:xfrm>
+        </p:spPr>
+        <p:txBody>
+          <a:bodyPr>
+            <a:normAutofit lnSpcReduction="10000"/>
+          </a:bodyPr>
+          <a:lstStyle/>
+          <a:p>
+            <a:r>
+              <a:rPr lang="en-US" dirty="0"/>
+              <a:t>Integrate PDEs over each control volume (cell)</a:t>
+            </a:r>
+          </a:p>
+          <a:p>
+            <a:r>
+              <a:rPr lang="en-US" dirty="0"/>
+              <a:t>Apply Gauss’ Divergence theorem to convert volume integral to surface integral</a:t>
+            </a:r>
+          </a:p>
+          <a:p>
+            <a:r>
+              <a:rPr lang="en-US" dirty="0"/>
+              <a:t>Momentum equation becomes a linear system per timestep</a:t>
+            </a:r>
+          </a:p>
+          <a:p>
+            <a:r>
+              <a:rPr lang="en-US" dirty="0"/>
+              <a:t>Pressure emerges from continuity.</a:t>
+            </a:r>
+          </a:p>
+        </p:txBody>
+      </p:sp>
+      <p:sp>
+        <p:nvSpPr>
+          <p:cNvPr id="4" name="Title 1">
+            <a:extLst>
+              <a:ext uri="{FF2B5EF4-FFF2-40B4-BE49-F238E27FC236}">
+                <a16:creationId xmlns:a16="http://schemas.microsoft.com/office/drawing/2014/main" id="{5AF153D4-2A99-BF13-549F-DC2FE4CEDD2C}"/>
+              </a:ext>
+            </a:extLst>
+          </p:cNvPr>
+          <p:cNvSpPr txBox="1">
+            <a:spLocks/>
+          </p:cNvSpPr>
+          <p:nvPr/>
+        </p:nvSpPr>
+        <p:spPr>
+          <a:xfrm>
+            <a:off x="1301071" y="3718229"/>
+            <a:ext cx="10890929" cy="1097280"/>
+          </a:xfrm>
+          <a:prstGeom prst="rect">
+            <a:avLst/>
+          </a:prstGeom>
+        </p:spPr>
+        <p:txBody>
+          <a:bodyPr vert="horz" lIns="91440" tIns="45720" rIns="91440" bIns="45720" rtlCol="0" anchor="t">
+            <a:normAutofit/>
+          </a:bodyPr>
+          <a:lstStyle>
+            <a:lvl1pPr algn="l" defTabSz="914400" rtl="0" eaLnBrk="1" latinLnBrk="0" hangingPunct="1">
+              <a:lnSpc>
+                <a:spcPct val="100000"/>
+              </a:lnSpc>
+              <a:spcBef>
+                <a:spcPct val="0"/>
+              </a:spcBef>
+              <a:buNone/>
+              <a:defRPr sz="4000" b="1" kern="1200">
+                <a:solidFill>
+                  <a:schemeClr val="tx1"/>
+                </a:solidFill>
+                <a:latin typeface="+mj-lt"/>
+                <a:ea typeface="+mj-ea"/>
+                <a:cs typeface="+mj-cs"/>
+              </a:defRPr>
+            </a:lvl1pPr>
+          </a:lstStyle>
+          <a:p>
+            <a:r>
+              <a:rPr lang="en-US" sz="3200" dirty="0"/>
+              <a:t>Finite Volume Discretization</a:t>
+            </a:r>
+          </a:p>
+        </p:txBody>
+      </p:sp>
+      <p:sp>
+        <p:nvSpPr>
+          <p:cNvPr id="8" name="Rectangle 7">
+            <a:extLst>
+              <a:ext uri="{FF2B5EF4-FFF2-40B4-BE49-F238E27FC236}">
+                <a16:creationId xmlns:a16="http://schemas.microsoft.com/office/drawing/2014/main" id="{6A49FFFD-19DC-3295-725C-A9ECD324C75C}"/>
+              </a:ext>
+            </a:extLst>
+          </p:cNvPr>
+          <p:cNvSpPr/>
+          <p:nvPr/>
+        </p:nvSpPr>
+        <p:spPr>
+          <a:xfrm>
+            <a:off x="1301069" y="2057400"/>
+            <a:ext cx="10890931" cy="1660829"/>
+          </a:xfrm>
+          <a:prstGeom prst="rect">
+            <a:avLst/>
+          </a:prstGeom>
+          <a:solidFill>
+            <a:schemeClr val="tx2">
+              <a:lumMod val="10000"/>
+              <a:lumOff val="90000"/>
+            </a:schemeClr>
+          </a:solidFill>
+        </p:spPr>
+        <p:style>
+          <a:lnRef idx="2">
+            <a:schemeClr val="accent1">
+              <a:shade val="15000"/>
+            </a:schemeClr>
+          </a:lnRef>
+          <a:fillRef idx="1">
+            <a:schemeClr val="accent1"/>
+          </a:fillRef>
+          <a:effectRef idx="0">
+            <a:schemeClr val="accent1"/>
+          </a:effectRef>
+          <a:fontRef idx="minor">
+            <a:schemeClr val="lt1"/>
+          </a:fontRef>
+        </p:style>
+        <p:txBody>
+          <a:bodyPr rtlCol="0" anchor="ctr"/>
+          <a:lstStyle/>
+          <a:p>
+            <a:pPr algn="ctr"/>
             <a:endParaRPr lang="en-US"/>
           </a:p>
         </p:txBody>
       </p:sp>
+      <p:sp>
+        <p:nvSpPr>
+          <p:cNvPr id="5" name="Title 1">
+            <a:extLst>
+              <a:ext uri="{FF2B5EF4-FFF2-40B4-BE49-F238E27FC236}">
+                <a16:creationId xmlns:a16="http://schemas.microsoft.com/office/drawing/2014/main" id="{3F8D099D-7725-12F5-4824-27782DD47C40}"/>
+              </a:ext>
+            </a:extLst>
+          </p:cNvPr>
+          <p:cNvSpPr txBox="1">
+            <a:spLocks/>
+          </p:cNvSpPr>
+          <p:nvPr/>
+        </p:nvSpPr>
+        <p:spPr>
+          <a:xfrm>
+            <a:off x="1301070" y="2057400"/>
+            <a:ext cx="10890929" cy="1097280"/>
+          </a:xfrm>
+          <a:prstGeom prst="rect">
+            <a:avLst/>
+          </a:prstGeom>
+        </p:spPr>
+        <p:txBody>
+          <a:bodyPr vert="horz" lIns="91440" tIns="45720" rIns="91440" bIns="45720" rtlCol="0" anchor="t">
+            <a:normAutofit/>
+          </a:bodyPr>
+          <a:lstStyle>
+            <a:lvl1pPr algn="l" defTabSz="914400" rtl="0" eaLnBrk="1" latinLnBrk="0" hangingPunct="1">
+              <a:lnSpc>
+                <a:spcPct val="100000"/>
+              </a:lnSpc>
+              <a:spcBef>
+                <a:spcPct val="0"/>
+              </a:spcBef>
+              <a:buNone/>
+              <a:defRPr sz="4000" b="1" kern="1200">
+                <a:solidFill>
+                  <a:schemeClr val="tx1"/>
+                </a:solidFill>
+                <a:latin typeface="+mj-lt"/>
+                <a:ea typeface="+mj-ea"/>
+                <a:cs typeface="+mj-cs"/>
+              </a:defRPr>
+            </a:lvl1pPr>
+          </a:lstStyle>
+          <a:p>
+            <a:r>
+              <a:rPr lang="en-US" sz="3200" dirty="0"/>
+              <a:t>What is </a:t>
+            </a:r>
+            <a:r>
+              <a:rPr lang="en-US" sz="3200" dirty="0" err="1"/>
+              <a:t>openFoam</a:t>
+            </a:r>
+            <a:r>
+              <a:rPr lang="en-US" sz="3200" dirty="0"/>
+              <a:t>?</a:t>
+            </a:r>
+          </a:p>
+        </p:txBody>
+      </p:sp>
+      <mc:AlternateContent xmlns:mc="http://schemas.openxmlformats.org/markup-compatibility/2006">
+        <mc:Choice xmlns:a14="http://schemas.microsoft.com/office/drawing/2010/main" Requires="a14">
+          <p:sp>
+            <p:nvSpPr>
+              <p:cNvPr id="7" name="TextBox 6">
+                <a:extLst>
+                  <a:ext uri="{FF2B5EF4-FFF2-40B4-BE49-F238E27FC236}">
+                    <a16:creationId xmlns:a16="http://schemas.microsoft.com/office/drawing/2014/main" id="{2A1EE006-DAB7-9708-4FC3-B2582E84AB3B}"/>
+                  </a:ext>
+                </a:extLst>
+              </p:cNvPr>
+              <p:cNvSpPr txBox="1"/>
+              <p:nvPr/>
+            </p:nvSpPr>
+            <p:spPr>
+              <a:xfrm>
+                <a:off x="1461052" y="2763078"/>
+                <a:ext cx="6167073" cy="923330"/>
+              </a:xfrm>
+              <a:prstGeom prst="rect">
+                <a:avLst/>
+              </a:prstGeom>
+              <a:noFill/>
+            </p:spPr>
+            <p:txBody>
+              <a:bodyPr wrap="none" rtlCol="0">
+                <a:spAutoFit/>
+              </a:bodyPr>
+              <a:lstStyle/>
+              <a:p>
+                <a:pPr marL="285750" indent="-285750">
+                  <a:buFont typeface="Arial" panose="020B0604020202020204" pitchFamily="34" charset="0"/>
+                  <a:buChar char="•"/>
+                </a:pPr>
+                <a:r>
+                  <a:rPr lang="en-US" dirty="0"/>
+                  <a:t>Transient, incompressible, laminar Navier-Stokes solver</a:t>
+                </a:r>
+              </a:p>
+              <a:p>
+                <a:pPr marL="285750" indent="-285750">
+                  <a:buFont typeface="Arial" panose="020B0604020202020204" pitchFamily="34" charset="0"/>
+                  <a:buChar char="•"/>
+                </a:pPr>
+                <a:r>
+                  <a:rPr lang="en-US" dirty="0"/>
+                  <a:t>Cell-centered u and p with fluxes defined at faces</a:t>
+                </a:r>
+              </a:p>
+              <a:p>
+                <a:pPr marL="285750" indent="-285750">
+                  <a:buFont typeface="Arial" panose="020B0604020202020204" pitchFamily="34" charset="0"/>
+                  <a:buChar char="•"/>
+                </a:pPr>
+                <a:r>
+                  <a:rPr lang="en-US" dirty="0"/>
+                  <a:t>Continuity </a:t>
+                </a:r>
+                <a14:m>
+                  <m:oMath xmlns:m="http://schemas.openxmlformats.org/officeDocument/2006/math">
+                    <m:r>
+                      <a:rPr lang="nb-NO" b="0" i="0" smtClean="0">
+                        <a:latin typeface="Cambria Math" panose="02040503050406030204" pitchFamily="18" charset="0"/>
+                      </a:rPr>
+                      <m:t>(</m:t>
+                    </m:r>
+                    <m:r>
+                      <m:rPr>
+                        <m:sty m:val="p"/>
+                      </m:rPr>
+                      <a:rPr lang="nb-NO" b="0" i="0" smtClean="0">
+                        <a:latin typeface="Cambria Math" panose="02040503050406030204" pitchFamily="18" charset="0"/>
+                      </a:rPr>
+                      <m:t>∇</m:t>
+                    </m:r>
+                    <m:r>
+                      <a:rPr lang="nb-NO" b="0" i="1" smtClean="0">
+                        <a:latin typeface="Cambria Math" panose="02040503050406030204" pitchFamily="18" charset="0"/>
+                      </a:rPr>
+                      <m:t> ⋅</m:t>
+                    </m:r>
+                    <m:r>
+                      <a:rPr lang="nb-NO" b="0" i="1" smtClean="0">
+                        <a:latin typeface="Cambria Math" panose="02040503050406030204" pitchFamily="18" charset="0"/>
+                      </a:rPr>
+                      <m:t>𝐮</m:t>
+                    </m:r>
+                    <m:r>
+                      <a:rPr lang="nb-NO" b="0" i="1" smtClean="0">
+                        <a:latin typeface="Cambria Math" panose="02040503050406030204" pitchFamily="18" charset="0"/>
+                      </a:rPr>
+                      <m:t>)=0</m:t>
+                    </m:r>
+                  </m:oMath>
+                </a14:m>
+                <a:r>
+                  <a:rPr lang="en-US" dirty="0"/>
+                  <a:t> introduces coupling challenge</a:t>
+                </a:r>
+              </a:p>
+            </p:txBody>
+          </p:sp>
+        </mc:Choice>
+        <mc:Fallback>
+          <p:sp>
+            <p:nvSpPr>
+              <p:cNvPr id="7" name="TextBox 6">
+                <a:extLst>
+                  <a:ext uri="{FF2B5EF4-FFF2-40B4-BE49-F238E27FC236}">
+                    <a16:creationId xmlns:a16="http://schemas.microsoft.com/office/drawing/2014/main" id="{2A1EE006-DAB7-9708-4FC3-B2582E84AB3B}"/>
+                  </a:ext>
+                </a:extLst>
+              </p:cNvPr>
+              <p:cNvSpPr txBox="1">
+                <a:spLocks noRot="1" noChangeAspect="1" noMove="1" noResize="1" noEditPoints="1" noAdjustHandles="1" noChangeArrowheads="1" noChangeShapeType="1" noTextEdit="1"/>
+              </p:cNvSpPr>
+              <p:nvPr/>
+            </p:nvSpPr>
+            <p:spPr>
+              <a:xfrm>
+                <a:off x="1461052" y="2763078"/>
+                <a:ext cx="6167073" cy="923330"/>
+              </a:xfrm>
+              <a:prstGeom prst="rect">
+                <a:avLst/>
+              </a:prstGeom>
+              <a:blipFill>
+                <a:blip r:embed="rId2"/>
+                <a:stretch>
+                  <a:fillRect l="-823" t="-2703" b="-8108"/>
+                </a:stretch>
+              </a:blipFill>
+            </p:spPr>
+            <p:txBody>
+              <a:bodyPr/>
+              <a:lstStyle/>
+              <a:p>
+                <a:r>
+                  <a:rPr lang="en-US">
+                    <a:noFill/>
+                  </a:rPr>
+                  <a:t> </a:t>
+                </a:r>
+              </a:p>
+            </p:txBody>
+          </p:sp>
+        </mc:Fallback>
+      </mc:AlternateContent>
     </p:spTree>
     <p:extLst>
       <p:ext uri="{BB962C8B-B14F-4D97-AF65-F5344CB8AC3E}">
-        <p14:creationId xmlns:p14="http://schemas.microsoft.com/office/powerpoint/2010/main" val="2598518009"/>
+        <p14:creationId xmlns:p14="http://schemas.microsoft.com/office/powerpoint/2010/main" val="1463697046"/>
       </p:ext>
     </p:extLst>
   </p:cSld>
@@ -5210,7 +5905,13 @@
   <p:cSld>
     <p:spTree>
       <p:nvGrpSpPr>
-        <p:cNvPr id="1" name=""/>
+        <p:cNvPr id="1" name="">
+          <a:extLst>
+            <a:ext uri="{FF2B5EF4-FFF2-40B4-BE49-F238E27FC236}">
+              <a16:creationId xmlns:a16="http://schemas.microsoft.com/office/drawing/2014/main" id="{A97B19B7-7DE3-B655-4D36-A9FBCDDC8E6E}"/>
+            </a:ext>
+          </a:extLst>
+        </p:cNvPr>
         <p:cNvGrpSpPr/>
         <p:nvPr/>
       </p:nvGrpSpPr>
@@ -5227,7 +5928,7 @@
           <p:cNvPr id="2" name="Title 1">
             <a:extLst>
               <a:ext uri="{FF2B5EF4-FFF2-40B4-BE49-F238E27FC236}">
-                <a16:creationId xmlns:a16="http://schemas.microsoft.com/office/drawing/2014/main" id="{0BEFB0F0-9D33-7833-091B-06BA37CB6A64}"/>
+                <a16:creationId xmlns:a16="http://schemas.microsoft.com/office/drawing/2014/main" id="{125108ED-23DF-3D9D-5F3A-DA6D469FA8A2}"/>
               </a:ext>
             </a:extLst>
           </p:cNvPr>
@@ -5245,40 +5946,405 @@
           <a:p>
             <a:r>
               <a:rPr lang="en-US" dirty="0"/>
-              <a:t>Results at Re=200</a:t>
-            </a:r>
-          </a:p>
-        </p:txBody>
-      </p:sp>
-      <p:sp>
-        <p:nvSpPr>
-          <p:cNvPr id="3" name="Content Placeholder 2">
-            <a:extLst>
-              <a:ext uri="{FF2B5EF4-FFF2-40B4-BE49-F238E27FC236}">
-                <a16:creationId xmlns:a16="http://schemas.microsoft.com/office/drawing/2014/main" id="{64009468-F970-CF2A-5411-CE3546C29415}"/>
-              </a:ext>
-            </a:extLst>
-          </p:cNvPr>
-          <p:cNvSpPr>
-            <a:spLocks noGrp="1"/>
-          </p:cNvSpPr>
-          <p:nvPr>
-            <p:ph idx="1"/>
-          </p:nvPr>
-        </p:nvSpPr>
-        <p:spPr/>
-        <p:txBody>
-          <a:bodyPr/>
-          <a:lstStyle/>
-          <a:p>
+              <a:t>Solver 1: </a:t>
+            </a:r>
+            <a:r>
+              <a:rPr lang="en-US" dirty="0" err="1"/>
+              <a:t>OpenFoam</a:t>
+            </a:r>
+            <a:endParaRPr lang="en-US" dirty="0"/>
+          </a:p>
+        </p:txBody>
+      </p:sp>
+      <p:sp>
+        <p:nvSpPr>
+          <p:cNvPr id="5" name="Rectangle 4">
+            <a:extLst>
+              <a:ext uri="{FF2B5EF4-FFF2-40B4-BE49-F238E27FC236}">
+                <a16:creationId xmlns:a16="http://schemas.microsoft.com/office/drawing/2014/main" id="{A9438689-6394-4F95-D9F4-3F2B28E36F7D}"/>
+              </a:ext>
+            </a:extLst>
+          </p:cNvPr>
+          <p:cNvSpPr/>
+          <p:nvPr/>
+        </p:nvSpPr>
+        <p:spPr>
+          <a:xfrm>
+            <a:off x="1301071" y="2034540"/>
+            <a:ext cx="10890929" cy="3556220"/>
+          </a:xfrm>
+          <a:prstGeom prst="rect">
+            <a:avLst/>
+          </a:prstGeom>
+          <a:solidFill>
+            <a:schemeClr val="tx2">
+              <a:lumMod val="25000"/>
+              <a:lumOff val="75000"/>
+            </a:schemeClr>
+          </a:solidFill>
+        </p:spPr>
+        <p:style>
+          <a:lnRef idx="2">
+            <a:schemeClr val="accent1">
+              <a:shade val="15000"/>
+            </a:schemeClr>
+          </a:lnRef>
+          <a:fillRef idx="1">
+            <a:schemeClr val="accent1"/>
+          </a:fillRef>
+          <a:effectRef idx="0">
+            <a:schemeClr val="accent1"/>
+          </a:effectRef>
+          <a:fontRef idx="minor">
+            <a:schemeClr val="lt1"/>
+          </a:fontRef>
+        </p:style>
+        <p:txBody>
+          <a:bodyPr rtlCol="0" anchor="ctr"/>
+          <a:lstStyle/>
+          <a:p>
+            <a:pPr algn="ctr"/>
             <a:endParaRPr lang="en-US"/>
+          </a:p>
+        </p:txBody>
+      </p:sp>
+      <mc:AlternateContent xmlns:mc="http://schemas.openxmlformats.org/markup-compatibility/2006">
+        <mc:Choice xmlns:a14="http://schemas.microsoft.com/office/drawing/2010/main" Requires="a14">
+          <p:sp>
+            <p:nvSpPr>
+              <p:cNvPr id="3" name="Content Placeholder 2">
+                <a:extLst>
+                  <a:ext uri="{FF2B5EF4-FFF2-40B4-BE49-F238E27FC236}">
+                    <a16:creationId xmlns:a16="http://schemas.microsoft.com/office/drawing/2014/main" id="{E87CEE18-CB53-4F89-4E5B-9A641D69B6EA}"/>
+                  </a:ext>
+                </a:extLst>
+              </p:cNvPr>
+              <p:cNvSpPr>
+                <a:spLocks noGrp="1"/>
+              </p:cNvSpPr>
+              <p:nvPr>
+                <p:ph idx="1"/>
+              </p:nvPr>
+            </p:nvSpPr>
+            <p:spPr>
+              <a:xfrm>
+                <a:off x="1301071" y="2715370"/>
+                <a:ext cx="10890928" cy="3566160"/>
+              </a:xfrm>
+            </p:spPr>
+            <p:txBody>
+              <a:bodyPr/>
+              <a:lstStyle/>
+              <a:p>
+                <a:r>
+                  <a:rPr lang="en-US" dirty="0"/>
+                  <a:t>Predictor: solve momentum equation with lagged pressure. </a:t>
+                </a:r>
+                <a14:m>
+                  <m:oMath xmlns:m="http://schemas.openxmlformats.org/officeDocument/2006/math">
+                    <m:sSup>
+                      <m:sSupPr>
+                        <m:ctrlPr>
+                          <a:rPr lang="nb-NO" b="0" i="1" smtClean="0">
+                            <a:latin typeface="Cambria Math" panose="02040503050406030204" pitchFamily="18" charset="0"/>
+                          </a:rPr>
+                        </m:ctrlPr>
+                      </m:sSupPr>
+                      <m:e>
+                        <m:r>
+                          <a:rPr lang="nb-NO" b="0" i="1" smtClean="0">
+                            <a:latin typeface="Cambria Math" panose="02040503050406030204" pitchFamily="18" charset="0"/>
+                          </a:rPr>
+                          <m:t>𝑢</m:t>
+                        </m:r>
+                      </m:e>
+                      <m:sup>
+                        <m:r>
+                          <a:rPr lang="nb-NO" b="0" i="1" smtClean="0">
+                            <a:latin typeface="Cambria Math" panose="02040503050406030204" pitchFamily="18" charset="0"/>
+                          </a:rPr>
+                          <m:t>∗</m:t>
+                        </m:r>
+                      </m:sup>
+                    </m:sSup>
+                  </m:oMath>
+                </a14:m>
+                <a:r>
+                  <a:rPr lang="en-US" dirty="0"/>
+                  <a:t> is not divergence free.</a:t>
+                </a:r>
+              </a:p>
+              <a:p>
+                <a:r>
+                  <a:rPr lang="en-US" dirty="0"/>
+                  <a:t>Pressure solve: Poisson equation </a:t>
+                </a:r>
+                <a14:m>
+                  <m:oMath xmlns:m="http://schemas.openxmlformats.org/officeDocument/2006/math">
+                    <m:r>
+                      <m:rPr>
+                        <m:sty m:val="p"/>
+                      </m:rPr>
+                      <a:rPr lang="nb-NO" b="0" i="0" smtClean="0">
+                        <a:latin typeface="Cambria Math" panose="02040503050406030204" pitchFamily="18" charset="0"/>
+                      </a:rPr>
+                      <m:t>∇</m:t>
+                    </m:r>
+                    <m:r>
+                      <a:rPr lang="nb-NO" b="0" i="1" smtClean="0">
+                        <a:latin typeface="Cambria Math" panose="02040503050406030204" pitchFamily="18" charset="0"/>
+                      </a:rPr>
+                      <m:t>⋅</m:t>
+                    </m:r>
+                    <m:d>
+                      <m:dPr>
+                        <m:ctrlPr>
+                          <a:rPr lang="nb-NO" b="0" i="1" smtClean="0">
+                            <a:latin typeface="Cambria Math" panose="02040503050406030204" pitchFamily="18" charset="0"/>
+                          </a:rPr>
+                        </m:ctrlPr>
+                      </m:dPr>
+                      <m:e>
+                        <m:d>
+                          <m:dPr>
+                            <m:ctrlPr>
+                              <a:rPr lang="nb-NO" b="0" i="1" smtClean="0">
+                                <a:latin typeface="Cambria Math" panose="02040503050406030204" pitchFamily="18" charset="0"/>
+                              </a:rPr>
+                            </m:ctrlPr>
+                          </m:dPr>
+                          <m:e>
+                            <m:f>
+                              <m:fPr>
+                                <m:ctrlPr>
+                                  <a:rPr lang="nb-NO" b="0" i="1" smtClean="0">
+                                    <a:latin typeface="Cambria Math" panose="02040503050406030204" pitchFamily="18" charset="0"/>
+                                  </a:rPr>
+                                </m:ctrlPr>
+                              </m:fPr>
+                              <m:num>
+                                <m:r>
+                                  <a:rPr lang="nb-NO" b="0" i="1" smtClean="0">
+                                    <a:latin typeface="Cambria Math" panose="02040503050406030204" pitchFamily="18" charset="0"/>
+                                  </a:rPr>
+                                  <m:t>1</m:t>
+                                </m:r>
+                              </m:num>
+                              <m:den>
+                                <m:r>
+                                  <a:rPr lang="nb-NO" b="0" i="1" smtClean="0">
+                                    <a:latin typeface="Cambria Math" panose="02040503050406030204" pitchFamily="18" charset="0"/>
+                                  </a:rPr>
+                                  <m:t>𝐴</m:t>
+                                </m:r>
+                              </m:den>
+                            </m:f>
+                          </m:e>
+                        </m:d>
+                        <m:r>
+                          <m:rPr>
+                            <m:sty m:val="p"/>
+                          </m:rPr>
+                          <a:rPr lang="nb-NO" b="0" i="0" smtClean="0">
+                            <a:latin typeface="Cambria Math" panose="02040503050406030204" pitchFamily="18" charset="0"/>
+                          </a:rPr>
+                          <m:t>∇</m:t>
+                        </m:r>
+                        <m:r>
+                          <a:rPr lang="nb-NO" b="0" i="1" smtClean="0">
+                            <a:latin typeface="Cambria Math" panose="02040503050406030204" pitchFamily="18" charset="0"/>
+                          </a:rPr>
+                          <m:t>𝑝</m:t>
+                        </m:r>
+                      </m:e>
+                    </m:d>
+                    <m:r>
+                      <a:rPr lang="nb-NO" b="0" i="1" smtClean="0">
+                        <a:latin typeface="Cambria Math" panose="02040503050406030204" pitchFamily="18" charset="0"/>
+                      </a:rPr>
+                      <m:t>=</m:t>
+                    </m:r>
+                    <m:r>
+                      <m:rPr>
+                        <m:sty m:val="p"/>
+                      </m:rPr>
+                      <a:rPr lang="nb-NO" b="0" i="0" smtClean="0">
+                        <a:latin typeface="Cambria Math" panose="02040503050406030204" pitchFamily="18" charset="0"/>
+                      </a:rPr>
+                      <m:t>∇</m:t>
+                    </m:r>
+                    <m:r>
+                      <a:rPr lang="nb-NO" b="0" i="1" smtClean="0">
+                        <a:latin typeface="Cambria Math" panose="02040503050406030204" pitchFamily="18" charset="0"/>
+                      </a:rPr>
+                      <m:t>⋅</m:t>
+                    </m:r>
+                    <m:d>
+                      <m:dPr>
+                        <m:ctrlPr>
+                          <a:rPr lang="nb-NO" b="0" i="1" smtClean="0">
+                            <a:latin typeface="Cambria Math" panose="02040503050406030204" pitchFamily="18" charset="0"/>
+                          </a:rPr>
+                        </m:ctrlPr>
+                      </m:dPr>
+                      <m:e>
+                        <m:f>
+                          <m:fPr>
+                            <m:ctrlPr>
+                              <a:rPr lang="nb-NO" b="0" i="1" smtClean="0">
+                                <a:latin typeface="Cambria Math" panose="02040503050406030204" pitchFamily="18" charset="0"/>
+                              </a:rPr>
+                            </m:ctrlPr>
+                          </m:fPr>
+                          <m:num>
+                            <m:r>
+                              <a:rPr lang="nb-NO" b="0" i="1" smtClean="0">
+                                <a:latin typeface="Cambria Math" panose="02040503050406030204" pitchFamily="18" charset="0"/>
+                              </a:rPr>
+                              <m:t>𝐻</m:t>
+                            </m:r>
+                          </m:num>
+                          <m:den>
+                            <m:r>
+                              <a:rPr lang="nb-NO" b="0" i="1" smtClean="0">
+                                <a:latin typeface="Cambria Math" panose="02040503050406030204" pitchFamily="18" charset="0"/>
+                              </a:rPr>
+                              <m:t>𝐴</m:t>
+                            </m:r>
+                          </m:den>
+                        </m:f>
+                      </m:e>
+                    </m:d>
+                  </m:oMath>
+                </a14:m>
+                <a:r>
+                  <a:rPr lang="en-US" dirty="0"/>
+                  <a:t> enforces continuity</a:t>
+                </a:r>
+              </a:p>
+              <a:p>
+                <a:r>
+                  <a:rPr lang="en-US" dirty="0"/>
+                  <a:t>Corrector: update u and face fluxes with new pressure</a:t>
+                </a:r>
+              </a:p>
+              <a:p>
+                <a:r>
+                  <a:rPr lang="en-US" dirty="0"/>
+                  <a:t>Repeat 2-3 times per timestep to reduce splitting error</a:t>
+                </a:r>
+              </a:p>
+              <a:p>
+                <a:r>
+                  <a:rPr lang="en-US" dirty="0"/>
+                  <a:t>Requires CFL &lt; 1 (Explicit convection)</a:t>
+                </a:r>
+              </a:p>
+            </p:txBody>
+          </p:sp>
+        </mc:Choice>
+        <mc:Fallback>
+          <p:sp>
+            <p:nvSpPr>
+              <p:cNvPr id="3" name="Content Placeholder 2">
+                <a:extLst>
+                  <a:ext uri="{FF2B5EF4-FFF2-40B4-BE49-F238E27FC236}">
+                    <a16:creationId xmlns:a16="http://schemas.microsoft.com/office/drawing/2014/main" id="{E87CEE18-CB53-4F89-4E5B-9A641D69B6EA}"/>
+                  </a:ext>
+                </a:extLst>
+              </p:cNvPr>
+              <p:cNvSpPr>
+                <a:spLocks noGrp="1" noRot="1" noChangeAspect="1" noMove="1" noResize="1" noEditPoints="1" noAdjustHandles="1" noChangeArrowheads="1" noChangeShapeType="1" noTextEdit="1"/>
+              </p:cNvSpPr>
+              <p:nvPr>
+                <p:ph idx="1"/>
+              </p:nvPr>
+            </p:nvSpPr>
+            <p:spPr>
+              <a:xfrm>
+                <a:off x="1301071" y="2715370"/>
+                <a:ext cx="10890928" cy="3566160"/>
+              </a:xfrm>
+              <a:blipFill>
+                <a:blip r:embed="rId2"/>
+                <a:stretch>
+                  <a:fillRect l="-349"/>
+                </a:stretch>
+              </a:blipFill>
+            </p:spPr>
+            <p:txBody>
+              <a:bodyPr/>
+              <a:lstStyle/>
+              <a:p>
+                <a:r>
+                  <a:rPr lang="en-US">
+                    <a:noFill/>
+                  </a:rPr>
+                  <a:t> </a:t>
+                </a:r>
+              </a:p>
+            </p:txBody>
+          </p:sp>
+        </mc:Fallback>
+      </mc:AlternateContent>
+      <p:sp>
+        <p:nvSpPr>
+          <p:cNvPr id="4" name="Title 1">
+            <a:extLst>
+              <a:ext uri="{FF2B5EF4-FFF2-40B4-BE49-F238E27FC236}">
+                <a16:creationId xmlns:a16="http://schemas.microsoft.com/office/drawing/2014/main" id="{6499EF5D-2E0E-041B-3F56-3021B7467160}"/>
+              </a:ext>
+            </a:extLst>
+          </p:cNvPr>
+          <p:cNvSpPr txBox="1">
+            <a:spLocks/>
+          </p:cNvSpPr>
+          <p:nvPr/>
+        </p:nvSpPr>
+        <p:spPr>
+          <a:xfrm>
+            <a:off x="1301071" y="1920241"/>
+            <a:ext cx="10890929" cy="1097280"/>
+          </a:xfrm>
+          <a:prstGeom prst="rect">
+            <a:avLst/>
+          </a:prstGeom>
+        </p:spPr>
+        <p:txBody>
+          <a:bodyPr vert="horz" lIns="91440" tIns="45720" rIns="91440" bIns="45720" rtlCol="0" anchor="t">
+            <a:normAutofit/>
+          </a:bodyPr>
+          <a:lstStyle>
+            <a:lvl1pPr algn="l" defTabSz="914400" rtl="0" eaLnBrk="1" latinLnBrk="0" hangingPunct="1">
+              <a:lnSpc>
+                <a:spcPct val="100000"/>
+              </a:lnSpc>
+              <a:spcBef>
+                <a:spcPct val="0"/>
+              </a:spcBef>
+              <a:buNone/>
+              <a:defRPr sz="4000" b="1" kern="1200">
+                <a:solidFill>
+                  <a:schemeClr val="tx1"/>
+                </a:solidFill>
+                <a:latin typeface="+mj-lt"/>
+                <a:ea typeface="+mj-ea"/>
+                <a:cs typeface="+mj-cs"/>
+              </a:defRPr>
+            </a:lvl1pPr>
+          </a:lstStyle>
+          <a:p>
+            <a:r>
+              <a:rPr lang="en-US" sz="3200" dirty="0"/>
+              <a:t>Piso Algorithm</a:t>
+            </a:r>
           </a:p>
         </p:txBody>
       </p:sp>
     </p:spTree>
     <p:extLst>
       <p:ext uri="{BB962C8B-B14F-4D97-AF65-F5344CB8AC3E}">
-        <p14:creationId xmlns:p14="http://schemas.microsoft.com/office/powerpoint/2010/main" val="1841831974"/>
+        <p14:creationId xmlns:p14="http://schemas.microsoft.com/office/powerpoint/2010/main" val="689377269"/>
       </p:ext>
     </p:extLst>
   </p:cSld>
@@ -5310,7 +6376,7 @@
           <p:cNvPr id="2" name="Title 1">
             <a:extLst>
               <a:ext uri="{FF2B5EF4-FFF2-40B4-BE49-F238E27FC236}">
-                <a16:creationId xmlns:a16="http://schemas.microsoft.com/office/drawing/2014/main" id="{515984D7-D2CE-D5F3-4D33-71550CF3C5CB}"/>
+                <a16:creationId xmlns:a16="http://schemas.microsoft.com/office/drawing/2014/main" id="{93D60F15-EB9B-302A-A859-87B8B6C516A4}"/>
               </a:ext>
             </a:extLst>
           </p:cNvPr>
@@ -5328,40 +6394,347 @@
           <a:p>
             <a:r>
               <a:rPr lang="en-US" dirty="0"/>
-              <a:t>Results at Re=1000</a:t>
-            </a:r>
-          </a:p>
-        </p:txBody>
-      </p:sp>
-      <p:sp>
-        <p:nvSpPr>
-          <p:cNvPr id="3" name="Content Placeholder 2">
-            <a:extLst>
-              <a:ext uri="{FF2B5EF4-FFF2-40B4-BE49-F238E27FC236}">
-                <a16:creationId xmlns:a16="http://schemas.microsoft.com/office/drawing/2014/main" id="{885C0D54-99DD-E31E-26DB-A88D993E79D8}"/>
-              </a:ext>
-            </a:extLst>
-          </p:cNvPr>
-          <p:cNvSpPr>
-            <a:spLocks noGrp="1"/>
-          </p:cNvSpPr>
+              <a:t>Solver 2: Physics-Informed Neural Networks</a:t>
+            </a:r>
+          </a:p>
+        </p:txBody>
+      </p:sp>
+      <p:graphicFrame>
+        <p:nvGraphicFramePr>
+          <p:cNvPr id="5" name="Content Placeholder 4">
+            <a:extLst>
+              <a:ext uri="{FF2B5EF4-FFF2-40B4-BE49-F238E27FC236}">
+                <a16:creationId xmlns:a16="http://schemas.microsoft.com/office/drawing/2014/main" id="{82477CFF-7FF1-01C9-5FC1-46938B5B843F}"/>
+              </a:ext>
+            </a:extLst>
+          </p:cNvPr>
+          <p:cNvGraphicFramePr>
+            <a:graphicFrameLocks noGrp="1"/>
+          </p:cNvGraphicFramePr>
           <p:nvPr>
             <p:ph idx="1"/>
-          </p:nvPr>
-        </p:nvSpPr>
-        <p:spPr/>
-        <p:txBody>
-          <a:bodyPr/>
-          <a:lstStyle/>
-          <a:p>
-            <a:endParaRPr lang="en-US"/>
+            <p:extLst>
+              <p:ext uri="{D42A27DB-BD31-4B8C-83A1-F6EECF244321}">
+                <p14:modId xmlns:p14="http://schemas.microsoft.com/office/powerpoint/2010/main" val="598151417"/>
+              </p:ext>
+            </p:extLst>
+          </p:nvPr>
+        </p:nvGraphicFramePr>
+        <p:xfrm>
+          <a:off x="639172" y="4671185"/>
+          <a:ext cx="10891836" cy="1854200"/>
+        </p:xfrm>
+        <a:graphic>
+          <a:graphicData uri="http://schemas.openxmlformats.org/drawingml/2006/table">
+            <a:tbl>
+              <a:tblPr firstRow="1" bandRow="1">
+                <a:tableStyleId>{5C22544A-7EE6-4342-B048-85BDC9FD1C3A}</a:tableStyleId>
+              </a:tblPr>
+              <a:tblGrid>
+                <a:gridCol w="5445918">
+                  <a:extLst>
+                    <a:ext uri="{9D8B030D-6E8A-4147-A177-3AD203B41FA5}">
+                      <a16:colId xmlns:a16="http://schemas.microsoft.com/office/drawing/2014/main" val="1905779268"/>
+                    </a:ext>
+                  </a:extLst>
+                </a:gridCol>
+                <a:gridCol w="5445918">
+                  <a:extLst>
+                    <a:ext uri="{9D8B030D-6E8A-4147-A177-3AD203B41FA5}">
+                      <a16:colId xmlns:a16="http://schemas.microsoft.com/office/drawing/2014/main" val="3756693606"/>
+                    </a:ext>
+                  </a:extLst>
+                </a:gridCol>
+              </a:tblGrid>
+              <a:tr h="370840">
+                <a:tc>
+                  <a:txBody>
+                    <a:bodyPr/>
+                    <a:lstStyle/>
+                    <a:p>
+                      <a:r>
+                        <a:rPr lang="en-US" dirty="0" err="1"/>
+                        <a:t>openFoam</a:t>
+                      </a:r>
+                      <a:endParaRPr lang="en-US" dirty="0"/>
+                    </a:p>
+                  </a:txBody>
+                  <a:tcPr/>
+                </a:tc>
+                <a:tc>
+                  <a:txBody>
+                    <a:bodyPr/>
+                    <a:lstStyle/>
+                    <a:p>
+                      <a:r>
+                        <a:rPr lang="en-US" dirty="0"/>
+                        <a:t>Pinn</a:t>
+                      </a:r>
+                    </a:p>
+                  </a:txBody>
+                  <a:tcPr/>
+                </a:tc>
+                <a:extLst>
+                  <a:ext uri="{0D108BD9-81ED-4DB2-BD59-A6C34878D82A}">
+                    <a16:rowId xmlns:a16="http://schemas.microsoft.com/office/drawing/2014/main" val="3005336221"/>
+                  </a:ext>
+                </a:extLst>
+              </a:tr>
+              <a:tr h="370840">
+                <a:tc>
+                  <a:txBody>
+                    <a:bodyPr/>
+                    <a:lstStyle/>
+                    <a:p>
+                      <a:r>
+                        <a:rPr lang="en-US" dirty="0"/>
+                        <a:t>Mesh</a:t>
+                      </a:r>
+                    </a:p>
+                  </a:txBody>
+                  <a:tcPr/>
+                </a:tc>
+                <a:tc>
+                  <a:txBody>
+                    <a:bodyPr/>
+                    <a:lstStyle/>
+                    <a:p>
+                      <a:r>
+                        <a:rPr lang="en-US" dirty="0"/>
+                        <a:t>Collocation points</a:t>
+                      </a:r>
+                    </a:p>
+                  </a:txBody>
+                  <a:tcPr/>
+                </a:tc>
+                <a:extLst>
+                  <a:ext uri="{0D108BD9-81ED-4DB2-BD59-A6C34878D82A}">
+                    <a16:rowId xmlns:a16="http://schemas.microsoft.com/office/drawing/2014/main" val="152984949"/>
+                  </a:ext>
+                </a:extLst>
+              </a:tr>
+              <a:tr h="370840">
+                <a:tc>
+                  <a:txBody>
+                    <a:bodyPr/>
+                    <a:lstStyle/>
+                    <a:p>
+                      <a:r>
+                        <a:rPr lang="en-US" dirty="0"/>
+                        <a:t>FVM </a:t>
+                      </a:r>
+                      <a:r>
+                        <a:rPr lang="en-US" dirty="0" err="1"/>
+                        <a:t>discretizatrion</a:t>
+                      </a:r>
+                      <a:endParaRPr lang="en-US" dirty="0"/>
+                    </a:p>
+                  </a:txBody>
+                  <a:tcPr/>
+                </a:tc>
+                <a:tc>
+                  <a:txBody>
+                    <a:bodyPr/>
+                    <a:lstStyle/>
+                    <a:p>
+                      <a:r>
+                        <a:rPr lang="en-US" dirty="0"/>
+                        <a:t>Automatic differentiation via JAX</a:t>
+                      </a:r>
+                    </a:p>
+                  </a:txBody>
+                  <a:tcPr/>
+                </a:tc>
+                <a:extLst>
+                  <a:ext uri="{0D108BD9-81ED-4DB2-BD59-A6C34878D82A}">
+                    <a16:rowId xmlns:a16="http://schemas.microsoft.com/office/drawing/2014/main" val="86595439"/>
+                  </a:ext>
+                </a:extLst>
+              </a:tr>
+              <a:tr h="370840">
+                <a:tc>
+                  <a:txBody>
+                    <a:bodyPr/>
+                    <a:lstStyle/>
+                    <a:p>
+                      <a:r>
+                        <a:rPr lang="en-US" dirty="0"/>
+                        <a:t>PISO pressure-velocity coupling</a:t>
+                      </a:r>
+                    </a:p>
+                  </a:txBody>
+                  <a:tcPr/>
+                </a:tc>
+                <a:tc>
+                  <a:txBody>
+                    <a:bodyPr/>
+                    <a:lstStyle/>
+                    <a:p>
+                      <a:r>
+                        <a:rPr lang="en-US" dirty="0"/>
+                        <a:t>continuity is enforced through loss function</a:t>
+                      </a:r>
+                    </a:p>
+                  </a:txBody>
+                  <a:tcPr/>
+                </a:tc>
+                <a:extLst>
+                  <a:ext uri="{0D108BD9-81ED-4DB2-BD59-A6C34878D82A}">
+                    <a16:rowId xmlns:a16="http://schemas.microsoft.com/office/drawing/2014/main" val="1554622976"/>
+                  </a:ext>
+                </a:extLst>
+              </a:tr>
+              <a:tr h="370840">
+                <a:tc>
+                  <a:txBody>
+                    <a:bodyPr/>
+                    <a:lstStyle/>
+                    <a:p>
+                      <a:r>
+                        <a:rPr lang="en-US" dirty="0"/>
+                        <a:t>Linear solver per timestep</a:t>
+                      </a:r>
+                    </a:p>
+                  </a:txBody>
+                  <a:tcPr/>
+                </a:tc>
+                <a:tc>
+                  <a:txBody>
+                    <a:bodyPr/>
+                    <a:lstStyle/>
+                    <a:p>
+                      <a:r>
+                        <a:rPr lang="en-US" dirty="0"/>
+                        <a:t>Gradient descent over all time  </a:t>
+                      </a:r>
+                    </a:p>
+                  </a:txBody>
+                  <a:tcPr/>
+                </a:tc>
+                <a:extLst>
+                  <a:ext uri="{0D108BD9-81ED-4DB2-BD59-A6C34878D82A}">
+                    <a16:rowId xmlns:a16="http://schemas.microsoft.com/office/drawing/2014/main" val="478575766"/>
+                  </a:ext>
+                </a:extLst>
+              </a:tr>
+            </a:tbl>
+          </a:graphicData>
+        </a:graphic>
+      </p:graphicFrame>
+      <p:sp>
+        <p:nvSpPr>
+          <p:cNvPr id="4" name="Title 1">
+            <a:extLst>
+              <a:ext uri="{FF2B5EF4-FFF2-40B4-BE49-F238E27FC236}">
+                <a16:creationId xmlns:a16="http://schemas.microsoft.com/office/drawing/2014/main" id="{6B55262A-29F4-2812-2596-FC2B5833BA7F}"/>
+              </a:ext>
+            </a:extLst>
+          </p:cNvPr>
+          <p:cNvSpPr txBox="1">
+            <a:spLocks/>
+          </p:cNvSpPr>
+          <p:nvPr/>
+        </p:nvSpPr>
+        <p:spPr>
+          <a:xfrm>
+            <a:off x="1430280" y="2049450"/>
+            <a:ext cx="10890929" cy="548640"/>
+          </a:xfrm>
+          <a:prstGeom prst="rect">
+            <a:avLst/>
+          </a:prstGeom>
+        </p:spPr>
+        <p:txBody>
+          <a:bodyPr vert="horz" lIns="91440" tIns="45720" rIns="91440" bIns="45720" rtlCol="0" anchor="t">
+            <a:normAutofit lnSpcReduction="10000"/>
+          </a:bodyPr>
+          <a:lstStyle>
+            <a:lvl1pPr algn="l" defTabSz="914400" rtl="0" eaLnBrk="1" latinLnBrk="0" hangingPunct="1">
+              <a:lnSpc>
+                <a:spcPct val="100000"/>
+              </a:lnSpc>
+              <a:spcBef>
+                <a:spcPct val="0"/>
+              </a:spcBef>
+              <a:buNone/>
+              <a:defRPr sz="4000" b="1" kern="1200">
+                <a:solidFill>
+                  <a:schemeClr val="tx1"/>
+                </a:solidFill>
+                <a:latin typeface="+mj-lt"/>
+                <a:ea typeface="+mj-ea"/>
+                <a:cs typeface="+mj-cs"/>
+              </a:defRPr>
+            </a:lvl1pPr>
+          </a:lstStyle>
+          <a:p>
+            <a:r>
+              <a:rPr lang="en-US" sz="3200" dirty="0"/>
+              <a:t>What are PINNs?</a:t>
+            </a:r>
+          </a:p>
+        </p:txBody>
+      </p:sp>
+      <p:sp>
+        <p:nvSpPr>
+          <p:cNvPr id="6" name="TextBox 5">
+            <a:extLst>
+              <a:ext uri="{FF2B5EF4-FFF2-40B4-BE49-F238E27FC236}">
+                <a16:creationId xmlns:a16="http://schemas.microsoft.com/office/drawing/2014/main" id="{4CA5F18F-0867-C81C-0E48-71F66583E933}"/>
+              </a:ext>
+            </a:extLst>
+          </p:cNvPr>
+          <p:cNvSpPr txBox="1"/>
+          <p:nvPr/>
+        </p:nvSpPr>
+        <p:spPr>
+          <a:xfrm>
+            <a:off x="1103243" y="2812774"/>
+            <a:ext cx="6091732" cy="923330"/>
+          </a:xfrm>
+          <a:prstGeom prst="rect">
+            <a:avLst/>
+          </a:prstGeom>
+          <a:noFill/>
+        </p:spPr>
+        <p:txBody>
+          <a:bodyPr wrap="none" rtlCol="0">
+            <a:spAutoFit/>
+          </a:bodyPr>
+          <a:lstStyle/>
+          <a:p>
+            <a:pPr marL="285750" indent="-285750">
+              <a:buFont typeface="Arial" panose="020B0604020202020204" pitchFamily="34" charset="0"/>
+              <a:buChar char="•"/>
+            </a:pPr>
+            <a:r>
+              <a:rPr lang="en-US" dirty="0"/>
+              <a:t>Replaces mesh with a neural network (MLP)</a:t>
+            </a:r>
+          </a:p>
+          <a:p>
+            <a:pPr marL="285750" indent="-285750">
+              <a:buFont typeface="Arial" panose="020B0604020202020204" pitchFamily="34" charset="0"/>
+              <a:buChar char="•"/>
+            </a:pPr>
+            <a:r>
+              <a:rPr lang="en-US" dirty="0"/>
+              <a:t>PDE residual is embedded directly into the loss function</a:t>
+            </a:r>
+          </a:p>
+          <a:p>
+            <a:pPr marL="285750" indent="-285750">
+              <a:buFont typeface="Arial" panose="020B0604020202020204" pitchFamily="34" charset="0"/>
+              <a:buChar char="•"/>
+            </a:pPr>
+            <a:endParaRPr lang="en-US" dirty="0"/>
           </a:p>
         </p:txBody>
       </p:sp>
     </p:spTree>
     <p:extLst>
       <p:ext uri="{BB962C8B-B14F-4D97-AF65-F5344CB8AC3E}">
-        <p14:creationId xmlns:p14="http://schemas.microsoft.com/office/powerpoint/2010/main" val="1095544334"/>
+        <p14:creationId xmlns:p14="http://schemas.microsoft.com/office/powerpoint/2010/main" val="2598518009"/>
       </p:ext>
     </p:extLst>
   </p:cSld>
@@ -5390,10 +6763,45 @@
       </p:grpSpPr>
       <p:sp>
         <p:nvSpPr>
-          <p:cNvPr id="2" name="Title 1">
-            <a:extLst>
-              <a:ext uri="{FF2B5EF4-FFF2-40B4-BE49-F238E27FC236}">
-                <a16:creationId xmlns:a16="http://schemas.microsoft.com/office/drawing/2014/main" id="{FB2E32BB-25E9-27ED-B610-6A5E47A250EA}"/>
+          <p:cNvPr id="3" name="Content Placeholder 2">
+            <a:extLst>
+              <a:ext uri="{FF2B5EF4-FFF2-40B4-BE49-F238E27FC236}">
+                <a16:creationId xmlns:a16="http://schemas.microsoft.com/office/drawing/2014/main" id="{ADA918DA-17C1-9258-D11D-A16A9A6E9DB4}"/>
+              </a:ext>
+            </a:extLst>
+          </p:cNvPr>
+          <p:cNvSpPr>
+            <a:spLocks noGrp="1"/>
+          </p:cNvSpPr>
+          <p:nvPr>
+            <p:ph idx="1"/>
+          </p:nvPr>
+        </p:nvSpPr>
+        <p:spPr/>
+        <p:txBody>
+          <a:bodyPr/>
+          <a:lstStyle/>
+          <a:p>
+            <a:r>
+              <a:rPr lang="en-US" dirty="0"/>
+              <a:t>Network Architecture (MLP):</a:t>
+            </a:r>
+          </a:p>
+          <a:p>
+            <a:pPr lvl="1"/>
+            <a:r>
+              <a:rPr lang="en-US" dirty="0"/>
+              <a:t>4 hidden layers with 128 neurons each using tanh activation ()</a:t>
+            </a:r>
+          </a:p>
+        </p:txBody>
+      </p:sp>
+      <p:sp>
+        <p:nvSpPr>
+          <p:cNvPr id="4" name="Title 1">
+            <a:extLst>
+              <a:ext uri="{FF2B5EF4-FFF2-40B4-BE49-F238E27FC236}">
+                <a16:creationId xmlns:a16="http://schemas.microsoft.com/office/drawing/2014/main" id="{DAC03048-E37F-AD7E-802E-7E3FBF85BA4E}"/>
               </a:ext>
             </a:extLst>
           </p:cNvPr>
@@ -5411,40 +6819,69 @@
           <a:p>
             <a:r>
               <a:rPr lang="en-US" dirty="0"/>
-              <a:t>Strengths and Limitations</a:t>
-            </a:r>
-          </a:p>
-        </p:txBody>
-      </p:sp>
-      <p:sp>
-        <p:nvSpPr>
-          <p:cNvPr id="3" name="Content Placeholder 2">
-            <a:extLst>
-              <a:ext uri="{FF2B5EF4-FFF2-40B4-BE49-F238E27FC236}">
-                <a16:creationId xmlns:a16="http://schemas.microsoft.com/office/drawing/2014/main" id="{17574145-5798-88A0-0DA9-018F8901AD84}"/>
-              </a:ext>
-            </a:extLst>
-          </p:cNvPr>
-          <p:cNvSpPr>
-            <a:spLocks noGrp="1"/>
-          </p:cNvSpPr>
-          <p:nvPr>
-            <p:ph idx="1"/>
-          </p:nvPr>
-        </p:nvSpPr>
-        <p:spPr/>
-        <p:txBody>
-          <a:bodyPr/>
-          <a:lstStyle/>
-          <a:p>
-            <a:endParaRPr lang="en-US"/>
+              <a:t>Solver 2: Physics-Informed Neural Networks</a:t>
+            </a:r>
+          </a:p>
+        </p:txBody>
+      </p:sp>
+      <p:sp>
+        <p:nvSpPr>
+          <p:cNvPr id="5" name="Title 1">
+            <a:extLst>
+              <a:ext uri="{FF2B5EF4-FFF2-40B4-BE49-F238E27FC236}">
+                <a16:creationId xmlns:a16="http://schemas.microsoft.com/office/drawing/2014/main" id="{0533923A-E516-1ED4-235C-868AF0BFC5A5}"/>
+              </a:ext>
+            </a:extLst>
+          </p:cNvPr>
+          <p:cNvSpPr txBox="1">
+            <a:spLocks/>
+          </p:cNvSpPr>
+          <p:nvPr/>
+        </p:nvSpPr>
+        <p:spPr>
+          <a:xfrm>
+            <a:off x="1430280" y="2049450"/>
+            <a:ext cx="10890929" cy="548640"/>
+          </a:xfrm>
+          <a:prstGeom prst="rect">
+            <a:avLst/>
+          </a:prstGeom>
+        </p:spPr>
+        <p:txBody>
+          <a:bodyPr vert="horz" lIns="91440" tIns="45720" rIns="91440" bIns="45720" rtlCol="0" anchor="t">
+            <a:normAutofit lnSpcReduction="10000"/>
+          </a:bodyPr>
+          <a:lstStyle>
+            <a:lvl1pPr algn="l" defTabSz="914400" rtl="0" eaLnBrk="1" latinLnBrk="0" hangingPunct="1">
+              <a:lnSpc>
+                <a:spcPct val="100000"/>
+              </a:lnSpc>
+              <a:spcBef>
+                <a:spcPct val="0"/>
+              </a:spcBef>
+              <a:buNone/>
+              <a:defRPr sz="4000" b="1" kern="1200">
+                <a:solidFill>
+                  <a:schemeClr val="tx1"/>
+                </a:solidFill>
+                <a:latin typeface="+mj-lt"/>
+                <a:ea typeface="+mj-ea"/>
+                <a:cs typeface="+mj-cs"/>
+              </a:defRPr>
+            </a:lvl1pPr>
+          </a:lstStyle>
+          <a:p>
+            <a:r>
+              <a:rPr lang="en-US" sz="3200" dirty="0"/>
+              <a:t>PINN setup</a:t>
+            </a:r>
           </a:p>
         </p:txBody>
       </p:sp>
     </p:spTree>
     <p:extLst>
       <p:ext uri="{BB962C8B-B14F-4D97-AF65-F5344CB8AC3E}">
-        <p14:creationId xmlns:p14="http://schemas.microsoft.com/office/powerpoint/2010/main" val="505740524"/>
+        <p14:creationId xmlns:p14="http://schemas.microsoft.com/office/powerpoint/2010/main" val="1436160802"/>
       </p:ext>
     </p:extLst>
   </p:cSld>
@@ -5457,6 +6894,14 @@
 <file path=ppt/slides/slide8.xml><?xml version="1.0" encoding="utf-8"?>
 <p:sld xmlns:a="http://schemas.openxmlformats.org/drawingml/2006/main" xmlns:r="http://schemas.openxmlformats.org/officeDocument/2006/relationships" xmlns:p="http://schemas.openxmlformats.org/presentationml/2006/main">
   <p:cSld>
+    <p:bg>
+      <p:bgPr>
+        <a:solidFill>
+          <a:schemeClr val="bg1"/>
+        </a:solidFill>
+        <a:effectLst/>
+      </p:bgPr>
+    </p:bg>
     <p:spTree>
       <p:nvGrpSpPr>
         <p:cNvPr id="1" name=""/>
@@ -5471,12 +6916,136 @@
           <a:chExt cx="0" cy="0"/>
         </a:xfrm>
       </p:grpSpPr>
+      <p:cxnSp>
+        <p:nvCxnSpPr>
+          <p:cNvPr id="16" name="Straight Connector 15">
+            <a:extLst>
+              <a:ext uri="{FF2B5EF4-FFF2-40B4-BE49-F238E27FC236}">
+                <a16:creationId xmlns:a16="http://schemas.microsoft.com/office/drawing/2014/main" id="{118E06E4-607B-144B-382B-AD3D06B1EE8C}"/>
+              </a:ext>
+              <a:ext uri="{C183D7F6-B498-43B3-948B-1728B52AA6E4}">
+                <adec:decorative xmlns:adec="http://schemas.microsoft.com/office/drawing/2017/decorative" val="1"/>
+              </a:ext>
+            </a:extLst>
+          </p:cNvPr>
+          <p:cNvCxnSpPr>
+            <a:cxnSpLocks noGrp="1" noRot="1" noChangeAspect="1" noMove="1" noResize="1" noEditPoints="1" noAdjustHandles="1" noChangeArrowheads="1" noChangeShapeType="1"/>
+          </p:cNvCxnSpPr>
+          <p:nvPr>
+            <p:extLst>
+              <p:ext uri="{386F3935-93C4-4BCD-93E2-E3B085C9AB24}">
+                <p16:designElem xmlns:p16="http://schemas.microsoft.com/office/powerpoint/2015/main" val="1"/>
+              </p:ext>
+            </p:extLst>
+          </p:nvPr>
+        </p:nvCxnSpPr>
+        <p:spPr>
+          <a:xfrm>
+            <a:off x="713232" y="1031001"/>
+            <a:ext cx="978862" cy="0"/>
+          </a:xfrm>
+          <a:prstGeom prst="line">
+            <a:avLst/>
+          </a:prstGeom>
+          <a:ln w="76200"/>
+        </p:spPr>
+        <p:style>
+          <a:lnRef idx="1">
+            <a:schemeClr val="accent1"/>
+          </a:lnRef>
+          <a:fillRef idx="0">
+            <a:schemeClr val="accent1"/>
+          </a:fillRef>
+          <a:effectRef idx="0">
+            <a:schemeClr val="accent1"/>
+          </a:effectRef>
+          <a:fontRef idx="minor">
+            <a:schemeClr val="tx1"/>
+          </a:fontRef>
+        </p:style>
+      </p:cxnSp>
+      <p:sp useBgFill="1">
+        <p:nvSpPr>
+          <p:cNvPr id="18" name="Rectangle 17">
+            <a:extLst>
+              <a:ext uri="{FF2B5EF4-FFF2-40B4-BE49-F238E27FC236}">
+                <a16:creationId xmlns:a16="http://schemas.microsoft.com/office/drawing/2014/main" id="{19F9BF86-FE94-4517-B97D-026C7515E589}"/>
+              </a:ext>
+              <a:ext uri="{C183D7F6-B498-43B3-948B-1728B52AA6E4}">
+                <adec:decorative xmlns:adec="http://schemas.microsoft.com/office/drawing/2017/decorative" val="1"/>
+              </a:ext>
+            </a:extLst>
+          </p:cNvPr>
+          <p:cNvSpPr>
+            <a:spLocks noGrp="1" noRot="1" noChangeAspect="1" noMove="1" noResize="1" noEditPoints="1" noAdjustHandles="1" noChangeArrowheads="1" noChangeShapeType="1" noTextEdit="1"/>
+          </p:cNvSpPr>
+          <p:nvPr>
+            <p:extLst>
+              <p:ext uri="{386F3935-93C4-4BCD-93E2-E3B085C9AB24}">
+                <p16:designElem xmlns:p16="http://schemas.microsoft.com/office/powerpoint/2015/main" val="1"/>
+              </p:ext>
+            </p:extLst>
+          </p:nvPr>
+        </p:nvSpPr>
+        <p:spPr>
+          <a:xfrm>
+            <a:off x="0" y="0"/>
+            <a:ext cx="12192000" cy="6858000"/>
+          </a:xfrm>
+          <a:prstGeom prst="rect">
+            <a:avLst/>
+          </a:prstGeom>
+          <a:ln w="12700" cap="flat" cmpd="sng" algn="ctr">
+            <a:noFill/>
+            <a:prstDash val="solid"/>
+            <a:miter lim="800000"/>
+          </a:ln>
+          <a:effectLst/>
+          <a:extLst>
+            <a:ext uri="{91240B29-F687-4F45-9708-019B960494DF}">
+              <a14:hiddenLine xmlns:a14="http://schemas.microsoft.com/office/drawing/2010/main" w="12700" cap="flat" cmpd="sng" algn="ctr">
+                <a:solidFill>
+                  <a:schemeClr val="accent1">
+                    <a:shade val="50000"/>
+                  </a:schemeClr>
+                </a:solidFill>
+                <a:prstDash val="solid"/>
+                <a:miter lim="800000"/>
+              </a14:hiddenLine>
+            </a:ext>
+          </a:extLst>
+        </p:spPr>
+        <p:style>
+          <a:lnRef idx="2">
+            <a:schemeClr val="accent1">
+              <a:shade val="50000"/>
+            </a:schemeClr>
+          </a:lnRef>
+          <a:fillRef idx="1">
+            <a:schemeClr val="accent1"/>
+          </a:fillRef>
+          <a:effectRef idx="0">
+            <a:schemeClr val="accent1"/>
+          </a:effectRef>
+          <a:fontRef idx="minor">
+            <a:schemeClr val="lt1"/>
+          </a:fontRef>
+        </p:style>
+        <p:txBody>
+          <a:bodyPr rtlCol="0" anchor="ctr"/>
+          <a:lstStyle/>
+          <a:p>
+            <a:pPr algn="ctr"/>
+            <a:endParaRPr lang="en-US"/>
+          </a:p>
+        </p:txBody>
+      </p:sp>
       <p:sp>
         <p:nvSpPr>
           <p:cNvPr id="2" name="Title 1">
             <a:extLst>
               <a:ext uri="{FF2B5EF4-FFF2-40B4-BE49-F238E27FC236}">
-                <a16:creationId xmlns:a16="http://schemas.microsoft.com/office/drawing/2014/main" id="{028621CC-814A-D7A9-4BBC-27FE0D235955}"/>
+                <a16:creationId xmlns:a16="http://schemas.microsoft.com/office/drawing/2014/main" id="{56DB60A1-D5E3-B0BD-9F22-7160CF5A8A8B}"/>
               </a:ext>
             </a:extLst>
           </p:cNvPr>
@@ -5487,62 +7056,426 @@
             <p:ph type="title"/>
           </p:nvPr>
         </p:nvSpPr>
-        <p:spPr/>
-        <p:txBody>
-          <a:bodyPr/>
-          <a:lstStyle/>
-          <a:p>
-            <a:r>
-              <a:rPr lang="en-US" dirty="0"/>
-              <a:t>Where PINNs Have the Edge?</a:t>
-            </a:r>
-          </a:p>
-        </p:txBody>
-      </p:sp>
-      <p:sp>
-        <p:nvSpPr>
-          <p:cNvPr id="3" name="Content Placeholder 2">
-            <a:extLst>
-              <a:ext uri="{FF2B5EF4-FFF2-40B4-BE49-F238E27FC236}">
-                <a16:creationId xmlns:a16="http://schemas.microsoft.com/office/drawing/2014/main" id="{D76CBFE0-BFB3-7819-271F-24A0845F1D80}"/>
-              </a:ext>
-            </a:extLst>
-          </p:cNvPr>
-          <p:cNvSpPr>
-            <a:spLocks noGrp="1"/>
-          </p:cNvSpPr>
+        <p:spPr>
+          <a:xfrm>
+            <a:off x="512378" y="3258434"/>
+            <a:ext cx="3509233" cy="3326797"/>
+          </a:xfrm>
+        </p:spPr>
+        <p:txBody>
+          <a:bodyPr vert="horz" lIns="91440" tIns="45720" rIns="91440" bIns="45720" rtlCol="0" anchor="b">
+            <a:normAutofit/>
+          </a:bodyPr>
+          <a:lstStyle/>
+          <a:p>
+            <a:r>
+              <a:rPr lang="en-US" sz="4800" dirty="0"/>
+              <a:t>Taylor Green Vortex Benchmark</a:t>
+            </a:r>
+          </a:p>
+        </p:txBody>
+      </p:sp>
+      <p:pic>
+        <p:nvPicPr>
+          <p:cNvPr id="7" name="Picture 6">
+            <a:extLst>
+              <a:ext uri="{FF2B5EF4-FFF2-40B4-BE49-F238E27FC236}">
+                <a16:creationId xmlns:a16="http://schemas.microsoft.com/office/drawing/2014/main" id="{E77CA4E2-D886-7D24-345D-B24A8E72F040}"/>
+              </a:ext>
+            </a:extLst>
+          </p:cNvPr>
+          <p:cNvPicPr>
+            <a:picLocks noChangeAspect="1"/>
+          </p:cNvPicPr>
+          <p:nvPr/>
+        </p:nvPicPr>
+        <p:blipFill>
+          <a:blip r:embed="rId2"/>
+          <a:stretch>
+            <a:fillRect/>
+          </a:stretch>
+        </p:blipFill>
+        <p:spPr>
+          <a:xfrm>
+            <a:off x="4670171" y="589060"/>
+            <a:ext cx="7495210" cy="5996171"/>
+          </a:xfrm>
+          <a:prstGeom prst="rect">
+            <a:avLst/>
+          </a:prstGeom>
+        </p:spPr>
+      </p:pic>
+      <p:pic>
+        <p:nvPicPr>
+          <p:cNvPr id="5" name="Content Placeholder 4">
+            <a:extLst>
+              <a:ext uri="{FF2B5EF4-FFF2-40B4-BE49-F238E27FC236}">
+                <a16:creationId xmlns:a16="http://schemas.microsoft.com/office/drawing/2014/main" id="{4FCACC49-D9E6-9BF1-A7CD-61C5F4EDA5A5}"/>
+              </a:ext>
+            </a:extLst>
+          </p:cNvPr>
+          <p:cNvPicPr>
+            <a:picLocks noGrp="1" noChangeAspect="1"/>
+          </p:cNvPicPr>
           <p:nvPr>
             <p:ph idx="1"/>
           </p:nvPr>
-        </p:nvSpPr>
-        <p:spPr/>
-        <p:txBody>
-          <a:bodyPr/>
-          <a:lstStyle/>
-          <a:p>
-            <a:endParaRPr lang="en-US"/>
+        </p:nvPicPr>
+        <p:blipFill>
+          <a:blip r:embed="rId3"/>
+          <a:stretch>
+            <a:fillRect/>
+          </a:stretch>
+        </p:blipFill>
+        <p:spPr>
+          <a:xfrm>
+            <a:off x="4533989" y="589060"/>
+            <a:ext cx="7631392" cy="6105116"/>
+          </a:xfrm>
+          <a:prstGeom prst="rect">
+            <a:avLst/>
+          </a:prstGeom>
+        </p:spPr>
+      </p:pic>
+      <p:pic>
+        <p:nvPicPr>
+          <p:cNvPr id="9" name="Picture 8">
+            <a:extLst>
+              <a:ext uri="{FF2B5EF4-FFF2-40B4-BE49-F238E27FC236}">
+                <a16:creationId xmlns:a16="http://schemas.microsoft.com/office/drawing/2014/main" id="{B36CA233-B044-2838-EB47-099AB4D31A31}"/>
+              </a:ext>
+            </a:extLst>
+          </p:cNvPr>
+          <p:cNvPicPr>
+            <a:picLocks noChangeAspect="1"/>
+          </p:cNvPicPr>
+          <p:nvPr/>
+        </p:nvPicPr>
+        <p:blipFill>
+          <a:blip r:embed="rId4"/>
+          <a:stretch>
+            <a:fillRect/>
+          </a:stretch>
+        </p:blipFill>
+        <p:spPr>
+          <a:xfrm>
+            <a:off x="4533989" y="589060"/>
+            <a:ext cx="7631380" cy="6105108"/>
+          </a:xfrm>
+          <a:prstGeom prst="rect">
+            <a:avLst/>
+          </a:prstGeom>
+        </p:spPr>
+      </p:pic>
+      <p:pic>
+        <p:nvPicPr>
+          <p:cNvPr id="11" name="Picture 10">
+            <a:extLst>
+              <a:ext uri="{FF2B5EF4-FFF2-40B4-BE49-F238E27FC236}">
+                <a16:creationId xmlns:a16="http://schemas.microsoft.com/office/drawing/2014/main" id="{E36C09B7-4A20-30AB-03E8-EC149A51E086}"/>
+              </a:ext>
+            </a:extLst>
+          </p:cNvPr>
+          <p:cNvPicPr>
+            <a:picLocks noChangeAspect="1"/>
+          </p:cNvPicPr>
+          <p:nvPr/>
+        </p:nvPicPr>
+        <p:blipFill>
+          <a:blip r:embed="rId5"/>
+          <a:stretch>
+            <a:fillRect/>
+          </a:stretch>
+        </p:blipFill>
+        <p:spPr>
+          <a:xfrm>
+            <a:off x="4507370" y="589052"/>
+            <a:ext cx="7631372" cy="6105099"/>
+          </a:xfrm>
+          <a:prstGeom prst="rect">
+            <a:avLst/>
+          </a:prstGeom>
+        </p:spPr>
+      </p:pic>
+      <p:sp>
+        <p:nvSpPr>
+          <p:cNvPr id="12" name="TextBox 11">
+            <a:extLst>
+              <a:ext uri="{FF2B5EF4-FFF2-40B4-BE49-F238E27FC236}">
+                <a16:creationId xmlns:a16="http://schemas.microsoft.com/office/drawing/2014/main" id="{D4751A91-EA69-EAC6-6D2B-F6542B21CAD9}"/>
+              </a:ext>
+            </a:extLst>
+          </p:cNvPr>
+          <p:cNvSpPr txBox="1"/>
+          <p:nvPr/>
+        </p:nvSpPr>
+        <p:spPr>
+          <a:xfrm>
+            <a:off x="435179" y="1790775"/>
+            <a:ext cx="2513830" cy="707886"/>
+          </a:xfrm>
+          <a:prstGeom prst="rect">
+            <a:avLst/>
+          </a:prstGeom>
+          <a:noFill/>
+        </p:spPr>
+        <p:txBody>
+          <a:bodyPr wrap="none" rtlCol="0">
+            <a:spAutoFit/>
+          </a:bodyPr>
+          <a:lstStyle/>
+          <a:p>
+            <a:r>
+              <a:rPr lang="en-US" sz="4000" b="1" dirty="0" err="1"/>
+              <a:t>openFoam</a:t>
+            </a:r>
+            <a:endParaRPr lang="en-US" sz="4000" b="1" dirty="0"/>
           </a:p>
         </p:txBody>
       </p:sp>
     </p:spTree>
     <p:extLst>
       <p:ext uri="{BB962C8B-B14F-4D97-AF65-F5344CB8AC3E}">
-        <p14:creationId xmlns:p14="http://schemas.microsoft.com/office/powerpoint/2010/main" val="1861428453"/>
+        <p14:creationId xmlns:p14="http://schemas.microsoft.com/office/powerpoint/2010/main" val="3896516673"/>
       </p:ext>
     </p:extLst>
   </p:cSld>
   <p:clrMapOvr>
     <a:masterClrMapping/>
   </p:clrMapOvr>
+  <p:timing>
+    <p:tnLst>
+      <p:par>
+        <p:cTn id="1" dur="indefinite" restart="never" nodeType="tmRoot">
+          <p:childTnLst>
+            <p:seq concurrent="1" nextAc="seek">
+              <p:cTn id="2" dur="indefinite" nodeType="mainSeq">
+                <p:childTnLst>
+                  <p:par>
+                    <p:cTn id="3" fill="hold">
+                      <p:stCondLst>
+                        <p:cond delay="indefinite"/>
+                      </p:stCondLst>
+                      <p:childTnLst>
+                        <p:par>
+                          <p:cTn id="4" fill="hold">
+                            <p:stCondLst>
+                              <p:cond delay="0"/>
+                            </p:stCondLst>
+                            <p:childTnLst>
+                              <p:par>
+                                <p:cTn id="5" presetID="1" presetClass="entr" presetSubtype="0" fill="hold" nodeType="clickEffect">
+                                  <p:stCondLst>
+                                    <p:cond delay="0"/>
+                                  </p:stCondLst>
+                                  <p:childTnLst>
+                                    <p:set>
+                                      <p:cBhvr>
+                                        <p:cTn id="6" dur="1" fill="hold">
+                                          <p:stCondLst>
+                                            <p:cond delay="0"/>
+                                          </p:stCondLst>
+                                        </p:cTn>
+                                        <p:tgtEl>
+                                          <p:spTgt spid="5"/>
+                                        </p:tgtEl>
+                                        <p:attrNameLst>
+                                          <p:attrName>style.visibility</p:attrName>
+                                        </p:attrNameLst>
+                                      </p:cBhvr>
+                                      <p:to>
+                                        <p:strVal val="visible"/>
+                                      </p:to>
+                                    </p:set>
+                                  </p:childTnLst>
+                                </p:cTn>
+                              </p:par>
+                            </p:childTnLst>
+                          </p:cTn>
+                        </p:par>
+                      </p:childTnLst>
+                    </p:cTn>
+                  </p:par>
+                  <p:par>
+                    <p:cTn id="7" fill="hold">
+                      <p:stCondLst>
+                        <p:cond delay="indefinite"/>
+                      </p:stCondLst>
+                      <p:childTnLst>
+                        <p:par>
+                          <p:cTn id="8" fill="hold">
+                            <p:stCondLst>
+                              <p:cond delay="0"/>
+                            </p:stCondLst>
+                            <p:childTnLst>
+                              <p:par>
+                                <p:cTn id="9" presetID="1" presetClass="entr" presetSubtype="0" fill="hold" nodeType="clickEffect">
+                                  <p:stCondLst>
+                                    <p:cond delay="0"/>
+                                  </p:stCondLst>
+                                  <p:childTnLst>
+                                    <p:set>
+                                      <p:cBhvr>
+                                        <p:cTn id="10" dur="1" fill="hold">
+                                          <p:stCondLst>
+                                            <p:cond delay="0"/>
+                                          </p:stCondLst>
+                                        </p:cTn>
+                                        <p:tgtEl>
+                                          <p:spTgt spid="9"/>
+                                        </p:tgtEl>
+                                        <p:attrNameLst>
+                                          <p:attrName>style.visibility</p:attrName>
+                                        </p:attrNameLst>
+                                      </p:cBhvr>
+                                      <p:to>
+                                        <p:strVal val="visible"/>
+                                      </p:to>
+                                    </p:set>
+                                  </p:childTnLst>
+                                </p:cTn>
+                              </p:par>
+                            </p:childTnLst>
+                          </p:cTn>
+                        </p:par>
+                      </p:childTnLst>
+                    </p:cTn>
+                  </p:par>
+                  <p:par>
+                    <p:cTn id="11" fill="hold">
+                      <p:stCondLst>
+                        <p:cond delay="indefinite"/>
+                      </p:stCondLst>
+                      <p:childTnLst>
+                        <p:par>
+                          <p:cTn id="12" fill="hold">
+                            <p:stCondLst>
+                              <p:cond delay="0"/>
+                            </p:stCondLst>
+                            <p:childTnLst>
+                              <p:par>
+                                <p:cTn id="13" presetID="1" presetClass="entr" presetSubtype="0" fill="hold" nodeType="clickEffect">
+                                  <p:stCondLst>
+                                    <p:cond delay="0"/>
+                                  </p:stCondLst>
+                                  <p:childTnLst>
+                                    <p:set>
+                                      <p:cBhvr>
+                                        <p:cTn id="14" dur="1" fill="hold">
+                                          <p:stCondLst>
+                                            <p:cond delay="0"/>
+                                          </p:stCondLst>
+                                        </p:cTn>
+                                        <p:tgtEl>
+                                          <p:spTgt spid="11"/>
+                                        </p:tgtEl>
+                                        <p:attrNameLst>
+                                          <p:attrName>style.visibility</p:attrName>
+                                        </p:attrNameLst>
+                                      </p:cBhvr>
+                                      <p:to>
+                                        <p:strVal val="visible"/>
+                                      </p:to>
+                                    </p:set>
+                                  </p:childTnLst>
+                                </p:cTn>
+                              </p:par>
+                            </p:childTnLst>
+                          </p:cTn>
+                        </p:par>
+                      </p:childTnLst>
+                    </p:cTn>
+                  </p:par>
+                  <p:par>
+                    <p:cTn id="15" fill="hold">
+                      <p:stCondLst>
+                        <p:cond delay="indefinite"/>
+                      </p:stCondLst>
+                      <p:childTnLst>
+                        <p:par>
+                          <p:cTn id="16" fill="hold">
+                            <p:stCondLst>
+                              <p:cond delay="0"/>
+                            </p:stCondLst>
+                            <p:childTnLst>
+                              <p:par>
+                                <p:cTn id="17" presetID="1" presetClass="entr" presetSubtype="0" fill="hold" nodeType="clickEffect">
+                                  <p:stCondLst>
+                                    <p:cond delay="0"/>
+                                  </p:stCondLst>
+                                  <p:childTnLst>
+                                    <p:set>
+                                      <p:cBhvr>
+                                        <p:cTn id="18" dur="1" fill="hold">
+                                          <p:stCondLst>
+                                            <p:cond delay="0"/>
+                                          </p:stCondLst>
+                                        </p:cTn>
+                                        <p:tgtEl>
+                                          <p:spTgt spid="11"/>
+                                        </p:tgtEl>
+                                        <p:attrNameLst>
+                                          <p:attrName>style.visibility</p:attrName>
+                                        </p:attrNameLst>
+                                      </p:cBhvr>
+                                      <p:to>
+                                        <p:strVal val="visible"/>
+                                      </p:to>
+                                    </p:set>
+                                  </p:childTnLst>
+                                </p:cTn>
+                              </p:par>
+                            </p:childTnLst>
+                          </p:cTn>
+                        </p:par>
+                      </p:childTnLst>
+                    </p:cTn>
+                  </p:par>
+                </p:childTnLst>
+              </p:cTn>
+              <p:prevCondLst>
+                <p:cond evt="onPrev" delay="0">
+                  <p:tgtEl>
+                    <p:sldTgt/>
+                  </p:tgtEl>
+                </p:cond>
+              </p:prevCondLst>
+              <p:nextCondLst>
+                <p:cond evt="onNext" delay="0">
+                  <p:tgtEl>
+                    <p:sldTgt/>
+                  </p:tgtEl>
+                </p:cond>
+              </p:nextCondLst>
+            </p:seq>
+          </p:childTnLst>
+        </p:cTn>
+      </p:par>
+    </p:tnLst>
+  </p:timing>
 </p:sld>
 </file>
 
 <file path=ppt/slides/slide9.xml><?xml version="1.0" encoding="utf-8"?>
 <p:sld xmlns:a="http://schemas.openxmlformats.org/drawingml/2006/main" xmlns:r="http://schemas.openxmlformats.org/officeDocument/2006/relationships" xmlns:p="http://schemas.openxmlformats.org/presentationml/2006/main">
   <p:cSld>
+    <p:bg>
+      <p:bgPr>
+        <a:solidFill>
+          <a:schemeClr val="bg1"/>
+        </a:solidFill>
+        <a:effectLst/>
+      </p:bgPr>
+    </p:bg>
     <p:spTree>
       <p:nvGrpSpPr>
-        <p:cNvPr id="1" name=""/>
+        <p:cNvPr id="1" name="">
+          <a:extLst>
+            <a:ext uri="{FF2B5EF4-FFF2-40B4-BE49-F238E27FC236}">
+              <a16:creationId xmlns:a16="http://schemas.microsoft.com/office/drawing/2014/main" id="{09EFF7D0-1DA7-330C-BAB5-59A69546054E}"/>
+            </a:ext>
+          </a:extLst>
+        </p:cNvPr>
         <p:cNvGrpSpPr/>
         <p:nvPr/>
       </p:nvGrpSpPr>
@@ -5554,12 +7487,136 @@
           <a:chExt cx="0" cy="0"/>
         </a:xfrm>
       </p:grpSpPr>
+      <p:cxnSp>
+        <p:nvCxnSpPr>
+          <p:cNvPr id="16" name="Straight Connector 15">
+            <a:extLst>
+              <a:ext uri="{FF2B5EF4-FFF2-40B4-BE49-F238E27FC236}">
+                <a16:creationId xmlns:a16="http://schemas.microsoft.com/office/drawing/2014/main" id="{AD8BCB5B-5555-6CCF-225D-99BDF2A76D2F}"/>
+              </a:ext>
+              <a:ext uri="{C183D7F6-B498-43B3-948B-1728B52AA6E4}">
+                <adec:decorative xmlns:adec="http://schemas.microsoft.com/office/drawing/2017/decorative" val="1"/>
+              </a:ext>
+            </a:extLst>
+          </p:cNvPr>
+          <p:cNvCxnSpPr>
+            <a:cxnSpLocks noGrp="1" noRot="1" noChangeAspect="1" noMove="1" noResize="1" noEditPoints="1" noAdjustHandles="1" noChangeArrowheads="1" noChangeShapeType="1"/>
+          </p:cNvCxnSpPr>
+          <p:nvPr>
+            <p:extLst>
+              <p:ext uri="{386F3935-93C4-4BCD-93E2-E3B085C9AB24}">
+                <p16:designElem xmlns:p16="http://schemas.microsoft.com/office/powerpoint/2015/main" val="1"/>
+              </p:ext>
+            </p:extLst>
+          </p:nvPr>
+        </p:nvCxnSpPr>
+        <p:spPr>
+          <a:xfrm>
+            <a:off x="713232" y="1031001"/>
+            <a:ext cx="978862" cy="0"/>
+          </a:xfrm>
+          <a:prstGeom prst="line">
+            <a:avLst/>
+          </a:prstGeom>
+          <a:ln w="76200"/>
+        </p:spPr>
+        <p:style>
+          <a:lnRef idx="1">
+            <a:schemeClr val="accent1"/>
+          </a:lnRef>
+          <a:fillRef idx="0">
+            <a:schemeClr val="accent1"/>
+          </a:fillRef>
+          <a:effectRef idx="0">
+            <a:schemeClr val="accent1"/>
+          </a:effectRef>
+          <a:fontRef idx="minor">
+            <a:schemeClr val="tx1"/>
+          </a:fontRef>
+        </p:style>
+      </p:cxnSp>
+      <p:sp useBgFill="1">
+        <p:nvSpPr>
+          <p:cNvPr id="18" name="Rectangle 17">
+            <a:extLst>
+              <a:ext uri="{FF2B5EF4-FFF2-40B4-BE49-F238E27FC236}">
+                <a16:creationId xmlns:a16="http://schemas.microsoft.com/office/drawing/2014/main" id="{D1202105-6653-E310-88A6-CAAE98DB8BC6}"/>
+              </a:ext>
+              <a:ext uri="{C183D7F6-B498-43B3-948B-1728B52AA6E4}">
+                <adec:decorative xmlns:adec="http://schemas.microsoft.com/office/drawing/2017/decorative" val="1"/>
+              </a:ext>
+            </a:extLst>
+          </p:cNvPr>
+          <p:cNvSpPr>
+            <a:spLocks noGrp="1" noRot="1" noChangeAspect="1" noMove="1" noResize="1" noEditPoints="1" noAdjustHandles="1" noChangeArrowheads="1" noChangeShapeType="1" noTextEdit="1"/>
+          </p:cNvSpPr>
+          <p:nvPr>
+            <p:extLst>
+              <p:ext uri="{386F3935-93C4-4BCD-93E2-E3B085C9AB24}">
+                <p16:designElem xmlns:p16="http://schemas.microsoft.com/office/powerpoint/2015/main" val="1"/>
+              </p:ext>
+            </p:extLst>
+          </p:nvPr>
+        </p:nvSpPr>
+        <p:spPr>
+          <a:xfrm>
+            <a:off x="0" y="0"/>
+            <a:ext cx="12192000" cy="6858000"/>
+          </a:xfrm>
+          <a:prstGeom prst="rect">
+            <a:avLst/>
+          </a:prstGeom>
+          <a:ln w="12700" cap="flat" cmpd="sng" algn="ctr">
+            <a:noFill/>
+            <a:prstDash val="solid"/>
+            <a:miter lim="800000"/>
+          </a:ln>
+          <a:effectLst/>
+          <a:extLst>
+            <a:ext uri="{91240B29-F687-4F45-9708-019B960494DF}">
+              <a14:hiddenLine xmlns:a14="http://schemas.microsoft.com/office/drawing/2010/main" w="12700" cap="flat" cmpd="sng" algn="ctr">
+                <a:solidFill>
+                  <a:schemeClr val="accent1">
+                    <a:shade val="50000"/>
+                  </a:schemeClr>
+                </a:solidFill>
+                <a:prstDash val="solid"/>
+                <a:miter lim="800000"/>
+              </a14:hiddenLine>
+            </a:ext>
+          </a:extLst>
+        </p:spPr>
+        <p:style>
+          <a:lnRef idx="2">
+            <a:schemeClr val="accent1">
+              <a:shade val="50000"/>
+            </a:schemeClr>
+          </a:lnRef>
+          <a:fillRef idx="1">
+            <a:schemeClr val="accent1"/>
+          </a:fillRef>
+          <a:effectRef idx="0">
+            <a:schemeClr val="accent1"/>
+          </a:effectRef>
+          <a:fontRef idx="minor">
+            <a:schemeClr val="lt1"/>
+          </a:fontRef>
+        </p:style>
+        <p:txBody>
+          <a:bodyPr rtlCol="0" anchor="ctr"/>
+          <a:lstStyle/>
+          <a:p>
+            <a:pPr algn="ctr"/>
+            <a:endParaRPr lang="en-US"/>
+          </a:p>
+        </p:txBody>
+      </p:sp>
       <p:sp>
         <p:nvSpPr>
           <p:cNvPr id="2" name="Title 1">
             <a:extLst>
               <a:ext uri="{FF2B5EF4-FFF2-40B4-BE49-F238E27FC236}">
-                <a16:creationId xmlns:a16="http://schemas.microsoft.com/office/drawing/2014/main" id="{94E9AA2D-D8BC-9FBA-568C-9089539EAC82}"/>
+                <a16:creationId xmlns:a16="http://schemas.microsoft.com/office/drawing/2014/main" id="{A877C020-20C4-A60C-C835-77FD684A8902}"/>
               </a:ext>
             </a:extLst>
           </p:cNvPr>
@@ -5570,24 +7627,66 @@
             <p:ph type="title"/>
           </p:nvPr>
         </p:nvSpPr>
-        <p:spPr/>
-        <p:txBody>
-          <a:bodyPr/>
-          <a:lstStyle/>
-          <a:p>
-            <a:r>
-              <a:rPr lang="en-US" dirty="0"/>
-              <a:t>Collaboration Results</a:t>
-            </a:r>
-          </a:p>
-        </p:txBody>
-      </p:sp>
-      <p:sp>
-        <p:nvSpPr>
-          <p:cNvPr id="3" name="Content Placeholder 2">
-            <a:extLst>
-              <a:ext uri="{FF2B5EF4-FFF2-40B4-BE49-F238E27FC236}">
-                <a16:creationId xmlns:a16="http://schemas.microsoft.com/office/drawing/2014/main" id="{06747A52-6C3E-D967-E643-A05597C6FEC8}"/>
+        <p:spPr>
+          <a:xfrm>
+            <a:off x="350911" y="3111282"/>
+            <a:ext cx="3509233" cy="3326797"/>
+          </a:xfrm>
+        </p:spPr>
+        <p:txBody>
+          <a:bodyPr vert="horz" lIns="91440" tIns="45720" rIns="91440" bIns="45720" rtlCol="0" anchor="b">
+            <a:normAutofit/>
+          </a:bodyPr>
+          <a:lstStyle/>
+          <a:p>
+            <a:r>
+              <a:rPr lang="en-US" sz="4800" dirty="0"/>
+              <a:t>Taylor Green Vortex Benchmark</a:t>
+            </a:r>
+          </a:p>
+        </p:txBody>
+      </p:sp>
+      <p:sp>
+        <p:nvSpPr>
+          <p:cNvPr id="3" name="TextBox 2">
+            <a:extLst>
+              <a:ext uri="{FF2B5EF4-FFF2-40B4-BE49-F238E27FC236}">
+                <a16:creationId xmlns:a16="http://schemas.microsoft.com/office/drawing/2014/main" id="{6F67E9F6-9A46-418B-64AC-38B0991E8B7B}"/>
+              </a:ext>
+            </a:extLst>
+          </p:cNvPr>
+          <p:cNvSpPr txBox="1"/>
+          <p:nvPr/>
+        </p:nvSpPr>
+        <p:spPr>
+          <a:xfrm>
+            <a:off x="437662" y="1983475"/>
+            <a:ext cx="1362874" cy="707886"/>
+          </a:xfrm>
+          <a:prstGeom prst="rect">
+            <a:avLst/>
+          </a:prstGeom>
+          <a:noFill/>
+        </p:spPr>
+        <p:txBody>
+          <a:bodyPr wrap="none" rtlCol="0">
+            <a:spAutoFit/>
+          </a:bodyPr>
+          <a:lstStyle/>
+          <a:p>
+            <a:r>
+              <a:rPr lang="en-US" sz="4000" b="1" dirty="0"/>
+              <a:t>PINN</a:t>
+            </a:r>
+          </a:p>
+        </p:txBody>
+      </p:sp>
+      <p:sp>
+        <p:nvSpPr>
+          <p:cNvPr id="6" name="Content Placeholder 5">
+            <a:extLst>
+              <a:ext uri="{FF2B5EF4-FFF2-40B4-BE49-F238E27FC236}">
+                <a16:creationId xmlns:a16="http://schemas.microsoft.com/office/drawing/2014/main" id="{24E28B5A-C4FE-8944-C1E9-DD17D7154931}"/>
               </a:ext>
             </a:extLst>
           </p:cNvPr>
@@ -5610,7 +7709,7 @@
     </p:spTree>
     <p:extLst>
       <p:ext uri="{BB962C8B-B14F-4D97-AF65-F5344CB8AC3E}">
-        <p14:creationId xmlns:p14="http://schemas.microsoft.com/office/powerpoint/2010/main" val="120589493"/>
+        <p14:creationId xmlns:p14="http://schemas.microsoft.com/office/powerpoint/2010/main" val="1332186539"/>
       </p:ext>
     </p:extLst>
   </p:cSld>

--- a/Presentation1.pptx
+++ b/Presentation1.pptx
@@ -6,18 +6,20 @@
   </p:sldMasterIdLst>
   <p:sldIdLst>
     <p:sldId id="256" r:id="rId2"/>
-    <p:sldId id="265" r:id="rId3"/>
-    <p:sldId id="260" r:id="rId4"/>
-    <p:sldId id="257" r:id="rId5"/>
-    <p:sldId id="266" r:id="rId6"/>
+    <p:sldId id="271" r:id="rId3"/>
+    <p:sldId id="265" r:id="rId4"/>
+    <p:sldId id="260" r:id="rId5"/>
+    <p:sldId id="257" r:id="rId6"/>
     <p:sldId id="258" r:id="rId7"/>
     <p:sldId id="267" r:id="rId8"/>
     <p:sldId id="268" r:id="rId9"/>
-    <p:sldId id="270" r:id="rId10"/>
-    <p:sldId id="261" r:id="rId11"/>
-    <p:sldId id="262" r:id="rId12"/>
-    <p:sldId id="263" r:id="rId13"/>
-    <p:sldId id="264" r:id="rId14"/>
+    <p:sldId id="261" r:id="rId10"/>
+    <p:sldId id="272" r:id="rId11"/>
+    <p:sldId id="274" r:id="rId12"/>
+    <p:sldId id="262" r:id="rId13"/>
+    <p:sldId id="263" r:id="rId14"/>
+    <p:sldId id="264" r:id="rId15"/>
+    <p:sldId id="273" r:id="rId16"/>
   </p:sldIdLst>
   <p:sldSz cx="12192000" cy="6858000"/>
   <p:notesSz cx="6858000" cy="9144000"/>
@@ -280,7 +282,7 @@
           <a:p>
             <a:fld id="{6444479B-705B-4489-957E-7E8A228BDFA0}" type="datetime1">
               <a:rPr lang="en-US" smtClean="0"/>
-              <a:t>5/7/26</a:t>
+              <a:t>5/26/26</a:t>
             </a:fld>
             <a:endParaRPr lang="en-US"/>
           </a:p>
@@ -480,7 +482,7 @@
           <a:p>
             <a:fld id="{C07B66AD-7C08-490A-ADA4-B47E10FB2407}" type="datetime1">
               <a:rPr lang="en-US" smtClean="0"/>
-              <a:t>5/7/26</a:t>
+              <a:t>5/26/26</a:t>
             </a:fld>
             <a:endParaRPr lang="en-US"/>
           </a:p>
@@ -739,7 +741,7 @@
           <a:p>
             <a:fld id="{05B95027-4255-49E7-9841-CD21BCC99996}" type="datetime1">
               <a:rPr lang="en-US" smtClean="0"/>
-              <a:t>5/7/26</a:t>
+              <a:t>5/26/26</a:t>
             </a:fld>
             <a:endParaRPr lang="en-US"/>
           </a:p>
@@ -980,7 +982,7 @@
           <a:p>
             <a:fld id="{9F89F774-3FA6-43B8-9241-99959C8FD463}" type="datetime1">
               <a:rPr lang="en-US" smtClean="0"/>
-              <a:t>5/7/26</a:t>
+              <a:t>5/26/26</a:t>
             </a:fld>
             <a:endParaRPr lang="en-US"/>
           </a:p>
@@ -1307,7 +1309,7 @@
           <a:p>
             <a:fld id="{F9504452-5DCC-4FE2-A5C9-8A5EF6714D65}" type="datetime1">
               <a:rPr lang="en-US" smtClean="0"/>
-              <a:t>5/7/26</a:t>
+              <a:t>5/26/26</a:t>
             </a:fld>
             <a:endParaRPr lang="en-US"/>
           </a:p>
@@ -1617,7 +1619,7 @@
           <a:p>
             <a:fld id="{E579ABC2-0180-4F3A-A895-A85BC724D472}" type="datetime1">
               <a:rPr lang="en-US" smtClean="0"/>
-              <a:t>5/7/26</a:t>
+              <a:t>5/26/26</a:t>
             </a:fld>
             <a:endParaRPr lang="en-US"/>
           </a:p>
@@ -2035,7 +2037,7 @@
           <a:p>
             <a:fld id="{6AEEA9BA-4E8F-439E-BEA4-91FBA01E3F5F}" type="datetime1">
               <a:rPr lang="en-US" smtClean="0"/>
-              <a:t>5/7/26</a:t>
+              <a:t>5/26/26</a:t>
             </a:fld>
             <a:endParaRPr lang="en-US"/>
           </a:p>
@@ -2177,7 +2179,7 @@
           <a:p>
             <a:fld id="{BE15BF18-0007-481C-AA29-413124BC3EE7}" type="datetime1">
               <a:rPr lang="en-US" smtClean="0"/>
-              <a:t>5/7/26</a:t>
+              <a:t>5/26/26</a:t>
             </a:fld>
             <a:endParaRPr lang="en-US"/>
           </a:p>
@@ -2339,7 +2341,7 @@
           <a:p>
             <a:fld id="{09BE9870-3748-43AD-B547-02A075CB4A1D}" type="datetime1">
               <a:rPr lang="en-US" smtClean="0"/>
-              <a:t>5/7/26</a:t>
+              <a:t>5/26/26</a:t>
             </a:fld>
             <a:endParaRPr lang="en-US"/>
           </a:p>
@@ -2656,7 +2658,7 @@
           <a:p>
             <a:fld id="{558E7897-33C5-4F1A-9307-D068E37F3DC7}" type="datetime1">
               <a:rPr lang="en-US" smtClean="0"/>
-              <a:t>5/7/26</a:t>
+              <a:t>5/26/26</a:t>
             </a:fld>
             <a:endParaRPr lang="en-US"/>
           </a:p>
@@ -2951,7 +2953,7 @@
           <a:p>
             <a:fld id="{82E171BA-CC09-47C8-A6DF-F5C5CB59CEEC}" type="datetime1">
               <a:rPr lang="en-US" smtClean="0"/>
-              <a:t>5/7/26</a:t>
+              <a:t>5/26/26</a:t>
             </a:fld>
             <a:endParaRPr lang="en-US"/>
           </a:p>
@@ -3192,7 +3194,7 @@
           <a:p>
             <a:fld id="{7DA38F49-B3E2-4BF0-BEC7-C30D34ABBB8D}" type="datetime1">
               <a:rPr lang="en-US" smtClean="0"/>
-              <a:t>5/7/26</a:t>
+              <a:t>5/26/26</a:t>
             </a:fld>
             <a:endParaRPr lang="en-US"/>
           </a:p>
@@ -3946,6 +3948,76 @@
           </a:prstGeom>
         </p:spPr>
       </p:pic>
+      <p:sp>
+        <p:nvSpPr>
+          <p:cNvPr id="7" name="TextBox 6">
+            <a:extLst>
+              <a:ext uri="{FF2B5EF4-FFF2-40B4-BE49-F238E27FC236}">
+                <a16:creationId xmlns:a16="http://schemas.microsoft.com/office/drawing/2014/main" id="{CD96A191-0859-B998-90CC-1D0A200B5994}"/>
+              </a:ext>
+            </a:extLst>
+          </p:cNvPr>
+          <p:cNvSpPr txBox="1"/>
+          <p:nvPr/>
+        </p:nvSpPr>
+        <p:spPr>
+          <a:xfrm>
+            <a:off x="150920" y="6454066"/>
+            <a:ext cx="1093569" cy="369332"/>
+          </a:xfrm>
+          <a:prstGeom prst="rect">
+            <a:avLst/>
+          </a:prstGeom>
+          <a:noFill/>
+        </p:spPr>
+        <p:txBody>
+          <a:bodyPr wrap="none" rtlCol="0">
+            <a:spAutoFit/>
+          </a:bodyPr>
+          <a:lstStyle/>
+          <a:p>
+            <a:r>
+              <a:rPr lang="en-US" dirty="0"/>
+              <a:t>Mek4470</a:t>
+            </a:r>
+          </a:p>
+        </p:txBody>
+      </p:sp>
+      <p:sp>
+        <p:nvSpPr>
+          <p:cNvPr id="12" name="TextBox 11">
+            <a:extLst>
+              <a:ext uri="{FF2B5EF4-FFF2-40B4-BE49-F238E27FC236}">
+                <a16:creationId xmlns:a16="http://schemas.microsoft.com/office/drawing/2014/main" id="{4EA10216-56D3-097C-A61E-77DF068058B6}"/>
+              </a:ext>
+            </a:extLst>
+          </p:cNvPr>
+          <p:cNvSpPr txBox="1"/>
+          <p:nvPr/>
+        </p:nvSpPr>
+        <p:spPr>
+          <a:xfrm>
+            <a:off x="3808520" y="6471821"/>
+            <a:ext cx="1438214" cy="369332"/>
+          </a:xfrm>
+          <a:prstGeom prst="rect">
+            <a:avLst/>
+          </a:prstGeom>
+          <a:noFill/>
+        </p:spPr>
+        <p:txBody>
+          <a:bodyPr wrap="none" rtlCol="0">
+            <a:spAutoFit/>
+          </a:bodyPr>
+          <a:lstStyle/>
+          <a:p>
+            <a:r>
+              <a:rPr lang="en-US" dirty="0"/>
+              <a:t>Henrik Haug</a:t>
+            </a:r>
+          </a:p>
+        </p:txBody>
+      </p:sp>
     </p:spTree>
     <p:extLst>
       <p:ext uri="{BB962C8B-B14F-4D97-AF65-F5344CB8AC3E}">
@@ -3981,7 +4053,7 @@
           <p:cNvPr id="2" name="Title 1">
             <a:extLst>
               <a:ext uri="{FF2B5EF4-FFF2-40B4-BE49-F238E27FC236}">
-                <a16:creationId xmlns:a16="http://schemas.microsoft.com/office/drawing/2014/main" id="{515984D7-D2CE-D5F3-4D33-71550CF3C5CB}"/>
+                <a16:creationId xmlns:a16="http://schemas.microsoft.com/office/drawing/2014/main" id="{157AB1D0-D432-0681-DC5F-EC7CBCF7AC41}"/>
               </a:ext>
             </a:extLst>
           </p:cNvPr>
@@ -3992,53 +4064,243 @@
             <p:ph type="title"/>
           </p:nvPr>
         </p:nvSpPr>
-        <p:spPr/>
+        <p:spPr>
+          <a:xfrm>
+            <a:off x="2257864" y="125205"/>
+            <a:ext cx="9476936" cy="2688335"/>
+          </a:xfrm>
+        </p:spPr>
         <p:txBody>
           <a:bodyPr/>
           <a:lstStyle/>
           <a:p>
             <a:r>
               <a:rPr lang="en-US" dirty="0"/>
-              <a:t>Results at Re=100, 400, 800</a:t>
-            </a:r>
-          </a:p>
-        </p:txBody>
-      </p:sp>
-      <p:sp>
-        <p:nvSpPr>
-          <p:cNvPr id="3" name="Content Placeholder 2">
-            <a:extLst>
-              <a:ext uri="{FF2B5EF4-FFF2-40B4-BE49-F238E27FC236}">
-                <a16:creationId xmlns:a16="http://schemas.microsoft.com/office/drawing/2014/main" id="{885C0D54-99DD-E31E-26DB-A88D993E79D8}"/>
-              </a:ext>
-            </a:extLst>
-          </p:cNvPr>
-          <p:cNvSpPr>
-            <a:spLocks noGrp="1"/>
-          </p:cNvSpPr>
-          <p:nvPr>
-            <p:ph idx="1"/>
-          </p:nvPr>
-        </p:nvSpPr>
-        <p:spPr/>
-        <p:txBody>
-          <a:bodyPr/>
-          <a:lstStyle/>
-          <a:p>
-            <a:endParaRPr lang="en-US" dirty="0"/>
-          </a:p>
-        </p:txBody>
-      </p:sp>
+              <a:t>Backward-Facing Step Results</a:t>
+            </a:r>
+          </a:p>
+        </p:txBody>
+      </p:sp>
+      <p:pic>
+        <p:nvPicPr>
+          <p:cNvPr id="5" name="Picture 4">
+            <a:extLst>
+              <a:ext uri="{FF2B5EF4-FFF2-40B4-BE49-F238E27FC236}">
+                <a16:creationId xmlns:a16="http://schemas.microsoft.com/office/drawing/2014/main" id="{279C47A1-DEA1-3AC2-AEF0-142064BBA1BE}"/>
+              </a:ext>
+            </a:extLst>
+          </p:cNvPr>
+          <p:cNvPicPr>
+            <a:picLocks noChangeAspect="1"/>
+          </p:cNvPicPr>
+          <p:nvPr/>
+        </p:nvPicPr>
+        <p:blipFill>
+          <a:blip r:embed="rId2"/>
+          <a:stretch>
+            <a:fillRect/>
+          </a:stretch>
+        </p:blipFill>
+        <p:spPr>
+          <a:xfrm>
+            <a:off x="179782" y="1066800"/>
+            <a:ext cx="12012218" cy="5791200"/>
+          </a:xfrm>
+          <a:prstGeom prst="rect">
+            <a:avLst/>
+          </a:prstGeom>
+        </p:spPr>
+      </p:pic>
+      <p:pic>
+        <p:nvPicPr>
+          <p:cNvPr id="7" name="Picture 6">
+            <a:extLst>
+              <a:ext uri="{FF2B5EF4-FFF2-40B4-BE49-F238E27FC236}">
+                <a16:creationId xmlns:a16="http://schemas.microsoft.com/office/drawing/2014/main" id="{658246FF-74D8-7D84-C772-E6ED9F448A1F}"/>
+              </a:ext>
+            </a:extLst>
+          </p:cNvPr>
+          <p:cNvPicPr>
+            <a:picLocks noChangeAspect="1"/>
+          </p:cNvPicPr>
+          <p:nvPr/>
+        </p:nvPicPr>
+        <p:blipFill>
+          <a:blip r:embed="rId3"/>
+          <a:stretch>
+            <a:fillRect/>
+          </a:stretch>
+        </p:blipFill>
+        <p:spPr>
+          <a:xfrm>
+            <a:off x="0" y="1066800"/>
+            <a:ext cx="12192000" cy="5872345"/>
+          </a:xfrm>
+          <a:prstGeom prst="rect">
+            <a:avLst/>
+          </a:prstGeom>
+        </p:spPr>
+      </p:pic>
+      <p:pic>
+        <p:nvPicPr>
+          <p:cNvPr id="9" name="Picture 8">
+            <a:extLst>
+              <a:ext uri="{FF2B5EF4-FFF2-40B4-BE49-F238E27FC236}">
+                <a16:creationId xmlns:a16="http://schemas.microsoft.com/office/drawing/2014/main" id="{1A86C0FF-A705-B78C-03F6-F4561D2F6C8E}"/>
+              </a:ext>
+            </a:extLst>
+          </p:cNvPr>
+          <p:cNvPicPr>
+            <a:picLocks noChangeAspect="1"/>
+          </p:cNvPicPr>
+          <p:nvPr/>
+        </p:nvPicPr>
+        <p:blipFill>
+          <a:blip r:embed="rId4"/>
+          <a:stretch>
+            <a:fillRect/>
+          </a:stretch>
+        </p:blipFill>
+        <p:spPr>
+          <a:xfrm>
+            <a:off x="0" y="1066800"/>
+            <a:ext cx="12192000" cy="5872346"/>
+          </a:xfrm>
+          <a:prstGeom prst="rect">
+            <a:avLst/>
+          </a:prstGeom>
+        </p:spPr>
+      </p:pic>
     </p:spTree>
     <p:extLst>
       <p:ext uri="{BB962C8B-B14F-4D97-AF65-F5344CB8AC3E}">
-        <p14:creationId xmlns:p14="http://schemas.microsoft.com/office/powerpoint/2010/main" val="1095544334"/>
+        <p14:creationId xmlns:p14="http://schemas.microsoft.com/office/powerpoint/2010/main" val="2537628197"/>
       </p:ext>
     </p:extLst>
   </p:cSld>
   <p:clrMapOvr>
     <a:masterClrMapping/>
   </p:clrMapOvr>
+  <p:timing>
+    <p:tnLst>
+      <p:par>
+        <p:cTn id="1" dur="indefinite" restart="never" nodeType="tmRoot">
+          <p:childTnLst>
+            <p:seq concurrent="1" nextAc="seek">
+              <p:cTn id="2" dur="indefinite" nodeType="mainSeq">
+                <p:childTnLst>
+                  <p:par>
+                    <p:cTn id="3" fill="hold">
+                      <p:stCondLst>
+                        <p:cond delay="indefinite"/>
+                      </p:stCondLst>
+                      <p:childTnLst>
+                        <p:par>
+                          <p:cTn id="4" fill="hold">
+                            <p:stCondLst>
+                              <p:cond delay="0"/>
+                            </p:stCondLst>
+                            <p:childTnLst>
+                              <p:par>
+                                <p:cTn id="5" presetID="1" presetClass="entr" presetSubtype="0" fill="hold" nodeType="clickEffect">
+                                  <p:stCondLst>
+                                    <p:cond delay="0"/>
+                                  </p:stCondLst>
+                                  <p:childTnLst>
+                                    <p:set>
+                                      <p:cBhvr>
+                                        <p:cTn id="6" dur="1" fill="hold">
+                                          <p:stCondLst>
+                                            <p:cond delay="0"/>
+                                          </p:stCondLst>
+                                        </p:cTn>
+                                        <p:tgtEl>
+                                          <p:spTgt spid="7"/>
+                                        </p:tgtEl>
+                                        <p:attrNameLst>
+                                          <p:attrName>style.visibility</p:attrName>
+                                        </p:attrNameLst>
+                                      </p:cBhvr>
+                                      <p:to>
+                                        <p:strVal val="visible"/>
+                                      </p:to>
+                                    </p:set>
+                                  </p:childTnLst>
+                                </p:cTn>
+                              </p:par>
+                            </p:childTnLst>
+                          </p:cTn>
+                        </p:par>
+                      </p:childTnLst>
+                    </p:cTn>
+                  </p:par>
+                  <p:par>
+                    <p:cTn id="7" fill="hold">
+                      <p:stCondLst>
+                        <p:cond delay="indefinite"/>
+                      </p:stCondLst>
+                      <p:childTnLst>
+                        <p:par>
+                          <p:cTn id="8" fill="hold">
+                            <p:stCondLst>
+                              <p:cond delay="0"/>
+                            </p:stCondLst>
+                            <p:childTnLst>
+                              <p:par>
+                                <p:cTn id="9" presetID="1" presetClass="entr" presetSubtype="0" fill="hold" nodeType="clickEffect">
+                                  <p:stCondLst>
+                                    <p:cond delay="0"/>
+                                  </p:stCondLst>
+                                  <p:childTnLst>
+                                    <p:set>
+                                      <p:cBhvr>
+                                        <p:cTn id="10" dur="1" fill="hold">
+                                          <p:stCondLst>
+                                            <p:cond delay="0"/>
+                                          </p:stCondLst>
+                                        </p:cTn>
+                                        <p:tgtEl>
+                                          <p:spTgt spid="9"/>
+                                        </p:tgtEl>
+                                        <p:attrNameLst>
+                                          <p:attrName>style.visibility</p:attrName>
+                                        </p:attrNameLst>
+                                      </p:cBhvr>
+                                      <p:to>
+                                        <p:strVal val="visible"/>
+                                      </p:to>
+                                    </p:set>
+                                  </p:childTnLst>
+                                </p:cTn>
+                              </p:par>
+                            </p:childTnLst>
+                          </p:cTn>
+                        </p:par>
+                      </p:childTnLst>
+                    </p:cTn>
+                  </p:par>
+                </p:childTnLst>
+              </p:cTn>
+              <p:prevCondLst>
+                <p:cond evt="onPrev" delay="0">
+                  <p:tgtEl>
+                    <p:sldTgt/>
+                  </p:tgtEl>
+                </p:cond>
+              </p:prevCondLst>
+              <p:nextCondLst>
+                <p:cond evt="onNext" delay="0">
+                  <p:tgtEl>
+                    <p:sldTgt/>
+                  </p:tgtEl>
+                </p:cond>
+              </p:nextCondLst>
+            </p:seq>
+          </p:childTnLst>
+        </p:cTn>
+      </p:par>
+    </p:tnLst>
+  </p:timing>
 </p:sld>
 </file>
 
@@ -4061,61 +4323,93 @@
       </p:grpSpPr>
       <p:sp>
         <p:nvSpPr>
-          <p:cNvPr id="2" name="Title 1">
-            <a:extLst>
-              <a:ext uri="{FF2B5EF4-FFF2-40B4-BE49-F238E27FC236}">
-                <a16:creationId xmlns:a16="http://schemas.microsoft.com/office/drawing/2014/main" id="{FB2E32BB-25E9-27ED-B610-6A5E47A250EA}"/>
-              </a:ext>
-            </a:extLst>
-          </p:cNvPr>
-          <p:cNvSpPr>
-            <a:spLocks noGrp="1"/>
-          </p:cNvSpPr>
-          <p:nvPr>
-            <p:ph type="title"/>
-          </p:nvPr>
-        </p:nvSpPr>
-        <p:spPr/>
-        <p:txBody>
-          <a:bodyPr/>
-          <a:lstStyle/>
-          <a:p>
-            <a:r>
-              <a:rPr lang="en-US" dirty="0"/>
-              <a:t>Strengths and Limitations</a:t>
-            </a:r>
-          </a:p>
-        </p:txBody>
-      </p:sp>
-      <p:sp>
-        <p:nvSpPr>
-          <p:cNvPr id="3" name="Content Placeholder 2">
-            <a:extLst>
-              <a:ext uri="{FF2B5EF4-FFF2-40B4-BE49-F238E27FC236}">
-                <a16:creationId xmlns:a16="http://schemas.microsoft.com/office/drawing/2014/main" id="{17574145-5798-88A0-0DA9-018F8901AD84}"/>
-              </a:ext>
-            </a:extLst>
-          </p:cNvPr>
-          <p:cNvSpPr>
-            <a:spLocks noGrp="1"/>
-          </p:cNvSpPr>
-          <p:nvPr>
-            <p:ph idx="1"/>
-          </p:nvPr>
-        </p:nvSpPr>
-        <p:spPr/>
-        <p:txBody>
-          <a:bodyPr/>
-          <a:lstStyle/>
-          <a:p>
-            <a:endParaRPr lang="en-US"/>
-          </a:p>
-        </p:txBody>
-      </p:sp>
+          <p:cNvPr id="4" name="Title 1">
+            <a:extLst>
+              <a:ext uri="{FF2B5EF4-FFF2-40B4-BE49-F238E27FC236}">
+                <a16:creationId xmlns:a16="http://schemas.microsoft.com/office/drawing/2014/main" id="{F9A454F1-F659-AC8C-99E4-F200D0C3E218}"/>
+              </a:ext>
+            </a:extLst>
+          </p:cNvPr>
+          <p:cNvSpPr txBox="1">
+            <a:spLocks/>
+          </p:cNvSpPr>
+          <p:nvPr/>
+        </p:nvSpPr>
+        <p:spPr>
+          <a:xfrm>
+            <a:off x="2257864" y="125205"/>
+            <a:ext cx="9476936" cy="2688335"/>
+          </a:xfrm>
+          <a:prstGeom prst="rect">
+            <a:avLst/>
+          </a:prstGeom>
+        </p:spPr>
+        <p:txBody>
+          <a:bodyPr vert="horz" lIns="91440" tIns="45720" rIns="91440" bIns="45720" rtlCol="0" anchor="t">
+            <a:normAutofit/>
+          </a:bodyPr>
+          <a:lstStyle>
+            <a:lvl1pPr algn="l" defTabSz="914400" rtl="0" eaLnBrk="1" latinLnBrk="0" hangingPunct="1">
+              <a:lnSpc>
+                <a:spcPct val="100000"/>
+              </a:lnSpc>
+              <a:spcBef>
+                <a:spcPct val="0"/>
+              </a:spcBef>
+              <a:buNone/>
+              <a:defRPr sz="4000" b="1" kern="1200">
+                <a:solidFill>
+                  <a:schemeClr val="tx1"/>
+                </a:solidFill>
+                <a:latin typeface="+mj-lt"/>
+                <a:ea typeface="+mj-ea"/>
+                <a:cs typeface="+mj-cs"/>
+              </a:defRPr>
+            </a:lvl1pPr>
+          </a:lstStyle>
+          <a:p>
+            <a:r>
+              <a:rPr lang="en-US"/>
+              <a:t>Backward-Facing Step Results</a:t>
+            </a:r>
+            <a:endParaRPr lang="en-US" dirty="0"/>
+          </a:p>
+        </p:txBody>
+      </p:sp>
+      <p:pic>
+        <p:nvPicPr>
+          <p:cNvPr id="6" name="Picture 5">
+            <a:extLst>
+              <a:ext uri="{FF2B5EF4-FFF2-40B4-BE49-F238E27FC236}">
+                <a16:creationId xmlns:a16="http://schemas.microsoft.com/office/drawing/2014/main" id="{F3DC4B6F-FC59-865D-C8E5-D668B3E4176F}"/>
+              </a:ext>
+            </a:extLst>
+          </p:cNvPr>
+          <p:cNvPicPr>
+            <a:picLocks noChangeAspect="1"/>
+          </p:cNvPicPr>
+          <p:nvPr/>
+        </p:nvPicPr>
+        <p:blipFill>
+          <a:blip r:embed="rId2"/>
+          <a:stretch>
+            <a:fillRect/>
+          </a:stretch>
+        </p:blipFill>
+        <p:spPr>
+          <a:xfrm>
+            <a:off x="2060819" y="1469372"/>
+            <a:ext cx="7772400" cy="4880567"/>
+          </a:xfrm>
+          <a:prstGeom prst="rect">
+            <a:avLst/>
+          </a:prstGeom>
+        </p:spPr>
+      </p:pic>
     </p:spTree>
     <p:extLst>
       <p:ext uri="{BB962C8B-B14F-4D97-AF65-F5344CB8AC3E}">
-        <p14:creationId xmlns:p14="http://schemas.microsoft.com/office/powerpoint/2010/main" val="505740524"/>
+        <p14:creationId xmlns:p14="http://schemas.microsoft.com/office/powerpoint/2010/main" val="2342299272"/>
       </p:ext>
     </p:extLst>
   </p:cSld>
@@ -4147,7 +4441,7 @@
           <p:cNvPr id="2" name="Title 1">
             <a:extLst>
               <a:ext uri="{FF2B5EF4-FFF2-40B4-BE49-F238E27FC236}">
-                <a16:creationId xmlns:a16="http://schemas.microsoft.com/office/drawing/2014/main" id="{028621CC-814A-D7A9-4BBC-27FE0D235955}"/>
+                <a16:creationId xmlns:a16="http://schemas.microsoft.com/office/drawing/2014/main" id="{FB2E32BB-25E9-27ED-B610-6A5E47A250EA}"/>
               </a:ext>
             </a:extLst>
           </p:cNvPr>
@@ -4165,40 +4459,237 @@
           <a:p>
             <a:r>
               <a:rPr lang="en-US" dirty="0"/>
-              <a:t>Where PINNs Have the Edge?</a:t>
-            </a:r>
-          </a:p>
-        </p:txBody>
-      </p:sp>
-      <p:sp>
-        <p:nvSpPr>
-          <p:cNvPr id="3" name="Content Placeholder 2">
-            <a:extLst>
-              <a:ext uri="{FF2B5EF4-FFF2-40B4-BE49-F238E27FC236}">
-                <a16:creationId xmlns:a16="http://schemas.microsoft.com/office/drawing/2014/main" id="{D76CBFE0-BFB3-7819-271F-24A0845F1D80}"/>
-              </a:ext>
-            </a:extLst>
-          </p:cNvPr>
-          <p:cNvSpPr>
-            <a:spLocks noGrp="1"/>
-          </p:cNvSpPr>
+              <a:t>Strengths and Limitations</a:t>
+            </a:r>
+          </a:p>
+        </p:txBody>
+      </p:sp>
+      <p:graphicFrame>
+        <p:nvGraphicFramePr>
+          <p:cNvPr id="4" name="Content Placeholder 4">
+            <a:extLst>
+              <a:ext uri="{FF2B5EF4-FFF2-40B4-BE49-F238E27FC236}">
+                <a16:creationId xmlns:a16="http://schemas.microsoft.com/office/drawing/2014/main" id="{289D9027-370F-CEA9-5A2F-F9E253B0E594}"/>
+              </a:ext>
+            </a:extLst>
+          </p:cNvPr>
+          <p:cNvGraphicFramePr>
+            <a:graphicFrameLocks noGrp="1"/>
+          </p:cNvGraphicFramePr>
           <p:nvPr>
             <p:ph idx="1"/>
-          </p:nvPr>
-        </p:nvSpPr>
-        <p:spPr/>
-        <p:txBody>
-          <a:bodyPr/>
-          <a:lstStyle/>
-          <a:p>
-            <a:endParaRPr lang="en-US"/>
-          </a:p>
-        </p:txBody>
-      </p:sp>
+            <p:extLst>
+              <p:ext uri="{D42A27DB-BD31-4B8C-83A1-F6EECF244321}">
+                <p14:modId xmlns:p14="http://schemas.microsoft.com/office/powerpoint/2010/main" val="3799072585"/>
+              </p:ext>
+            </p:extLst>
+          </p:nvPr>
+        </p:nvGraphicFramePr>
+        <p:xfrm>
+          <a:off x="539179" y="4745927"/>
+          <a:ext cx="10891836" cy="1828800"/>
+        </p:xfrm>
+        <a:graphic>
+          <a:graphicData uri="http://schemas.openxmlformats.org/drawingml/2006/table">
+            <a:tbl>
+              <a:tblPr firstRow="1" bandRow="1">
+                <a:tableStyleId>{5C22544A-7EE6-4342-B048-85BDC9FD1C3A}</a:tableStyleId>
+              </a:tblPr>
+              <a:tblGrid>
+                <a:gridCol w="5445918">
+                  <a:extLst>
+                    <a:ext uri="{9D8B030D-6E8A-4147-A177-3AD203B41FA5}">
+                      <a16:colId xmlns:a16="http://schemas.microsoft.com/office/drawing/2014/main" val="1905779268"/>
+                    </a:ext>
+                  </a:extLst>
+                </a:gridCol>
+                <a:gridCol w="5445918">
+                  <a:extLst>
+                    <a:ext uri="{9D8B030D-6E8A-4147-A177-3AD203B41FA5}">
+                      <a16:colId xmlns:a16="http://schemas.microsoft.com/office/drawing/2014/main" val="3756693606"/>
+                    </a:ext>
+                  </a:extLst>
+                </a:gridCol>
+              </a:tblGrid>
+              <a:tr h="184666">
+                <a:tc>
+                  <a:txBody>
+                    <a:bodyPr/>
+                    <a:lstStyle/>
+                    <a:p>
+                      <a:r>
+                        <a:rPr lang="en-US" dirty="0" err="1"/>
+                        <a:t>openFoam</a:t>
+                      </a:r>
+                      <a:endParaRPr lang="en-US" dirty="0"/>
+                    </a:p>
+                  </a:txBody>
+                  <a:tcPr/>
+                </a:tc>
+                <a:tc>
+                  <a:txBody>
+                    <a:bodyPr/>
+                    <a:lstStyle/>
+                    <a:p>
+                      <a:r>
+                        <a:rPr lang="en-US" dirty="0"/>
+                        <a:t>Pinn</a:t>
+                      </a:r>
+                    </a:p>
+                  </a:txBody>
+                  <a:tcPr/>
+                </a:tc>
+                <a:extLst>
+                  <a:ext uri="{0D108BD9-81ED-4DB2-BD59-A6C34878D82A}">
+                    <a16:rowId xmlns:a16="http://schemas.microsoft.com/office/drawing/2014/main" val="3005336221"/>
+                  </a:ext>
+                </a:extLst>
+              </a:tr>
+              <a:tr h="184666">
+                <a:tc>
+                  <a:txBody>
+                    <a:bodyPr/>
+                    <a:lstStyle/>
+                    <a:p>
+                      <a:r>
+                        <a:rPr lang="en-US" dirty="0"/>
+                        <a:t>Mesh</a:t>
+                      </a:r>
+                    </a:p>
+                  </a:txBody>
+                  <a:tcPr/>
+                </a:tc>
+                <a:tc>
+                  <a:txBody>
+                    <a:bodyPr/>
+                    <a:lstStyle/>
+                    <a:p>
+                      <a:r>
+                        <a:rPr lang="en-US" dirty="0"/>
+                        <a:t>Collocation points</a:t>
+                      </a:r>
+                    </a:p>
+                  </a:txBody>
+                  <a:tcPr/>
+                </a:tc>
+                <a:extLst>
+                  <a:ext uri="{0D108BD9-81ED-4DB2-BD59-A6C34878D82A}">
+                    <a16:rowId xmlns:a16="http://schemas.microsoft.com/office/drawing/2014/main" val="152984949"/>
+                  </a:ext>
+                </a:extLst>
+              </a:tr>
+              <a:tr h="184666">
+                <a:tc>
+                  <a:txBody>
+                    <a:bodyPr/>
+                    <a:lstStyle/>
+                    <a:p>
+                      <a:r>
+                        <a:rPr lang="en-US" dirty="0"/>
+                        <a:t>FVM </a:t>
+                      </a:r>
+                      <a:r>
+                        <a:rPr lang="en-US" dirty="0" err="1"/>
+                        <a:t>discretizatrion</a:t>
+                      </a:r>
+                      <a:endParaRPr lang="en-US" dirty="0"/>
+                    </a:p>
+                  </a:txBody>
+                  <a:tcPr/>
+                </a:tc>
+                <a:tc>
+                  <a:txBody>
+                    <a:bodyPr/>
+                    <a:lstStyle/>
+                    <a:p>
+                      <a:r>
+                        <a:rPr lang="en-US" dirty="0"/>
+                        <a:t>Automatic differentiation via JAX</a:t>
+                      </a:r>
+                    </a:p>
+                  </a:txBody>
+                  <a:tcPr/>
+                </a:tc>
+                <a:extLst>
+                  <a:ext uri="{0D108BD9-81ED-4DB2-BD59-A6C34878D82A}">
+                    <a16:rowId xmlns:a16="http://schemas.microsoft.com/office/drawing/2014/main" val="86595439"/>
+                  </a:ext>
+                </a:extLst>
+              </a:tr>
+              <a:tr h="184666">
+                <a:tc>
+                  <a:txBody>
+                    <a:bodyPr/>
+                    <a:lstStyle/>
+                    <a:p>
+                      <a:r>
+                        <a:rPr lang="en-US" dirty="0"/>
+                        <a:t>PISO pressure-velocity coupling</a:t>
+                      </a:r>
+                    </a:p>
+                  </a:txBody>
+                  <a:tcPr/>
+                </a:tc>
+                <a:tc>
+                  <a:txBody>
+                    <a:bodyPr/>
+                    <a:lstStyle/>
+                    <a:p>
+                      <a:r>
+                        <a:rPr lang="en-US" dirty="0"/>
+                        <a:t>continuity is enforced through loss function</a:t>
+                      </a:r>
+                    </a:p>
+                  </a:txBody>
+                  <a:tcPr/>
+                </a:tc>
+                <a:extLst>
+                  <a:ext uri="{0D108BD9-81ED-4DB2-BD59-A6C34878D82A}">
+                    <a16:rowId xmlns:a16="http://schemas.microsoft.com/office/drawing/2014/main" val="1554622976"/>
+                  </a:ext>
+                </a:extLst>
+              </a:tr>
+              <a:tr h="184666">
+                <a:tc>
+                  <a:txBody>
+                    <a:bodyPr/>
+                    <a:lstStyle/>
+                    <a:p>
+                      <a:r>
+                        <a:rPr lang="en-US" dirty="0"/>
+                        <a:t>Linear solver per timestep</a:t>
+                      </a:r>
+                    </a:p>
+                  </a:txBody>
+                  <a:tcPr/>
+                </a:tc>
+                <a:tc>
+                  <a:txBody>
+                    <a:bodyPr/>
+                    <a:lstStyle/>
+                    <a:p>
+                      <a:r>
+                        <a:rPr lang="en-US" dirty="0"/>
+                        <a:t>Gradient descent over all time  </a:t>
+                      </a:r>
+                    </a:p>
+                  </a:txBody>
+                  <a:tcPr/>
+                </a:tc>
+                <a:extLst>
+                  <a:ext uri="{0D108BD9-81ED-4DB2-BD59-A6C34878D82A}">
+                    <a16:rowId xmlns:a16="http://schemas.microsoft.com/office/drawing/2014/main" val="478575766"/>
+                  </a:ext>
+                </a:extLst>
+              </a:tr>
+            </a:tbl>
+          </a:graphicData>
+        </a:graphic>
+      </p:graphicFrame>
     </p:spTree>
     <p:extLst>
       <p:ext uri="{BB962C8B-B14F-4D97-AF65-F5344CB8AC3E}">
-        <p14:creationId xmlns:p14="http://schemas.microsoft.com/office/powerpoint/2010/main" val="1861428453"/>
+        <p14:creationId xmlns:p14="http://schemas.microsoft.com/office/powerpoint/2010/main" val="505740524"/>
       </p:ext>
     </p:extLst>
   </p:cSld>
@@ -4230,6 +4721,124 @@
           <p:cNvPr id="2" name="Title 1">
             <a:extLst>
               <a:ext uri="{FF2B5EF4-FFF2-40B4-BE49-F238E27FC236}">
+                <a16:creationId xmlns:a16="http://schemas.microsoft.com/office/drawing/2014/main" id="{028621CC-814A-D7A9-4BBC-27FE0D235955}"/>
+              </a:ext>
+            </a:extLst>
+          </p:cNvPr>
+          <p:cNvSpPr>
+            <a:spLocks noGrp="1"/>
+          </p:cNvSpPr>
+          <p:nvPr>
+            <p:ph type="title"/>
+          </p:nvPr>
+        </p:nvSpPr>
+        <p:spPr/>
+        <p:txBody>
+          <a:bodyPr/>
+          <a:lstStyle/>
+          <a:p>
+            <a:r>
+              <a:rPr lang="en-US" dirty="0"/>
+              <a:t>Where PINNs Have the Edge?</a:t>
+            </a:r>
+          </a:p>
+        </p:txBody>
+      </p:sp>
+      <p:sp>
+        <p:nvSpPr>
+          <p:cNvPr id="3" name="Content Placeholder 2">
+            <a:extLst>
+              <a:ext uri="{FF2B5EF4-FFF2-40B4-BE49-F238E27FC236}">
+                <a16:creationId xmlns:a16="http://schemas.microsoft.com/office/drawing/2014/main" id="{D76CBFE0-BFB3-7819-271F-24A0845F1D80}"/>
+              </a:ext>
+            </a:extLst>
+          </p:cNvPr>
+          <p:cNvSpPr>
+            <a:spLocks noGrp="1"/>
+          </p:cNvSpPr>
+          <p:nvPr>
+            <p:ph idx="1"/>
+          </p:nvPr>
+        </p:nvSpPr>
+        <p:spPr/>
+        <p:txBody>
+          <a:bodyPr/>
+          <a:lstStyle/>
+          <a:p>
+            <a:endParaRPr lang="en-US"/>
+          </a:p>
+        </p:txBody>
+      </p:sp>
+      <p:sp>
+        <p:nvSpPr>
+          <p:cNvPr id="4" name="TextBox 3">
+            <a:extLst>
+              <a:ext uri="{FF2B5EF4-FFF2-40B4-BE49-F238E27FC236}">
+                <a16:creationId xmlns:a16="http://schemas.microsoft.com/office/drawing/2014/main" id="{12FB0AE1-E1B2-DF18-6812-E362C1D6E170}"/>
+              </a:ext>
+            </a:extLst>
+          </p:cNvPr>
+          <p:cNvSpPr txBox="1"/>
+          <p:nvPr/>
+        </p:nvSpPr>
+        <p:spPr>
+          <a:xfrm>
+            <a:off x="1078992" y="2099549"/>
+            <a:ext cx="1882247" cy="369332"/>
+          </a:xfrm>
+          <a:prstGeom prst="rect">
+            <a:avLst/>
+          </a:prstGeom>
+          <a:noFill/>
+        </p:spPr>
+        <p:txBody>
+          <a:bodyPr wrap="none" rtlCol="0">
+            <a:spAutoFit/>
+          </a:bodyPr>
+          <a:lstStyle/>
+          <a:p>
+            <a:r>
+              <a:rPr lang="en-US" dirty="0"/>
+              <a:t>Inverse problem</a:t>
+            </a:r>
+          </a:p>
+        </p:txBody>
+      </p:sp>
+    </p:spTree>
+    <p:extLst>
+      <p:ext uri="{BB962C8B-B14F-4D97-AF65-F5344CB8AC3E}">
+        <p14:creationId xmlns:p14="http://schemas.microsoft.com/office/powerpoint/2010/main" val="1861428453"/>
+      </p:ext>
+    </p:extLst>
+  </p:cSld>
+  <p:clrMapOvr>
+    <a:masterClrMapping/>
+  </p:clrMapOvr>
+</p:sld>
+</file>
+
+<file path=ppt/slides/slide14.xml><?xml version="1.0" encoding="utf-8"?>
+<p:sld xmlns:a="http://schemas.openxmlformats.org/drawingml/2006/main" xmlns:r="http://schemas.openxmlformats.org/officeDocument/2006/relationships" xmlns:p="http://schemas.openxmlformats.org/presentationml/2006/main">
+  <p:cSld>
+    <p:spTree>
+      <p:nvGrpSpPr>
+        <p:cNvPr id="1" name=""/>
+        <p:cNvGrpSpPr/>
+        <p:nvPr/>
+      </p:nvGrpSpPr>
+      <p:grpSpPr>
+        <a:xfrm>
+          <a:off x="0" y="0"/>
+          <a:ext cx="0" cy="0"/>
+          <a:chOff x="0" y="0"/>
+          <a:chExt cx="0" cy="0"/>
+        </a:xfrm>
+      </p:grpSpPr>
+      <p:sp>
+        <p:nvSpPr>
+          <p:cNvPr id="2" name="Title 1">
+            <a:extLst>
+              <a:ext uri="{FF2B5EF4-FFF2-40B4-BE49-F238E27FC236}">
                 <a16:creationId xmlns:a16="http://schemas.microsoft.com/office/drawing/2014/main" id="{94E9AA2D-D8BC-9FBA-568C-9089539EAC82}"/>
               </a:ext>
             </a:extLst>
@@ -4248,7 +4857,7 @@
           <a:p>
             <a:r>
               <a:rPr lang="en-US" dirty="0"/>
-              <a:t>Collaboration Results</a:t>
+              <a:t>Conclusion</a:t>
             </a:r>
           </a:p>
         </p:txBody>
@@ -4282,6 +4891,89 @@
     <p:extLst>
       <p:ext uri="{BB962C8B-B14F-4D97-AF65-F5344CB8AC3E}">
         <p14:creationId xmlns:p14="http://schemas.microsoft.com/office/powerpoint/2010/main" val="120589493"/>
+      </p:ext>
+    </p:extLst>
+  </p:cSld>
+  <p:clrMapOvr>
+    <a:masterClrMapping/>
+  </p:clrMapOvr>
+</p:sld>
+</file>
+
+<file path=ppt/slides/slide15.xml><?xml version="1.0" encoding="utf-8"?>
+<p:sld xmlns:a="http://schemas.openxmlformats.org/drawingml/2006/main" xmlns:r="http://schemas.openxmlformats.org/officeDocument/2006/relationships" xmlns:p="http://schemas.openxmlformats.org/presentationml/2006/main">
+  <p:cSld>
+    <p:spTree>
+      <p:nvGrpSpPr>
+        <p:cNvPr id="1" name=""/>
+        <p:cNvGrpSpPr/>
+        <p:nvPr/>
+      </p:nvGrpSpPr>
+      <p:grpSpPr>
+        <a:xfrm>
+          <a:off x="0" y="0"/>
+          <a:ext cx="0" cy="0"/>
+          <a:chOff x="0" y="0"/>
+          <a:chExt cx="0" cy="0"/>
+        </a:xfrm>
+      </p:grpSpPr>
+      <p:sp>
+        <p:nvSpPr>
+          <p:cNvPr id="2" name="Title 1">
+            <a:extLst>
+              <a:ext uri="{FF2B5EF4-FFF2-40B4-BE49-F238E27FC236}">
+                <a16:creationId xmlns:a16="http://schemas.microsoft.com/office/drawing/2014/main" id="{4C034A3D-9B68-F4A9-8100-1A16FBBEB6BF}"/>
+              </a:ext>
+            </a:extLst>
+          </p:cNvPr>
+          <p:cNvSpPr>
+            <a:spLocks noGrp="1"/>
+          </p:cNvSpPr>
+          <p:nvPr>
+            <p:ph type="title"/>
+          </p:nvPr>
+        </p:nvSpPr>
+        <p:spPr/>
+        <p:txBody>
+          <a:bodyPr/>
+          <a:lstStyle/>
+          <a:p>
+            <a:r>
+              <a:rPr lang="en-US" dirty="0"/>
+              <a:t>References</a:t>
+            </a:r>
+          </a:p>
+        </p:txBody>
+      </p:sp>
+      <p:sp>
+        <p:nvSpPr>
+          <p:cNvPr id="3" name="Content Placeholder 2">
+            <a:extLst>
+              <a:ext uri="{FF2B5EF4-FFF2-40B4-BE49-F238E27FC236}">
+                <a16:creationId xmlns:a16="http://schemas.microsoft.com/office/drawing/2014/main" id="{77375454-CFF5-7FE0-0FD0-98EEF2DAAE17}"/>
+              </a:ext>
+            </a:extLst>
+          </p:cNvPr>
+          <p:cNvSpPr>
+            <a:spLocks noGrp="1"/>
+          </p:cNvSpPr>
+          <p:nvPr>
+            <p:ph idx="1"/>
+          </p:nvPr>
+        </p:nvSpPr>
+        <p:spPr/>
+        <p:txBody>
+          <a:bodyPr/>
+          <a:lstStyle/>
+          <a:p>
+            <a:endParaRPr lang="en-US"/>
+          </a:p>
+        </p:txBody>
+      </p:sp>
+    </p:spTree>
+    <p:extLst>
+      <p:ext uri="{BB962C8B-B14F-4D97-AF65-F5344CB8AC3E}">
+        <p14:creationId xmlns:p14="http://schemas.microsoft.com/office/powerpoint/2010/main" val="1690686654"/>
       </p:ext>
     </p:extLst>
   </p:cSld>
@@ -4313,6 +5005,89 @@
           <p:cNvPr id="2" name="Title 1">
             <a:extLst>
               <a:ext uri="{FF2B5EF4-FFF2-40B4-BE49-F238E27FC236}">
+                <a16:creationId xmlns:a16="http://schemas.microsoft.com/office/drawing/2014/main" id="{0546E100-0178-F2CD-97F0-B366FB7AE1E4}"/>
+              </a:ext>
+            </a:extLst>
+          </p:cNvPr>
+          <p:cNvSpPr>
+            <a:spLocks noGrp="1"/>
+          </p:cNvSpPr>
+          <p:nvPr>
+            <p:ph type="title"/>
+          </p:nvPr>
+        </p:nvSpPr>
+        <p:spPr/>
+        <p:txBody>
+          <a:bodyPr/>
+          <a:lstStyle/>
+          <a:p>
+            <a:r>
+              <a:rPr lang="en-US" dirty="0"/>
+              <a:t>Why PINNs?</a:t>
+            </a:r>
+          </a:p>
+        </p:txBody>
+      </p:sp>
+      <p:sp>
+        <p:nvSpPr>
+          <p:cNvPr id="3" name="Content Placeholder 2">
+            <a:extLst>
+              <a:ext uri="{FF2B5EF4-FFF2-40B4-BE49-F238E27FC236}">
+                <a16:creationId xmlns:a16="http://schemas.microsoft.com/office/drawing/2014/main" id="{3E10FCFF-EC2E-15EE-8815-E5894E1EE780}"/>
+              </a:ext>
+            </a:extLst>
+          </p:cNvPr>
+          <p:cNvSpPr>
+            <a:spLocks noGrp="1"/>
+          </p:cNvSpPr>
+          <p:nvPr>
+            <p:ph idx="1"/>
+          </p:nvPr>
+        </p:nvSpPr>
+        <p:spPr/>
+        <p:txBody>
+          <a:bodyPr/>
+          <a:lstStyle/>
+          <a:p>
+            <a:endParaRPr lang="en-US"/>
+          </a:p>
+        </p:txBody>
+      </p:sp>
+    </p:spTree>
+    <p:extLst>
+      <p:ext uri="{BB962C8B-B14F-4D97-AF65-F5344CB8AC3E}">
+        <p14:creationId xmlns:p14="http://schemas.microsoft.com/office/powerpoint/2010/main" val="2980458206"/>
+      </p:ext>
+    </p:extLst>
+  </p:cSld>
+  <p:clrMapOvr>
+    <a:masterClrMapping/>
+  </p:clrMapOvr>
+</p:sld>
+</file>
+
+<file path=ppt/slides/slide3.xml><?xml version="1.0" encoding="utf-8"?>
+<p:sld xmlns:a="http://schemas.openxmlformats.org/drawingml/2006/main" xmlns:r="http://schemas.openxmlformats.org/officeDocument/2006/relationships" xmlns:p="http://schemas.openxmlformats.org/presentationml/2006/main">
+  <p:cSld>
+    <p:spTree>
+      <p:nvGrpSpPr>
+        <p:cNvPr id="1" name=""/>
+        <p:cNvGrpSpPr/>
+        <p:nvPr/>
+      </p:nvGrpSpPr>
+      <p:grpSpPr>
+        <a:xfrm>
+          <a:off x="0" y="0"/>
+          <a:ext cx="0" cy="0"/>
+          <a:chOff x="0" y="0"/>
+          <a:chExt cx="0" cy="0"/>
+        </a:xfrm>
+      </p:grpSpPr>
+      <p:sp>
+        <p:nvSpPr>
+          <p:cNvPr id="2" name="Title 1">
+            <a:extLst>
+              <a:ext uri="{FF2B5EF4-FFF2-40B4-BE49-F238E27FC236}">
                 <a16:creationId xmlns:a16="http://schemas.microsoft.com/office/drawing/2014/main" id="{48FFA5AD-57F9-048D-4E4C-6A7F8C59FB06}"/>
               </a:ext>
             </a:extLst>
@@ -4336,8 +5111,8 @@
           </a:p>
         </p:txBody>
       </p:sp>
-      <mc:AlternateContent xmlns:mc="http://schemas.openxmlformats.org/markup-compatibility/2006">
-        <mc:Choice xmlns:a14="http://schemas.microsoft.com/office/drawing/2010/main" Requires="a14">
+      <mc:AlternateContent xmlns:mc="http://schemas.openxmlformats.org/markup-compatibility/2006" xmlns:a14="http://schemas.microsoft.com/office/drawing/2010/main">
+        <mc:Choice Requires="a14">
           <p:sp>
             <p:nvSpPr>
               <p:cNvPr id="3" name="Content Placeholder 2">
@@ -4605,7 +5380,7 @@
             </p:txBody>
           </p:sp>
         </mc:Choice>
-        <mc:Fallback>
+        <mc:Fallback xmlns="">
           <p:sp>
             <p:nvSpPr>
               <p:cNvPr id="3" name="Content Placeholder 2">
@@ -4658,7 +5433,7 @@
 </p:sld>
 </file>
 
-<file path=ppt/slides/slide3.xml><?xml version="1.0" encoding="utf-8"?>
+<file path=ppt/slides/slide4.xml><?xml version="1.0" encoding="utf-8"?>
 <p:sld xmlns:a="http://schemas.openxmlformats.org/drawingml/2006/main" xmlns:r="http://schemas.openxmlformats.org/officeDocument/2006/relationships" xmlns:p="http://schemas.openxmlformats.org/presentationml/2006/main">
   <p:cSld>
     <p:spTree>
@@ -4691,14 +5466,21 @@
             <p:ph type="title"/>
           </p:nvPr>
         </p:nvSpPr>
-        <p:spPr/>
-        <p:txBody>
-          <a:bodyPr/>
+        <p:spPr>
+          <a:xfrm>
+            <a:off x="457200" y="1621274"/>
+            <a:ext cx="3621024" cy="1271015"/>
+          </a:xfrm>
+        </p:spPr>
+        <p:txBody>
+          <a:bodyPr>
+            <a:normAutofit fontScale="90000"/>
+          </a:bodyPr>
           <a:lstStyle/>
           <a:p>
             <a:r>
               <a:rPr lang="en-US" dirty="0"/>
-              <a:t>The Problems</a:t>
+              <a:t>Test Cases Overview</a:t>
             </a:r>
           </a:p>
         </p:txBody>
@@ -4723,7 +5505,7 @@
             </p:nvSpPr>
             <p:spPr>
               <a:xfrm>
-                <a:off x="640079" y="3730752"/>
+                <a:off x="155882" y="4705373"/>
                 <a:ext cx="4759234" cy="2083671"/>
               </a:xfrm>
             </p:spPr>
@@ -4813,7 +5595,7 @@
                           <a:rPr lang="nb-NO" b="0" i="0" smtClean="0">
                             <a:latin typeface="Cambria Math" panose="02040503050406030204" pitchFamily="18" charset="0"/>
                           </a:rPr>
-                          <m:t>-</m:t>
+                          <m:t>−</m:t>
                         </m:r>
                         <m:r>
                           <m:rPr>
@@ -5279,6 +6061,9 @@
                     </m:sSup>
                   </m:oMath>
                 </a14:m>
+                <a:endParaRPr lang="nb-NO" b="0" i="1" dirty="0">
+                  <a:latin typeface="Cambria Math" panose="02040503050406030204" pitchFamily="18" charset="0"/>
+                </a:endParaRPr>
               </a:p>
               <a:p>
                 <a:pPr lvl="2"/>
@@ -5308,13 +6093,13 @@
             </p:nvSpPr>
             <p:spPr>
               <a:xfrm>
-                <a:off x="640079" y="3730752"/>
+                <a:off x="155882" y="4705373"/>
                 <a:ext cx="4759234" cy="2083671"/>
               </a:xfrm>
               <a:blipFill>
                 <a:blip r:embed="rId2"/>
                 <a:stretch>
-                  <a:fillRect l="-532"/>
+                  <a:fillRect l="-800"/>
                 </a:stretch>
               </a:blipFill>
             </p:spPr>
@@ -5347,8 +6132,8 @@
         </p:nvSpPr>
         <p:spPr>
           <a:xfrm>
-            <a:off x="5399313" y="3730752"/>
-            <a:ext cx="1681871" cy="369332"/>
+            <a:off x="8430259" y="4705373"/>
+            <a:ext cx="2488182" cy="369332"/>
           </a:xfrm>
           <a:prstGeom prst="rect">
             <a:avLst/>
@@ -5363,7 +6148,7 @@
           <a:p>
             <a:r>
               <a:rPr lang="en-US" dirty="0"/>
-              <a:t>Backward step</a:t>
+              <a:t>Backward-Facing Step</a:t>
             </a:r>
           </a:p>
         </p:txBody>
@@ -5382,7 +6167,7 @@
         </p:nvSpPr>
         <p:spPr>
           <a:xfrm>
-            <a:off x="8418443" y="3730752"/>
+            <a:off x="4915116" y="4705373"/>
             <a:ext cx="3339548" cy="369332"/>
           </a:xfrm>
           <a:prstGeom prst="rect">
@@ -5398,11 +6183,41 @@
           <a:p>
             <a:r>
               <a:rPr lang="en-US" dirty="0"/>
-              <a:t>Inverse problem</a:t>
-            </a:r>
-          </a:p>
-        </p:txBody>
-      </p:sp>
+              <a:t>Lid Driven Cavity</a:t>
+            </a:r>
+          </a:p>
+        </p:txBody>
+      </p:sp>
+      <p:pic>
+        <p:nvPicPr>
+          <p:cNvPr id="4" name="Picture 3">
+            <a:extLst>
+              <a:ext uri="{FF2B5EF4-FFF2-40B4-BE49-F238E27FC236}">
+                <a16:creationId xmlns:a16="http://schemas.microsoft.com/office/drawing/2014/main" id="{7288C9E2-D617-53AF-BDB8-5BBF749F7827}"/>
+              </a:ext>
+            </a:extLst>
+          </p:cNvPr>
+          <p:cNvPicPr>
+            <a:picLocks noChangeAspect="1"/>
+          </p:cNvPicPr>
+          <p:nvPr/>
+        </p:nvPicPr>
+        <p:blipFill>
+          <a:blip r:embed="rId3"/>
+          <a:stretch>
+            <a:fillRect/>
+          </a:stretch>
+        </p:blipFill>
+        <p:spPr>
+          <a:xfrm>
+            <a:off x="3434196" y="60221"/>
+            <a:ext cx="8510917" cy="4645152"/>
+          </a:xfrm>
+          <a:prstGeom prst="rect">
+            <a:avLst/>
+          </a:prstGeom>
+        </p:spPr>
+      </p:pic>
     </p:spTree>
     <p:extLst>
       <p:ext uri="{BB962C8B-B14F-4D97-AF65-F5344CB8AC3E}">
@@ -5416,7 +6231,7 @@
 </p:sld>
 </file>
 
-<file path=ppt/slides/slide4.xml><?xml version="1.0" encoding="utf-8"?>
+<file path=ppt/slides/slide5.xml><?xml version="1.0" encoding="utf-8"?>
 <p:sld xmlns:a="http://schemas.openxmlformats.org/drawingml/2006/main" xmlns:r="http://schemas.openxmlformats.org/officeDocument/2006/relationships" xmlns:p="http://schemas.openxmlformats.org/presentationml/2006/main">
   <p:cSld>
     <p:spTree>
@@ -5755,7 +6570,7 @@
             </p:nvSpPr>
             <p:spPr>
               <a:xfrm>
-                <a:off x="1461052" y="2763078"/>
+                <a:off x="1497628" y="2754140"/>
                 <a:ext cx="6167073" cy="923330"/>
               </a:xfrm>
               <a:prstGeom prst="rect">
@@ -5859,7 +6674,7 @@
             </p:nvSpPr>
             <p:spPr>
               <a:xfrm>
-                <a:off x="1461052" y="2763078"/>
+                <a:off x="1497628" y="2754140"/>
                 <a:ext cx="6167073" cy="923330"/>
               </a:xfrm>
               <a:prstGeom prst="rect">
@@ -5887,154 +6702,41 @@
           </p:sp>
         </mc:Fallback>
       </mc:AlternateContent>
-    </p:spTree>
-    <p:extLst>
-      <p:ext uri="{BB962C8B-B14F-4D97-AF65-F5344CB8AC3E}">
-        <p14:creationId xmlns:p14="http://schemas.microsoft.com/office/powerpoint/2010/main" val="1463697046"/>
-      </p:ext>
-    </p:extLst>
-  </p:cSld>
-  <p:clrMapOvr>
-    <a:masterClrMapping/>
-  </p:clrMapOvr>
-</p:sld>
-</file>
-
-<file path=ppt/slides/slide5.xml><?xml version="1.0" encoding="utf-8"?>
-<p:sld xmlns:a="http://schemas.openxmlformats.org/drawingml/2006/main" xmlns:r="http://schemas.openxmlformats.org/officeDocument/2006/relationships" xmlns:p="http://schemas.openxmlformats.org/presentationml/2006/main">
-  <p:cSld>
-    <p:spTree>
-      <p:nvGrpSpPr>
-        <p:cNvPr id="1" name="">
-          <a:extLst>
-            <a:ext uri="{FF2B5EF4-FFF2-40B4-BE49-F238E27FC236}">
-              <a16:creationId xmlns:a16="http://schemas.microsoft.com/office/drawing/2014/main" id="{A97B19B7-7DE3-B655-4D36-A9FBCDDC8E6E}"/>
-            </a:ext>
-          </a:extLst>
-        </p:cNvPr>
-        <p:cNvGrpSpPr/>
-        <p:nvPr/>
-      </p:nvGrpSpPr>
-      <p:grpSpPr>
-        <a:xfrm>
-          <a:off x="0" y="0"/>
-          <a:ext cx="0" cy="0"/>
-          <a:chOff x="0" y="0"/>
-          <a:chExt cx="0" cy="0"/>
-        </a:xfrm>
-      </p:grpSpPr>
-      <p:sp>
-        <p:nvSpPr>
-          <p:cNvPr id="2" name="Title 1">
-            <a:extLst>
-              <a:ext uri="{FF2B5EF4-FFF2-40B4-BE49-F238E27FC236}">
-                <a16:creationId xmlns:a16="http://schemas.microsoft.com/office/drawing/2014/main" id="{125108ED-23DF-3D9D-5F3A-DA6D469FA8A2}"/>
-              </a:ext>
-            </a:extLst>
-          </p:cNvPr>
-          <p:cNvSpPr>
-            <a:spLocks noGrp="1"/>
-          </p:cNvSpPr>
-          <p:nvPr>
-            <p:ph type="title"/>
-          </p:nvPr>
-        </p:nvSpPr>
-        <p:spPr/>
-        <p:txBody>
-          <a:bodyPr/>
-          <a:lstStyle/>
-          <a:p>
-            <a:r>
-              <a:rPr lang="en-US" dirty="0"/>
-              <a:t>Solver 1: </a:t>
-            </a:r>
-            <a:r>
-              <a:rPr lang="en-US" dirty="0" err="1"/>
-              <a:t>OpenFoam</a:t>
-            </a:r>
-            <a:endParaRPr lang="en-US" dirty="0"/>
-          </a:p>
-        </p:txBody>
-      </p:sp>
-      <p:sp>
-        <p:nvSpPr>
-          <p:cNvPr id="5" name="Rectangle 4">
-            <a:extLst>
-              <a:ext uri="{FF2B5EF4-FFF2-40B4-BE49-F238E27FC236}">
-                <a16:creationId xmlns:a16="http://schemas.microsoft.com/office/drawing/2014/main" id="{A9438689-6394-4F95-D9F4-3F2B28E36F7D}"/>
-              </a:ext>
-            </a:extLst>
-          </p:cNvPr>
-          <p:cNvSpPr/>
-          <p:nvPr/>
-        </p:nvSpPr>
-        <p:spPr>
-          <a:xfrm>
-            <a:off x="1301071" y="2034540"/>
-            <a:ext cx="10890929" cy="3556220"/>
-          </a:xfrm>
-          <a:prstGeom prst="rect">
-            <a:avLst/>
-          </a:prstGeom>
-          <a:solidFill>
-            <a:schemeClr val="tx2">
-              <a:lumMod val="25000"/>
-              <a:lumOff val="75000"/>
-            </a:schemeClr>
-          </a:solidFill>
-        </p:spPr>
-        <p:style>
-          <a:lnRef idx="2">
-            <a:schemeClr val="accent1">
-              <a:shade val="15000"/>
-            </a:schemeClr>
-          </a:lnRef>
-          <a:fillRef idx="1">
-            <a:schemeClr val="accent1"/>
-          </a:fillRef>
-          <a:effectRef idx="0">
-            <a:schemeClr val="accent1"/>
-          </a:effectRef>
-          <a:fontRef idx="minor">
-            <a:schemeClr val="lt1"/>
-          </a:fontRef>
-        </p:style>
-        <p:txBody>
-          <a:bodyPr rtlCol="0" anchor="ctr"/>
-          <a:lstStyle/>
-          <a:p>
-            <a:pPr algn="ctr"/>
-            <a:endParaRPr lang="en-US"/>
-          </a:p>
-        </p:txBody>
-      </p:sp>
       <mc:AlternateContent xmlns:mc="http://schemas.openxmlformats.org/markup-compatibility/2006">
         <mc:Choice xmlns:a14="http://schemas.microsoft.com/office/drawing/2010/main" Requires="a14">
           <p:sp>
             <p:nvSpPr>
-              <p:cNvPr id="3" name="Content Placeholder 2">
+              <p:cNvPr id="6" name="TextBox 5">
                 <a:extLst>
                   <a:ext uri="{FF2B5EF4-FFF2-40B4-BE49-F238E27FC236}">
-                    <a16:creationId xmlns:a16="http://schemas.microsoft.com/office/drawing/2014/main" id="{E87CEE18-CB53-4F89-4E5B-9A641D69B6EA}"/>
+                    <a16:creationId xmlns:a16="http://schemas.microsoft.com/office/drawing/2014/main" id="{88187DE0-1B83-2450-878A-A3A41A90E8E4}"/>
                   </a:ext>
                 </a:extLst>
               </p:cNvPr>
-              <p:cNvSpPr>
-                <a:spLocks noGrp="1"/>
-              </p:cNvSpPr>
-              <p:nvPr>
-                <p:ph idx="1"/>
-              </p:nvPr>
+              <p:cNvSpPr txBox="1"/>
+              <p:nvPr/>
             </p:nvSpPr>
             <p:spPr>
               <a:xfrm>
-                <a:off x="1301071" y="2715370"/>
-                <a:ext cx="10890928" cy="3566160"/>
+                <a:off x="5221224" y="1073829"/>
+                <a:ext cx="8700523" cy="2244140"/>
               </a:xfrm>
+              <a:prstGeom prst="rect">
+                <a:avLst/>
+              </a:prstGeom>
+              <a:noFill/>
             </p:spPr>
             <p:txBody>
-              <a:bodyPr/>
+              <a:bodyPr wrap="none" rtlCol="0">
+                <a:spAutoFit/>
+              </a:bodyPr>
               <a:lstStyle/>
+              <a:p>
+                <a:r>
+                  <a:rPr lang="en-US" dirty="0"/>
+                  <a:t>PISO ALGO</a:t>
+                </a:r>
+              </a:p>
               <a:p>
                 <a:r>
                   <a:rPr lang="en-US" dirty="0"/>
@@ -6045,14 +6747,14 @@
                     <m:sSup>
                       <m:sSupPr>
                         <m:ctrlPr>
-                          <a:rPr lang="nb-NO" b="0" i="1" smtClean="0">
+                          <a:rPr lang="nb-NO" i="1">
                             <a:latin typeface="Cambria Math" panose="02040503050406030204" pitchFamily="18" charset="0"/>
                           </a:rPr>
                         </m:ctrlPr>
                       </m:sSupPr>
                       <m:e>
                         <m:r>
-                          <a:rPr lang="nb-NO" b="0" i="1" smtClean="0">
+                          <a:rPr lang="nb-NO" i="1">
                             <a:latin typeface="Cambria Math" panose="02040503050406030204" pitchFamily="18" charset="0"/>
                           </a:rPr>
                           <m:t>𝑢</m:t>
@@ -6060,7 +6762,7 @@
                       </m:e>
                       <m:sup>
                         <m:r>
-                          <a:rPr lang="nb-NO" b="0" i="1" smtClean="0">
+                          <a:rPr lang="nb-NO" i="1">
                             <a:latin typeface="Cambria Math" panose="02040503050406030204" pitchFamily="18" charset="0"/>
                           </a:rPr>
                           <m:t>∗</m:t>
@@ -6085,13 +6787,13 @@
                       <m:rPr>
                         <m:sty m:val="p"/>
                       </m:rPr>
-                      <a:rPr lang="nb-NO" b="0" i="0" smtClean="0">
+                      <a:rPr lang="nb-NO">
                         <a:latin typeface="Cambria Math" panose="02040503050406030204" pitchFamily="18" charset="0"/>
                       </a:rPr>
                       <m:t>∇</m:t>
                     </m:r>
                     <m:r>
-                      <a:rPr lang="nb-NO" b="0" i="1" smtClean="0">
+                      <a:rPr lang="nb-NO" i="1">
                         <a:latin typeface="Cambria Math" panose="02040503050406030204" pitchFamily="18" charset="0"/>
                       </a:rPr>
                       <m:t>⋅</m:t>
@@ -6099,7 +6801,7 @@
                     <m:d>
                       <m:dPr>
                         <m:ctrlPr>
-                          <a:rPr lang="nb-NO" b="0" i="1" smtClean="0">
+                          <a:rPr lang="nb-NO" i="1">
                             <a:latin typeface="Cambria Math" panose="02040503050406030204" pitchFamily="18" charset="0"/>
                           </a:rPr>
                         </m:ctrlPr>
@@ -6108,7 +6810,7 @@
                         <m:d>
                           <m:dPr>
                             <m:ctrlPr>
-                              <a:rPr lang="nb-NO" b="0" i="1" smtClean="0">
+                              <a:rPr lang="nb-NO" i="1">
                                 <a:latin typeface="Cambria Math" panose="02040503050406030204" pitchFamily="18" charset="0"/>
                               </a:rPr>
                             </m:ctrlPr>
@@ -6117,14 +6819,14 @@
                             <m:f>
                               <m:fPr>
                                 <m:ctrlPr>
-                                  <a:rPr lang="nb-NO" b="0" i="1" smtClean="0">
+                                  <a:rPr lang="nb-NO" i="1">
                                     <a:latin typeface="Cambria Math" panose="02040503050406030204" pitchFamily="18" charset="0"/>
                                   </a:rPr>
                                 </m:ctrlPr>
                               </m:fPr>
                               <m:num>
                                 <m:r>
-                                  <a:rPr lang="nb-NO" b="0" i="1" smtClean="0">
+                                  <a:rPr lang="nb-NO" i="1">
                                     <a:latin typeface="Cambria Math" panose="02040503050406030204" pitchFamily="18" charset="0"/>
                                   </a:rPr>
                                   <m:t>1</m:t>
@@ -6132,7 +6834,7 @@
                               </m:num>
                               <m:den>
                                 <m:r>
-                                  <a:rPr lang="nb-NO" b="0" i="1" smtClean="0">
+                                  <a:rPr lang="nb-NO" i="1">
                                     <a:latin typeface="Cambria Math" panose="02040503050406030204" pitchFamily="18" charset="0"/>
                                   </a:rPr>
                                   <m:t>𝐴</m:t>
@@ -6145,13 +6847,13 @@
                           <m:rPr>
                             <m:sty m:val="p"/>
                           </m:rPr>
-                          <a:rPr lang="nb-NO" b="0" i="0" smtClean="0">
+                          <a:rPr lang="nb-NO">
                             <a:latin typeface="Cambria Math" panose="02040503050406030204" pitchFamily="18" charset="0"/>
                           </a:rPr>
                           <m:t>∇</m:t>
                         </m:r>
                         <m:r>
-                          <a:rPr lang="nb-NO" b="0" i="1" smtClean="0">
+                          <a:rPr lang="nb-NO" i="1">
                             <a:latin typeface="Cambria Math" panose="02040503050406030204" pitchFamily="18" charset="0"/>
                           </a:rPr>
                           <m:t>𝑝</m:t>
@@ -6159,7 +6861,7 @@
                       </m:e>
                     </m:d>
                     <m:r>
-                      <a:rPr lang="nb-NO" b="0" i="1" smtClean="0">
+                      <a:rPr lang="nb-NO" i="1">
                         <a:latin typeface="Cambria Math" panose="02040503050406030204" pitchFamily="18" charset="0"/>
                       </a:rPr>
                       <m:t>=</m:t>
@@ -6168,13 +6870,13 @@
                       <m:rPr>
                         <m:sty m:val="p"/>
                       </m:rPr>
-                      <a:rPr lang="nb-NO" b="0" i="0" smtClean="0">
+                      <a:rPr lang="nb-NO">
                         <a:latin typeface="Cambria Math" panose="02040503050406030204" pitchFamily="18" charset="0"/>
                       </a:rPr>
                       <m:t>∇</m:t>
                     </m:r>
                     <m:r>
-                      <a:rPr lang="nb-NO" b="0" i="1" smtClean="0">
+                      <a:rPr lang="nb-NO" i="1">
                         <a:latin typeface="Cambria Math" panose="02040503050406030204" pitchFamily="18" charset="0"/>
                       </a:rPr>
                       <m:t>⋅</m:t>
@@ -6182,7 +6884,7 @@
                     <m:d>
                       <m:dPr>
                         <m:ctrlPr>
-                          <a:rPr lang="nb-NO" b="0" i="1" smtClean="0">
+                          <a:rPr lang="nb-NO" i="1">
                             <a:latin typeface="Cambria Math" panose="02040503050406030204" pitchFamily="18" charset="0"/>
                           </a:rPr>
                         </m:ctrlPr>
@@ -6191,14 +6893,14 @@
                         <m:f>
                           <m:fPr>
                             <m:ctrlPr>
-                              <a:rPr lang="nb-NO" b="0" i="1" smtClean="0">
+                              <a:rPr lang="nb-NO" i="1">
                                 <a:latin typeface="Cambria Math" panose="02040503050406030204" pitchFamily="18" charset="0"/>
                               </a:rPr>
                             </m:ctrlPr>
                           </m:fPr>
                           <m:num>
                             <m:r>
-                              <a:rPr lang="nb-NO" b="0" i="1" smtClean="0">
+                              <a:rPr lang="nb-NO" i="1">
                                 <a:latin typeface="Cambria Math" panose="02040503050406030204" pitchFamily="18" charset="0"/>
                               </a:rPr>
                               <m:t>𝐻</m:t>
@@ -6206,7 +6908,7 @@
                           </m:num>
                           <m:den>
                             <m:r>
-                              <a:rPr lang="nb-NO" b="0" i="1" smtClean="0">
+                              <a:rPr lang="nb-NO" i="1">
                                 <a:latin typeface="Cambria Math" panose="02040503050406030204" pitchFamily="18" charset="0"/>
                               </a:rPr>
                               <m:t>𝐴</m:t>
@@ -6240,35 +6942,39 @@
                   <a:t>Requires CFL &lt; 1 (Explicit convection)</a:t>
                 </a:r>
               </a:p>
+              <a:p>
+                <a:endParaRPr lang="en-US" dirty="0"/>
+              </a:p>
             </p:txBody>
           </p:sp>
         </mc:Choice>
         <mc:Fallback>
           <p:sp>
             <p:nvSpPr>
-              <p:cNvPr id="3" name="Content Placeholder 2">
+              <p:cNvPr id="6" name="TextBox 5">
                 <a:extLst>
                   <a:ext uri="{FF2B5EF4-FFF2-40B4-BE49-F238E27FC236}">
-                    <a16:creationId xmlns:a16="http://schemas.microsoft.com/office/drawing/2014/main" id="{E87CEE18-CB53-4F89-4E5B-9A641D69B6EA}"/>
+                    <a16:creationId xmlns:a16="http://schemas.microsoft.com/office/drawing/2014/main" id="{88187DE0-1B83-2450-878A-A3A41A90E8E4}"/>
                   </a:ext>
                 </a:extLst>
               </p:cNvPr>
-              <p:cNvSpPr>
-                <a:spLocks noGrp="1" noRot="1" noChangeAspect="1" noMove="1" noResize="1" noEditPoints="1" noAdjustHandles="1" noChangeArrowheads="1" noChangeShapeType="1" noTextEdit="1"/>
+              <p:cNvSpPr txBox="1">
+                <a:spLocks noRot="1" noChangeAspect="1" noMove="1" noResize="1" noEditPoints="1" noAdjustHandles="1" noChangeArrowheads="1" noChangeShapeType="1" noTextEdit="1"/>
               </p:cNvSpPr>
-              <p:nvPr>
-                <p:ph idx="1"/>
-              </p:nvPr>
+              <p:nvPr/>
             </p:nvSpPr>
             <p:spPr>
               <a:xfrm>
-                <a:off x="1301071" y="2715370"/>
-                <a:ext cx="10890928" cy="3566160"/>
+                <a:off x="5221224" y="1073829"/>
+                <a:ext cx="8700523" cy="2244140"/>
               </a:xfrm>
+              <a:prstGeom prst="rect">
+                <a:avLst/>
+              </a:prstGeom>
               <a:blipFill>
-                <a:blip r:embed="rId2"/>
+                <a:blip r:embed="rId3"/>
                 <a:stretch>
-                  <a:fillRect l="-349"/>
+                  <a:fillRect l="-583" t="-1124"/>
                 </a:stretch>
               </a:blipFill>
             </p:spPr>
@@ -6287,64 +6993,10 @@
           </p:sp>
         </mc:Fallback>
       </mc:AlternateContent>
-      <p:sp>
-        <p:nvSpPr>
-          <p:cNvPr id="4" name="Title 1">
-            <a:extLst>
-              <a:ext uri="{FF2B5EF4-FFF2-40B4-BE49-F238E27FC236}">
-                <a16:creationId xmlns:a16="http://schemas.microsoft.com/office/drawing/2014/main" id="{6499EF5D-2E0E-041B-3F56-3021B7467160}"/>
-              </a:ext>
-            </a:extLst>
-          </p:cNvPr>
-          <p:cNvSpPr txBox="1">
-            <a:spLocks/>
-          </p:cNvSpPr>
-          <p:nvPr/>
-        </p:nvSpPr>
-        <p:spPr>
-          <a:xfrm>
-            <a:off x="1301071" y="1920241"/>
-            <a:ext cx="10890929" cy="1097280"/>
-          </a:xfrm>
-          <a:prstGeom prst="rect">
-            <a:avLst/>
-          </a:prstGeom>
-        </p:spPr>
-        <p:txBody>
-          <a:bodyPr vert="horz" lIns="91440" tIns="45720" rIns="91440" bIns="45720" rtlCol="0" anchor="t">
-            <a:normAutofit/>
-          </a:bodyPr>
-          <a:lstStyle>
-            <a:lvl1pPr algn="l" defTabSz="914400" rtl="0" eaLnBrk="1" latinLnBrk="0" hangingPunct="1">
-              <a:lnSpc>
-                <a:spcPct val="100000"/>
-              </a:lnSpc>
-              <a:spcBef>
-                <a:spcPct val="0"/>
-              </a:spcBef>
-              <a:buNone/>
-              <a:defRPr sz="4000" b="1" kern="1200">
-                <a:solidFill>
-                  <a:schemeClr val="tx1"/>
-                </a:solidFill>
-                <a:latin typeface="+mj-lt"/>
-                <a:ea typeface="+mj-ea"/>
-                <a:cs typeface="+mj-cs"/>
-              </a:defRPr>
-            </a:lvl1pPr>
-          </a:lstStyle>
-          <a:p>
-            <a:r>
-              <a:rPr lang="en-US" sz="3200" dirty="0"/>
-              <a:t>Piso Algorithm</a:t>
-            </a:r>
-          </a:p>
-        </p:txBody>
-      </p:sp>
     </p:spTree>
     <p:extLst>
       <p:ext uri="{BB962C8B-B14F-4D97-AF65-F5344CB8AC3E}">
-        <p14:creationId xmlns:p14="http://schemas.microsoft.com/office/powerpoint/2010/main" val="689377269"/>
+        <p14:creationId xmlns:p14="http://schemas.microsoft.com/office/powerpoint/2010/main" val="1463697046"/>
       </p:ext>
     </p:extLst>
   </p:cSld>
@@ -6399,228 +7051,6 @@
           </a:p>
         </p:txBody>
       </p:sp>
-      <p:graphicFrame>
-        <p:nvGraphicFramePr>
-          <p:cNvPr id="5" name="Content Placeholder 4">
-            <a:extLst>
-              <a:ext uri="{FF2B5EF4-FFF2-40B4-BE49-F238E27FC236}">
-                <a16:creationId xmlns:a16="http://schemas.microsoft.com/office/drawing/2014/main" id="{82477CFF-7FF1-01C9-5FC1-46938B5B843F}"/>
-              </a:ext>
-            </a:extLst>
-          </p:cNvPr>
-          <p:cNvGraphicFramePr>
-            <a:graphicFrameLocks noGrp="1"/>
-          </p:cNvGraphicFramePr>
-          <p:nvPr>
-            <p:ph idx="1"/>
-            <p:extLst>
-              <p:ext uri="{D42A27DB-BD31-4B8C-83A1-F6EECF244321}">
-                <p14:modId xmlns:p14="http://schemas.microsoft.com/office/powerpoint/2010/main" val="598151417"/>
-              </p:ext>
-            </p:extLst>
-          </p:nvPr>
-        </p:nvGraphicFramePr>
-        <p:xfrm>
-          <a:off x="639172" y="4671185"/>
-          <a:ext cx="10891836" cy="1854200"/>
-        </p:xfrm>
-        <a:graphic>
-          <a:graphicData uri="http://schemas.openxmlformats.org/drawingml/2006/table">
-            <a:tbl>
-              <a:tblPr firstRow="1" bandRow="1">
-                <a:tableStyleId>{5C22544A-7EE6-4342-B048-85BDC9FD1C3A}</a:tableStyleId>
-              </a:tblPr>
-              <a:tblGrid>
-                <a:gridCol w="5445918">
-                  <a:extLst>
-                    <a:ext uri="{9D8B030D-6E8A-4147-A177-3AD203B41FA5}">
-                      <a16:colId xmlns:a16="http://schemas.microsoft.com/office/drawing/2014/main" val="1905779268"/>
-                    </a:ext>
-                  </a:extLst>
-                </a:gridCol>
-                <a:gridCol w="5445918">
-                  <a:extLst>
-                    <a:ext uri="{9D8B030D-6E8A-4147-A177-3AD203B41FA5}">
-                      <a16:colId xmlns:a16="http://schemas.microsoft.com/office/drawing/2014/main" val="3756693606"/>
-                    </a:ext>
-                  </a:extLst>
-                </a:gridCol>
-              </a:tblGrid>
-              <a:tr h="370840">
-                <a:tc>
-                  <a:txBody>
-                    <a:bodyPr/>
-                    <a:lstStyle/>
-                    <a:p>
-                      <a:r>
-                        <a:rPr lang="en-US" dirty="0" err="1"/>
-                        <a:t>openFoam</a:t>
-                      </a:r>
-                      <a:endParaRPr lang="en-US" dirty="0"/>
-                    </a:p>
-                  </a:txBody>
-                  <a:tcPr/>
-                </a:tc>
-                <a:tc>
-                  <a:txBody>
-                    <a:bodyPr/>
-                    <a:lstStyle/>
-                    <a:p>
-                      <a:r>
-                        <a:rPr lang="en-US" dirty="0"/>
-                        <a:t>Pinn</a:t>
-                      </a:r>
-                    </a:p>
-                  </a:txBody>
-                  <a:tcPr/>
-                </a:tc>
-                <a:extLst>
-                  <a:ext uri="{0D108BD9-81ED-4DB2-BD59-A6C34878D82A}">
-                    <a16:rowId xmlns:a16="http://schemas.microsoft.com/office/drawing/2014/main" val="3005336221"/>
-                  </a:ext>
-                </a:extLst>
-              </a:tr>
-              <a:tr h="370840">
-                <a:tc>
-                  <a:txBody>
-                    <a:bodyPr/>
-                    <a:lstStyle/>
-                    <a:p>
-                      <a:r>
-                        <a:rPr lang="en-US" dirty="0"/>
-                        <a:t>Mesh</a:t>
-                      </a:r>
-                    </a:p>
-                  </a:txBody>
-                  <a:tcPr/>
-                </a:tc>
-                <a:tc>
-                  <a:txBody>
-                    <a:bodyPr/>
-                    <a:lstStyle/>
-                    <a:p>
-                      <a:r>
-                        <a:rPr lang="en-US" dirty="0"/>
-                        <a:t>Collocation points</a:t>
-                      </a:r>
-                    </a:p>
-                  </a:txBody>
-                  <a:tcPr/>
-                </a:tc>
-                <a:extLst>
-                  <a:ext uri="{0D108BD9-81ED-4DB2-BD59-A6C34878D82A}">
-                    <a16:rowId xmlns:a16="http://schemas.microsoft.com/office/drawing/2014/main" val="152984949"/>
-                  </a:ext>
-                </a:extLst>
-              </a:tr>
-              <a:tr h="370840">
-                <a:tc>
-                  <a:txBody>
-                    <a:bodyPr/>
-                    <a:lstStyle/>
-                    <a:p>
-                      <a:r>
-                        <a:rPr lang="en-US" dirty="0"/>
-                        <a:t>FVM </a:t>
-                      </a:r>
-                      <a:r>
-                        <a:rPr lang="en-US" dirty="0" err="1"/>
-                        <a:t>discretizatrion</a:t>
-                      </a:r>
-                      <a:endParaRPr lang="en-US" dirty="0"/>
-                    </a:p>
-                  </a:txBody>
-                  <a:tcPr/>
-                </a:tc>
-                <a:tc>
-                  <a:txBody>
-                    <a:bodyPr/>
-                    <a:lstStyle/>
-                    <a:p>
-                      <a:r>
-                        <a:rPr lang="en-US" dirty="0"/>
-                        <a:t>Automatic differentiation via JAX</a:t>
-                      </a:r>
-                    </a:p>
-                  </a:txBody>
-                  <a:tcPr/>
-                </a:tc>
-                <a:extLst>
-                  <a:ext uri="{0D108BD9-81ED-4DB2-BD59-A6C34878D82A}">
-                    <a16:rowId xmlns:a16="http://schemas.microsoft.com/office/drawing/2014/main" val="86595439"/>
-                  </a:ext>
-                </a:extLst>
-              </a:tr>
-              <a:tr h="370840">
-                <a:tc>
-                  <a:txBody>
-                    <a:bodyPr/>
-                    <a:lstStyle/>
-                    <a:p>
-                      <a:r>
-                        <a:rPr lang="en-US" dirty="0"/>
-                        <a:t>PISO pressure-velocity coupling</a:t>
-                      </a:r>
-                    </a:p>
-                  </a:txBody>
-                  <a:tcPr/>
-                </a:tc>
-                <a:tc>
-                  <a:txBody>
-                    <a:bodyPr/>
-                    <a:lstStyle/>
-                    <a:p>
-                      <a:r>
-                        <a:rPr lang="en-US" dirty="0"/>
-                        <a:t>continuity is enforced through loss function</a:t>
-                      </a:r>
-                    </a:p>
-                  </a:txBody>
-                  <a:tcPr/>
-                </a:tc>
-                <a:extLst>
-                  <a:ext uri="{0D108BD9-81ED-4DB2-BD59-A6C34878D82A}">
-                    <a16:rowId xmlns:a16="http://schemas.microsoft.com/office/drawing/2014/main" val="1554622976"/>
-                  </a:ext>
-                </a:extLst>
-              </a:tr>
-              <a:tr h="370840">
-                <a:tc>
-                  <a:txBody>
-                    <a:bodyPr/>
-                    <a:lstStyle/>
-                    <a:p>
-                      <a:r>
-                        <a:rPr lang="en-US" dirty="0"/>
-                        <a:t>Linear solver per timestep</a:t>
-                      </a:r>
-                    </a:p>
-                  </a:txBody>
-                  <a:tcPr/>
-                </a:tc>
-                <a:tc>
-                  <a:txBody>
-                    <a:bodyPr/>
-                    <a:lstStyle/>
-                    <a:p>
-                      <a:r>
-                        <a:rPr lang="en-US" dirty="0"/>
-                        <a:t>Gradient descent over all time  </a:t>
-                      </a:r>
-                    </a:p>
-                  </a:txBody>
-                  <a:tcPr/>
-                </a:tc>
-                <a:extLst>
-                  <a:ext uri="{0D108BD9-81ED-4DB2-BD59-A6C34878D82A}">
-                    <a16:rowId xmlns:a16="http://schemas.microsoft.com/office/drawing/2014/main" val="478575766"/>
-                  </a:ext>
-                </a:extLst>
-              </a:tr>
-            </a:tbl>
-          </a:graphicData>
-        </a:graphic>
-      </p:graphicFrame>
       <p:sp>
         <p:nvSpPr>
           <p:cNvPr id="4" name="Title 1">
@@ -6728,6 +7158,31 @@
               <a:buChar char="•"/>
             </a:pPr>
             <a:endParaRPr lang="en-US" dirty="0"/>
+          </a:p>
+        </p:txBody>
+      </p:sp>
+      <p:sp>
+        <p:nvSpPr>
+          <p:cNvPr id="7" name="Content Placeholder 6">
+            <a:extLst>
+              <a:ext uri="{FF2B5EF4-FFF2-40B4-BE49-F238E27FC236}">
+                <a16:creationId xmlns:a16="http://schemas.microsoft.com/office/drawing/2014/main" id="{72DD03BC-9155-251C-1667-6DD9FE76B50A}"/>
+              </a:ext>
+            </a:extLst>
+          </p:cNvPr>
+          <p:cNvSpPr>
+            <a:spLocks noGrp="1"/>
+          </p:cNvSpPr>
+          <p:nvPr>
+            <p:ph idx="1"/>
+          </p:nvPr>
+        </p:nvSpPr>
+        <p:spPr/>
+        <p:txBody>
+          <a:bodyPr/>
+          <a:lstStyle/>
+          <a:p>
+            <a:endParaRPr lang="en-US"/>
           </a:p>
         </p:txBody>
       </p:sp>
@@ -6791,7 +7246,7 @@
             <a:pPr lvl="1"/>
             <a:r>
               <a:rPr lang="en-US" dirty="0"/>
-              <a:t>4 hidden layers with 128 neurons each using tanh activation ()</a:t>
+              <a:t>4 hidden layers with 128 neurons each using tanh activation</a:t>
             </a:r>
           </a:p>
         </p:txBody>
@@ -6878,6 +7333,36 @@
           </a:p>
         </p:txBody>
       </p:sp>
+      <p:pic>
+        <p:nvPicPr>
+          <p:cNvPr id="2" name="Picture 1">
+            <a:extLst>
+              <a:ext uri="{FF2B5EF4-FFF2-40B4-BE49-F238E27FC236}">
+                <a16:creationId xmlns:a16="http://schemas.microsoft.com/office/drawing/2014/main" id="{F390B86D-0B39-822D-3DBB-69E0CC860331}"/>
+              </a:ext>
+            </a:extLst>
+          </p:cNvPr>
+          <p:cNvPicPr>
+            <a:picLocks noChangeAspect="1"/>
+          </p:cNvPicPr>
+          <p:nvPr/>
+        </p:nvPicPr>
+        <p:blipFill>
+          <a:blip r:embed="rId2"/>
+          <a:stretch>
+            <a:fillRect/>
+          </a:stretch>
+        </p:blipFill>
+        <p:spPr>
+          <a:xfrm>
+            <a:off x="8439531" y="2468881"/>
+            <a:ext cx="3752469" cy="3358033"/>
+          </a:xfrm>
+          <a:prstGeom prst="rect">
+            <a:avLst/>
+          </a:prstGeom>
+        </p:spPr>
+      </p:pic>
     </p:spTree>
     <p:extLst>
       <p:ext uri="{BB962C8B-B14F-4D97-AF65-F5344CB8AC3E}">
@@ -7058,7 +7543,7 @@
         </p:nvSpPr>
         <p:spPr>
           <a:xfrm>
-            <a:off x="512378" y="3258434"/>
+            <a:off x="338642" y="1765601"/>
             <a:ext cx="3509233" cy="3326797"/>
           </a:xfrm>
         </p:spPr>
@@ -7197,42 +7682,6 @@
           </a:prstGeom>
         </p:spPr>
       </p:pic>
-      <p:sp>
-        <p:nvSpPr>
-          <p:cNvPr id="12" name="TextBox 11">
-            <a:extLst>
-              <a:ext uri="{FF2B5EF4-FFF2-40B4-BE49-F238E27FC236}">
-                <a16:creationId xmlns:a16="http://schemas.microsoft.com/office/drawing/2014/main" id="{D4751A91-EA69-EAC6-6D2B-F6542B21CAD9}"/>
-              </a:ext>
-            </a:extLst>
-          </p:cNvPr>
-          <p:cNvSpPr txBox="1"/>
-          <p:nvPr/>
-        </p:nvSpPr>
-        <p:spPr>
-          <a:xfrm>
-            <a:off x="435179" y="1790775"/>
-            <a:ext cx="2513830" cy="707886"/>
-          </a:xfrm>
-          <a:prstGeom prst="rect">
-            <a:avLst/>
-          </a:prstGeom>
-          <a:noFill/>
-        </p:spPr>
-        <p:txBody>
-          <a:bodyPr wrap="none" rtlCol="0">
-            <a:spAutoFit/>
-          </a:bodyPr>
-          <a:lstStyle/>
-          <a:p>
-            <a:r>
-              <a:rPr lang="en-US" sz="4000" b="1" dirty="0" err="1"/>
-              <a:t>openFoam</a:t>
-            </a:r>
-            <a:endParaRPr lang="en-US" sz="4000" b="1" dirty="0"/>
-          </a:p>
-        </p:txBody>
-      </p:sp>
     </p:spTree>
     <p:extLst>
       <p:ext uri="{BB962C8B-B14F-4D97-AF65-F5344CB8AC3E}">
@@ -7459,23 +7908,9 @@
 <file path=ppt/slides/slide9.xml><?xml version="1.0" encoding="utf-8"?>
 <p:sld xmlns:a="http://schemas.openxmlformats.org/drawingml/2006/main" xmlns:r="http://schemas.openxmlformats.org/officeDocument/2006/relationships" xmlns:p="http://schemas.openxmlformats.org/presentationml/2006/main">
   <p:cSld>
-    <p:bg>
-      <p:bgPr>
-        <a:solidFill>
-          <a:schemeClr val="bg1"/>
-        </a:solidFill>
-        <a:effectLst/>
-      </p:bgPr>
-    </p:bg>
     <p:spTree>
       <p:nvGrpSpPr>
-        <p:cNvPr id="1" name="">
-          <a:extLst>
-            <a:ext uri="{FF2B5EF4-FFF2-40B4-BE49-F238E27FC236}">
-              <a16:creationId xmlns:a16="http://schemas.microsoft.com/office/drawing/2014/main" id="{09EFF7D0-1DA7-330C-BAB5-59A69546054E}"/>
-            </a:ext>
-          </a:extLst>
-        </p:cNvPr>
+        <p:cNvPr id="1" name=""/>
         <p:cNvGrpSpPr/>
         <p:nvPr/>
       </p:nvGrpSpPr>
@@ -7487,229 +7922,43 @@
           <a:chExt cx="0" cy="0"/>
         </a:xfrm>
       </p:grpSpPr>
-      <p:cxnSp>
-        <p:nvCxnSpPr>
-          <p:cNvPr id="16" name="Straight Connector 15">
-            <a:extLst>
-              <a:ext uri="{FF2B5EF4-FFF2-40B4-BE49-F238E27FC236}">
-                <a16:creationId xmlns:a16="http://schemas.microsoft.com/office/drawing/2014/main" id="{AD8BCB5B-5555-6CCF-225D-99BDF2A76D2F}"/>
-              </a:ext>
-              <a:ext uri="{C183D7F6-B498-43B3-948B-1728B52AA6E4}">
-                <adec:decorative xmlns:adec="http://schemas.microsoft.com/office/drawing/2017/decorative" val="1"/>
-              </a:ext>
-            </a:extLst>
-          </p:cNvPr>
-          <p:cNvCxnSpPr>
-            <a:cxnSpLocks noGrp="1" noRot="1" noChangeAspect="1" noMove="1" noResize="1" noEditPoints="1" noAdjustHandles="1" noChangeArrowheads="1" noChangeShapeType="1"/>
-          </p:cNvCxnSpPr>
-          <p:nvPr>
-            <p:extLst>
-              <p:ext uri="{386F3935-93C4-4BCD-93E2-E3B085C9AB24}">
-                <p16:designElem xmlns:p16="http://schemas.microsoft.com/office/powerpoint/2015/main" val="1"/>
-              </p:ext>
-            </p:extLst>
-          </p:nvPr>
-        </p:nvCxnSpPr>
+      <p:sp>
+        <p:nvSpPr>
+          <p:cNvPr id="2" name="Title 1">
+            <a:extLst>
+              <a:ext uri="{FF2B5EF4-FFF2-40B4-BE49-F238E27FC236}">
+                <a16:creationId xmlns:a16="http://schemas.microsoft.com/office/drawing/2014/main" id="{515984D7-D2CE-D5F3-4D33-71550CF3C5CB}"/>
+              </a:ext>
+            </a:extLst>
+          </p:cNvPr>
+          <p:cNvSpPr>
+            <a:spLocks noGrp="1"/>
+          </p:cNvSpPr>
+          <p:nvPr>
+            <p:ph type="title"/>
+          </p:nvPr>
+        </p:nvSpPr>
         <p:spPr>
           <a:xfrm>
-            <a:off x="713232" y="1031001"/>
-            <a:ext cx="978862" cy="0"/>
-          </a:xfrm>
-          <a:prstGeom prst="line">
-            <a:avLst/>
-          </a:prstGeom>
-          <a:ln w="76200"/>
-        </p:spPr>
-        <p:style>
-          <a:lnRef idx="1">
-            <a:schemeClr val="accent1"/>
-          </a:lnRef>
-          <a:fillRef idx="0">
-            <a:schemeClr val="accent1"/>
-          </a:fillRef>
-          <a:effectRef idx="0">
-            <a:schemeClr val="accent1"/>
-          </a:effectRef>
-          <a:fontRef idx="minor">
-            <a:schemeClr val="tx1"/>
-          </a:fontRef>
-        </p:style>
-      </p:cxnSp>
-      <p:sp useBgFill="1">
-        <p:nvSpPr>
-          <p:cNvPr id="18" name="Rectangle 17">
-            <a:extLst>
-              <a:ext uri="{FF2B5EF4-FFF2-40B4-BE49-F238E27FC236}">
-                <a16:creationId xmlns:a16="http://schemas.microsoft.com/office/drawing/2014/main" id="{D1202105-6653-E310-88A6-CAAE98DB8BC6}"/>
-              </a:ext>
-              <a:ext uri="{C183D7F6-B498-43B3-948B-1728B52AA6E4}">
-                <adec:decorative xmlns:adec="http://schemas.microsoft.com/office/drawing/2017/decorative" val="1"/>
-              </a:ext>
-            </a:extLst>
-          </p:cNvPr>
-          <p:cNvSpPr>
-            <a:spLocks noGrp="1" noRot="1" noChangeAspect="1" noMove="1" noResize="1" noEditPoints="1" noAdjustHandles="1" noChangeArrowheads="1" noChangeShapeType="1" noTextEdit="1"/>
-          </p:cNvSpPr>
-          <p:nvPr>
-            <p:extLst>
-              <p:ext uri="{386F3935-93C4-4BCD-93E2-E3B085C9AB24}">
-                <p16:designElem xmlns:p16="http://schemas.microsoft.com/office/powerpoint/2015/main" val="1"/>
-              </p:ext>
-            </p:extLst>
-          </p:nvPr>
-        </p:nvSpPr>
-        <p:spPr>
-          <a:xfrm>
-            <a:off x="0" y="0"/>
-            <a:ext cx="12192000" cy="6858000"/>
-          </a:xfrm>
-          <a:prstGeom prst="rect">
-            <a:avLst/>
-          </a:prstGeom>
-          <a:ln w="12700" cap="flat" cmpd="sng" algn="ctr">
-            <a:noFill/>
-            <a:prstDash val="solid"/>
-            <a:miter lim="800000"/>
-          </a:ln>
-          <a:effectLst/>
-          <a:extLst>
-            <a:ext uri="{91240B29-F687-4F45-9708-019B960494DF}">
-              <a14:hiddenLine xmlns:a14="http://schemas.microsoft.com/office/drawing/2010/main" w="12700" cap="flat" cmpd="sng" algn="ctr">
-                <a:solidFill>
-                  <a:schemeClr val="accent1">
-                    <a:shade val="50000"/>
-                  </a:schemeClr>
-                </a:solidFill>
-                <a:prstDash val="solid"/>
-                <a:miter lim="800000"/>
-              </a14:hiddenLine>
-            </a:ext>
-          </a:extLst>
-        </p:spPr>
-        <p:style>
-          <a:lnRef idx="2">
-            <a:schemeClr val="accent1">
-              <a:shade val="50000"/>
-            </a:schemeClr>
-          </a:lnRef>
-          <a:fillRef idx="1">
-            <a:schemeClr val="accent1"/>
-          </a:fillRef>
-          <a:effectRef idx="0">
-            <a:schemeClr val="accent1"/>
-          </a:effectRef>
-          <a:fontRef idx="minor">
-            <a:schemeClr val="lt1"/>
-          </a:fontRef>
-        </p:style>
-        <p:txBody>
-          <a:bodyPr rtlCol="0" anchor="ctr"/>
-          <a:lstStyle/>
-          <a:p>
-            <a:pPr algn="ctr"/>
-            <a:endParaRPr lang="en-US"/>
-          </a:p>
-        </p:txBody>
-      </p:sp>
-      <p:sp>
-        <p:nvSpPr>
-          <p:cNvPr id="2" name="Title 1">
-            <a:extLst>
-              <a:ext uri="{FF2B5EF4-FFF2-40B4-BE49-F238E27FC236}">
-                <a16:creationId xmlns:a16="http://schemas.microsoft.com/office/drawing/2014/main" id="{A877C020-20C4-A60C-C835-77FD684A8902}"/>
-              </a:ext>
-            </a:extLst>
-          </p:cNvPr>
-          <p:cNvSpPr>
-            <a:spLocks noGrp="1"/>
-          </p:cNvSpPr>
-          <p:nvPr>
-            <p:ph type="title"/>
-          </p:nvPr>
-        </p:nvSpPr>
-        <p:spPr>
-          <a:xfrm>
-            <a:off x="350911" y="3111282"/>
-            <a:ext cx="3509233" cy="3326797"/>
+            <a:off x="640079" y="1371600"/>
+            <a:ext cx="3236977" cy="2295143"/>
           </a:xfrm>
         </p:spPr>
         <p:txBody>
-          <a:bodyPr vert="horz" lIns="91440" tIns="45720" rIns="91440" bIns="45720" rtlCol="0" anchor="b">
-            <a:normAutofit/>
-          </a:bodyPr>
-          <a:lstStyle/>
-          <a:p>
-            <a:r>
-              <a:rPr lang="en-US" sz="4800" dirty="0"/>
-              <a:t>Taylor Green Vortex Benchmark</a:t>
-            </a:r>
-          </a:p>
-        </p:txBody>
-      </p:sp>
-      <p:sp>
-        <p:nvSpPr>
-          <p:cNvPr id="3" name="TextBox 2">
-            <a:extLst>
-              <a:ext uri="{FF2B5EF4-FFF2-40B4-BE49-F238E27FC236}">
-                <a16:creationId xmlns:a16="http://schemas.microsoft.com/office/drawing/2014/main" id="{6F67E9F6-9A46-418B-64AC-38B0991E8B7B}"/>
-              </a:ext>
-            </a:extLst>
-          </p:cNvPr>
-          <p:cNvSpPr txBox="1"/>
-          <p:nvPr/>
-        </p:nvSpPr>
-        <p:spPr>
-          <a:xfrm>
-            <a:off x="437662" y="1983475"/>
-            <a:ext cx="1362874" cy="707886"/>
-          </a:xfrm>
-          <a:prstGeom prst="rect">
-            <a:avLst/>
-          </a:prstGeom>
-          <a:noFill/>
-        </p:spPr>
-        <p:txBody>
-          <a:bodyPr wrap="none" rtlCol="0">
-            <a:spAutoFit/>
-          </a:bodyPr>
-          <a:lstStyle/>
-          <a:p>
-            <a:r>
-              <a:rPr lang="en-US" sz="4000" b="1" dirty="0"/>
-              <a:t>PINN</a:t>
-            </a:r>
-          </a:p>
-        </p:txBody>
-      </p:sp>
-      <p:sp>
-        <p:nvSpPr>
-          <p:cNvPr id="6" name="Content Placeholder 5">
-            <a:extLst>
-              <a:ext uri="{FF2B5EF4-FFF2-40B4-BE49-F238E27FC236}">
-                <a16:creationId xmlns:a16="http://schemas.microsoft.com/office/drawing/2014/main" id="{24E28B5A-C4FE-8944-C1E9-DD17D7154931}"/>
-              </a:ext>
-            </a:extLst>
-          </p:cNvPr>
-          <p:cNvSpPr>
-            <a:spLocks noGrp="1"/>
-          </p:cNvSpPr>
-          <p:nvPr>
-            <p:ph idx="1"/>
-          </p:nvPr>
-        </p:nvSpPr>
-        <p:spPr/>
-        <p:txBody>
           <a:bodyPr/>
           <a:lstStyle/>
           <a:p>
-            <a:endParaRPr lang="en-US"/>
+            <a:r>
+              <a:rPr lang="en-US" dirty="0"/>
+              <a:t>Lid Driven Cavity Results</a:t>
+            </a:r>
           </a:p>
         </p:txBody>
       </p:sp>
     </p:spTree>
     <p:extLst>
       <p:ext uri="{BB962C8B-B14F-4D97-AF65-F5344CB8AC3E}">
-        <p14:creationId xmlns:p14="http://schemas.microsoft.com/office/powerpoint/2010/main" val="1332186539"/>
+        <p14:creationId xmlns:p14="http://schemas.microsoft.com/office/powerpoint/2010/main" val="1095544334"/>
       </p:ext>
     </p:extLst>
   </p:cSld>

--- a/Presentation1.pptx
+++ b/Presentation1.pptx
@@ -14,12 +14,13 @@
     <p:sldId id="267" r:id="rId8"/>
     <p:sldId id="268" r:id="rId9"/>
     <p:sldId id="261" r:id="rId10"/>
-    <p:sldId id="272" r:id="rId11"/>
-    <p:sldId id="274" r:id="rId12"/>
-    <p:sldId id="262" r:id="rId13"/>
-    <p:sldId id="263" r:id="rId14"/>
-    <p:sldId id="264" r:id="rId15"/>
-    <p:sldId id="273" r:id="rId16"/>
+    <p:sldId id="275" r:id="rId11"/>
+    <p:sldId id="272" r:id="rId12"/>
+    <p:sldId id="274" r:id="rId13"/>
+    <p:sldId id="262" r:id="rId14"/>
+    <p:sldId id="263" r:id="rId15"/>
+    <p:sldId id="264" r:id="rId16"/>
+    <p:sldId id="273" r:id="rId17"/>
   </p:sldIdLst>
   <p:sldSz cx="12192000" cy="6858000"/>
   <p:notesSz cx="6858000" cy="9144000"/>
@@ -282,7 +283,7 @@
           <a:p>
             <a:fld id="{6444479B-705B-4489-957E-7E8A228BDFA0}" type="datetime1">
               <a:rPr lang="en-US" smtClean="0"/>
-              <a:t>5/26/26</a:t>
+              <a:t>5/28/26</a:t>
             </a:fld>
             <a:endParaRPr lang="en-US"/>
           </a:p>
@@ -482,7 +483,7 @@
           <a:p>
             <a:fld id="{C07B66AD-7C08-490A-ADA4-B47E10FB2407}" type="datetime1">
               <a:rPr lang="en-US" smtClean="0"/>
-              <a:t>5/26/26</a:t>
+              <a:t>5/28/26</a:t>
             </a:fld>
             <a:endParaRPr lang="en-US"/>
           </a:p>
@@ -741,7 +742,7 @@
           <a:p>
             <a:fld id="{05B95027-4255-49E7-9841-CD21BCC99996}" type="datetime1">
               <a:rPr lang="en-US" smtClean="0"/>
-              <a:t>5/26/26</a:t>
+              <a:t>5/28/26</a:t>
             </a:fld>
             <a:endParaRPr lang="en-US"/>
           </a:p>
@@ -982,7 +983,7 @@
           <a:p>
             <a:fld id="{9F89F774-3FA6-43B8-9241-99959C8FD463}" type="datetime1">
               <a:rPr lang="en-US" smtClean="0"/>
-              <a:t>5/26/26</a:t>
+              <a:t>5/28/26</a:t>
             </a:fld>
             <a:endParaRPr lang="en-US"/>
           </a:p>
@@ -1309,7 +1310,7 @@
           <a:p>
             <a:fld id="{F9504452-5DCC-4FE2-A5C9-8A5EF6714D65}" type="datetime1">
               <a:rPr lang="en-US" smtClean="0"/>
-              <a:t>5/26/26</a:t>
+              <a:t>5/28/26</a:t>
             </a:fld>
             <a:endParaRPr lang="en-US"/>
           </a:p>
@@ -1619,7 +1620,7 @@
           <a:p>
             <a:fld id="{E579ABC2-0180-4F3A-A895-A85BC724D472}" type="datetime1">
               <a:rPr lang="en-US" smtClean="0"/>
-              <a:t>5/26/26</a:t>
+              <a:t>5/28/26</a:t>
             </a:fld>
             <a:endParaRPr lang="en-US"/>
           </a:p>
@@ -2037,7 +2038,7 @@
           <a:p>
             <a:fld id="{6AEEA9BA-4E8F-439E-BEA4-91FBA01E3F5F}" type="datetime1">
               <a:rPr lang="en-US" smtClean="0"/>
-              <a:t>5/26/26</a:t>
+              <a:t>5/28/26</a:t>
             </a:fld>
             <a:endParaRPr lang="en-US"/>
           </a:p>
@@ -2179,7 +2180,7 @@
           <a:p>
             <a:fld id="{BE15BF18-0007-481C-AA29-413124BC3EE7}" type="datetime1">
               <a:rPr lang="en-US" smtClean="0"/>
-              <a:t>5/26/26</a:t>
+              <a:t>5/28/26</a:t>
             </a:fld>
             <a:endParaRPr lang="en-US"/>
           </a:p>
@@ -2341,7 +2342,7 @@
           <a:p>
             <a:fld id="{09BE9870-3748-43AD-B547-02A075CB4A1D}" type="datetime1">
               <a:rPr lang="en-US" smtClean="0"/>
-              <a:t>5/26/26</a:t>
+              <a:t>5/28/26</a:t>
             </a:fld>
             <a:endParaRPr lang="en-US"/>
           </a:p>
@@ -2658,7 +2659,7 @@
           <a:p>
             <a:fld id="{558E7897-33C5-4F1A-9307-D068E37F3DC7}" type="datetime1">
               <a:rPr lang="en-US" smtClean="0"/>
-              <a:t>5/26/26</a:t>
+              <a:t>5/28/26</a:t>
             </a:fld>
             <a:endParaRPr lang="en-US"/>
           </a:p>
@@ -2953,7 +2954,7 @@
           <a:p>
             <a:fld id="{82E171BA-CC09-47C8-A6DF-F5C5CB59CEEC}" type="datetime1">
               <a:rPr lang="en-US" smtClean="0"/>
-              <a:t>5/26/26</a:t>
+              <a:t>5/28/26</a:t>
             </a:fld>
             <a:endParaRPr lang="en-US"/>
           </a:p>
@@ -3194,7 +3195,7 @@
           <a:p>
             <a:fld id="{7DA38F49-B3E2-4BF0-BEC7-C30D34ABBB8D}" type="datetime1">
               <a:rPr lang="en-US" smtClean="0"/>
-              <a:t>5/26/26</a:t>
+              <a:t>5/28/26</a:t>
             </a:fld>
             <a:endParaRPr lang="en-US"/>
           </a:p>
@@ -4048,6 +4049,122 @@
           <a:chExt cx="0" cy="0"/>
         </a:xfrm>
       </p:grpSpPr>
+      <p:pic>
+        <p:nvPicPr>
+          <p:cNvPr id="5" name="Content Placeholder 4">
+            <a:extLst>
+              <a:ext uri="{FF2B5EF4-FFF2-40B4-BE49-F238E27FC236}">
+                <a16:creationId xmlns:a16="http://schemas.microsoft.com/office/drawing/2014/main" id="{363064F7-C31C-C697-7A86-A1E5E667BEE5}"/>
+              </a:ext>
+            </a:extLst>
+          </p:cNvPr>
+          <p:cNvPicPr>
+            <a:picLocks noGrp="1" noChangeAspect="1"/>
+          </p:cNvPicPr>
+          <p:nvPr>
+            <p:ph idx="1"/>
+          </p:nvPr>
+        </p:nvPicPr>
+        <p:blipFill>
+          <a:blip r:embed="rId2"/>
+          <a:stretch>
+            <a:fillRect/>
+          </a:stretch>
+        </p:blipFill>
+        <p:spPr>
+          <a:xfrm>
+            <a:off x="3390481" y="818985"/>
+            <a:ext cx="8133852" cy="5380204"/>
+          </a:xfrm>
+          <a:prstGeom prst="rect">
+            <a:avLst/>
+          </a:prstGeom>
+        </p:spPr>
+      </p:pic>
+      <p:sp>
+        <p:nvSpPr>
+          <p:cNvPr id="6" name="Title 1">
+            <a:extLst>
+              <a:ext uri="{FF2B5EF4-FFF2-40B4-BE49-F238E27FC236}">
+                <a16:creationId xmlns:a16="http://schemas.microsoft.com/office/drawing/2014/main" id="{460AA165-C119-1ED7-6F4E-A8F2F3ED3FEE}"/>
+              </a:ext>
+            </a:extLst>
+          </p:cNvPr>
+          <p:cNvSpPr txBox="1">
+            <a:spLocks/>
+          </p:cNvSpPr>
+          <p:nvPr/>
+        </p:nvSpPr>
+        <p:spPr>
+          <a:xfrm>
+            <a:off x="640079" y="1371600"/>
+            <a:ext cx="3236977" cy="2295143"/>
+          </a:xfrm>
+          <a:prstGeom prst="rect">
+            <a:avLst/>
+          </a:prstGeom>
+        </p:spPr>
+        <p:txBody>
+          <a:bodyPr vert="horz" lIns="91440" tIns="45720" rIns="91440" bIns="45720" rtlCol="0" anchor="t">
+            <a:normAutofit/>
+          </a:bodyPr>
+          <a:lstStyle>
+            <a:lvl1pPr algn="l" defTabSz="914400" rtl="0" eaLnBrk="1" latinLnBrk="0" hangingPunct="1">
+              <a:lnSpc>
+                <a:spcPct val="100000"/>
+              </a:lnSpc>
+              <a:spcBef>
+                <a:spcPct val="0"/>
+              </a:spcBef>
+              <a:buNone/>
+              <a:defRPr sz="4000" b="1" kern="1200">
+                <a:solidFill>
+                  <a:schemeClr val="tx1"/>
+                </a:solidFill>
+                <a:latin typeface="+mj-lt"/>
+                <a:ea typeface="+mj-ea"/>
+                <a:cs typeface="+mj-cs"/>
+              </a:defRPr>
+            </a:lvl1pPr>
+          </a:lstStyle>
+          <a:p>
+            <a:r>
+              <a:rPr lang="en-US" dirty="0"/>
+              <a:t>Lid Driven Cavity Results</a:t>
+            </a:r>
+          </a:p>
+        </p:txBody>
+      </p:sp>
+    </p:spTree>
+    <p:extLst>
+      <p:ext uri="{BB962C8B-B14F-4D97-AF65-F5344CB8AC3E}">
+        <p14:creationId xmlns:p14="http://schemas.microsoft.com/office/powerpoint/2010/main" val="3140568401"/>
+      </p:ext>
+    </p:extLst>
+  </p:cSld>
+  <p:clrMapOvr>
+    <a:masterClrMapping/>
+  </p:clrMapOvr>
+</p:sld>
+</file>
+
+<file path=ppt/slides/slide11.xml><?xml version="1.0" encoding="utf-8"?>
+<p:sld xmlns:a="http://schemas.openxmlformats.org/drawingml/2006/main" xmlns:r="http://schemas.openxmlformats.org/officeDocument/2006/relationships" xmlns:p="http://schemas.openxmlformats.org/presentationml/2006/main">
+  <p:cSld>
+    <p:spTree>
+      <p:nvGrpSpPr>
+        <p:cNvPr id="1" name=""/>
+        <p:cNvGrpSpPr/>
+        <p:nvPr/>
+      </p:nvGrpSpPr>
+      <p:grpSpPr>
+        <a:xfrm>
+          <a:off x="0" y="0"/>
+          <a:ext cx="0" cy="0"/>
+          <a:chOff x="0" y="0"/>
+          <a:chExt cx="0" cy="0"/>
+        </a:xfrm>
+      </p:grpSpPr>
       <p:sp>
         <p:nvSpPr>
           <p:cNvPr id="2" name="Title 1">
@@ -4103,7 +4220,7 @@
         </p:blipFill>
         <p:spPr>
           <a:xfrm>
-            <a:off x="179782" y="1066800"/>
+            <a:off x="89891" y="1079646"/>
             <a:ext cx="12012218" cy="5791200"/>
           </a:xfrm>
           <a:prstGeom prst="rect">
@@ -4133,8 +4250,8 @@
         </p:blipFill>
         <p:spPr>
           <a:xfrm>
-            <a:off x="0" y="1066800"/>
-            <a:ext cx="12192000" cy="5872345"/>
+            <a:off x="0" y="985656"/>
+            <a:ext cx="12102109" cy="5829048"/>
           </a:xfrm>
           <a:prstGeom prst="rect">
             <a:avLst/>
@@ -4163,8 +4280,8 @@
         </p:blipFill>
         <p:spPr>
           <a:xfrm>
-            <a:off x="0" y="1066800"/>
-            <a:ext cx="12192000" cy="5872346"/>
+            <a:off x="44945" y="985656"/>
+            <a:ext cx="12012218" cy="5785753"/>
           </a:xfrm>
           <a:prstGeom prst="rect">
             <a:avLst/>
@@ -4304,7 +4421,7 @@
 </p:sld>
 </file>
 
-<file path=ppt/slides/slide11.xml><?xml version="1.0" encoding="utf-8"?>
+<file path=ppt/slides/slide12.xml><?xml version="1.0" encoding="utf-8"?>
 <p:sld xmlns:a="http://schemas.openxmlformats.org/drawingml/2006/main" xmlns:r="http://schemas.openxmlformats.org/officeDocument/2006/relationships" xmlns:p="http://schemas.openxmlformats.org/presentationml/2006/main">
   <p:cSld>
     <p:spTree>
@@ -4378,10 +4495,10 @@
       </p:sp>
       <p:pic>
         <p:nvPicPr>
-          <p:cNvPr id="6" name="Picture 5">
-            <a:extLst>
-              <a:ext uri="{FF2B5EF4-FFF2-40B4-BE49-F238E27FC236}">
-                <a16:creationId xmlns:a16="http://schemas.microsoft.com/office/drawing/2014/main" id="{F3DC4B6F-FC59-865D-C8E5-D668B3E4176F}"/>
+          <p:cNvPr id="3" name="Picture 2">
+            <a:extLst>
+              <a:ext uri="{FF2B5EF4-FFF2-40B4-BE49-F238E27FC236}">
+                <a16:creationId xmlns:a16="http://schemas.microsoft.com/office/drawing/2014/main" id="{1F3DFE25-A4D4-389A-0B14-E3908F78A47C}"/>
               </a:ext>
             </a:extLst>
           </p:cNvPr>
@@ -4398,8 +4515,8 @@
         </p:blipFill>
         <p:spPr>
           <a:xfrm>
-            <a:off x="2060819" y="1469372"/>
-            <a:ext cx="7772400" cy="4880567"/>
+            <a:off x="171500" y="2014826"/>
+            <a:ext cx="11563300" cy="3559037"/>
           </a:xfrm>
           <a:prstGeom prst="rect">
             <a:avLst/>
@@ -4419,7 +4536,7 @@
 </p:sld>
 </file>
 
-<file path=ppt/slides/slide12.xml><?xml version="1.0" encoding="utf-8"?>
+<file path=ppt/slides/slide13.xml><?xml version="1.0" encoding="utf-8"?>
 <p:sld xmlns:a="http://schemas.openxmlformats.org/drawingml/2006/main" xmlns:r="http://schemas.openxmlformats.org/officeDocument/2006/relationships" xmlns:p="http://schemas.openxmlformats.org/presentationml/2006/main">
   <p:cSld>
     <p:spTree>
@@ -4699,124 +4816,6 @@
 </p:sld>
 </file>
 
-<file path=ppt/slides/slide13.xml><?xml version="1.0" encoding="utf-8"?>
-<p:sld xmlns:a="http://schemas.openxmlformats.org/drawingml/2006/main" xmlns:r="http://schemas.openxmlformats.org/officeDocument/2006/relationships" xmlns:p="http://schemas.openxmlformats.org/presentationml/2006/main">
-  <p:cSld>
-    <p:spTree>
-      <p:nvGrpSpPr>
-        <p:cNvPr id="1" name=""/>
-        <p:cNvGrpSpPr/>
-        <p:nvPr/>
-      </p:nvGrpSpPr>
-      <p:grpSpPr>
-        <a:xfrm>
-          <a:off x="0" y="0"/>
-          <a:ext cx="0" cy="0"/>
-          <a:chOff x="0" y="0"/>
-          <a:chExt cx="0" cy="0"/>
-        </a:xfrm>
-      </p:grpSpPr>
-      <p:sp>
-        <p:nvSpPr>
-          <p:cNvPr id="2" name="Title 1">
-            <a:extLst>
-              <a:ext uri="{FF2B5EF4-FFF2-40B4-BE49-F238E27FC236}">
-                <a16:creationId xmlns:a16="http://schemas.microsoft.com/office/drawing/2014/main" id="{028621CC-814A-D7A9-4BBC-27FE0D235955}"/>
-              </a:ext>
-            </a:extLst>
-          </p:cNvPr>
-          <p:cNvSpPr>
-            <a:spLocks noGrp="1"/>
-          </p:cNvSpPr>
-          <p:nvPr>
-            <p:ph type="title"/>
-          </p:nvPr>
-        </p:nvSpPr>
-        <p:spPr/>
-        <p:txBody>
-          <a:bodyPr/>
-          <a:lstStyle/>
-          <a:p>
-            <a:r>
-              <a:rPr lang="en-US" dirty="0"/>
-              <a:t>Where PINNs Have the Edge?</a:t>
-            </a:r>
-          </a:p>
-        </p:txBody>
-      </p:sp>
-      <p:sp>
-        <p:nvSpPr>
-          <p:cNvPr id="3" name="Content Placeholder 2">
-            <a:extLst>
-              <a:ext uri="{FF2B5EF4-FFF2-40B4-BE49-F238E27FC236}">
-                <a16:creationId xmlns:a16="http://schemas.microsoft.com/office/drawing/2014/main" id="{D76CBFE0-BFB3-7819-271F-24A0845F1D80}"/>
-              </a:ext>
-            </a:extLst>
-          </p:cNvPr>
-          <p:cNvSpPr>
-            <a:spLocks noGrp="1"/>
-          </p:cNvSpPr>
-          <p:nvPr>
-            <p:ph idx="1"/>
-          </p:nvPr>
-        </p:nvSpPr>
-        <p:spPr/>
-        <p:txBody>
-          <a:bodyPr/>
-          <a:lstStyle/>
-          <a:p>
-            <a:endParaRPr lang="en-US"/>
-          </a:p>
-        </p:txBody>
-      </p:sp>
-      <p:sp>
-        <p:nvSpPr>
-          <p:cNvPr id="4" name="TextBox 3">
-            <a:extLst>
-              <a:ext uri="{FF2B5EF4-FFF2-40B4-BE49-F238E27FC236}">
-                <a16:creationId xmlns:a16="http://schemas.microsoft.com/office/drawing/2014/main" id="{12FB0AE1-E1B2-DF18-6812-E362C1D6E170}"/>
-              </a:ext>
-            </a:extLst>
-          </p:cNvPr>
-          <p:cNvSpPr txBox="1"/>
-          <p:nvPr/>
-        </p:nvSpPr>
-        <p:spPr>
-          <a:xfrm>
-            <a:off x="1078992" y="2099549"/>
-            <a:ext cx="1882247" cy="369332"/>
-          </a:xfrm>
-          <a:prstGeom prst="rect">
-            <a:avLst/>
-          </a:prstGeom>
-          <a:noFill/>
-        </p:spPr>
-        <p:txBody>
-          <a:bodyPr wrap="none" rtlCol="0">
-            <a:spAutoFit/>
-          </a:bodyPr>
-          <a:lstStyle/>
-          <a:p>
-            <a:r>
-              <a:rPr lang="en-US" dirty="0"/>
-              <a:t>Inverse problem</a:t>
-            </a:r>
-          </a:p>
-        </p:txBody>
-      </p:sp>
-    </p:spTree>
-    <p:extLst>
-      <p:ext uri="{BB962C8B-B14F-4D97-AF65-F5344CB8AC3E}">
-        <p14:creationId xmlns:p14="http://schemas.microsoft.com/office/powerpoint/2010/main" val="1861428453"/>
-      </p:ext>
-    </p:extLst>
-  </p:cSld>
-  <p:clrMapOvr>
-    <a:masterClrMapping/>
-  </p:clrMapOvr>
-</p:sld>
-</file>
-
 <file path=ppt/slides/slide14.xml><?xml version="1.0" encoding="utf-8"?>
 <p:sld xmlns:a="http://schemas.openxmlformats.org/drawingml/2006/main" xmlns:r="http://schemas.openxmlformats.org/officeDocument/2006/relationships" xmlns:p="http://schemas.openxmlformats.org/presentationml/2006/main">
   <p:cSld>
@@ -4839,7 +4838,7 @@
           <p:cNvPr id="2" name="Title 1">
             <a:extLst>
               <a:ext uri="{FF2B5EF4-FFF2-40B4-BE49-F238E27FC236}">
-                <a16:creationId xmlns:a16="http://schemas.microsoft.com/office/drawing/2014/main" id="{94E9AA2D-D8BC-9FBA-568C-9089539EAC82}"/>
+                <a16:creationId xmlns:a16="http://schemas.microsoft.com/office/drawing/2014/main" id="{028621CC-814A-D7A9-4BBC-27FE0D235955}"/>
               </a:ext>
             </a:extLst>
           </p:cNvPr>
@@ -4857,17 +4856,52 @@
           <a:p>
             <a:r>
               <a:rPr lang="en-US" dirty="0"/>
-              <a:t>Conclusion</a:t>
-            </a:r>
-          </a:p>
-        </p:txBody>
-      </p:sp>
-      <p:sp>
-        <p:nvSpPr>
-          <p:cNvPr id="3" name="Content Placeholder 2">
-            <a:extLst>
-              <a:ext uri="{FF2B5EF4-FFF2-40B4-BE49-F238E27FC236}">
-                <a16:creationId xmlns:a16="http://schemas.microsoft.com/office/drawing/2014/main" id="{06747A52-6C3E-D967-E643-A05597C6FEC8}"/>
+              <a:t>Where PINNs Have the Edge?</a:t>
+            </a:r>
+          </a:p>
+        </p:txBody>
+      </p:sp>
+      <p:sp>
+        <p:nvSpPr>
+          <p:cNvPr id="4" name="TextBox 3">
+            <a:extLst>
+              <a:ext uri="{FF2B5EF4-FFF2-40B4-BE49-F238E27FC236}">
+                <a16:creationId xmlns:a16="http://schemas.microsoft.com/office/drawing/2014/main" id="{12FB0AE1-E1B2-DF18-6812-E362C1D6E170}"/>
+              </a:ext>
+            </a:extLst>
+          </p:cNvPr>
+          <p:cNvSpPr txBox="1"/>
+          <p:nvPr/>
+        </p:nvSpPr>
+        <p:spPr>
+          <a:xfrm>
+            <a:off x="1078992" y="2099549"/>
+            <a:ext cx="1882247" cy="369332"/>
+          </a:xfrm>
+          <a:prstGeom prst="rect">
+            <a:avLst/>
+          </a:prstGeom>
+          <a:noFill/>
+        </p:spPr>
+        <p:txBody>
+          <a:bodyPr wrap="none" rtlCol="0">
+            <a:spAutoFit/>
+          </a:bodyPr>
+          <a:lstStyle/>
+          <a:p>
+            <a:r>
+              <a:rPr lang="en-US" dirty="0"/>
+              <a:t>Inverse problem</a:t>
+            </a:r>
+          </a:p>
+        </p:txBody>
+      </p:sp>
+      <p:sp>
+        <p:nvSpPr>
+          <p:cNvPr id="8" name="Content Placeholder 7">
+            <a:extLst>
+              <a:ext uri="{FF2B5EF4-FFF2-40B4-BE49-F238E27FC236}">
+                <a16:creationId xmlns:a16="http://schemas.microsoft.com/office/drawing/2014/main" id="{35C0D3E6-8912-B68D-50DD-EBFFD21D6516}"/>
               </a:ext>
             </a:extLst>
           </p:cNvPr>
@@ -4887,6 +4921,265 @@
           </a:p>
         </p:txBody>
       </p:sp>
+    </p:spTree>
+    <p:extLst>
+      <p:ext uri="{BB962C8B-B14F-4D97-AF65-F5344CB8AC3E}">
+        <p14:creationId xmlns:p14="http://schemas.microsoft.com/office/powerpoint/2010/main" val="1861428453"/>
+      </p:ext>
+    </p:extLst>
+  </p:cSld>
+  <p:clrMapOvr>
+    <a:masterClrMapping/>
+  </p:clrMapOvr>
+</p:sld>
+</file>
+
+<file path=ppt/slides/slide15.xml><?xml version="1.0" encoding="utf-8"?>
+<p:sld xmlns:a="http://schemas.openxmlformats.org/drawingml/2006/main" xmlns:r="http://schemas.openxmlformats.org/officeDocument/2006/relationships" xmlns:p="http://schemas.openxmlformats.org/presentationml/2006/main">
+  <p:cSld>
+    <p:bg>
+      <p:bgPr>
+        <a:solidFill>
+          <a:schemeClr val="bg1"/>
+        </a:solidFill>
+        <a:effectLst/>
+      </p:bgPr>
+    </p:bg>
+    <p:spTree>
+      <p:nvGrpSpPr>
+        <p:cNvPr id="1" name=""/>
+        <p:cNvGrpSpPr/>
+        <p:nvPr/>
+      </p:nvGrpSpPr>
+      <p:grpSpPr>
+        <a:xfrm>
+          <a:off x="0" y="0"/>
+          <a:ext cx="0" cy="0"/>
+          <a:chOff x="0" y="0"/>
+          <a:chExt cx="0" cy="0"/>
+        </a:xfrm>
+      </p:grpSpPr>
+      <p:sp useBgFill="1">
+        <p:nvSpPr>
+          <p:cNvPr id="9" name="Rectangle 8">
+            <a:extLst>
+              <a:ext uri="{FF2B5EF4-FFF2-40B4-BE49-F238E27FC236}">
+                <a16:creationId xmlns:a16="http://schemas.microsoft.com/office/drawing/2014/main" id="{744CAA32-F237-419C-A2DD-43C28D920D3C}"/>
+              </a:ext>
+              <a:ext uri="{C183D7F6-B498-43B3-948B-1728B52AA6E4}">
+                <adec:decorative xmlns:adec="http://schemas.microsoft.com/office/drawing/2017/decorative" val="1"/>
+              </a:ext>
+            </a:extLst>
+          </p:cNvPr>
+          <p:cNvSpPr>
+            <a:spLocks noGrp="1" noRot="1" noChangeAspect="1" noMove="1" noResize="1" noEditPoints="1" noAdjustHandles="1" noChangeArrowheads="1" noChangeShapeType="1" noTextEdit="1"/>
+          </p:cNvSpPr>
+          <p:nvPr>
+            <p:extLst>
+              <p:ext uri="{386F3935-93C4-4BCD-93E2-E3B085C9AB24}">
+                <p16:designElem xmlns:p16="http://schemas.microsoft.com/office/powerpoint/2015/main" val="1"/>
+              </p:ext>
+            </p:extLst>
+          </p:nvPr>
+        </p:nvSpPr>
+        <p:spPr>
+          <a:xfrm>
+            <a:off x="0" y="0"/>
+            <a:ext cx="12192000" cy="6858000"/>
+          </a:xfrm>
+          <a:prstGeom prst="rect">
+            <a:avLst/>
+          </a:prstGeom>
+          <a:ln w="12700" cap="flat" cmpd="sng" algn="ctr">
+            <a:noFill/>
+            <a:prstDash val="solid"/>
+            <a:miter lim="800000"/>
+          </a:ln>
+          <a:effectLst/>
+          <a:extLst>
+            <a:ext uri="{91240B29-F687-4F45-9708-019B960494DF}">
+              <a14:hiddenLine xmlns:a14="http://schemas.microsoft.com/office/drawing/2010/main" w="12700" cap="flat" cmpd="sng" algn="ctr">
+                <a:solidFill>
+                  <a:schemeClr val="accent1">
+                    <a:shade val="50000"/>
+                  </a:schemeClr>
+                </a:solidFill>
+                <a:prstDash val="solid"/>
+                <a:miter lim="800000"/>
+              </a14:hiddenLine>
+            </a:ext>
+          </a:extLst>
+        </p:spPr>
+        <p:style>
+          <a:lnRef idx="2">
+            <a:schemeClr val="accent1">
+              <a:shade val="50000"/>
+            </a:schemeClr>
+          </a:lnRef>
+          <a:fillRef idx="1">
+            <a:schemeClr val="accent1"/>
+          </a:fillRef>
+          <a:effectRef idx="0">
+            <a:schemeClr val="accent1"/>
+          </a:effectRef>
+          <a:fontRef idx="minor">
+            <a:schemeClr val="lt1"/>
+          </a:fontRef>
+        </p:style>
+        <p:txBody>
+          <a:bodyPr rtlCol="0" anchor="ctr"/>
+          <a:lstStyle/>
+          <a:p>
+            <a:pPr algn="ctr"/>
+            <a:endParaRPr lang="en-US"/>
+          </a:p>
+        </p:txBody>
+      </p:sp>
+      <p:sp>
+        <p:nvSpPr>
+          <p:cNvPr id="2" name="Title 1">
+            <a:extLst>
+              <a:ext uri="{FF2B5EF4-FFF2-40B4-BE49-F238E27FC236}">
+                <a16:creationId xmlns:a16="http://schemas.microsoft.com/office/drawing/2014/main" id="{94E9AA2D-D8BC-9FBA-568C-9089539EAC82}"/>
+              </a:ext>
+            </a:extLst>
+          </p:cNvPr>
+          <p:cNvSpPr>
+            <a:spLocks noGrp="1"/>
+          </p:cNvSpPr>
+          <p:nvPr>
+            <p:ph type="title"/>
+          </p:nvPr>
+        </p:nvSpPr>
+        <p:spPr>
+          <a:xfrm>
+            <a:off x="640080" y="1371600"/>
+            <a:ext cx="5737859" cy="1097280"/>
+          </a:xfrm>
+        </p:spPr>
+        <p:txBody>
+          <a:bodyPr>
+            <a:normAutofit/>
+          </a:bodyPr>
+          <a:lstStyle/>
+          <a:p>
+            <a:r>
+              <a:rPr lang="en-US" dirty="0"/>
+              <a:t>Conclusion</a:t>
+            </a:r>
+          </a:p>
+        </p:txBody>
+      </p:sp>
+      <p:cxnSp>
+        <p:nvCxnSpPr>
+          <p:cNvPr id="11" name="Straight Connector 10">
+            <a:extLst>
+              <a:ext uri="{FF2B5EF4-FFF2-40B4-BE49-F238E27FC236}">
+                <a16:creationId xmlns:a16="http://schemas.microsoft.com/office/drawing/2014/main" id="{753FE100-D0AB-4AE2-824B-60CFA31EC6A2}"/>
+              </a:ext>
+              <a:ext uri="{C183D7F6-B498-43B3-948B-1728B52AA6E4}">
+                <adec:decorative xmlns:adec="http://schemas.microsoft.com/office/drawing/2017/decorative" val="1"/>
+              </a:ext>
+            </a:extLst>
+          </p:cNvPr>
+          <p:cNvCxnSpPr>
+            <a:cxnSpLocks noGrp="1" noRot="1" noChangeAspect="1" noMove="1" noResize="1" noEditPoints="1" noAdjustHandles="1" noChangeArrowheads="1" noChangeShapeType="1"/>
+          </p:cNvCxnSpPr>
+          <p:nvPr>
+            <p:extLst>
+              <p:ext uri="{386F3935-93C4-4BCD-93E2-E3B085C9AB24}">
+                <p16:designElem xmlns:p16="http://schemas.microsoft.com/office/powerpoint/2015/main" val="1"/>
+              </p:ext>
+            </p:extLst>
+          </p:nvPr>
+        </p:nvCxnSpPr>
+        <p:spPr>
+          <a:xfrm>
+            <a:off x="713232" y="1031001"/>
+            <a:ext cx="978862" cy="0"/>
+          </a:xfrm>
+          <a:prstGeom prst="line">
+            <a:avLst/>
+          </a:prstGeom>
+          <a:ln w="76200"/>
+        </p:spPr>
+        <p:style>
+          <a:lnRef idx="1">
+            <a:schemeClr val="accent1"/>
+          </a:lnRef>
+          <a:fillRef idx="0">
+            <a:schemeClr val="accent1"/>
+          </a:fillRef>
+          <a:effectRef idx="0">
+            <a:schemeClr val="accent1"/>
+          </a:effectRef>
+          <a:fontRef idx="minor">
+            <a:schemeClr val="tx1"/>
+          </a:fontRef>
+        </p:style>
+      </p:cxnSp>
+      <p:sp>
+        <p:nvSpPr>
+          <p:cNvPr id="3" name="Content Placeholder 2">
+            <a:extLst>
+              <a:ext uri="{FF2B5EF4-FFF2-40B4-BE49-F238E27FC236}">
+                <a16:creationId xmlns:a16="http://schemas.microsoft.com/office/drawing/2014/main" id="{06747A52-6C3E-D967-E643-A05597C6FEC8}"/>
+              </a:ext>
+            </a:extLst>
+          </p:cNvPr>
+          <p:cNvSpPr>
+            <a:spLocks noGrp="1"/>
+          </p:cNvSpPr>
+          <p:nvPr>
+            <p:ph idx="1"/>
+          </p:nvPr>
+        </p:nvSpPr>
+        <p:spPr>
+          <a:xfrm>
+            <a:off x="640080" y="2633236"/>
+            <a:ext cx="5737860" cy="3666980"/>
+          </a:xfrm>
+        </p:spPr>
+        <p:txBody>
+          <a:bodyPr>
+            <a:normAutofit/>
+          </a:bodyPr>
+          <a:lstStyle/>
+          <a:p>
+            <a:endParaRPr lang="en-US" dirty="0"/>
+          </a:p>
+        </p:txBody>
+      </p:sp>
+      <p:pic>
+        <p:nvPicPr>
+          <p:cNvPr id="4" name="Picture 3">
+            <a:extLst>
+              <a:ext uri="{FF2B5EF4-FFF2-40B4-BE49-F238E27FC236}">
+                <a16:creationId xmlns:a16="http://schemas.microsoft.com/office/drawing/2014/main" id="{1FE34C91-F763-5445-A5A2-5DF16B74A5ED}"/>
+              </a:ext>
+            </a:extLst>
+          </p:cNvPr>
+          <p:cNvPicPr>
+            <a:picLocks noChangeAspect="1"/>
+          </p:cNvPicPr>
+          <p:nvPr/>
+        </p:nvPicPr>
+        <p:blipFill>
+          <a:blip r:embed="rId2"/>
+          <a:stretch>
+            <a:fillRect/>
+          </a:stretch>
+        </p:blipFill>
+        <p:spPr>
+          <a:xfrm>
+            <a:off x="4368644" y="333963"/>
+            <a:ext cx="7742811" cy="5632894"/>
+          </a:xfrm>
+          <a:prstGeom prst="rect">
+            <a:avLst/>
+          </a:prstGeom>
+        </p:spPr>
+      </p:pic>
     </p:spTree>
     <p:extLst>
       <p:ext uri="{BB962C8B-B14F-4D97-AF65-F5344CB8AC3E}">
@@ -4900,7 +5193,7 @@
 </p:sld>
 </file>
 
-<file path=ppt/slides/slide15.xml><?xml version="1.0" encoding="utf-8"?>
+<file path=ppt/slides/slide16.xml><?xml version="1.0" encoding="utf-8"?>
 <p:sld xmlns:a="http://schemas.openxmlformats.org/drawingml/2006/main" xmlns:r="http://schemas.openxmlformats.org/officeDocument/2006/relationships" xmlns:p="http://schemas.openxmlformats.org/presentationml/2006/main">
   <p:cSld>
     <p:spTree>
@@ -5485,8 +5778,8 @@
           </a:p>
         </p:txBody>
       </p:sp>
-      <mc:AlternateContent xmlns:mc="http://schemas.openxmlformats.org/markup-compatibility/2006">
-        <mc:Choice xmlns:a14="http://schemas.microsoft.com/office/drawing/2010/main" Requires="a14">
+      <mc:AlternateContent xmlns:mc="http://schemas.openxmlformats.org/markup-compatibility/2006" xmlns:a14="http://schemas.microsoft.com/office/drawing/2010/main">
+        <mc:Choice Requires="a14">
           <p:sp>
             <p:nvSpPr>
               <p:cNvPr id="3" name="Content Placeholder 2">
@@ -6074,7 +6367,7 @@
             </p:txBody>
           </p:sp>
         </mc:Choice>
-        <mc:Fallback>
+        <mc:Fallback xmlns="">
           <p:sp>
             <p:nvSpPr>
               <p:cNvPr id="3" name="Content Placeholder 2">
@@ -6554,8 +6847,8 @@
           </a:p>
         </p:txBody>
       </p:sp>
-      <mc:AlternateContent xmlns:mc="http://schemas.openxmlformats.org/markup-compatibility/2006">
-        <mc:Choice xmlns:a14="http://schemas.microsoft.com/office/drawing/2010/main" Requires="a14">
+      <mc:AlternateContent xmlns:mc="http://schemas.openxmlformats.org/markup-compatibility/2006" xmlns:a14="http://schemas.microsoft.com/office/drawing/2010/main">
+        <mc:Choice Requires="a14">
           <p:sp>
             <p:nvSpPr>
               <p:cNvPr id="7" name="TextBox 6">
@@ -6657,7 +6950,7 @@
             </p:txBody>
           </p:sp>
         </mc:Choice>
-        <mc:Fallback>
+        <mc:Fallback xmlns="">
           <p:sp>
             <p:nvSpPr>
               <p:cNvPr id="7" name="TextBox 6">
@@ -6702,8 +6995,8 @@
           </p:sp>
         </mc:Fallback>
       </mc:AlternateContent>
-      <mc:AlternateContent xmlns:mc="http://schemas.openxmlformats.org/markup-compatibility/2006">
-        <mc:Choice xmlns:a14="http://schemas.microsoft.com/office/drawing/2010/main" Requires="a14">
+      <mc:AlternateContent xmlns:mc="http://schemas.openxmlformats.org/markup-compatibility/2006" xmlns:a14="http://schemas.microsoft.com/office/drawing/2010/main">
+        <mc:Choice Requires="a14">
           <p:sp>
             <p:nvSpPr>
               <p:cNvPr id="6" name="TextBox 5">
@@ -6948,7 +7241,7 @@
             </p:txBody>
           </p:sp>
         </mc:Choice>
-        <mc:Fallback>
+        <mc:Fallback xmlns="">
           <p:sp>
             <p:nvSpPr>
               <p:cNvPr id="6" name="TextBox 5">
@@ -7403,7 +7696,7 @@
       </p:grpSpPr>
       <p:cxnSp>
         <p:nvCxnSpPr>
-          <p:cNvPr id="16" name="Straight Connector 15">
+          <p:cNvPr id="35" name="Straight Connector 34">
             <a:extLst>
               <a:ext uri="{FF2B5EF4-FFF2-40B4-BE49-F238E27FC236}">
                 <a16:creationId xmlns:a16="http://schemas.microsoft.com/office/drawing/2014/main" id="{118E06E4-607B-144B-382B-AD3D06B1EE8C}"/>
@@ -7451,7 +7744,7 @@
       </p:cxnSp>
       <p:sp useBgFill="1">
         <p:nvSpPr>
-          <p:cNvPr id="18" name="Rectangle 17">
+          <p:cNvPr id="37" name="Rectangle 36">
             <a:extLst>
               <a:ext uri="{FF2B5EF4-FFF2-40B4-BE49-F238E27FC236}">
                 <a16:creationId xmlns:a16="http://schemas.microsoft.com/office/drawing/2014/main" id="{19F9BF86-FE94-4517-B97D-026C7515E589}"/>
@@ -7543,13 +7836,13 @@
         </p:nvSpPr>
         <p:spPr>
           <a:xfrm>
-            <a:off x="338642" y="1765601"/>
-            <a:ext cx="3509233" cy="3326797"/>
+            <a:off x="363109" y="1200647"/>
+            <a:ext cx="3498574" cy="2981729"/>
           </a:xfrm>
         </p:spPr>
         <p:txBody>
           <a:bodyPr vert="horz" lIns="91440" tIns="45720" rIns="91440" bIns="45720" rtlCol="0" anchor="b">
-            <a:normAutofit/>
+            <a:normAutofit fontScale="90000"/>
           </a:bodyPr>
           <a:lstStyle/>
           <a:p>
@@ -7562,10 +7855,10 @@
       </p:sp>
       <p:pic>
         <p:nvPicPr>
-          <p:cNvPr id="7" name="Picture 6">
-            <a:extLst>
-              <a:ext uri="{FF2B5EF4-FFF2-40B4-BE49-F238E27FC236}">
-                <a16:creationId xmlns:a16="http://schemas.microsoft.com/office/drawing/2014/main" id="{E77CA4E2-D886-7D24-345D-B24A8E72F040}"/>
+          <p:cNvPr id="28" name="Picture 27">
+            <a:extLst>
+              <a:ext uri="{FF2B5EF4-FFF2-40B4-BE49-F238E27FC236}">
+                <a16:creationId xmlns:a16="http://schemas.microsoft.com/office/drawing/2014/main" id="{3EA313C1-9C75-78D0-D446-7D0ECF3B5E22}"/>
               </a:ext>
             </a:extLst>
           </p:cNvPr>
@@ -7582,8 +7875,8 @@
         </p:blipFill>
         <p:spPr>
           <a:xfrm>
-            <a:off x="4670171" y="589060"/>
-            <a:ext cx="7495210" cy="5996171"/>
+            <a:off x="3980953" y="3445099"/>
+            <a:ext cx="8211047" cy="3346001"/>
           </a:xfrm>
           <a:prstGeom prst="rect">
             <a:avLst/>
@@ -7592,19 +7885,17 @@
       </p:pic>
       <p:pic>
         <p:nvPicPr>
-          <p:cNvPr id="5" name="Content Placeholder 4">
-            <a:extLst>
-              <a:ext uri="{FF2B5EF4-FFF2-40B4-BE49-F238E27FC236}">
-                <a16:creationId xmlns:a16="http://schemas.microsoft.com/office/drawing/2014/main" id="{4FCACC49-D9E6-9BF1-A7CD-61C5F4EDA5A5}"/>
+          <p:cNvPr id="21" name="Picture 20">
+            <a:extLst>
+              <a:ext uri="{FF2B5EF4-FFF2-40B4-BE49-F238E27FC236}">
+                <a16:creationId xmlns:a16="http://schemas.microsoft.com/office/drawing/2014/main" id="{12D5033A-E2A0-7823-1841-DB58317AE8BD}"/>
               </a:ext>
             </a:extLst>
           </p:cNvPr>
           <p:cNvPicPr>
-            <a:picLocks noGrp="1" noChangeAspect="1"/>
+            <a:picLocks noChangeAspect="1"/>
           </p:cNvPicPr>
-          <p:nvPr>
-            <p:ph idx="1"/>
-          </p:nvPr>
+          <p:nvPr/>
         </p:nvPicPr>
         <p:blipFill>
           <a:blip r:embed="rId3"/>
@@ -7614,8 +7905,101 @@
         </p:blipFill>
         <p:spPr>
           <a:xfrm>
-            <a:off x="4533989" y="589060"/>
-            <a:ext cx="7631392" cy="6105116"/>
+            <a:off x="4023263" y="148843"/>
+            <a:ext cx="8049467" cy="3280157"/>
+          </a:xfrm>
+          <a:prstGeom prst="rect">
+            <a:avLst/>
+          </a:prstGeom>
+        </p:spPr>
+      </p:pic>
+    </p:spTree>
+    <p:extLst>
+      <p:ext uri="{BB962C8B-B14F-4D97-AF65-F5344CB8AC3E}">
+        <p14:creationId xmlns:p14="http://schemas.microsoft.com/office/powerpoint/2010/main" val="3896516673"/>
+      </p:ext>
+    </p:extLst>
+  </p:cSld>
+  <p:clrMapOvr>
+    <a:masterClrMapping/>
+  </p:clrMapOvr>
+</p:sld>
+</file>
+
+<file path=ppt/slides/slide9.xml><?xml version="1.0" encoding="utf-8"?>
+<p:sld xmlns:a="http://schemas.openxmlformats.org/drawingml/2006/main" xmlns:r="http://schemas.openxmlformats.org/officeDocument/2006/relationships" xmlns:p="http://schemas.openxmlformats.org/presentationml/2006/main">
+  <p:cSld>
+    <p:spTree>
+      <p:nvGrpSpPr>
+        <p:cNvPr id="1" name=""/>
+        <p:cNvGrpSpPr/>
+        <p:nvPr/>
+      </p:nvGrpSpPr>
+      <p:grpSpPr>
+        <a:xfrm>
+          <a:off x="0" y="0"/>
+          <a:ext cx="0" cy="0"/>
+          <a:chOff x="0" y="0"/>
+          <a:chExt cx="0" cy="0"/>
+        </a:xfrm>
+      </p:grpSpPr>
+      <p:sp>
+        <p:nvSpPr>
+          <p:cNvPr id="2" name="Title 1">
+            <a:extLst>
+              <a:ext uri="{FF2B5EF4-FFF2-40B4-BE49-F238E27FC236}">
+                <a16:creationId xmlns:a16="http://schemas.microsoft.com/office/drawing/2014/main" id="{515984D7-D2CE-D5F3-4D33-71550CF3C5CB}"/>
+              </a:ext>
+            </a:extLst>
+          </p:cNvPr>
+          <p:cNvSpPr>
+            <a:spLocks noGrp="1"/>
+          </p:cNvSpPr>
+          <p:nvPr>
+            <p:ph type="title"/>
+          </p:nvPr>
+        </p:nvSpPr>
+        <p:spPr>
+          <a:xfrm>
+            <a:off x="640079" y="1371600"/>
+            <a:ext cx="3236977" cy="2295143"/>
+          </a:xfrm>
+        </p:spPr>
+        <p:txBody>
+          <a:bodyPr/>
+          <a:lstStyle/>
+          <a:p>
+            <a:r>
+              <a:rPr lang="en-US" dirty="0"/>
+              <a:t>Lid Driven Cavity Results</a:t>
+            </a:r>
+          </a:p>
+        </p:txBody>
+      </p:sp>
+      <p:pic>
+        <p:nvPicPr>
+          <p:cNvPr id="4" name="Picture 3">
+            <a:extLst>
+              <a:ext uri="{FF2B5EF4-FFF2-40B4-BE49-F238E27FC236}">
+                <a16:creationId xmlns:a16="http://schemas.microsoft.com/office/drawing/2014/main" id="{1AFA005F-0380-77E3-480F-52E5143FDC06}"/>
+              </a:ext>
+            </a:extLst>
+          </p:cNvPr>
+          <p:cNvPicPr>
+            <a:picLocks noChangeAspect="1"/>
+          </p:cNvPicPr>
+          <p:nvPr/>
+        </p:nvPicPr>
+        <p:blipFill>
+          <a:blip r:embed="rId2"/>
+          <a:stretch>
+            <a:fillRect/>
+          </a:stretch>
+        </p:blipFill>
+        <p:spPr>
+          <a:xfrm>
+            <a:off x="3117692" y="655982"/>
+            <a:ext cx="9074308" cy="6202018"/>
           </a:xfrm>
           <a:prstGeom prst="rect">
             <a:avLst/>
@@ -7624,10 +8008,40 @@
       </p:pic>
       <p:pic>
         <p:nvPicPr>
-          <p:cNvPr id="9" name="Picture 8">
-            <a:extLst>
-              <a:ext uri="{FF2B5EF4-FFF2-40B4-BE49-F238E27FC236}">
-                <a16:creationId xmlns:a16="http://schemas.microsoft.com/office/drawing/2014/main" id="{B36CA233-B044-2838-EB47-099AB4D31A31}"/>
+          <p:cNvPr id="6" name="Picture 5">
+            <a:extLst>
+              <a:ext uri="{FF2B5EF4-FFF2-40B4-BE49-F238E27FC236}">
+                <a16:creationId xmlns:a16="http://schemas.microsoft.com/office/drawing/2014/main" id="{DF3F95AF-BC93-227B-F608-A0582108FDA2}"/>
+              </a:ext>
+            </a:extLst>
+          </p:cNvPr>
+          <p:cNvPicPr>
+            <a:picLocks noChangeAspect="1"/>
+          </p:cNvPicPr>
+          <p:nvPr/>
+        </p:nvPicPr>
+        <p:blipFill>
+          <a:blip r:embed="rId3"/>
+          <a:stretch>
+            <a:fillRect/>
+          </a:stretch>
+        </p:blipFill>
+        <p:spPr>
+          <a:xfrm>
+            <a:off x="3117693" y="655982"/>
+            <a:ext cx="9053032" cy="6202018"/>
+          </a:xfrm>
+          <a:prstGeom prst="rect">
+            <a:avLst/>
+          </a:prstGeom>
+        </p:spPr>
+      </p:pic>
+      <p:pic>
+        <p:nvPicPr>
+          <p:cNvPr id="8" name="Picture 7">
+            <a:extLst>
+              <a:ext uri="{FF2B5EF4-FFF2-40B4-BE49-F238E27FC236}">
+                <a16:creationId xmlns:a16="http://schemas.microsoft.com/office/drawing/2014/main" id="{B15C5632-956D-4B7B-F241-EC75DD37E277}"/>
               </a:ext>
             </a:extLst>
           </p:cNvPr>
@@ -7644,38 +8058,8 @@
         </p:blipFill>
         <p:spPr>
           <a:xfrm>
-            <a:off x="4533989" y="589060"/>
-            <a:ext cx="7631380" cy="6105108"/>
-          </a:xfrm>
-          <a:prstGeom prst="rect">
-            <a:avLst/>
-          </a:prstGeom>
-        </p:spPr>
-      </p:pic>
-      <p:pic>
-        <p:nvPicPr>
-          <p:cNvPr id="11" name="Picture 10">
-            <a:extLst>
-              <a:ext uri="{FF2B5EF4-FFF2-40B4-BE49-F238E27FC236}">
-                <a16:creationId xmlns:a16="http://schemas.microsoft.com/office/drawing/2014/main" id="{E36C09B7-4A20-30AB-03E8-EC149A51E086}"/>
-              </a:ext>
-            </a:extLst>
-          </p:cNvPr>
-          <p:cNvPicPr>
-            <a:picLocks noChangeAspect="1"/>
-          </p:cNvPicPr>
-          <p:nvPr/>
-        </p:nvPicPr>
-        <p:blipFill>
-          <a:blip r:embed="rId5"/>
-          <a:stretch>
-            <a:fillRect/>
-          </a:stretch>
-        </p:blipFill>
-        <p:spPr>
-          <a:xfrm>
-            <a:off x="4507370" y="589052"/>
-            <a:ext cx="7631372" cy="6105099"/>
+            <a:off x="3117691" y="655983"/>
+            <a:ext cx="9053032" cy="6223958"/>
           </a:xfrm>
           <a:prstGeom prst="rect">
             <a:avLst/>
@@ -7685,7 +8069,7 @@
     </p:spTree>
     <p:extLst>
       <p:ext uri="{BB962C8B-B14F-4D97-AF65-F5344CB8AC3E}">
-        <p14:creationId xmlns:p14="http://schemas.microsoft.com/office/powerpoint/2010/main" val="3896516673"/>
+        <p14:creationId xmlns:p14="http://schemas.microsoft.com/office/powerpoint/2010/main" val="1095544334"/>
       </p:ext>
     </p:extLst>
   </p:cSld>
@@ -7726,7 +8110,7 @@
                                           </p:stCondLst>
                                         </p:cTn>
                                         <p:tgtEl>
-                                          <p:spTgt spid="5"/>
+                                          <p:spTgt spid="6"/>
                                         </p:tgtEl>
                                         <p:attrNameLst>
                                           <p:attrName>style.visibility</p:attrName>
@@ -7771,97 +8155,7 @@
                                           </p:stCondLst>
                                         </p:cTn>
                                         <p:tgtEl>
-                                          <p:spTgt spid="9"/>
-                                        </p:tgtEl>
-                                        <p:attrNameLst>
-                                          <p:attrName>style.visibility</p:attrName>
-                                        </p:attrNameLst>
-                                      </p:cBhvr>
-                                      <p:to>
-                                        <p:strVal val="visible"/>
-                                      </p:to>
-                                    </p:set>
-                                  </p:childTnLst>
-                                </p:cTn>
-                              </p:par>
-                            </p:childTnLst>
-                          </p:cTn>
-                        </p:par>
-                      </p:childTnLst>
-                    </p:cTn>
-                  </p:par>
-                  <p:par>
-                    <p:cTn id="11" fill="hold">
-                      <p:stCondLst>
-                        <p:cond delay="indefinite"/>
-                      </p:stCondLst>
-                      <p:childTnLst>
-                        <p:par>
-                          <p:cTn id="12" fill="hold">
-                            <p:stCondLst>
-                              <p:cond delay="0"/>
-                            </p:stCondLst>
-                            <p:childTnLst>
-                              <p:par>
-                                <p:cTn id="13" presetID="1" presetClass="entr" presetSubtype="0" fill="hold" nodeType="clickEffect">
-                                  <p:stCondLst>
-                                    <p:cond delay="0"/>
-                                  </p:stCondLst>
-                                  <p:childTnLst>
-                                    <p:set>
-                                      <p:cBhvr>
-                                        <p:cTn id="14" dur="1" fill="hold">
-                                          <p:stCondLst>
-                                            <p:cond delay="0"/>
-                                          </p:stCondLst>
-                                        </p:cTn>
-                                        <p:tgtEl>
-                                          <p:spTgt spid="11"/>
-                                        </p:tgtEl>
-                                        <p:attrNameLst>
-                                          <p:attrName>style.visibility</p:attrName>
-                                        </p:attrNameLst>
-                                      </p:cBhvr>
-                                      <p:to>
-                                        <p:strVal val="visible"/>
-                                      </p:to>
-                                    </p:set>
-                                  </p:childTnLst>
-                                </p:cTn>
-                              </p:par>
-                            </p:childTnLst>
-                          </p:cTn>
-                        </p:par>
-                      </p:childTnLst>
-                    </p:cTn>
-                  </p:par>
-                  <p:par>
-                    <p:cTn id="15" fill="hold">
-                      <p:stCondLst>
-                        <p:cond delay="indefinite"/>
-                      </p:stCondLst>
-                      <p:childTnLst>
-                        <p:par>
-                          <p:cTn id="16" fill="hold">
-                            <p:stCondLst>
-                              <p:cond delay="0"/>
-                            </p:stCondLst>
-                            <p:childTnLst>
-                              <p:par>
-                                <p:cTn id="17" presetID="1" presetClass="entr" presetSubtype="0" fill="hold" nodeType="clickEffect">
-                                  <p:stCondLst>
-                                    <p:cond delay="0"/>
-                                  </p:stCondLst>
-                                  <p:childTnLst>
-                                    <p:set>
-                                      <p:cBhvr>
-                                        <p:cTn id="18" dur="1" fill="hold">
-                                          <p:stCondLst>
-                                            <p:cond delay="0"/>
-                                          </p:stCondLst>
-                                        </p:cTn>
-                                        <p:tgtEl>
-                                          <p:spTgt spid="11"/>
+                                          <p:spTgt spid="8"/>
                                         </p:tgtEl>
                                         <p:attrNameLst>
                                           <p:attrName>style.visibility</p:attrName>
@@ -7902,69 +8196,6 @@
       </p:par>
     </p:tnLst>
   </p:timing>
-</p:sld>
-</file>
-
-<file path=ppt/slides/slide9.xml><?xml version="1.0" encoding="utf-8"?>
-<p:sld xmlns:a="http://schemas.openxmlformats.org/drawingml/2006/main" xmlns:r="http://schemas.openxmlformats.org/officeDocument/2006/relationships" xmlns:p="http://schemas.openxmlformats.org/presentationml/2006/main">
-  <p:cSld>
-    <p:spTree>
-      <p:nvGrpSpPr>
-        <p:cNvPr id="1" name=""/>
-        <p:cNvGrpSpPr/>
-        <p:nvPr/>
-      </p:nvGrpSpPr>
-      <p:grpSpPr>
-        <a:xfrm>
-          <a:off x="0" y="0"/>
-          <a:ext cx="0" cy="0"/>
-          <a:chOff x="0" y="0"/>
-          <a:chExt cx="0" cy="0"/>
-        </a:xfrm>
-      </p:grpSpPr>
-      <p:sp>
-        <p:nvSpPr>
-          <p:cNvPr id="2" name="Title 1">
-            <a:extLst>
-              <a:ext uri="{FF2B5EF4-FFF2-40B4-BE49-F238E27FC236}">
-                <a16:creationId xmlns:a16="http://schemas.microsoft.com/office/drawing/2014/main" id="{515984D7-D2CE-D5F3-4D33-71550CF3C5CB}"/>
-              </a:ext>
-            </a:extLst>
-          </p:cNvPr>
-          <p:cNvSpPr>
-            <a:spLocks noGrp="1"/>
-          </p:cNvSpPr>
-          <p:nvPr>
-            <p:ph type="title"/>
-          </p:nvPr>
-        </p:nvSpPr>
-        <p:spPr>
-          <a:xfrm>
-            <a:off x="640079" y="1371600"/>
-            <a:ext cx="3236977" cy="2295143"/>
-          </a:xfrm>
-        </p:spPr>
-        <p:txBody>
-          <a:bodyPr/>
-          <a:lstStyle/>
-          <a:p>
-            <a:r>
-              <a:rPr lang="en-US" dirty="0"/>
-              <a:t>Lid Driven Cavity Results</a:t>
-            </a:r>
-          </a:p>
-        </p:txBody>
-      </p:sp>
-    </p:spTree>
-    <p:extLst>
-      <p:ext uri="{BB962C8B-B14F-4D97-AF65-F5344CB8AC3E}">
-        <p14:creationId xmlns:p14="http://schemas.microsoft.com/office/powerpoint/2010/main" val="1095544334"/>
-      </p:ext>
-    </p:extLst>
-  </p:cSld>
-  <p:clrMapOvr>
-    <a:masterClrMapping/>
-  </p:clrMapOvr>
 </p:sld>
 </file>
 

--- a/Presentation1.pptx
+++ b/Presentation1.pptx
@@ -4,23 +4,24 @@
   <p:sldMasterIdLst>
     <p:sldMasterId id="2147483699" r:id="rId1"/>
   </p:sldMasterIdLst>
+  <p:notesMasterIdLst>
+    <p:notesMasterId r:id="rId16"/>
+  </p:notesMasterIdLst>
   <p:sldIdLst>
     <p:sldId id="256" r:id="rId2"/>
     <p:sldId id="271" r:id="rId3"/>
-    <p:sldId id="265" r:id="rId4"/>
-    <p:sldId id="260" r:id="rId5"/>
-    <p:sldId id="257" r:id="rId6"/>
-    <p:sldId id="258" r:id="rId7"/>
-    <p:sldId id="267" r:id="rId8"/>
-    <p:sldId id="268" r:id="rId9"/>
-    <p:sldId id="261" r:id="rId10"/>
-    <p:sldId id="275" r:id="rId11"/>
-    <p:sldId id="272" r:id="rId12"/>
-    <p:sldId id="274" r:id="rId13"/>
-    <p:sldId id="262" r:id="rId14"/>
-    <p:sldId id="263" r:id="rId15"/>
-    <p:sldId id="264" r:id="rId16"/>
-    <p:sldId id="273" r:id="rId17"/>
+    <p:sldId id="258" r:id="rId4"/>
+    <p:sldId id="257" r:id="rId5"/>
+    <p:sldId id="260" r:id="rId6"/>
+    <p:sldId id="268" r:id="rId7"/>
+    <p:sldId id="261" r:id="rId8"/>
+    <p:sldId id="275" r:id="rId9"/>
+    <p:sldId id="272" r:id="rId10"/>
+    <p:sldId id="274" r:id="rId11"/>
+    <p:sldId id="262" r:id="rId12"/>
+    <p:sldId id="263" r:id="rId13"/>
+    <p:sldId id="264" r:id="rId14"/>
+    <p:sldId id="273" r:id="rId15"/>
   </p:sldIdLst>
   <p:sldSz cx="12192000" cy="6858000"/>
   <p:notesSz cx="6858000" cy="9144000"/>
@@ -127,6 +128,440 @@
 </p:presentation>
 </file>
 
+<file path=ppt/notesMasters/notesMaster1.xml><?xml version="1.0" encoding="utf-8"?>
+<p:notesMaster xmlns:a="http://schemas.openxmlformats.org/drawingml/2006/main" xmlns:r="http://schemas.openxmlformats.org/officeDocument/2006/relationships" xmlns:p="http://schemas.openxmlformats.org/presentationml/2006/main">
+  <p:cSld>
+    <p:bg>
+      <p:bgRef idx="1001">
+        <a:schemeClr val="bg1"/>
+      </p:bgRef>
+    </p:bg>
+    <p:spTree>
+      <p:nvGrpSpPr>
+        <p:cNvPr id="1" name=""/>
+        <p:cNvGrpSpPr/>
+        <p:nvPr/>
+      </p:nvGrpSpPr>
+      <p:grpSpPr>
+        <a:xfrm>
+          <a:off x="0" y="0"/>
+          <a:ext cx="0" cy="0"/>
+          <a:chOff x="0" y="0"/>
+          <a:chExt cx="0" cy="0"/>
+        </a:xfrm>
+      </p:grpSpPr>
+      <p:sp>
+        <p:nvSpPr>
+          <p:cNvPr id="2" name="Header Placeholder 1"/>
+          <p:cNvSpPr>
+            <a:spLocks noGrp="1"/>
+          </p:cNvSpPr>
+          <p:nvPr>
+            <p:ph type="hdr" sz="quarter"/>
+          </p:nvPr>
+        </p:nvSpPr>
+        <p:spPr>
+          <a:xfrm>
+            <a:off x="0" y="0"/>
+            <a:ext cx="2971800" cy="458788"/>
+          </a:xfrm>
+          <a:prstGeom prst="rect">
+            <a:avLst/>
+          </a:prstGeom>
+        </p:spPr>
+        <p:txBody>
+          <a:bodyPr vert="horz" lIns="91440" tIns="45720" rIns="91440" bIns="45720" rtlCol="0"/>
+          <a:lstStyle>
+            <a:lvl1pPr algn="l">
+              <a:defRPr sz="1200"/>
+            </a:lvl1pPr>
+          </a:lstStyle>
+          <a:p>
+            <a:endParaRPr lang="en-US"/>
+          </a:p>
+        </p:txBody>
+      </p:sp>
+      <p:sp>
+        <p:nvSpPr>
+          <p:cNvPr id="3" name="Date Placeholder 2"/>
+          <p:cNvSpPr>
+            <a:spLocks noGrp="1"/>
+          </p:cNvSpPr>
+          <p:nvPr>
+            <p:ph type="dt" idx="1"/>
+          </p:nvPr>
+        </p:nvSpPr>
+        <p:spPr>
+          <a:xfrm>
+            <a:off x="3884613" y="0"/>
+            <a:ext cx="2971800" cy="458788"/>
+          </a:xfrm>
+          <a:prstGeom prst="rect">
+            <a:avLst/>
+          </a:prstGeom>
+        </p:spPr>
+        <p:txBody>
+          <a:bodyPr vert="horz" lIns="91440" tIns="45720" rIns="91440" bIns="45720" rtlCol="0"/>
+          <a:lstStyle>
+            <a:lvl1pPr algn="r">
+              <a:defRPr sz="1200"/>
+            </a:lvl1pPr>
+          </a:lstStyle>
+          <a:p>
+            <a:fld id="{E636CCAA-7520-2C44-BCD8-0C95CAB14863}" type="datetimeFigureOut">
+              <a:rPr lang="en-US" smtClean="0"/>
+              <a:t>6/3/26</a:t>
+            </a:fld>
+            <a:endParaRPr lang="en-US"/>
+          </a:p>
+        </p:txBody>
+      </p:sp>
+      <p:sp>
+        <p:nvSpPr>
+          <p:cNvPr id="4" name="Slide Image Placeholder 3"/>
+          <p:cNvSpPr>
+            <a:spLocks noGrp="1" noRot="1" noChangeAspect="1"/>
+          </p:cNvSpPr>
+          <p:nvPr>
+            <p:ph type="sldImg" idx="2"/>
+          </p:nvPr>
+        </p:nvSpPr>
+        <p:spPr>
+          <a:xfrm>
+            <a:off x="685800" y="1143000"/>
+            <a:ext cx="5486400" cy="3086100"/>
+          </a:xfrm>
+          <a:prstGeom prst="rect">
+            <a:avLst/>
+          </a:prstGeom>
+          <a:noFill/>
+          <a:ln w="12700">
+            <a:solidFill>
+              <a:prstClr val="black"/>
+            </a:solidFill>
+          </a:ln>
+        </p:spPr>
+        <p:txBody>
+          <a:bodyPr vert="horz" lIns="91440" tIns="45720" rIns="91440" bIns="45720" rtlCol="0" anchor="ctr"/>
+          <a:lstStyle/>
+          <a:p>
+            <a:endParaRPr lang="en-US"/>
+          </a:p>
+        </p:txBody>
+      </p:sp>
+      <p:sp>
+        <p:nvSpPr>
+          <p:cNvPr id="5" name="Notes Placeholder 4"/>
+          <p:cNvSpPr>
+            <a:spLocks noGrp="1"/>
+          </p:cNvSpPr>
+          <p:nvPr>
+            <p:ph type="body" sz="quarter" idx="3"/>
+          </p:nvPr>
+        </p:nvSpPr>
+        <p:spPr>
+          <a:xfrm>
+            <a:off x="685800" y="4400550"/>
+            <a:ext cx="5486400" cy="3600450"/>
+          </a:xfrm>
+          <a:prstGeom prst="rect">
+            <a:avLst/>
+          </a:prstGeom>
+        </p:spPr>
+        <p:txBody>
+          <a:bodyPr vert="horz" lIns="91440" tIns="45720" rIns="91440" bIns="45720" rtlCol="0"/>
+          <a:lstStyle/>
+          <a:p>
+            <a:pPr lvl="0"/>
+            <a:r>
+              <a:rPr lang="en-GB"/>
+              <a:t>Click to edit Master text styles</a:t>
+            </a:r>
+          </a:p>
+          <a:p>
+            <a:pPr lvl="1"/>
+            <a:r>
+              <a:rPr lang="en-GB"/>
+              <a:t>Second level</a:t>
+            </a:r>
+          </a:p>
+          <a:p>
+            <a:pPr lvl="2"/>
+            <a:r>
+              <a:rPr lang="en-GB"/>
+              <a:t>Third level</a:t>
+            </a:r>
+          </a:p>
+          <a:p>
+            <a:pPr lvl="3"/>
+            <a:r>
+              <a:rPr lang="en-GB"/>
+              <a:t>Fourth level</a:t>
+            </a:r>
+          </a:p>
+          <a:p>
+            <a:pPr lvl="4"/>
+            <a:r>
+              <a:rPr lang="en-GB"/>
+              <a:t>Fifth level</a:t>
+            </a:r>
+            <a:endParaRPr lang="en-US"/>
+          </a:p>
+        </p:txBody>
+      </p:sp>
+      <p:sp>
+        <p:nvSpPr>
+          <p:cNvPr id="6" name="Footer Placeholder 5"/>
+          <p:cNvSpPr>
+            <a:spLocks noGrp="1"/>
+          </p:cNvSpPr>
+          <p:nvPr>
+            <p:ph type="ftr" sz="quarter" idx="4"/>
+          </p:nvPr>
+        </p:nvSpPr>
+        <p:spPr>
+          <a:xfrm>
+            <a:off x="0" y="8685213"/>
+            <a:ext cx="2971800" cy="458787"/>
+          </a:xfrm>
+          <a:prstGeom prst="rect">
+            <a:avLst/>
+          </a:prstGeom>
+        </p:spPr>
+        <p:txBody>
+          <a:bodyPr vert="horz" lIns="91440" tIns="45720" rIns="91440" bIns="45720" rtlCol="0" anchor="b"/>
+          <a:lstStyle>
+            <a:lvl1pPr algn="l">
+              <a:defRPr sz="1200"/>
+            </a:lvl1pPr>
+          </a:lstStyle>
+          <a:p>
+            <a:endParaRPr lang="en-US"/>
+          </a:p>
+        </p:txBody>
+      </p:sp>
+      <p:sp>
+        <p:nvSpPr>
+          <p:cNvPr id="7" name="Slide Number Placeholder 6"/>
+          <p:cNvSpPr>
+            <a:spLocks noGrp="1"/>
+          </p:cNvSpPr>
+          <p:nvPr>
+            <p:ph type="sldNum" sz="quarter" idx="5"/>
+          </p:nvPr>
+        </p:nvSpPr>
+        <p:spPr>
+          <a:xfrm>
+            <a:off x="3884613" y="8685213"/>
+            <a:ext cx="2971800" cy="458787"/>
+          </a:xfrm>
+          <a:prstGeom prst="rect">
+            <a:avLst/>
+          </a:prstGeom>
+        </p:spPr>
+        <p:txBody>
+          <a:bodyPr vert="horz" lIns="91440" tIns="45720" rIns="91440" bIns="45720" rtlCol="0" anchor="b"/>
+          <a:lstStyle>
+            <a:lvl1pPr algn="r">
+              <a:defRPr sz="1200"/>
+            </a:lvl1pPr>
+          </a:lstStyle>
+          <a:p>
+            <a:fld id="{CB04A9B6-AF14-014D-87C3-238F7623C25D}" type="slidenum">
+              <a:rPr lang="en-US" smtClean="0"/>
+              <a:t>‹#›</a:t>
+            </a:fld>
+            <a:endParaRPr lang="en-US"/>
+          </a:p>
+        </p:txBody>
+      </p:sp>
+    </p:spTree>
+    <p:extLst>
+      <p:ext uri="{BB962C8B-B14F-4D97-AF65-F5344CB8AC3E}">
+        <p14:creationId xmlns:p14="http://schemas.microsoft.com/office/powerpoint/2010/main" val="442110791"/>
+      </p:ext>
+    </p:extLst>
+  </p:cSld>
+  <p:clrMap bg1="lt1" tx1="dk1" bg2="lt2" tx2="dk2" accent1="accent1" accent2="accent2" accent3="accent3" accent4="accent4" accent5="accent5" accent6="accent6" hlink="hlink" folHlink="folHlink"/>
+  <p:notesStyle>
+    <a:lvl1pPr marL="0" algn="l" defTabSz="914400" rtl="0" eaLnBrk="1" latinLnBrk="0" hangingPunct="1">
+      <a:defRPr sz="1200" kern="1200">
+        <a:solidFill>
+          <a:schemeClr val="tx1"/>
+        </a:solidFill>
+        <a:latin typeface="+mn-lt"/>
+        <a:ea typeface="+mn-ea"/>
+        <a:cs typeface="+mn-cs"/>
+      </a:defRPr>
+    </a:lvl1pPr>
+    <a:lvl2pPr marL="457200" algn="l" defTabSz="914400" rtl="0" eaLnBrk="1" latinLnBrk="0" hangingPunct="1">
+      <a:defRPr sz="1200" kern="1200">
+        <a:solidFill>
+          <a:schemeClr val="tx1"/>
+        </a:solidFill>
+        <a:latin typeface="+mn-lt"/>
+        <a:ea typeface="+mn-ea"/>
+        <a:cs typeface="+mn-cs"/>
+      </a:defRPr>
+    </a:lvl2pPr>
+    <a:lvl3pPr marL="914400" algn="l" defTabSz="914400" rtl="0" eaLnBrk="1" latinLnBrk="0" hangingPunct="1">
+      <a:defRPr sz="1200" kern="1200">
+        <a:solidFill>
+          <a:schemeClr val="tx1"/>
+        </a:solidFill>
+        <a:latin typeface="+mn-lt"/>
+        <a:ea typeface="+mn-ea"/>
+        <a:cs typeface="+mn-cs"/>
+      </a:defRPr>
+    </a:lvl3pPr>
+    <a:lvl4pPr marL="1371600" algn="l" defTabSz="914400" rtl="0" eaLnBrk="1" latinLnBrk="0" hangingPunct="1">
+      <a:defRPr sz="1200" kern="1200">
+        <a:solidFill>
+          <a:schemeClr val="tx1"/>
+        </a:solidFill>
+        <a:latin typeface="+mn-lt"/>
+        <a:ea typeface="+mn-ea"/>
+        <a:cs typeface="+mn-cs"/>
+      </a:defRPr>
+    </a:lvl4pPr>
+    <a:lvl5pPr marL="1828800" algn="l" defTabSz="914400" rtl="0" eaLnBrk="1" latinLnBrk="0" hangingPunct="1">
+      <a:defRPr sz="1200" kern="1200">
+        <a:solidFill>
+          <a:schemeClr val="tx1"/>
+        </a:solidFill>
+        <a:latin typeface="+mn-lt"/>
+        <a:ea typeface="+mn-ea"/>
+        <a:cs typeface="+mn-cs"/>
+      </a:defRPr>
+    </a:lvl5pPr>
+    <a:lvl6pPr marL="2286000" algn="l" defTabSz="914400" rtl="0" eaLnBrk="1" latinLnBrk="0" hangingPunct="1">
+      <a:defRPr sz="1200" kern="1200">
+        <a:solidFill>
+          <a:schemeClr val="tx1"/>
+        </a:solidFill>
+        <a:latin typeface="+mn-lt"/>
+        <a:ea typeface="+mn-ea"/>
+        <a:cs typeface="+mn-cs"/>
+      </a:defRPr>
+    </a:lvl6pPr>
+    <a:lvl7pPr marL="2743200" algn="l" defTabSz="914400" rtl="0" eaLnBrk="1" latinLnBrk="0" hangingPunct="1">
+      <a:defRPr sz="1200" kern="1200">
+        <a:solidFill>
+          <a:schemeClr val="tx1"/>
+        </a:solidFill>
+        <a:latin typeface="+mn-lt"/>
+        <a:ea typeface="+mn-ea"/>
+        <a:cs typeface="+mn-cs"/>
+      </a:defRPr>
+    </a:lvl7pPr>
+    <a:lvl8pPr marL="3200400" algn="l" defTabSz="914400" rtl="0" eaLnBrk="1" latinLnBrk="0" hangingPunct="1">
+      <a:defRPr sz="1200" kern="1200">
+        <a:solidFill>
+          <a:schemeClr val="tx1"/>
+        </a:solidFill>
+        <a:latin typeface="+mn-lt"/>
+        <a:ea typeface="+mn-ea"/>
+        <a:cs typeface="+mn-cs"/>
+      </a:defRPr>
+    </a:lvl8pPr>
+    <a:lvl9pPr marL="3657600" algn="l" defTabSz="914400" rtl="0" eaLnBrk="1" latinLnBrk="0" hangingPunct="1">
+      <a:defRPr sz="1200" kern="1200">
+        <a:solidFill>
+          <a:schemeClr val="tx1"/>
+        </a:solidFill>
+        <a:latin typeface="+mn-lt"/>
+        <a:ea typeface="+mn-ea"/>
+        <a:cs typeface="+mn-cs"/>
+      </a:defRPr>
+    </a:lvl9pPr>
+  </p:notesStyle>
+</p:notesMaster>
+</file>
+
+<file path=ppt/notesSlides/notesSlide1.xml><?xml version="1.0" encoding="utf-8"?>
+<p:notes xmlns:a="http://schemas.openxmlformats.org/drawingml/2006/main" xmlns:r="http://schemas.openxmlformats.org/officeDocument/2006/relationships" xmlns:p="http://schemas.openxmlformats.org/presentationml/2006/main">
+  <p:cSld>
+    <p:spTree>
+      <p:nvGrpSpPr>
+        <p:cNvPr id="1" name=""/>
+        <p:cNvGrpSpPr/>
+        <p:nvPr/>
+      </p:nvGrpSpPr>
+      <p:grpSpPr>
+        <a:xfrm>
+          <a:off x="0" y="0"/>
+          <a:ext cx="0" cy="0"/>
+          <a:chOff x="0" y="0"/>
+          <a:chExt cx="0" cy="0"/>
+        </a:xfrm>
+      </p:grpSpPr>
+      <p:sp>
+        <p:nvSpPr>
+          <p:cNvPr id="2" name="Slide Image Placeholder 1"/>
+          <p:cNvSpPr>
+            <a:spLocks noGrp="1" noRot="1" noChangeAspect="1"/>
+          </p:cNvSpPr>
+          <p:nvPr>
+            <p:ph type="sldImg"/>
+          </p:nvPr>
+        </p:nvSpPr>
+        <p:spPr/>
+      </p:sp>
+      <p:sp>
+        <p:nvSpPr>
+          <p:cNvPr id="3" name="Notes Placeholder 2"/>
+          <p:cNvSpPr>
+            <a:spLocks noGrp="1"/>
+          </p:cNvSpPr>
+          <p:nvPr>
+            <p:ph type="body" idx="1"/>
+          </p:nvPr>
+        </p:nvSpPr>
+        <p:spPr/>
+        <p:txBody>
+          <a:bodyPr/>
+          <a:lstStyle/>
+          <a:p>
+            <a:endParaRPr lang="en-US" dirty="0"/>
+          </a:p>
+        </p:txBody>
+      </p:sp>
+      <p:sp>
+        <p:nvSpPr>
+          <p:cNvPr id="4" name="Slide Number Placeholder 3"/>
+          <p:cNvSpPr>
+            <a:spLocks noGrp="1"/>
+          </p:cNvSpPr>
+          <p:nvPr>
+            <p:ph type="sldNum" sz="quarter" idx="5"/>
+          </p:nvPr>
+        </p:nvSpPr>
+        <p:spPr/>
+        <p:txBody>
+          <a:bodyPr/>
+          <a:lstStyle/>
+          <a:p>
+            <a:fld id="{CB04A9B6-AF14-014D-87C3-238F7623C25D}" type="slidenum">
+              <a:rPr lang="en-US" smtClean="0"/>
+              <a:t>12</a:t>
+            </a:fld>
+            <a:endParaRPr lang="en-US"/>
+          </a:p>
+        </p:txBody>
+      </p:sp>
+    </p:spTree>
+    <p:extLst>
+      <p:ext uri="{BB962C8B-B14F-4D97-AF65-F5344CB8AC3E}">
+        <p14:creationId xmlns:p14="http://schemas.microsoft.com/office/powerpoint/2010/main" val="3511445299"/>
+      </p:ext>
+    </p:extLst>
+  </p:cSld>
+  <p:clrMapOvr>
+    <a:masterClrMapping/>
+  </p:clrMapOvr>
+</p:notes>
+</file>
+
 <file path=ppt/slideLayouts/slideLayout1.xml><?xml version="1.0" encoding="utf-8"?>
 <p:sldLayout xmlns:a="http://schemas.openxmlformats.org/drawingml/2006/main" xmlns:r="http://schemas.openxmlformats.org/officeDocument/2006/relationships" xmlns:p="http://schemas.openxmlformats.org/presentationml/2006/main" type="title" preserve="1">
   <p:cSld name="Title Slide">
@@ -283,7 +718,7 @@
           <a:p>
             <a:fld id="{6444479B-705B-4489-957E-7E8A228BDFA0}" type="datetime1">
               <a:rPr lang="en-US" smtClean="0"/>
-              <a:t>5/28/26</a:t>
+              <a:t>6/2/26</a:t>
             </a:fld>
             <a:endParaRPr lang="en-US"/>
           </a:p>
@@ -483,7 +918,7 @@
           <a:p>
             <a:fld id="{C07B66AD-7C08-490A-ADA4-B47E10FB2407}" type="datetime1">
               <a:rPr lang="en-US" smtClean="0"/>
-              <a:t>5/28/26</a:t>
+              <a:t>6/2/26</a:t>
             </a:fld>
             <a:endParaRPr lang="en-US"/>
           </a:p>
@@ -742,7 +1177,7 @@
           <a:p>
             <a:fld id="{05B95027-4255-49E7-9841-CD21BCC99996}" type="datetime1">
               <a:rPr lang="en-US" smtClean="0"/>
-              <a:t>5/28/26</a:t>
+              <a:t>6/2/26</a:t>
             </a:fld>
             <a:endParaRPr lang="en-US"/>
           </a:p>
@@ -983,7 +1418,7 @@
           <a:p>
             <a:fld id="{9F89F774-3FA6-43B8-9241-99959C8FD463}" type="datetime1">
               <a:rPr lang="en-US" smtClean="0"/>
-              <a:t>5/28/26</a:t>
+              <a:t>6/2/26</a:t>
             </a:fld>
             <a:endParaRPr lang="en-US"/>
           </a:p>
@@ -1310,7 +1745,7 @@
           <a:p>
             <a:fld id="{F9504452-5DCC-4FE2-A5C9-8A5EF6714D65}" type="datetime1">
               <a:rPr lang="en-US" smtClean="0"/>
-              <a:t>5/28/26</a:t>
+              <a:t>6/2/26</a:t>
             </a:fld>
             <a:endParaRPr lang="en-US"/>
           </a:p>
@@ -1620,7 +2055,7 @@
           <a:p>
             <a:fld id="{E579ABC2-0180-4F3A-A895-A85BC724D472}" type="datetime1">
               <a:rPr lang="en-US" smtClean="0"/>
-              <a:t>5/28/26</a:t>
+              <a:t>6/2/26</a:t>
             </a:fld>
             <a:endParaRPr lang="en-US"/>
           </a:p>
@@ -2038,7 +2473,7 @@
           <a:p>
             <a:fld id="{6AEEA9BA-4E8F-439E-BEA4-91FBA01E3F5F}" type="datetime1">
               <a:rPr lang="en-US" smtClean="0"/>
-              <a:t>5/28/26</a:t>
+              <a:t>6/2/26</a:t>
             </a:fld>
             <a:endParaRPr lang="en-US"/>
           </a:p>
@@ -2180,7 +2615,7 @@
           <a:p>
             <a:fld id="{BE15BF18-0007-481C-AA29-413124BC3EE7}" type="datetime1">
               <a:rPr lang="en-US" smtClean="0"/>
-              <a:t>5/28/26</a:t>
+              <a:t>6/2/26</a:t>
             </a:fld>
             <a:endParaRPr lang="en-US"/>
           </a:p>
@@ -2342,7 +2777,7 @@
           <a:p>
             <a:fld id="{09BE9870-3748-43AD-B547-02A075CB4A1D}" type="datetime1">
               <a:rPr lang="en-US" smtClean="0"/>
-              <a:t>5/28/26</a:t>
+              <a:t>6/2/26</a:t>
             </a:fld>
             <a:endParaRPr lang="en-US"/>
           </a:p>
@@ -2659,7 +3094,7 @@
           <a:p>
             <a:fld id="{558E7897-33C5-4F1A-9307-D068E37F3DC7}" type="datetime1">
               <a:rPr lang="en-US" smtClean="0"/>
-              <a:t>5/28/26</a:t>
+              <a:t>6/2/26</a:t>
             </a:fld>
             <a:endParaRPr lang="en-US"/>
           </a:p>
@@ -2954,7 +3389,7 @@
           <a:p>
             <a:fld id="{82E171BA-CC09-47C8-A6DF-F5C5CB59CEEC}" type="datetime1">
               <a:rPr lang="en-US" smtClean="0"/>
-              <a:t>5/28/26</a:t>
+              <a:t>6/2/26</a:t>
             </a:fld>
             <a:endParaRPr lang="en-US"/>
           </a:p>
@@ -3195,7 +3630,7 @@
           <a:p>
             <a:fld id="{7DA38F49-B3E2-4BF0-BEC7-C30D34ABBB8D}" type="datetime1">
               <a:rPr lang="en-US" smtClean="0"/>
-              <a:t>5/28/26</a:t>
+              <a:t>6/2/26</a:t>
             </a:fld>
             <a:endParaRPr lang="en-US"/>
           </a:p>
@@ -4049,395 +4484,6 @@
           <a:chExt cx="0" cy="0"/>
         </a:xfrm>
       </p:grpSpPr>
-      <p:pic>
-        <p:nvPicPr>
-          <p:cNvPr id="5" name="Content Placeholder 4">
-            <a:extLst>
-              <a:ext uri="{FF2B5EF4-FFF2-40B4-BE49-F238E27FC236}">
-                <a16:creationId xmlns:a16="http://schemas.microsoft.com/office/drawing/2014/main" id="{363064F7-C31C-C697-7A86-A1E5E667BEE5}"/>
-              </a:ext>
-            </a:extLst>
-          </p:cNvPr>
-          <p:cNvPicPr>
-            <a:picLocks noGrp="1" noChangeAspect="1"/>
-          </p:cNvPicPr>
-          <p:nvPr>
-            <p:ph idx="1"/>
-          </p:nvPr>
-        </p:nvPicPr>
-        <p:blipFill>
-          <a:blip r:embed="rId2"/>
-          <a:stretch>
-            <a:fillRect/>
-          </a:stretch>
-        </p:blipFill>
-        <p:spPr>
-          <a:xfrm>
-            <a:off x="3390481" y="818985"/>
-            <a:ext cx="8133852" cy="5380204"/>
-          </a:xfrm>
-          <a:prstGeom prst="rect">
-            <a:avLst/>
-          </a:prstGeom>
-        </p:spPr>
-      </p:pic>
-      <p:sp>
-        <p:nvSpPr>
-          <p:cNvPr id="6" name="Title 1">
-            <a:extLst>
-              <a:ext uri="{FF2B5EF4-FFF2-40B4-BE49-F238E27FC236}">
-                <a16:creationId xmlns:a16="http://schemas.microsoft.com/office/drawing/2014/main" id="{460AA165-C119-1ED7-6F4E-A8F2F3ED3FEE}"/>
-              </a:ext>
-            </a:extLst>
-          </p:cNvPr>
-          <p:cNvSpPr txBox="1">
-            <a:spLocks/>
-          </p:cNvSpPr>
-          <p:nvPr/>
-        </p:nvSpPr>
-        <p:spPr>
-          <a:xfrm>
-            <a:off x="640079" y="1371600"/>
-            <a:ext cx="3236977" cy="2295143"/>
-          </a:xfrm>
-          <a:prstGeom prst="rect">
-            <a:avLst/>
-          </a:prstGeom>
-        </p:spPr>
-        <p:txBody>
-          <a:bodyPr vert="horz" lIns="91440" tIns="45720" rIns="91440" bIns="45720" rtlCol="0" anchor="t">
-            <a:normAutofit/>
-          </a:bodyPr>
-          <a:lstStyle>
-            <a:lvl1pPr algn="l" defTabSz="914400" rtl="0" eaLnBrk="1" latinLnBrk="0" hangingPunct="1">
-              <a:lnSpc>
-                <a:spcPct val="100000"/>
-              </a:lnSpc>
-              <a:spcBef>
-                <a:spcPct val="0"/>
-              </a:spcBef>
-              <a:buNone/>
-              <a:defRPr sz="4000" b="1" kern="1200">
-                <a:solidFill>
-                  <a:schemeClr val="tx1"/>
-                </a:solidFill>
-                <a:latin typeface="+mj-lt"/>
-                <a:ea typeface="+mj-ea"/>
-                <a:cs typeface="+mj-cs"/>
-              </a:defRPr>
-            </a:lvl1pPr>
-          </a:lstStyle>
-          <a:p>
-            <a:r>
-              <a:rPr lang="en-US" dirty="0"/>
-              <a:t>Lid Driven Cavity Results</a:t>
-            </a:r>
-          </a:p>
-        </p:txBody>
-      </p:sp>
-    </p:spTree>
-    <p:extLst>
-      <p:ext uri="{BB962C8B-B14F-4D97-AF65-F5344CB8AC3E}">
-        <p14:creationId xmlns:p14="http://schemas.microsoft.com/office/powerpoint/2010/main" val="3140568401"/>
-      </p:ext>
-    </p:extLst>
-  </p:cSld>
-  <p:clrMapOvr>
-    <a:masterClrMapping/>
-  </p:clrMapOvr>
-</p:sld>
-</file>
-
-<file path=ppt/slides/slide11.xml><?xml version="1.0" encoding="utf-8"?>
-<p:sld xmlns:a="http://schemas.openxmlformats.org/drawingml/2006/main" xmlns:r="http://schemas.openxmlformats.org/officeDocument/2006/relationships" xmlns:p="http://schemas.openxmlformats.org/presentationml/2006/main">
-  <p:cSld>
-    <p:spTree>
-      <p:nvGrpSpPr>
-        <p:cNvPr id="1" name=""/>
-        <p:cNvGrpSpPr/>
-        <p:nvPr/>
-      </p:nvGrpSpPr>
-      <p:grpSpPr>
-        <a:xfrm>
-          <a:off x="0" y="0"/>
-          <a:ext cx="0" cy="0"/>
-          <a:chOff x="0" y="0"/>
-          <a:chExt cx="0" cy="0"/>
-        </a:xfrm>
-      </p:grpSpPr>
-      <p:sp>
-        <p:nvSpPr>
-          <p:cNvPr id="2" name="Title 1">
-            <a:extLst>
-              <a:ext uri="{FF2B5EF4-FFF2-40B4-BE49-F238E27FC236}">
-                <a16:creationId xmlns:a16="http://schemas.microsoft.com/office/drawing/2014/main" id="{157AB1D0-D432-0681-DC5F-EC7CBCF7AC41}"/>
-              </a:ext>
-            </a:extLst>
-          </p:cNvPr>
-          <p:cNvSpPr>
-            <a:spLocks noGrp="1"/>
-          </p:cNvSpPr>
-          <p:nvPr>
-            <p:ph type="title"/>
-          </p:nvPr>
-        </p:nvSpPr>
-        <p:spPr>
-          <a:xfrm>
-            <a:off x="2257864" y="125205"/>
-            <a:ext cx="9476936" cy="2688335"/>
-          </a:xfrm>
-        </p:spPr>
-        <p:txBody>
-          <a:bodyPr/>
-          <a:lstStyle/>
-          <a:p>
-            <a:r>
-              <a:rPr lang="en-US" dirty="0"/>
-              <a:t>Backward-Facing Step Results</a:t>
-            </a:r>
-          </a:p>
-        </p:txBody>
-      </p:sp>
-      <p:pic>
-        <p:nvPicPr>
-          <p:cNvPr id="5" name="Picture 4">
-            <a:extLst>
-              <a:ext uri="{FF2B5EF4-FFF2-40B4-BE49-F238E27FC236}">
-                <a16:creationId xmlns:a16="http://schemas.microsoft.com/office/drawing/2014/main" id="{279C47A1-DEA1-3AC2-AEF0-142064BBA1BE}"/>
-              </a:ext>
-            </a:extLst>
-          </p:cNvPr>
-          <p:cNvPicPr>
-            <a:picLocks noChangeAspect="1"/>
-          </p:cNvPicPr>
-          <p:nvPr/>
-        </p:nvPicPr>
-        <p:blipFill>
-          <a:blip r:embed="rId2"/>
-          <a:stretch>
-            <a:fillRect/>
-          </a:stretch>
-        </p:blipFill>
-        <p:spPr>
-          <a:xfrm>
-            <a:off x="89891" y="1079646"/>
-            <a:ext cx="12012218" cy="5791200"/>
-          </a:xfrm>
-          <a:prstGeom prst="rect">
-            <a:avLst/>
-          </a:prstGeom>
-        </p:spPr>
-      </p:pic>
-      <p:pic>
-        <p:nvPicPr>
-          <p:cNvPr id="7" name="Picture 6">
-            <a:extLst>
-              <a:ext uri="{FF2B5EF4-FFF2-40B4-BE49-F238E27FC236}">
-                <a16:creationId xmlns:a16="http://schemas.microsoft.com/office/drawing/2014/main" id="{658246FF-74D8-7D84-C772-E6ED9F448A1F}"/>
-              </a:ext>
-            </a:extLst>
-          </p:cNvPr>
-          <p:cNvPicPr>
-            <a:picLocks noChangeAspect="1"/>
-          </p:cNvPicPr>
-          <p:nvPr/>
-        </p:nvPicPr>
-        <p:blipFill>
-          <a:blip r:embed="rId3"/>
-          <a:stretch>
-            <a:fillRect/>
-          </a:stretch>
-        </p:blipFill>
-        <p:spPr>
-          <a:xfrm>
-            <a:off x="0" y="985656"/>
-            <a:ext cx="12102109" cy="5829048"/>
-          </a:xfrm>
-          <a:prstGeom prst="rect">
-            <a:avLst/>
-          </a:prstGeom>
-        </p:spPr>
-      </p:pic>
-      <p:pic>
-        <p:nvPicPr>
-          <p:cNvPr id="9" name="Picture 8">
-            <a:extLst>
-              <a:ext uri="{FF2B5EF4-FFF2-40B4-BE49-F238E27FC236}">
-                <a16:creationId xmlns:a16="http://schemas.microsoft.com/office/drawing/2014/main" id="{1A86C0FF-A705-B78C-03F6-F4561D2F6C8E}"/>
-              </a:ext>
-            </a:extLst>
-          </p:cNvPr>
-          <p:cNvPicPr>
-            <a:picLocks noChangeAspect="1"/>
-          </p:cNvPicPr>
-          <p:nvPr/>
-        </p:nvPicPr>
-        <p:blipFill>
-          <a:blip r:embed="rId4"/>
-          <a:stretch>
-            <a:fillRect/>
-          </a:stretch>
-        </p:blipFill>
-        <p:spPr>
-          <a:xfrm>
-            <a:off x="44945" y="985656"/>
-            <a:ext cx="12012218" cy="5785753"/>
-          </a:xfrm>
-          <a:prstGeom prst="rect">
-            <a:avLst/>
-          </a:prstGeom>
-        </p:spPr>
-      </p:pic>
-    </p:spTree>
-    <p:extLst>
-      <p:ext uri="{BB962C8B-B14F-4D97-AF65-F5344CB8AC3E}">
-        <p14:creationId xmlns:p14="http://schemas.microsoft.com/office/powerpoint/2010/main" val="2537628197"/>
-      </p:ext>
-    </p:extLst>
-  </p:cSld>
-  <p:clrMapOvr>
-    <a:masterClrMapping/>
-  </p:clrMapOvr>
-  <p:timing>
-    <p:tnLst>
-      <p:par>
-        <p:cTn id="1" dur="indefinite" restart="never" nodeType="tmRoot">
-          <p:childTnLst>
-            <p:seq concurrent="1" nextAc="seek">
-              <p:cTn id="2" dur="indefinite" nodeType="mainSeq">
-                <p:childTnLst>
-                  <p:par>
-                    <p:cTn id="3" fill="hold">
-                      <p:stCondLst>
-                        <p:cond delay="indefinite"/>
-                      </p:stCondLst>
-                      <p:childTnLst>
-                        <p:par>
-                          <p:cTn id="4" fill="hold">
-                            <p:stCondLst>
-                              <p:cond delay="0"/>
-                            </p:stCondLst>
-                            <p:childTnLst>
-                              <p:par>
-                                <p:cTn id="5" presetID="1" presetClass="entr" presetSubtype="0" fill="hold" nodeType="clickEffect">
-                                  <p:stCondLst>
-                                    <p:cond delay="0"/>
-                                  </p:stCondLst>
-                                  <p:childTnLst>
-                                    <p:set>
-                                      <p:cBhvr>
-                                        <p:cTn id="6" dur="1" fill="hold">
-                                          <p:stCondLst>
-                                            <p:cond delay="0"/>
-                                          </p:stCondLst>
-                                        </p:cTn>
-                                        <p:tgtEl>
-                                          <p:spTgt spid="7"/>
-                                        </p:tgtEl>
-                                        <p:attrNameLst>
-                                          <p:attrName>style.visibility</p:attrName>
-                                        </p:attrNameLst>
-                                      </p:cBhvr>
-                                      <p:to>
-                                        <p:strVal val="visible"/>
-                                      </p:to>
-                                    </p:set>
-                                  </p:childTnLst>
-                                </p:cTn>
-                              </p:par>
-                            </p:childTnLst>
-                          </p:cTn>
-                        </p:par>
-                      </p:childTnLst>
-                    </p:cTn>
-                  </p:par>
-                  <p:par>
-                    <p:cTn id="7" fill="hold">
-                      <p:stCondLst>
-                        <p:cond delay="indefinite"/>
-                      </p:stCondLst>
-                      <p:childTnLst>
-                        <p:par>
-                          <p:cTn id="8" fill="hold">
-                            <p:stCondLst>
-                              <p:cond delay="0"/>
-                            </p:stCondLst>
-                            <p:childTnLst>
-                              <p:par>
-                                <p:cTn id="9" presetID="1" presetClass="entr" presetSubtype="0" fill="hold" nodeType="clickEffect">
-                                  <p:stCondLst>
-                                    <p:cond delay="0"/>
-                                  </p:stCondLst>
-                                  <p:childTnLst>
-                                    <p:set>
-                                      <p:cBhvr>
-                                        <p:cTn id="10" dur="1" fill="hold">
-                                          <p:stCondLst>
-                                            <p:cond delay="0"/>
-                                          </p:stCondLst>
-                                        </p:cTn>
-                                        <p:tgtEl>
-                                          <p:spTgt spid="9"/>
-                                        </p:tgtEl>
-                                        <p:attrNameLst>
-                                          <p:attrName>style.visibility</p:attrName>
-                                        </p:attrNameLst>
-                                      </p:cBhvr>
-                                      <p:to>
-                                        <p:strVal val="visible"/>
-                                      </p:to>
-                                    </p:set>
-                                  </p:childTnLst>
-                                </p:cTn>
-                              </p:par>
-                            </p:childTnLst>
-                          </p:cTn>
-                        </p:par>
-                      </p:childTnLst>
-                    </p:cTn>
-                  </p:par>
-                </p:childTnLst>
-              </p:cTn>
-              <p:prevCondLst>
-                <p:cond evt="onPrev" delay="0">
-                  <p:tgtEl>
-                    <p:sldTgt/>
-                  </p:tgtEl>
-                </p:cond>
-              </p:prevCondLst>
-              <p:nextCondLst>
-                <p:cond evt="onNext" delay="0">
-                  <p:tgtEl>
-                    <p:sldTgt/>
-                  </p:tgtEl>
-                </p:cond>
-              </p:nextCondLst>
-            </p:seq>
-          </p:childTnLst>
-        </p:cTn>
-      </p:par>
-    </p:tnLst>
-  </p:timing>
-</p:sld>
-</file>
-
-<file path=ppt/slides/slide12.xml><?xml version="1.0" encoding="utf-8"?>
-<p:sld xmlns:a="http://schemas.openxmlformats.org/drawingml/2006/main" xmlns:r="http://schemas.openxmlformats.org/officeDocument/2006/relationships" xmlns:p="http://schemas.openxmlformats.org/presentationml/2006/main">
-  <p:cSld>
-    <p:spTree>
-      <p:nvGrpSpPr>
-        <p:cNvPr id="1" name=""/>
-        <p:cNvGrpSpPr/>
-        <p:nvPr/>
-      </p:nvGrpSpPr>
-      <p:grpSpPr>
-        <a:xfrm>
-          <a:off x="0" y="0"/>
-          <a:ext cx="0" cy="0"/>
-          <a:chOff x="0" y="0"/>
-          <a:chExt cx="0" cy="0"/>
-        </a:xfrm>
-      </p:grpSpPr>
       <p:sp>
         <p:nvSpPr>
           <p:cNvPr id="4" name="Title 1">
@@ -4536,7 +4582,7 @@
 </p:sld>
 </file>
 
-<file path=ppt/slides/slide13.xml><?xml version="1.0" encoding="utf-8"?>
+<file path=ppt/slides/slide11.xml><?xml version="1.0" encoding="utf-8"?>
 <p:sld xmlns:a="http://schemas.openxmlformats.org/drawingml/2006/main" xmlns:r="http://schemas.openxmlformats.org/officeDocument/2006/relationships" xmlns:p="http://schemas.openxmlformats.org/presentationml/2006/main">
   <p:cSld>
     <p:spTree>
@@ -4576,233 +4622,84 @@
           <a:p>
             <a:r>
               <a:rPr lang="en-US" dirty="0"/>
-              <a:t>Strengths and Limitations</a:t>
-            </a:r>
-          </a:p>
-        </p:txBody>
-      </p:sp>
-      <p:graphicFrame>
-        <p:nvGraphicFramePr>
-          <p:cNvPr id="4" name="Content Placeholder 4">
-            <a:extLst>
-              <a:ext uri="{FF2B5EF4-FFF2-40B4-BE49-F238E27FC236}">
-                <a16:creationId xmlns:a16="http://schemas.microsoft.com/office/drawing/2014/main" id="{289D9027-370F-CEA9-5A2F-F9E253B0E594}"/>
-              </a:ext>
-            </a:extLst>
-          </p:cNvPr>
-          <p:cNvGraphicFramePr>
-            <a:graphicFrameLocks noGrp="1"/>
-          </p:cNvGraphicFramePr>
-          <p:nvPr>
-            <p:ph idx="1"/>
-            <p:extLst>
-              <p:ext uri="{D42A27DB-BD31-4B8C-83A1-F6EECF244321}">
-                <p14:modId xmlns:p14="http://schemas.microsoft.com/office/powerpoint/2010/main" val="3799072585"/>
-              </p:ext>
-            </p:extLst>
-          </p:nvPr>
-        </p:nvGraphicFramePr>
-        <p:xfrm>
-          <a:off x="539179" y="4745927"/>
-          <a:ext cx="10891836" cy="1828800"/>
-        </p:xfrm>
-        <a:graphic>
-          <a:graphicData uri="http://schemas.openxmlformats.org/drawingml/2006/table">
-            <a:tbl>
-              <a:tblPr firstRow="1" bandRow="1">
-                <a:tableStyleId>{5C22544A-7EE6-4342-B048-85BDC9FD1C3A}</a:tableStyleId>
-              </a:tblPr>
-              <a:tblGrid>
-                <a:gridCol w="5445918">
-                  <a:extLst>
-                    <a:ext uri="{9D8B030D-6E8A-4147-A177-3AD203B41FA5}">
-                      <a16:colId xmlns:a16="http://schemas.microsoft.com/office/drawing/2014/main" val="1905779268"/>
-                    </a:ext>
-                  </a:extLst>
-                </a:gridCol>
-                <a:gridCol w="5445918">
-                  <a:extLst>
-                    <a:ext uri="{9D8B030D-6E8A-4147-A177-3AD203B41FA5}">
-                      <a16:colId xmlns:a16="http://schemas.microsoft.com/office/drawing/2014/main" val="3756693606"/>
-                    </a:ext>
-                  </a:extLst>
-                </a:gridCol>
-              </a:tblGrid>
-              <a:tr h="184666">
-                <a:tc>
-                  <a:txBody>
-                    <a:bodyPr/>
-                    <a:lstStyle/>
-                    <a:p>
-                      <a:r>
-                        <a:rPr lang="en-US" dirty="0" err="1"/>
-                        <a:t>openFoam</a:t>
-                      </a:r>
-                      <a:endParaRPr lang="en-US" dirty="0"/>
-                    </a:p>
-                  </a:txBody>
-                  <a:tcPr/>
-                </a:tc>
-                <a:tc>
-                  <a:txBody>
-                    <a:bodyPr/>
-                    <a:lstStyle/>
-                    <a:p>
-                      <a:r>
-                        <a:rPr lang="en-US" dirty="0"/>
-                        <a:t>Pinn</a:t>
-                      </a:r>
-                    </a:p>
-                  </a:txBody>
-                  <a:tcPr/>
-                </a:tc>
-                <a:extLst>
-                  <a:ext uri="{0D108BD9-81ED-4DB2-BD59-A6C34878D82A}">
-                    <a16:rowId xmlns:a16="http://schemas.microsoft.com/office/drawing/2014/main" val="3005336221"/>
-                  </a:ext>
-                </a:extLst>
-              </a:tr>
-              <a:tr h="184666">
-                <a:tc>
-                  <a:txBody>
-                    <a:bodyPr/>
-                    <a:lstStyle/>
-                    <a:p>
-                      <a:r>
-                        <a:rPr lang="en-US" dirty="0"/>
-                        <a:t>Mesh</a:t>
-                      </a:r>
-                    </a:p>
-                  </a:txBody>
-                  <a:tcPr/>
-                </a:tc>
-                <a:tc>
-                  <a:txBody>
-                    <a:bodyPr/>
-                    <a:lstStyle/>
-                    <a:p>
-                      <a:r>
-                        <a:rPr lang="en-US" dirty="0"/>
-                        <a:t>Collocation points</a:t>
-                      </a:r>
-                    </a:p>
-                  </a:txBody>
-                  <a:tcPr/>
-                </a:tc>
-                <a:extLst>
-                  <a:ext uri="{0D108BD9-81ED-4DB2-BD59-A6C34878D82A}">
-                    <a16:rowId xmlns:a16="http://schemas.microsoft.com/office/drawing/2014/main" val="152984949"/>
-                  </a:ext>
-                </a:extLst>
-              </a:tr>
-              <a:tr h="184666">
-                <a:tc>
-                  <a:txBody>
-                    <a:bodyPr/>
-                    <a:lstStyle/>
-                    <a:p>
-                      <a:r>
-                        <a:rPr lang="en-US" dirty="0"/>
-                        <a:t>FVM </a:t>
-                      </a:r>
-                      <a:r>
-                        <a:rPr lang="en-US" dirty="0" err="1"/>
-                        <a:t>discretizatrion</a:t>
-                      </a:r>
-                      <a:endParaRPr lang="en-US" dirty="0"/>
-                    </a:p>
-                  </a:txBody>
-                  <a:tcPr/>
-                </a:tc>
-                <a:tc>
-                  <a:txBody>
-                    <a:bodyPr/>
-                    <a:lstStyle/>
-                    <a:p>
-                      <a:r>
-                        <a:rPr lang="en-US" dirty="0"/>
-                        <a:t>Automatic differentiation via JAX</a:t>
-                      </a:r>
-                    </a:p>
-                  </a:txBody>
-                  <a:tcPr/>
-                </a:tc>
-                <a:extLst>
-                  <a:ext uri="{0D108BD9-81ED-4DB2-BD59-A6C34878D82A}">
-                    <a16:rowId xmlns:a16="http://schemas.microsoft.com/office/drawing/2014/main" val="86595439"/>
-                  </a:ext>
-                </a:extLst>
-              </a:tr>
-              <a:tr h="184666">
-                <a:tc>
-                  <a:txBody>
-                    <a:bodyPr/>
-                    <a:lstStyle/>
-                    <a:p>
-                      <a:r>
-                        <a:rPr lang="en-US" dirty="0"/>
-                        <a:t>PISO pressure-velocity coupling</a:t>
-                      </a:r>
-                    </a:p>
-                  </a:txBody>
-                  <a:tcPr/>
-                </a:tc>
-                <a:tc>
-                  <a:txBody>
-                    <a:bodyPr/>
-                    <a:lstStyle/>
-                    <a:p>
-                      <a:r>
-                        <a:rPr lang="en-US" dirty="0"/>
-                        <a:t>continuity is enforced through loss function</a:t>
-                      </a:r>
-                    </a:p>
-                  </a:txBody>
-                  <a:tcPr/>
-                </a:tc>
-                <a:extLst>
-                  <a:ext uri="{0D108BD9-81ED-4DB2-BD59-A6C34878D82A}">
-                    <a16:rowId xmlns:a16="http://schemas.microsoft.com/office/drawing/2014/main" val="1554622976"/>
-                  </a:ext>
-                </a:extLst>
-              </a:tr>
-              <a:tr h="184666">
-                <a:tc>
-                  <a:txBody>
-                    <a:bodyPr/>
-                    <a:lstStyle/>
-                    <a:p>
-                      <a:r>
-                        <a:rPr lang="en-US" dirty="0"/>
-                        <a:t>Linear solver per timestep</a:t>
-                      </a:r>
-                    </a:p>
-                  </a:txBody>
-                  <a:tcPr/>
-                </a:tc>
-                <a:tc>
-                  <a:txBody>
-                    <a:bodyPr/>
-                    <a:lstStyle/>
-                    <a:p>
-                      <a:r>
-                        <a:rPr lang="en-US" dirty="0"/>
-                        <a:t>Gradient descent over all time  </a:t>
-                      </a:r>
-                    </a:p>
-                  </a:txBody>
-                  <a:tcPr/>
-                </a:tc>
-                <a:extLst>
-                  <a:ext uri="{0D108BD9-81ED-4DB2-BD59-A6C34878D82A}">
-                    <a16:rowId xmlns:a16="http://schemas.microsoft.com/office/drawing/2014/main" val="478575766"/>
-                  </a:ext>
-                </a:extLst>
-              </a:tr>
-            </a:tbl>
-          </a:graphicData>
-        </a:graphic>
-      </p:graphicFrame>
+              <a:t>Limitations</a:t>
+            </a:r>
+          </a:p>
+        </p:txBody>
+      </p:sp>
+      <p:sp>
+        <p:nvSpPr>
+          <p:cNvPr id="3" name="TextBox 2">
+            <a:extLst>
+              <a:ext uri="{FF2B5EF4-FFF2-40B4-BE49-F238E27FC236}">
+                <a16:creationId xmlns:a16="http://schemas.microsoft.com/office/drawing/2014/main" id="{C682AEC4-FD76-D9F8-E395-31D44C34CC86}"/>
+              </a:ext>
+            </a:extLst>
+          </p:cNvPr>
+          <p:cNvSpPr txBox="1"/>
+          <p:nvPr/>
+        </p:nvSpPr>
+        <p:spPr>
+          <a:xfrm>
+            <a:off x="640079" y="2642992"/>
+            <a:ext cx="7263843" cy="1477328"/>
+          </a:xfrm>
+          <a:prstGeom prst="rect">
+            <a:avLst/>
+          </a:prstGeom>
+          <a:noFill/>
+        </p:spPr>
+        <p:txBody>
+          <a:bodyPr wrap="square" rtlCol="0">
+            <a:spAutoFit/>
+          </a:bodyPr>
+          <a:lstStyle/>
+          <a:p>
+            <a:pPr marL="285750" indent="-285750">
+              <a:buFont typeface="Arial" panose="020B0604020202020204" pitchFamily="34" charset="0"/>
+              <a:buChar char="•"/>
+            </a:pPr>
+            <a:r>
+              <a:rPr lang="en-US" dirty="0"/>
+              <a:t>Accuracy</a:t>
+            </a:r>
+          </a:p>
+          <a:p>
+            <a:pPr marL="285750" indent="-285750">
+              <a:buFont typeface="Arial" panose="020B0604020202020204" pitchFamily="34" charset="0"/>
+              <a:buChar char="•"/>
+            </a:pPr>
+            <a:r>
+              <a:rPr lang="en-US" dirty="0"/>
+              <a:t>Computationally expensive</a:t>
+            </a:r>
+          </a:p>
+          <a:p>
+            <a:pPr marL="285750" indent="-285750">
+              <a:buFont typeface="Arial" panose="020B0604020202020204" pitchFamily="34" charset="0"/>
+              <a:buChar char="•"/>
+            </a:pPr>
+            <a:r>
+              <a:rPr lang="en-US" dirty="0"/>
+              <a:t>Finding the correct network parameters and architecture</a:t>
+            </a:r>
+          </a:p>
+          <a:p>
+            <a:pPr marL="285750" indent="-285750">
+              <a:buFont typeface="Arial" panose="020B0604020202020204" pitchFamily="34" charset="0"/>
+              <a:buChar char="•"/>
+            </a:pPr>
+            <a:endParaRPr lang="en-US" dirty="0"/>
+          </a:p>
+          <a:p>
+            <a:pPr marL="285750" indent="-285750">
+              <a:buFont typeface="Arial" panose="020B0604020202020204" pitchFamily="34" charset="0"/>
+              <a:buChar char="•"/>
+            </a:pPr>
+            <a:endParaRPr lang="en-US" dirty="0"/>
+          </a:p>
+        </p:txBody>
+      </p:sp>
     </p:spTree>
     <p:extLst>
       <p:ext uri="{BB962C8B-B14F-4D97-AF65-F5344CB8AC3E}">
@@ -4816,7 +4713,7 @@
 </p:sld>
 </file>
 
-<file path=ppt/slides/slide14.xml><?xml version="1.0" encoding="utf-8"?>
+<file path=ppt/slides/slide12.xml><?xml version="1.0" encoding="utf-8"?>
 <p:sld xmlns:a="http://schemas.openxmlformats.org/drawingml/2006/main" xmlns:r="http://schemas.openxmlformats.org/officeDocument/2006/relationships" xmlns:p="http://schemas.openxmlformats.org/presentationml/2006/main">
   <p:cSld>
     <p:spTree>
@@ -4876,7 +4773,7 @@
         <p:spPr>
           <a:xfrm>
             <a:off x="1078992" y="2099549"/>
-            <a:ext cx="1882247" cy="369332"/>
+            <a:ext cx="7760208" cy="369332"/>
           </a:xfrm>
           <a:prstGeom prst="rect">
             <a:avLst/>
@@ -4884,40 +4781,90 @@
           <a:noFill/>
         </p:spPr>
         <p:txBody>
-          <a:bodyPr wrap="none" rtlCol="0">
+          <a:bodyPr wrap="square" rtlCol="0">
             <a:spAutoFit/>
           </a:bodyPr>
           <a:lstStyle/>
           <a:p>
             <a:r>
               <a:rPr lang="en-US" dirty="0"/>
-              <a:t>Inverse problem</a:t>
-            </a:r>
-          </a:p>
-        </p:txBody>
-      </p:sp>
-      <p:sp>
-        <p:nvSpPr>
-          <p:cNvPr id="8" name="Content Placeholder 7">
-            <a:extLst>
-              <a:ext uri="{FF2B5EF4-FFF2-40B4-BE49-F238E27FC236}">
-                <a16:creationId xmlns:a16="http://schemas.microsoft.com/office/drawing/2014/main" id="{35C0D3E6-8912-B68D-50DD-EBFFD21D6516}"/>
-              </a:ext>
-            </a:extLst>
-          </p:cNvPr>
-          <p:cNvSpPr>
-            <a:spLocks noGrp="1"/>
-          </p:cNvSpPr>
+              <a:t>Inverse problem for the backward step setup:</a:t>
+            </a:r>
+          </a:p>
+        </p:txBody>
+      </p:sp>
+      <p:pic>
+        <p:nvPicPr>
+          <p:cNvPr id="12" name="Content Placeholder 11">
+            <a:extLst>
+              <a:ext uri="{FF2B5EF4-FFF2-40B4-BE49-F238E27FC236}">
+                <a16:creationId xmlns:a16="http://schemas.microsoft.com/office/drawing/2014/main" id="{0BC2DA2B-A63F-973C-7EBB-8F512A4EC08A}"/>
+              </a:ext>
+            </a:extLst>
+          </p:cNvPr>
+          <p:cNvPicPr>
+            <a:picLocks noGrp="1" noChangeAspect="1"/>
+          </p:cNvPicPr>
           <p:nvPr>
             <p:ph idx="1"/>
           </p:nvPr>
-        </p:nvSpPr>
-        <p:spPr/>
-        <p:txBody>
-          <a:bodyPr/>
+        </p:nvPicPr>
+        <p:blipFill>
+          <a:blip r:embed="rId3"/>
+          <a:stretch>
+            <a:fillRect/>
+          </a:stretch>
+        </p:blipFill>
+        <p:spPr>
+          <a:xfrm>
+            <a:off x="1615281" y="2708275"/>
+            <a:ext cx="8940800" cy="3416300"/>
+          </a:xfrm>
+          <a:prstGeom prst="rect">
+            <a:avLst/>
+          </a:prstGeom>
+        </p:spPr>
+      </p:pic>
+      <p:sp>
+        <p:nvSpPr>
+          <p:cNvPr id="13" name="TextBox 12">
+            <a:extLst>
+              <a:ext uri="{FF2B5EF4-FFF2-40B4-BE49-F238E27FC236}">
+                <a16:creationId xmlns:a16="http://schemas.microsoft.com/office/drawing/2014/main" id="{10C0B027-8142-6B67-568C-769B7F844CEB}"/>
+              </a:ext>
+            </a:extLst>
+          </p:cNvPr>
+          <p:cNvSpPr txBox="1"/>
+          <p:nvPr/>
+        </p:nvSpPr>
+        <p:spPr>
+          <a:xfrm>
+            <a:off x="6340941" y="6124575"/>
+            <a:ext cx="5190067" cy="369332"/>
+          </a:xfrm>
+          <a:prstGeom prst="rect">
+            <a:avLst/>
+          </a:prstGeom>
+          <a:noFill/>
+        </p:spPr>
+        <p:txBody>
+          <a:bodyPr wrap="square" rtlCol="0">
+            <a:spAutoFit/>
+          </a:bodyPr>
           <a:lstStyle/>
           <a:p>
-            <a:endParaRPr lang="en-US"/>
+            <a:r>
+              <a:rPr lang="en-US" dirty="0"/>
+              <a:t>X-axis scatter is inaccurate for </a:t>
+            </a:r>
+            <a:r>
+              <a:rPr lang="en-US" dirty="0" err="1"/>
+              <a:t>visability</a:t>
+            </a:r>
+            <a:r>
+              <a:rPr lang="en-US" dirty="0"/>
+              <a:t> reasons </a:t>
+            </a:r>
           </a:p>
         </p:txBody>
       </p:sp>
@@ -4934,7 +4881,7 @@
 </p:sld>
 </file>
 
-<file path=ppt/slides/slide15.xml><?xml version="1.0" encoding="utf-8"?>
+<file path=ppt/slides/slide13.xml><?xml version="1.0" encoding="utf-8"?>
 <p:sld xmlns:a="http://schemas.openxmlformats.org/drawingml/2006/main" xmlns:r="http://schemas.openxmlformats.org/officeDocument/2006/relationships" xmlns:p="http://schemas.openxmlformats.org/presentationml/2006/main">
   <p:cSld>
     <p:bg>
@@ -4961,7 +4908,7 @@
       </p:grpSpPr>
       <p:sp useBgFill="1">
         <p:nvSpPr>
-          <p:cNvPr id="9" name="Rectangle 8">
+          <p:cNvPr id="16" name="Rectangle 15">
             <a:extLst>
               <a:ext uri="{FF2B5EF4-FFF2-40B4-BE49-F238E27FC236}">
                 <a16:creationId xmlns:a16="http://schemas.microsoft.com/office/drawing/2014/main" id="{744CAA32-F237-419C-A2DD-43C28D920D3C}"/>
@@ -5072,7 +5019,7 @@
       </p:sp>
       <p:cxnSp>
         <p:nvCxnSpPr>
-          <p:cNvPr id="11" name="Straight Connector 10">
+          <p:cNvPr id="18" name="Straight Connector 17">
             <a:extLst>
               <a:ext uri="{FF2B5EF4-FFF2-40B4-BE49-F238E27FC236}">
                 <a16:creationId xmlns:a16="http://schemas.microsoft.com/office/drawing/2014/main" id="{753FE100-D0AB-4AE2-824B-60CFA31EC6A2}"/>
@@ -5146,7 +5093,28 @@
           </a:bodyPr>
           <a:lstStyle/>
           <a:p>
-            <a:endParaRPr lang="en-US" dirty="0"/>
+            <a:r>
+              <a:rPr lang="en-US" dirty="0"/>
+              <a:t>Does not replace traditional time stepping methods – rather an additional tool</a:t>
+            </a:r>
+          </a:p>
+          <a:p>
+            <a:r>
+              <a:rPr lang="en-US" dirty="0"/>
+              <a:t>PINN accuracy decreases as Re increases</a:t>
+            </a:r>
+          </a:p>
+          <a:p>
+            <a:r>
+              <a:rPr lang="en-US" dirty="0"/>
+              <a:t>PINNs perform better on a simple grid</a:t>
+            </a:r>
+          </a:p>
+          <a:p>
+            <a:r>
+              <a:rPr lang="en-US" dirty="0"/>
+              <a:t>PINNs struggle with sharp gradients</a:t>
+            </a:r>
           </a:p>
         </p:txBody>
       </p:sp>
@@ -5172,8 +5140,8 @@
         </p:blipFill>
         <p:spPr>
           <a:xfrm>
-            <a:off x="4368644" y="333963"/>
-            <a:ext cx="7742811" cy="5632894"/>
+            <a:off x="5791200" y="1371600"/>
+            <a:ext cx="6297267" cy="4581261"/>
           </a:xfrm>
           <a:prstGeom prst="rect">
             <a:avLst/>
@@ -5193,7 +5161,7 @@
 </p:sld>
 </file>
 
-<file path=ppt/slides/slide16.xml><?xml version="1.0" encoding="utf-8"?>
+<file path=ppt/slides/slide14.xml><?xml version="1.0" encoding="utf-8"?>
 <p:sld xmlns:a="http://schemas.openxmlformats.org/drawingml/2006/main" xmlns:r="http://schemas.openxmlformats.org/officeDocument/2006/relationships" xmlns:p="http://schemas.openxmlformats.org/presentationml/2006/main">
   <p:cSld>
     <p:spTree>
@@ -5256,10 +5224,73 @@
         </p:nvSpPr>
         <p:spPr/>
         <p:txBody>
-          <a:bodyPr/>
+          <a:bodyPr>
+            <a:normAutofit fontScale="92500" lnSpcReduction="10000"/>
+          </a:bodyPr>
           <a:lstStyle/>
           <a:p>
-            <a:endParaRPr lang="en-US"/>
+            <a:r>
+              <a:rPr lang="en-NO" dirty="0"/>
+              <a:t>First PINN paper:</a:t>
+            </a:r>
+          </a:p>
+          <a:p>
+            <a:pPr lvl="1"/>
+            <a:r>
+              <a:rPr lang="en-NO" dirty="0"/>
+              <a:t>M. Raissi, P. Perdikaris, and G. E. Karniadakis, "Physics-informed neural networks: A deep learning framework for solving forward and inverse problems involving nonlinear partial differential equations," </a:t>
+            </a:r>
+            <a:r>
+              <a:rPr lang="en-NO" i="1" dirty="0"/>
+              <a:t>Journal of Computational Physics</a:t>
+            </a:r>
+            <a:r>
+              <a:rPr lang="en-NO" dirty="0"/>
+              <a:t>, vol. 378, pp. 686–707, 2019.</a:t>
+            </a:r>
+          </a:p>
+          <a:p>
+            <a:r>
+              <a:rPr lang="en-NO" dirty="0"/>
+              <a:t>Article for training PINNS:</a:t>
+            </a:r>
+          </a:p>
+          <a:p>
+            <a:pPr lvl="1"/>
+            <a:r>
+              <a:rPr lang="en-NO" dirty="0"/>
+              <a:t>S. Wang, S. Sankaran, H. Wang, and P. Perdikaris, "An Expert's Guide to Training Physics-Informed Neural Networks," </a:t>
+            </a:r>
+            <a:r>
+              <a:rPr lang="en-NO" i="1" dirty="0"/>
+              <a:t>arXiv preprint</a:t>
+            </a:r>
+            <a:r>
+              <a:rPr lang="en-NO" dirty="0"/>
+              <a:t> arXiv:2308.08468, 2023.</a:t>
+            </a:r>
+          </a:p>
+          <a:p>
+            <a:r>
+              <a:rPr lang="en-NO" dirty="0"/>
+              <a:t>CFD book:</a:t>
+            </a:r>
+          </a:p>
+          <a:p>
+            <a:pPr lvl="1"/>
+            <a:r>
+              <a:rPr lang="en-NO" dirty="0"/>
+              <a:t>H. K. Versteeg and W. Malalasekera, </a:t>
+            </a:r>
+            <a:r>
+              <a:rPr lang="en-NO" i="1" dirty="0"/>
+              <a:t>An Introduction to Computational Fluid Dynamics: The Finite Volume Method</a:t>
+            </a:r>
+            <a:r>
+              <a:rPr lang="en-NO" dirty="0"/>
+              <a:t>, 2nd ed. Harlow, England: Pearson Education Limited, 2007.</a:t>
+            </a:r>
+            <a:endParaRPr lang="en-US" dirty="0"/>
           </a:p>
         </p:txBody>
       </p:sp>
@@ -5279,6 +5310,14 @@
 <file path=ppt/slides/slide2.xml><?xml version="1.0" encoding="utf-8"?>
 <p:sld xmlns:a="http://schemas.openxmlformats.org/drawingml/2006/main" xmlns:r="http://schemas.openxmlformats.org/officeDocument/2006/relationships" xmlns:p="http://schemas.openxmlformats.org/presentationml/2006/main">
   <p:cSld>
+    <p:bg>
+      <p:bgPr>
+        <a:solidFill>
+          <a:schemeClr val="bg1"/>
+        </a:solidFill>
+        <a:effectLst/>
+      </p:bgPr>
+    </p:bg>
     <p:spTree>
       <p:nvGrpSpPr>
         <p:cNvPr id="1" name=""/>
@@ -5293,6 +5332,82 @@
           <a:chExt cx="0" cy="0"/>
         </a:xfrm>
       </p:grpSpPr>
+      <p:sp useBgFill="1">
+        <p:nvSpPr>
+          <p:cNvPr id="9" name="Rectangle 8">
+            <a:extLst>
+              <a:ext uri="{FF2B5EF4-FFF2-40B4-BE49-F238E27FC236}">
+                <a16:creationId xmlns:a16="http://schemas.microsoft.com/office/drawing/2014/main" id="{DBDA151C-5770-45E4-AAFF-59E7F403866D}"/>
+              </a:ext>
+              <a:ext uri="{C183D7F6-B498-43B3-948B-1728B52AA6E4}">
+                <adec:decorative xmlns:adec="http://schemas.microsoft.com/office/drawing/2017/decorative" val="1"/>
+              </a:ext>
+            </a:extLst>
+          </p:cNvPr>
+          <p:cNvSpPr>
+            <a:spLocks noGrp="1" noRot="1" noChangeAspect="1" noMove="1" noResize="1" noEditPoints="1" noAdjustHandles="1" noChangeArrowheads="1" noChangeShapeType="1" noTextEdit="1"/>
+          </p:cNvSpPr>
+          <p:nvPr>
+            <p:extLst>
+              <p:ext uri="{386F3935-93C4-4BCD-93E2-E3B085C9AB24}">
+                <p16:designElem xmlns:p16="http://schemas.microsoft.com/office/powerpoint/2015/main" val="1"/>
+              </p:ext>
+            </p:extLst>
+          </p:nvPr>
+        </p:nvSpPr>
+        <p:spPr>
+          <a:xfrm>
+            <a:off x="0" y="0"/>
+            <a:ext cx="12192000" cy="6858000"/>
+          </a:xfrm>
+          <a:prstGeom prst="rect">
+            <a:avLst/>
+          </a:prstGeom>
+          <a:ln w="12700" cap="flat" cmpd="sng" algn="ctr">
+            <a:noFill/>
+            <a:prstDash val="solid"/>
+            <a:miter lim="800000"/>
+          </a:ln>
+          <a:effectLst/>
+          <a:extLst>
+            <a:ext uri="{91240B29-F687-4F45-9708-019B960494DF}">
+              <a14:hiddenLine xmlns:a14="http://schemas.microsoft.com/office/drawing/2010/main" w="12700" cap="flat" cmpd="sng" algn="ctr">
+                <a:solidFill>
+                  <a:schemeClr val="accent1">
+                    <a:shade val="50000"/>
+                  </a:schemeClr>
+                </a:solidFill>
+                <a:prstDash val="solid"/>
+                <a:miter lim="800000"/>
+              </a14:hiddenLine>
+            </a:ext>
+          </a:extLst>
+        </p:spPr>
+        <p:style>
+          <a:lnRef idx="2">
+            <a:schemeClr val="accent1">
+              <a:shade val="50000"/>
+            </a:schemeClr>
+          </a:lnRef>
+          <a:fillRef idx="1">
+            <a:schemeClr val="accent1"/>
+          </a:fillRef>
+          <a:effectRef idx="0">
+            <a:schemeClr val="accent1"/>
+          </a:effectRef>
+          <a:fontRef idx="minor">
+            <a:schemeClr val="lt1"/>
+          </a:fontRef>
+        </p:style>
+        <p:txBody>
+          <a:bodyPr rtlCol="0" anchor="ctr"/>
+          <a:lstStyle/>
+          <a:p>
+            <a:pPr algn="ctr"/>
+            <a:endParaRPr lang="en-US" dirty="0"/>
+          </a:p>
+        </p:txBody>
+      </p:sp>
       <p:sp>
         <p:nvSpPr>
           <p:cNvPr id="2" name="Title 1">
@@ -5309,14 +5424,21 @@
             <p:ph type="title"/>
           </p:nvPr>
         </p:nvSpPr>
-        <p:spPr/>
-        <p:txBody>
-          <a:bodyPr/>
+        <p:spPr>
+          <a:xfrm>
+            <a:off x="640080" y="914399"/>
+            <a:ext cx="10847494" cy="1171069"/>
+          </a:xfrm>
+        </p:spPr>
+        <p:txBody>
+          <a:bodyPr anchor="t">
+            <a:normAutofit/>
+          </a:bodyPr>
           <a:lstStyle/>
           <a:p>
             <a:r>
               <a:rPr lang="en-US" dirty="0"/>
-              <a:t>Why PINNs?</a:t>
+              <a:t>What are PINNs, and why use them?</a:t>
             </a:r>
           </a:p>
         </p:txBody>
@@ -5337,15 +5459,343 @@
             <p:ph idx="1"/>
           </p:nvPr>
         </p:nvSpPr>
-        <p:spPr/>
-        <p:txBody>
-          <a:bodyPr/>
+        <p:spPr>
+          <a:xfrm>
+            <a:off x="6915150" y="2256287"/>
+            <a:ext cx="4563618" cy="3760459"/>
+          </a:xfrm>
+        </p:spPr>
+        <p:txBody>
+          <a:bodyPr anchor="t">
+            <a:normAutofit/>
+          </a:bodyPr>
           <a:lstStyle/>
           <a:p>
-            <a:endParaRPr lang="en-US"/>
-          </a:p>
-        </p:txBody>
-      </p:sp>
+            <a:pPr marL="285750" indent="-285750"/>
+            <a:r>
+              <a:rPr lang="en-US" dirty="0"/>
+              <a:t>Multilayer perceptron (MLP)</a:t>
+            </a:r>
+          </a:p>
+          <a:p>
+            <a:pPr marL="285750" indent="-285750"/>
+            <a:r>
+              <a:rPr lang="en-US" dirty="0"/>
+              <a:t>Meshless architecture</a:t>
+            </a:r>
+          </a:p>
+          <a:p>
+            <a:pPr marL="550926" lvl="1" indent="-285750"/>
+            <a:r>
+              <a:rPr lang="en-US" dirty="0"/>
+              <a:t>Datapoint validation</a:t>
+            </a:r>
+          </a:p>
+          <a:p>
+            <a:pPr marL="285750" indent="-285750"/>
+            <a:r>
+              <a:rPr lang="en-US" dirty="0"/>
+              <a:t>PDE residual is embedded directly into the loss function</a:t>
+            </a:r>
+          </a:p>
+          <a:p>
+            <a:r>
+              <a:rPr lang="en-US" dirty="0"/>
+              <a:t>Data Efficient (Does not need training data for solving the forward problem)</a:t>
+            </a:r>
+          </a:p>
+          <a:p>
+            <a:r>
+              <a:rPr lang="en-US" dirty="0"/>
+              <a:t>Perform well on inverse problems</a:t>
+            </a:r>
+          </a:p>
+          <a:p>
+            <a:endParaRPr lang="en-US" dirty="0"/>
+          </a:p>
+          <a:p>
+            <a:endParaRPr lang="en-US" dirty="0"/>
+          </a:p>
+          <a:p>
+            <a:endParaRPr lang="en-US" dirty="0"/>
+          </a:p>
+          <a:p>
+            <a:endParaRPr lang="en-US" dirty="0"/>
+          </a:p>
+          <a:p>
+            <a:endParaRPr lang="en-US" dirty="0"/>
+          </a:p>
+          <a:p>
+            <a:endParaRPr lang="en-US" dirty="0"/>
+          </a:p>
+          <a:p>
+            <a:endParaRPr lang="en-US" dirty="0"/>
+          </a:p>
+        </p:txBody>
+      </p:sp>
+      <p:cxnSp>
+        <p:nvCxnSpPr>
+          <p:cNvPr id="11" name="Straight Connector 10">
+            <a:extLst>
+              <a:ext uri="{FF2B5EF4-FFF2-40B4-BE49-F238E27FC236}">
+                <a16:creationId xmlns:a16="http://schemas.microsoft.com/office/drawing/2014/main" id="{2EA0F4A6-3CC9-C9E2-BA02-58FA29F7DD8E}"/>
+              </a:ext>
+              <a:ext uri="{C183D7F6-B498-43B3-948B-1728B52AA6E4}">
+                <adec:decorative xmlns:adec="http://schemas.microsoft.com/office/drawing/2017/decorative" val="1"/>
+              </a:ext>
+            </a:extLst>
+          </p:cNvPr>
+          <p:cNvCxnSpPr>
+            <a:cxnSpLocks noGrp="1" noRot="1" noChangeAspect="1" noMove="1" noResize="1" noEditPoints="1" noAdjustHandles="1" noChangeArrowheads="1" noChangeShapeType="1"/>
+          </p:cNvCxnSpPr>
+          <p:nvPr>
+            <p:extLst>
+              <p:ext uri="{386F3935-93C4-4BCD-93E2-E3B085C9AB24}">
+                <p16:designElem xmlns:p16="http://schemas.microsoft.com/office/powerpoint/2015/main" val="1"/>
+              </p:ext>
+            </p:extLst>
+          </p:nvPr>
+        </p:nvCxnSpPr>
+        <p:spPr>
+          <a:xfrm>
+            <a:off x="672253" y="6272784"/>
+            <a:ext cx="10847495" cy="0"/>
+          </a:xfrm>
+          <a:prstGeom prst="line">
+            <a:avLst/>
+          </a:prstGeom>
+          <a:ln w="76200"/>
+        </p:spPr>
+        <p:style>
+          <a:lnRef idx="1">
+            <a:schemeClr val="accent1"/>
+          </a:lnRef>
+          <a:fillRef idx="0">
+            <a:schemeClr val="accent1"/>
+          </a:fillRef>
+          <a:effectRef idx="0">
+            <a:schemeClr val="accent1"/>
+          </a:effectRef>
+          <a:fontRef idx="minor">
+            <a:schemeClr val="tx1"/>
+          </a:fontRef>
+        </p:style>
+      </p:cxnSp>
+      <p:graphicFrame>
+        <p:nvGraphicFramePr>
+          <p:cNvPr id="4" name="Content Placeholder 4">
+            <a:extLst>
+              <a:ext uri="{FF2B5EF4-FFF2-40B4-BE49-F238E27FC236}">
+                <a16:creationId xmlns:a16="http://schemas.microsoft.com/office/drawing/2014/main" id="{BA2BE5F3-C89C-D67C-64C8-EE6F3F50B427}"/>
+              </a:ext>
+            </a:extLst>
+          </p:cNvPr>
+          <p:cNvGraphicFramePr>
+            <a:graphicFrameLocks/>
+          </p:cNvGraphicFramePr>
+          <p:nvPr>
+            <p:extLst>
+              <p:ext uri="{D42A27DB-BD31-4B8C-83A1-F6EECF244321}">
+                <p14:modId xmlns:p14="http://schemas.microsoft.com/office/powerpoint/2010/main" val="3314489204"/>
+              </p:ext>
+            </p:extLst>
+          </p:nvPr>
+        </p:nvGraphicFramePr>
+        <p:xfrm>
+          <a:off x="720000" y="2816713"/>
+          <a:ext cx="5641425" cy="2639608"/>
+        </p:xfrm>
+        <a:graphic>
+          <a:graphicData uri="http://schemas.openxmlformats.org/drawingml/2006/table">
+            <a:tbl>
+              <a:tblPr firstRow="1" bandRow="1">
+                <a:tableStyleId>{5C22544A-7EE6-4342-B048-85BDC9FD1C3A}</a:tableStyleId>
+              </a:tblPr>
+              <a:tblGrid>
+                <a:gridCol w="2734545">
+                  <a:extLst>
+                    <a:ext uri="{9D8B030D-6E8A-4147-A177-3AD203B41FA5}">
+                      <a16:colId xmlns:a16="http://schemas.microsoft.com/office/drawing/2014/main" val="1905779268"/>
+                    </a:ext>
+                  </a:extLst>
+                </a:gridCol>
+                <a:gridCol w="2906880">
+                  <a:extLst>
+                    <a:ext uri="{9D8B030D-6E8A-4147-A177-3AD203B41FA5}">
+                      <a16:colId xmlns:a16="http://schemas.microsoft.com/office/drawing/2014/main" val="3756693606"/>
+                    </a:ext>
+                  </a:extLst>
+                </a:gridCol>
+              </a:tblGrid>
+              <a:tr h="374654">
+                <a:tc>
+                  <a:txBody>
+                    <a:bodyPr/>
+                    <a:lstStyle/>
+                    <a:p>
+                      <a:r>
+                        <a:rPr lang="en-US" sz="1700"/>
+                        <a:t>openFoam</a:t>
+                      </a:r>
+                    </a:p>
+                  </a:txBody>
+                  <a:tcPr marL="85149" marR="85149" marT="42574" marB="42574"/>
+                </a:tc>
+                <a:tc>
+                  <a:txBody>
+                    <a:bodyPr/>
+                    <a:lstStyle/>
+                    <a:p>
+                      <a:r>
+                        <a:rPr lang="en-US" sz="1700"/>
+                        <a:t>Pinn</a:t>
+                      </a:r>
+                    </a:p>
+                  </a:txBody>
+                  <a:tcPr marL="85149" marR="85149" marT="42574" marB="42574"/>
+                </a:tc>
+                <a:extLst>
+                  <a:ext uri="{0D108BD9-81ED-4DB2-BD59-A6C34878D82A}">
+                    <a16:rowId xmlns:a16="http://schemas.microsoft.com/office/drawing/2014/main" val="3005336221"/>
+                  </a:ext>
+                </a:extLst>
+              </a:tr>
+              <a:tr h="374654">
+                <a:tc>
+                  <a:txBody>
+                    <a:bodyPr/>
+                    <a:lstStyle/>
+                    <a:p>
+                      <a:r>
+                        <a:rPr lang="en-US" sz="1700"/>
+                        <a:t>Mesh</a:t>
+                      </a:r>
+                    </a:p>
+                  </a:txBody>
+                  <a:tcPr marL="85149" marR="85149" marT="42574" marB="42574"/>
+                </a:tc>
+                <a:tc>
+                  <a:txBody>
+                    <a:bodyPr/>
+                    <a:lstStyle/>
+                    <a:p>
+                      <a:r>
+                        <a:rPr lang="en-US" sz="1700"/>
+                        <a:t>Collocation points</a:t>
+                      </a:r>
+                    </a:p>
+                  </a:txBody>
+                  <a:tcPr marL="85149" marR="85149" marT="42574" marB="42574"/>
+                </a:tc>
+                <a:extLst>
+                  <a:ext uri="{0D108BD9-81ED-4DB2-BD59-A6C34878D82A}">
+                    <a16:rowId xmlns:a16="http://schemas.microsoft.com/office/drawing/2014/main" val="152984949"/>
+                  </a:ext>
+                </a:extLst>
+              </a:tr>
+              <a:tr h="630100">
+                <a:tc>
+                  <a:txBody>
+                    <a:bodyPr/>
+                    <a:lstStyle/>
+                    <a:p>
+                      <a:r>
+                        <a:rPr lang="en-US" sz="1700"/>
+                        <a:t>FVM discretizatrion</a:t>
+                      </a:r>
+                    </a:p>
+                  </a:txBody>
+                  <a:tcPr marL="85149" marR="85149" marT="42574" marB="42574"/>
+                </a:tc>
+                <a:tc>
+                  <a:txBody>
+                    <a:bodyPr/>
+                    <a:lstStyle/>
+                    <a:p>
+                      <a:r>
+                        <a:rPr lang="en-US" sz="1700"/>
+                        <a:t>Automatic differentiation via JAX</a:t>
+                      </a:r>
+                    </a:p>
+                  </a:txBody>
+                  <a:tcPr marL="85149" marR="85149" marT="42574" marB="42574"/>
+                </a:tc>
+                <a:extLst>
+                  <a:ext uri="{0D108BD9-81ED-4DB2-BD59-A6C34878D82A}">
+                    <a16:rowId xmlns:a16="http://schemas.microsoft.com/office/drawing/2014/main" val="86595439"/>
+                  </a:ext>
+                </a:extLst>
+              </a:tr>
+              <a:tr h="630100">
+                <a:tc>
+                  <a:txBody>
+                    <a:bodyPr/>
+                    <a:lstStyle/>
+                    <a:p>
+                      <a:r>
+                        <a:rPr lang="en-US" sz="1700"/>
+                        <a:t>PISO pressure-velocity coupling</a:t>
+                      </a:r>
+                    </a:p>
+                  </a:txBody>
+                  <a:tcPr marL="85149" marR="85149" marT="42574" marB="42574"/>
+                </a:tc>
+                <a:tc>
+                  <a:txBody>
+                    <a:bodyPr/>
+                    <a:lstStyle/>
+                    <a:p>
+                      <a:r>
+                        <a:rPr lang="en-US" sz="1700"/>
+                        <a:t>continuity is enforced through loss function</a:t>
+                      </a:r>
+                    </a:p>
+                  </a:txBody>
+                  <a:tcPr marL="85149" marR="85149" marT="42574" marB="42574"/>
+                </a:tc>
+                <a:extLst>
+                  <a:ext uri="{0D108BD9-81ED-4DB2-BD59-A6C34878D82A}">
+                    <a16:rowId xmlns:a16="http://schemas.microsoft.com/office/drawing/2014/main" val="1554622976"/>
+                  </a:ext>
+                </a:extLst>
+              </a:tr>
+              <a:tr h="630100">
+                <a:tc>
+                  <a:txBody>
+                    <a:bodyPr/>
+                    <a:lstStyle/>
+                    <a:p>
+                      <a:r>
+                        <a:rPr lang="en-US" sz="1700"/>
+                        <a:t>Linear solver per timestep</a:t>
+                      </a:r>
+                    </a:p>
+                  </a:txBody>
+                  <a:tcPr marL="85149" marR="85149" marT="42574" marB="42574"/>
+                </a:tc>
+                <a:tc>
+                  <a:txBody>
+                    <a:bodyPr/>
+                    <a:lstStyle/>
+                    <a:p>
+                      <a:r>
+                        <a:rPr lang="en-US" sz="1700" dirty="0"/>
+                        <a:t>Gradient descent over all time  </a:t>
+                      </a:r>
+                    </a:p>
+                  </a:txBody>
+                  <a:tcPr marL="85149" marR="85149" marT="42574" marB="42574"/>
+                </a:tc>
+                <a:extLst>
+                  <a:ext uri="{0D108BD9-81ED-4DB2-BD59-A6C34878D82A}">
+                    <a16:rowId xmlns:a16="http://schemas.microsoft.com/office/drawing/2014/main" val="478575766"/>
+                  </a:ext>
+                </a:extLst>
+              </a:tr>
+            </a:tbl>
+          </a:graphicData>
+        </a:graphic>
+      </p:graphicFrame>
     </p:spTree>
     <p:extLst>
       <p:ext uri="{BB962C8B-B14F-4D97-AF65-F5344CB8AC3E}">
@@ -5381,7 +5831,7 @@
           <p:cNvPr id="2" name="Title 1">
             <a:extLst>
               <a:ext uri="{FF2B5EF4-FFF2-40B4-BE49-F238E27FC236}">
-                <a16:creationId xmlns:a16="http://schemas.microsoft.com/office/drawing/2014/main" id="{48FFA5AD-57F9-048D-4E4C-6A7F8C59FB06}"/>
+                <a16:creationId xmlns:a16="http://schemas.microsoft.com/office/drawing/2014/main" id="{93D60F15-EB9B-302A-A859-87B8B6C516A4}"/>
               </a:ext>
             </a:extLst>
           </p:cNvPr>
@@ -5392,39 +5842,210 @@
             <p:ph type="title"/>
           </p:nvPr>
         </p:nvSpPr>
-        <p:spPr/>
+        <p:spPr>
+          <a:xfrm>
+            <a:off x="566287" y="959028"/>
+            <a:ext cx="10890929" cy="1097280"/>
+          </a:xfrm>
+        </p:spPr>
         <p:txBody>
           <a:bodyPr/>
           <a:lstStyle/>
           <a:p>
             <a:r>
               <a:rPr lang="en-US" dirty="0"/>
-              <a:t>Governing Equations</a:t>
-            </a:r>
-          </a:p>
-        </p:txBody>
-      </p:sp>
+              <a:t>Solver 1: Physics-Informed Neural Networks</a:t>
+            </a:r>
+          </a:p>
+        </p:txBody>
+      </p:sp>
+      <p:sp>
+        <p:nvSpPr>
+          <p:cNvPr id="4" name="Title 1">
+            <a:extLst>
+              <a:ext uri="{FF2B5EF4-FFF2-40B4-BE49-F238E27FC236}">
+                <a16:creationId xmlns:a16="http://schemas.microsoft.com/office/drawing/2014/main" id="{6B55262A-29F4-2812-2596-FC2B5833BA7F}"/>
+              </a:ext>
+            </a:extLst>
+          </p:cNvPr>
+          <p:cNvSpPr txBox="1">
+            <a:spLocks/>
+          </p:cNvSpPr>
+          <p:nvPr/>
+        </p:nvSpPr>
+        <p:spPr>
+          <a:xfrm>
+            <a:off x="826776" y="1661821"/>
+            <a:ext cx="10890929" cy="548640"/>
+          </a:xfrm>
+          <a:prstGeom prst="rect">
+            <a:avLst/>
+          </a:prstGeom>
+        </p:spPr>
+        <p:txBody>
+          <a:bodyPr vert="horz" lIns="91440" tIns="45720" rIns="91440" bIns="45720" rtlCol="0" anchor="t">
+            <a:normAutofit lnSpcReduction="10000"/>
+          </a:bodyPr>
+          <a:lstStyle>
+            <a:lvl1pPr algn="l" defTabSz="914400" rtl="0" eaLnBrk="1" latinLnBrk="0" hangingPunct="1">
+              <a:lnSpc>
+                <a:spcPct val="100000"/>
+              </a:lnSpc>
+              <a:spcBef>
+                <a:spcPct val="0"/>
+              </a:spcBef>
+              <a:buNone/>
+              <a:defRPr sz="4000" b="1" kern="1200">
+                <a:solidFill>
+                  <a:schemeClr val="tx1"/>
+                </a:solidFill>
+                <a:latin typeface="+mj-lt"/>
+                <a:ea typeface="+mj-ea"/>
+                <a:cs typeface="+mj-cs"/>
+              </a:defRPr>
+            </a:lvl1pPr>
+          </a:lstStyle>
+          <a:p>
+            <a:r>
+              <a:rPr lang="en-US" sz="3200" dirty="0"/>
+              <a:t>What are PINNs?</a:t>
+            </a:r>
+          </a:p>
+        </p:txBody>
+      </p:sp>
+      <p:sp>
+        <p:nvSpPr>
+          <p:cNvPr id="6" name="TextBox 5">
+            <a:extLst>
+              <a:ext uri="{FF2B5EF4-FFF2-40B4-BE49-F238E27FC236}">
+                <a16:creationId xmlns:a16="http://schemas.microsoft.com/office/drawing/2014/main" id="{4CA5F18F-0867-C81C-0E48-71F66583E933}"/>
+              </a:ext>
+            </a:extLst>
+          </p:cNvPr>
+          <p:cNvSpPr txBox="1"/>
+          <p:nvPr/>
+        </p:nvSpPr>
+        <p:spPr>
+          <a:xfrm>
+            <a:off x="1018800" y="2046681"/>
+            <a:ext cx="6936479" cy="1477328"/>
+          </a:xfrm>
+          <a:prstGeom prst="rect">
+            <a:avLst/>
+          </a:prstGeom>
+          <a:noFill/>
+        </p:spPr>
+        <p:txBody>
+          <a:bodyPr wrap="square" rtlCol="0">
+            <a:spAutoFit/>
+          </a:bodyPr>
+          <a:lstStyle/>
+          <a:p>
+            <a:r>
+              <a:rPr lang="en-US" dirty="0"/>
+              <a:t>Network Architecture (MLP):</a:t>
+            </a:r>
+          </a:p>
+          <a:p>
+            <a:pPr marL="742950" lvl="1" indent="-285750">
+              <a:buFont typeface="Arial" panose="020B0604020202020204" pitchFamily="34" charset="0"/>
+              <a:buChar char="•"/>
+            </a:pPr>
+            <a:r>
+              <a:rPr lang="en-US" dirty="0"/>
+              <a:t>Inputs (x, y), outputs (u, v, p)</a:t>
+            </a:r>
+          </a:p>
+          <a:p>
+            <a:pPr marL="742950" lvl="1" indent="-285750">
+              <a:buFont typeface="Arial" panose="020B0604020202020204" pitchFamily="34" charset="0"/>
+              <a:buChar char="•"/>
+            </a:pPr>
+            <a:r>
+              <a:rPr lang="en-US" dirty="0"/>
+              <a:t>Fourier feature encoding</a:t>
+            </a:r>
+          </a:p>
+          <a:p>
+            <a:pPr marL="742950" lvl="1" indent="-285750">
+              <a:buFont typeface="Arial" panose="020B0604020202020204" pitchFamily="34" charset="0"/>
+              <a:buChar char="•"/>
+            </a:pPr>
+            <a:r>
+              <a:rPr lang="en-US" dirty="0"/>
+              <a:t>4 hidden layers with 128 neurons each using tanh activation</a:t>
+            </a:r>
+          </a:p>
+          <a:p>
+            <a:pPr marL="742950" lvl="1" indent="-285750">
+              <a:buFont typeface="Arial" panose="020B0604020202020204" pitchFamily="34" charset="0"/>
+              <a:buChar char="•"/>
+            </a:pPr>
+            <a:r>
+              <a:rPr lang="en-US" dirty="0"/>
+              <a:t>Two-phase training (Adam with cosine decay + L-BFGS)</a:t>
+            </a:r>
+          </a:p>
+        </p:txBody>
+      </p:sp>
+      <p:pic>
+        <p:nvPicPr>
+          <p:cNvPr id="9" name="Picture 8">
+            <a:extLst>
+              <a:ext uri="{FF2B5EF4-FFF2-40B4-BE49-F238E27FC236}">
+                <a16:creationId xmlns:a16="http://schemas.microsoft.com/office/drawing/2014/main" id="{2BD1EBED-B8F3-EFBE-3A97-6C41999B76A6}"/>
+              </a:ext>
+            </a:extLst>
+          </p:cNvPr>
+          <p:cNvPicPr>
+            <a:picLocks noChangeAspect="1"/>
+          </p:cNvPicPr>
+          <p:nvPr/>
+        </p:nvPicPr>
+        <p:blipFill>
+          <a:blip r:embed="rId2"/>
+          <a:stretch>
+            <a:fillRect/>
+          </a:stretch>
+        </p:blipFill>
+        <p:spPr>
+          <a:xfrm>
+            <a:off x="0" y="3514381"/>
+            <a:ext cx="12301997" cy="3343619"/>
+          </a:xfrm>
+          <a:prstGeom prst="rect">
+            <a:avLst/>
+          </a:prstGeom>
+        </p:spPr>
+      </p:pic>
       <mc:AlternateContent xmlns:mc="http://schemas.openxmlformats.org/markup-compatibility/2006" xmlns:a14="http://schemas.microsoft.com/office/drawing/2010/main">
         <mc:Choice Requires="a14">
           <p:sp>
             <p:nvSpPr>
-              <p:cNvPr id="3" name="Content Placeholder 2">
+              <p:cNvPr id="10" name="TextBox 9">
                 <a:extLst>
                   <a:ext uri="{FF2B5EF4-FFF2-40B4-BE49-F238E27FC236}">
-                    <a16:creationId xmlns:a16="http://schemas.microsoft.com/office/drawing/2014/main" id="{8F1F6078-B32A-E9E8-4975-AF0B0A992896}"/>
+                    <a16:creationId xmlns:a16="http://schemas.microsoft.com/office/drawing/2014/main" id="{E8546639-C282-3FBF-8FC2-F84CE43B265D}"/>
                   </a:ext>
                 </a:extLst>
               </p:cNvPr>
-              <p:cNvSpPr>
-                <a:spLocks noGrp="1"/>
-              </p:cNvSpPr>
-              <p:nvPr>
-                <p:ph idx="1"/>
-              </p:nvPr>
+              <p:cNvSpPr txBox="1"/>
+              <p:nvPr/>
             </p:nvSpPr>
-            <p:spPr/>
+            <p:spPr>
+              <a:xfrm>
+                <a:off x="7572956" y="1888034"/>
+                <a:ext cx="4527073" cy="2286908"/>
+              </a:xfrm>
+              <a:prstGeom prst="rect">
+                <a:avLst/>
+              </a:prstGeom>
+              <a:noFill/>
+            </p:spPr>
             <p:txBody>
-              <a:bodyPr/>
+              <a:bodyPr wrap="none" rtlCol="0">
+                <a:spAutoFit/>
+              </a:bodyPr>
               <a:lstStyle/>
               <a:p>
                 <a:r>
@@ -5446,165 +6067,170 @@
               <a:p>
                 <a:pPr marL="1200150" lvl="2" indent="-285750"/>
                 <a14:m>
-                  <m:oMath xmlns:m="http://schemas.openxmlformats.org/officeDocument/2006/math">
-                    <m:r>
-                      <a:rPr lang="nb-NO" i="1">
-                        <a:latin typeface="Cambria Math" panose="02040503050406030204" pitchFamily="18" charset="0"/>
-                      </a:rPr>
-                      <m:t>𝜌</m:t>
-                    </m:r>
-                    <m:d>
-                      <m:dPr>
-                        <m:ctrlPr>
-                          <a:rPr lang="nb-NO" i="1">
-                            <a:latin typeface="Cambria Math" panose="02040503050406030204" pitchFamily="18" charset="0"/>
-                          </a:rPr>
-                        </m:ctrlPr>
-                      </m:dPr>
-                      <m:e>
-                        <m:f>
-                          <m:fPr>
-                            <m:ctrlPr>
-                              <a:rPr lang="nb-NO" i="1">
-                                <a:latin typeface="Cambria Math" panose="02040503050406030204" pitchFamily="18" charset="0"/>
-                              </a:rPr>
-                            </m:ctrlPr>
-                          </m:fPr>
-                          <m:num>
-                            <m:r>
-                              <a:rPr lang="nb-NO" i="1">
-                                <a:latin typeface="Cambria Math" panose="02040503050406030204" pitchFamily="18" charset="0"/>
-                              </a:rPr>
-                              <m:t>𝜕</m:t>
-                            </m:r>
-                            <m:r>
-                              <a:rPr lang="nb-NO" i="1">
-                                <a:latin typeface="Cambria Math" panose="02040503050406030204" pitchFamily="18" charset="0"/>
-                              </a:rPr>
-                              <m:t>𝐮</m:t>
-                            </m:r>
-                          </m:num>
-                          <m:den>
-                            <m:r>
-                              <a:rPr lang="nb-NO" i="1">
-                                <a:latin typeface="Cambria Math" panose="02040503050406030204" pitchFamily="18" charset="0"/>
-                              </a:rPr>
-                              <m:t>𝜕</m:t>
-                            </m:r>
-                            <m:r>
-                              <a:rPr lang="nb-NO" i="1">
-                                <a:latin typeface="Cambria Math" panose="02040503050406030204" pitchFamily="18" charset="0"/>
-                              </a:rPr>
-                              <m:t>𝑡</m:t>
-                            </m:r>
-                          </m:den>
-                        </m:f>
-                        <m:r>
-                          <a:rPr lang="nb-NO" i="1">
-                            <a:latin typeface="Cambria Math" panose="02040503050406030204" pitchFamily="18" charset="0"/>
-                          </a:rPr>
-                          <m:t>+</m:t>
-                        </m:r>
-                        <m:r>
-                          <a:rPr lang="nb-NO" i="1">
-                            <a:latin typeface="Cambria Math" panose="02040503050406030204" pitchFamily="18" charset="0"/>
-                          </a:rPr>
-                          <m:t>𝐮</m:t>
-                        </m:r>
-                        <m:r>
-                          <a:rPr lang="nb-NO" i="1">
-                            <a:latin typeface="Cambria Math" panose="02040503050406030204" pitchFamily="18" charset="0"/>
-                          </a:rPr>
-                          <m:t>⋅</m:t>
-                        </m:r>
-                        <m:r>
-                          <m:rPr>
-                            <m:sty m:val="p"/>
-                          </m:rPr>
-                          <a:rPr lang="nb-NO">
-                            <a:latin typeface="Cambria Math" panose="02040503050406030204" pitchFamily="18" charset="0"/>
-                          </a:rPr>
-                          <m:t>∇</m:t>
-                        </m:r>
-                        <m:r>
-                          <a:rPr lang="nb-NO" i="1">
-                            <a:latin typeface="Cambria Math" panose="02040503050406030204" pitchFamily="18" charset="0"/>
-                          </a:rPr>
-                          <m:t>𝐮</m:t>
-                        </m:r>
-                      </m:e>
-                    </m:d>
-                    <m:r>
-                      <a:rPr lang="nb-NO" i="1">
-                        <a:latin typeface="Cambria Math" panose="02040503050406030204" pitchFamily="18" charset="0"/>
-                      </a:rPr>
-                      <m:t>=−</m:t>
-                    </m:r>
-                    <m:r>
-                      <m:rPr>
-                        <m:sty m:val="p"/>
-                      </m:rPr>
-                      <a:rPr lang="nb-NO">
-                        <a:latin typeface="Cambria Math" panose="02040503050406030204" pitchFamily="18" charset="0"/>
-                      </a:rPr>
-                      <m:t>∇</m:t>
-                    </m:r>
-                    <m:r>
-                      <m:rPr>
-                        <m:sty m:val="p"/>
-                      </m:rPr>
-                      <a:rPr lang="nb-NO" i="1">
-                        <a:latin typeface="Cambria Math" panose="02040503050406030204" pitchFamily="18" charset="0"/>
-                      </a:rPr>
-                      <m:t>p</m:t>
-                    </m:r>
-                    <m:r>
-                      <a:rPr lang="nb-NO" i="1">
-                        <a:latin typeface="Cambria Math" panose="02040503050406030204" pitchFamily="18" charset="0"/>
-                      </a:rPr>
-                      <m:t>+</m:t>
-                    </m:r>
-                    <m:r>
-                      <a:rPr lang="nb-NO" i="1">
-                        <a:latin typeface="Cambria Math" panose="02040503050406030204" pitchFamily="18" charset="0"/>
-                      </a:rPr>
-                      <m:t>𝜇</m:t>
-                    </m:r>
-                    <m:sSup>
-                      <m:sSupPr>
-                        <m:ctrlPr>
-                          <a:rPr lang="nb-NO" i="1">
-                            <a:latin typeface="Cambria Math" panose="02040503050406030204" pitchFamily="18" charset="0"/>
-                          </a:rPr>
-                        </m:ctrlPr>
-                      </m:sSupPr>
-                      <m:e>
-                        <m:r>
-                          <m:rPr>
-                            <m:sty m:val="p"/>
-                          </m:rPr>
-                          <a:rPr lang="nb-NO">
-                            <a:latin typeface="Cambria Math" panose="02040503050406030204" pitchFamily="18" charset="0"/>
-                          </a:rPr>
-                          <m:t>∇</m:t>
-                        </m:r>
-                      </m:e>
-                      <m:sup>
-                        <m:r>
-                          <a:rPr lang="nb-NO" i="1">
-                            <a:latin typeface="Cambria Math" panose="02040503050406030204" pitchFamily="18" charset="0"/>
-                          </a:rPr>
-                          <m:t>2</m:t>
-                        </m:r>
-                      </m:sup>
-                    </m:sSup>
-                    <m:r>
-                      <a:rPr lang="nb-NO" i="1">
-                        <a:latin typeface="Cambria Math" panose="02040503050406030204" pitchFamily="18" charset="0"/>
-                      </a:rPr>
-                      <m:t>𝐮</m:t>
-                    </m:r>
-                  </m:oMath>
+                  <m:oMathPara xmlns:m="http://schemas.openxmlformats.org/officeDocument/2006/math">
+                    <m:oMathParaPr>
+                      <m:jc m:val="centerGroup"/>
+                    </m:oMathParaPr>
+                    <m:oMath xmlns:m="http://schemas.openxmlformats.org/officeDocument/2006/math">
+                      <m:r>
+                        <a:rPr lang="nb-NO" i="1">
+                          <a:latin typeface="Cambria Math" panose="02040503050406030204" pitchFamily="18" charset="0"/>
+                        </a:rPr>
+                        <m:t>𝜌</m:t>
+                      </m:r>
+                      <m:d>
+                        <m:dPr>
+                          <m:ctrlPr>
+                            <a:rPr lang="nb-NO" i="1">
+                              <a:latin typeface="Cambria Math" panose="02040503050406030204" pitchFamily="18" charset="0"/>
+                            </a:rPr>
+                          </m:ctrlPr>
+                        </m:dPr>
+                        <m:e>
+                          <m:f>
+                            <m:fPr>
+                              <m:ctrlPr>
+                                <a:rPr lang="nb-NO" i="1">
+                                  <a:latin typeface="Cambria Math" panose="02040503050406030204" pitchFamily="18" charset="0"/>
+                                </a:rPr>
+                              </m:ctrlPr>
+                            </m:fPr>
+                            <m:num>
+                              <m:r>
+                                <a:rPr lang="nb-NO" i="1">
+                                  <a:latin typeface="Cambria Math" panose="02040503050406030204" pitchFamily="18" charset="0"/>
+                                </a:rPr>
+                                <m:t>𝜕</m:t>
+                              </m:r>
+                              <m:r>
+                                <a:rPr lang="nb-NO" i="1">
+                                  <a:latin typeface="Cambria Math" panose="02040503050406030204" pitchFamily="18" charset="0"/>
+                                </a:rPr>
+                                <m:t>𝐮</m:t>
+                              </m:r>
+                            </m:num>
+                            <m:den>
+                              <m:r>
+                                <a:rPr lang="nb-NO" i="1">
+                                  <a:latin typeface="Cambria Math" panose="02040503050406030204" pitchFamily="18" charset="0"/>
+                                </a:rPr>
+                                <m:t>𝜕</m:t>
+                              </m:r>
+                              <m:r>
+                                <a:rPr lang="nb-NO" i="1">
+                                  <a:latin typeface="Cambria Math" panose="02040503050406030204" pitchFamily="18" charset="0"/>
+                                </a:rPr>
+                                <m:t>𝑡</m:t>
+                              </m:r>
+                            </m:den>
+                          </m:f>
+                          <m:r>
+                            <a:rPr lang="nb-NO" i="1">
+                              <a:latin typeface="Cambria Math" panose="02040503050406030204" pitchFamily="18" charset="0"/>
+                            </a:rPr>
+                            <m:t>+</m:t>
+                          </m:r>
+                          <m:r>
+                            <a:rPr lang="nb-NO" i="1">
+                              <a:latin typeface="Cambria Math" panose="02040503050406030204" pitchFamily="18" charset="0"/>
+                            </a:rPr>
+                            <m:t>𝐮</m:t>
+                          </m:r>
+                          <m:r>
+                            <a:rPr lang="nb-NO" i="1">
+                              <a:latin typeface="Cambria Math" panose="02040503050406030204" pitchFamily="18" charset="0"/>
+                            </a:rPr>
+                            <m:t>⋅</m:t>
+                          </m:r>
+                          <m:r>
+                            <m:rPr>
+                              <m:sty m:val="p"/>
+                            </m:rPr>
+                            <a:rPr lang="nb-NO">
+                              <a:latin typeface="Cambria Math" panose="02040503050406030204" pitchFamily="18" charset="0"/>
+                            </a:rPr>
+                            <m:t>∇</m:t>
+                          </m:r>
+                          <m:r>
+                            <a:rPr lang="nb-NO" i="1">
+                              <a:latin typeface="Cambria Math" panose="02040503050406030204" pitchFamily="18" charset="0"/>
+                            </a:rPr>
+                            <m:t>𝐮</m:t>
+                          </m:r>
+                        </m:e>
+                      </m:d>
+                      <m:r>
+                        <a:rPr lang="nb-NO" i="1">
+                          <a:latin typeface="Cambria Math" panose="02040503050406030204" pitchFamily="18" charset="0"/>
+                        </a:rPr>
+                        <m:t>=−</m:t>
+                      </m:r>
+                      <m:r>
+                        <m:rPr>
+                          <m:sty m:val="p"/>
+                        </m:rPr>
+                        <a:rPr lang="nb-NO">
+                          <a:latin typeface="Cambria Math" panose="02040503050406030204" pitchFamily="18" charset="0"/>
+                        </a:rPr>
+                        <m:t>∇</m:t>
+                      </m:r>
+                      <m:r>
+                        <m:rPr>
+                          <m:sty m:val="p"/>
+                        </m:rPr>
+                        <a:rPr lang="nb-NO" i="1">
+                          <a:latin typeface="Cambria Math" panose="02040503050406030204" pitchFamily="18" charset="0"/>
+                        </a:rPr>
+                        <m:t>p</m:t>
+                      </m:r>
+                      <m:r>
+                        <a:rPr lang="nb-NO" i="1">
+                          <a:latin typeface="Cambria Math" panose="02040503050406030204" pitchFamily="18" charset="0"/>
+                        </a:rPr>
+                        <m:t>+</m:t>
+                      </m:r>
+                      <m:r>
+                        <a:rPr lang="nb-NO" i="1">
+                          <a:latin typeface="Cambria Math" panose="02040503050406030204" pitchFamily="18" charset="0"/>
+                        </a:rPr>
+                        <m:t>𝜇</m:t>
+                      </m:r>
+                      <m:sSup>
+                        <m:sSupPr>
+                          <m:ctrlPr>
+                            <a:rPr lang="nb-NO" i="1">
+                              <a:latin typeface="Cambria Math" panose="02040503050406030204" pitchFamily="18" charset="0"/>
+                            </a:rPr>
+                          </m:ctrlPr>
+                        </m:sSupPr>
+                        <m:e>
+                          <m:r>
+                            <m:rPr>
+                              <m:sty m:val="p"/>
+                            </m:rPr>
+                            <a:rPr lang="nb-NO">
+                              <a:latin typeface="Cambria Math" panose="02040503050406030204" pitchFamily="18" charset="0"/>
+                            </a:rPr>
+                            <m:t>∇</m:t>
+                          </m:r>
+                        </m:e>
+                        <m:sup>
+                          <m:r>
+                            <a:rPr lang="nb-NO" i="1">
+                              <a:latin typeface="Cambria Math" panose="02040503050406030204" pitchFamily="18" charset="0"/>
+                            </a:rPr>
+                            <m:t>2</m:t>
+                          </m:r>
+                        </m:sup>
+                      </m:sSup>
+                      <m:r>
+                        <a:rPr lang="nb-NO" i="1">
+                          <a:latin typeface="Cambria Math" panose="02040503050406030204" pitchFamily="18" charset="0"/>
+                        </a:rPr>
+                        <m:t>𝐮</m:t>
+                      </m:r>
+                    </m:oMath>
+                  </m:oMathPara>
                 </a14:m>
                 <a:endParaRPr lang="en-US" dirty="0"/>
               </a:p>
@@ -5638,36 +6264,51 @@
               <a:p>
                 <a:pPr marL="1200150" lvl="2" indent="-285750"/>
                 <a14:m>
-                  <m:oMath xmlns:m="http://schemas.openxmlformats.org/officeDocument/2006/math">
-                    <m:r>
-                      <m:rPr>
-                        <m:sty m:val="p"/>
-                      </m:rPr>
-                      <a:rPr lang="nb-NO">
-                        <a:latin typeface="Cambria Math" panose="02040503050406030204" pitchFamily="18" charset="0"/>
-                      </a:rPr>
-                      <m:t>∇</m:t>
-                    </m:r>
-                    <m:r>
-                      <a:rPr lang="nb-NO" i="1">
-                        <a:latin typeface="Cambria Math" panose="02040503050406030204" pitchFamily="18" charset="0"/>
-                      </a:rPr>
-                      <m:t>⋅</m:t>
-                    </m:r>
-                    <m:r>
-                      <a:rPr lang="nb-NO" i="1">
-                        <a:latin typeface="Cambria Math" panose="02040503050406030204" pitchFamily="18" charset="0"/>
-                      </a:rPr>
-                      <m:t>𝐮</m:t>
-                    </m:r>
-                    <m:r>
-                      <a:rPr lang="nb-NO" i="1">
-                        <a:latin typeface="Cambria Math" panose="02040503050406030204" pitchFamily="18" charset="0"/>
-                      </a:rPr>
-                      <m:t>=0</m:t>
-                    </m:r>
-                  </m:oMath>
+                  <m:oMathPara xmlns:m="http://schemas.openxmlformats.org/officeDocument/2006/math">
+                    <m:oMathParaPr>
+                      <m:jc m:val="centerGroup"/>
+                    </m:oMathParaPr>
+                    <m:oMath xmlns:m="http://schemas.openxmlformats.org/officeDocument/2006/math">
+                      <m:r>
+                        <m:rPr>
+                          <m:sty m:val="p"/>
+                        </m:rPr>
+                        <a:rPr lang="nb-NO">
+                          <a:latin typeface="Cambria Math" panose="02040503050406030204" pitchFamily="18" charset="0"/>
+                        </a:rPr>
+                        <m:t>∇</m:t>
+                      </m:r>
+                      <m:r>
+                        <a:rPr lang="nb-NO" i="1">
+                          <a:latin typeface="Cambria Math" panose="02040503050406030204" pitchFamily="18" charset="0"/>
+                        </a:rPr>
+                        <m:t>⋅</m:t>
+                      </m:r>
+                      <m:r>
+                        <a:rPr lang="nb-NO" i="1">
+                          <a:latin typeface="Cambria Math" panose="02040503050406030204" pitchFamily="18" charset="0"/>
+                        </a:rPr>
+                        <m:t>𝐮</m:t>
+                      </m:r>
+                      <m:r>
+                        <a:rPr lang="nb-NO" i="1">
+                          <a:latin typeface="Cambria Math" panose="02040503050406030204" pitchFamily="18" charset="0"/>
+                        </a:rPr>
+                        <m:t>=0</m:t>
+                      </m:r>
+                    </m:oMath>
+                  </m:oMathPara>
                 </a14:m>
+                <a:endParaRPr lang="en-US" dirty="0"/>
+              </a:p>
+              <a:p>
+                <a:pPr marL="742950" lvl="1" indent="-285750">
+                  <a:buFont typeface="Arial" panose="020B0604020202020204" pitchFamily="34" charset="0"/>
+                  <a:buChar char="•"/>
+                </a:pPr>
+                <a:endParaRPr lang="en-US" dirty="0"/>
+              </a:p>
+              <a:p>
                 <a:endParaRPr lang="en-US" dirty="0"/>
               </a:p>
             </p:txBody>
@@ -5676,25 +6317,30 @@
         <mc:Fallback xmlns="">
           <p:sp>
             <p:nvSpPr>
-              <p:cNvPr id="3" name="Content Placeholder 2">
+              <p:cNvPr id="10" name="TextBox 9">
                 <a:extLst>
                   <a:ext uri="{FF2B5EF4-FFF2-40B4-BE49-F238E27FC236}">
-                    <a16:creationId xmlns:a16="http://schemas.microsoft.com/office/drawing/2014/main" id="{8F1F6078-B32A-E9E8-4975-AF0B0A992896}"/>
+                    <a16:creationId xmlns:a16="http://schemas.microsoft.com/office/drawing/2014/main" id="{E8546639-C282-3FBF-8FC2-F84CE43B265D}"/>
                   </a:ext>
                 </a:extLst>
               </p:cNvPr>
-              <p:cNvSpPr>
-                <a:spLocks noGrp="1" noRot="1" noChangeAspect="1" noMove="1" noResize="1" noEditPoints="1" noAdjustHandles="1" noChangeArrowheads="1" noChangeShapeType="1" noTextEdit="1"/>
+              <p:cNvSpPr txBox="1">
+                <a:spLocks noRot="1" noChangeAspect="1" noMove="1" noResize="1" noEditPoints="1" noAdjustHandles="1" noChangeArrowheads="1" noChangeShapeType="1" noTextEdit="1"/>
               </p:cNvSpPr>
-              <p:nvPr>
-                <p:ph idx="1"/>
-              </p:nvPr>
+              <p:nvPr/>
             </p:nvSpPr>
             <p:spPr>
+              <a:xfrm>
+                <a:off x="7572956" y="1888034"/>
+                <a:ext cx="4527073" cy="2286908"/>
+              </a:xfrm>
+              <a:prstGeom prst="rect">
+                <a:avLst/>
+              </a:prstGeom>
               <a:blipFill>
-                <a:blip r:embed="rId2"/>
+                <a:blip r:embed="rId3"/>
                 <a:stretch>
-                  <a:fillRect l="-233"/>
+                  <a:fillRect l="-1120" t="-1105"/>
                 </a:stretch>
               </a:blipFill>
             </p:spPr>
@@ -5716,7 +6362,7 @@
     </p:spTree>
     <p:extLst>
       <p:ext uri="{BB962C8B-B14F-4D97-AF65-F5344CB8AC3E}">
-        <p14:creationId xmlns:p14="http://schemas.microsoft.com/office/powerpoint/2010/main" val="3069239637"/>
+        <p14:creationId xmlns:p14="http://schemas.microsoft.com/office/powerpoint/2010/main" val="2598518009"/>
       </p:ext>
     </p:extLst>
   </p:cSld>
@@ -5727,6 +6373,808 @@
 </file>
 
 <file path=ppt/slides/slide4.xml><?xml version="1.0" encoding="utf-8"?>
+<p:sld xmlns:a="http://schemas.openxmlformats.org/drawingml/2006/main" xmlns:r="http://schemas.openxmlformats.org/officeDocument/2006/relationships" xmlns:p="http://schemas.openxmlformats.org/presentationml/2006/main">
+  <p:cSld>
+    <p:spTree>
+      <p:nvGrpSpPr>
+        <p:cNvPr id="1" name=""/>
+        <p:cNvGrpSpPr/>
+        <p:nvPr/>
+      </p:nvGrpSpPr>
+      <p:grpSpPr>
+        <a:xfrm>
+          <a:off x="0" y="0"/>
+          <a:ext cx="0" cy="0"/>
+          <a:chOff x="0" y="0"/>
+          <a:chExt cx="0" cy="0"/>
+        </a:xfrm>
+      </p:grpSpPr>
+      <p:sp>
+        <p:nvSpPr>
+          <p:cNvPr id="2" name="Title 1">
+            <a:extLst>
+              <a:ext uri="{FF2B5EF4-FFF2-40B4-BE49-F238E27FC236}">
+                <a16:creationId xmlns:a16="http://schemas.microsoft.com/office/drawing/2014/main" id="{1FF187FB-3826-A13A-27DE-1AD08BEE92BE}"/>
+              </a:ext>
+            </a:extLst>
+          </p:cNvPr>
+          <p:cNvSpPr>
+            <a:spLocks noGrp="1"/>
+          </p:cNvSpPr>
+          <p:nvPr>
+            <p:ph type="title"/>
+          </p:nvPr>
+        </p:nvSpPr>
+        <p:spPr>
+          <a:xfrm>
+            <a:off x="650535" y="1040868"/>
+            <a:ext cx="10890929" cy="1097280"/>
+          </a:xfrm>
+        </p:spPr>
+        <p:txBody>
+          <a:bodyPr/>
+          <a:lstStyle/>
+          <a:p>
+            <a:r>
+              <a:rPr lang="en-US" dirty="0"/>
+              <a:t>Solver 2: </a:t>
+            </a:r>
+            <a:r>
+              <a:rPr lang="en-US" dirty="0" err="1"/>
+              <a:t>OpenFoam</a:t>
+            </a:r>
+            <a:endParaRPr lang="en-US" dirty="0"/>
+          </a:p>
+        </p:txBody>
+      </p:sp>
+      <p:sp>
+        <p:nvSpPr>
+          <p:cNvPr id="9" name="Rectangle 8">
+            <a:extLst>
+              <a:ext uri="{FF2B5EF4-FFF2-40B4-BE49-F238E27FC236}">
+                <a16:creationId xmlns:a16="http://schemas.microsoft.com/office/drawing/2014/main" id="{CA2C8DE6-7EF3-0AEF-CD88-CD8C02BCA828}"/>
+              </a:ext>
+            </a:extLst>
+          </p:cNvPr>
+          <p:cNvSpPr/>
+          <p:nvPr/>
+        </p:nvSpPr>
+        <p:spPr>
+          <a:xfrm>
+            <a:off x="834715" y="2973223"/>
+            <a:ext cx="10890935" cy="3411946"/>
+          </a:xfrm>
+          <a:prstGeom prst="rect">
+            <a:avLst/>
+          </a:prstGeom>
+          <a:solidFill>
+            <a:schemeClr val="tx2">
+              <a:lumMod val="25000"/>
+              <a:lumOff val="75000"/>
+            </a:schemeClr>
+          </a:solidFill>
+        </p:spPr>
+        <p:style>
+          <a:lnRef idx="2">
+            <a:schemeClr val="accent1">
+              <a:shade val="15000"/>
+            </a:schemeClr>
+          </a:lnRef>
+          <a:fillRef idx="1">
+            <a:schemeClr val="accent1"/>
+          </a:fillRef>
+          <a:effectRef idx="0">
+            <a:schemeClr val="accent1"/>
+          </a:effectRef>
+          <a:fontRef idx="minor">
+            <a:schemeClr val="lt1"/>
+          </a:fontRef>
+        </p:style>
+        <p:txBody>
+          <a:bodyPr rtlCol="0" anchor="ctr"/>
+          <a:lstStyle/>
+          <a:p>
+            <a:pPr algn="ctr"/>
+            <a:endParaRPr lang="en-US" dirty="0"/>
+          </a:p>
+        </p:txBody>
+      </p:sp>
+      <p:sp>
+        <p:nvSpPr>
+          <p:cNvPr id="4" name="Title 1">
+            <a:extLst>
+              <a:ext uri="{FF2B5EF4-FFF2-40B4-BE49-F238E27FC236}">
+                <a16:creationId xmlns:a16="http://schemas.microsoft.com/office/drawing/2014/main" id="{5AF153D4-2A99-BF13-549F-DC2FE4CEDD2C}"/>
+              </a:ext>
+            </a:extLst>
+          </p:cNvPr>
+          <p:cNvSpPr txBox="1">
+            <a:spLocks/>
+          </p:cNvSpPr>
+          <p:nvPr/>
+        </p:nvSpPr>
+        <p:spPr>
+          <a:xfrm>
+            <a:off x="1301071" y="3718229"/>
+            <a:ext cx="10890929" cy="1097280"/>
+          </a:xfrm>
+          <a:prstGeom prst="rect">
+            <a:avLst/>
+          </a:prstGeom>
+        </p:spPr>
+        <p:txBody>
+          <a:bodyPr vert="horz" lIns="91440" tIns="45720" rIns="91440" bIns="45720" rtlCol="0" anchor="t">
+            <a:normAutofit/>
+          </a:bodyPr>
+          <a:lstStyle>
+            <a:lvl1pPr algn="l" defTabSz="914400" rtl="0" eaLnBrk="1" latinLnBrk="0" hangingPunct="1">
+              <a:lnSpc>
+                <a:spcPct val="100000"/>
+              </a:lnSpc>
+              <a:spcBef>
+                <a:spcPct val="0"/>
+              </a:spcBef>
+              <a:buNone/>
+              <a:defRPr sz="4000" b="1" kern="1200">
+                <a:solidFill>
+                  <a:schemeClr val="tx1"/>
+                </a:solidFill>
+                <a:latin typeface="+mj-lt"/>
+                <a:ea typeface="+mj-ea"/>
+                <a:cs typeface="+mj-cs"/>
+              </a:defRPr>
+            </a:lvl1pPr>
+          </a:lstStyle>
+          <a:p>
+            <a:endParaRPr lang="en-US" sz="3200" dirty="0"/>
+          </a:p>
+        </p:txBody>
+      </p:sp>
+      <p:sp>
+        <p:nvSpPr>
+          <p:cNvPr id="8" name="Rectangle 7">
+            <a:extLst>
+              <a:ext uri="{FF2B5EF4-FFF2-40B4-BE49-F238E27FC236}">
+                <a16:creationId xmlns:a16="http://schemas.microsoft.com/office/drawing/2014/main" id="{6A49FFFD-19DC-3295-725C-A9ECD324C75C}"/>
+              </a:ext>
+            </a:extLst>
+          </p:cNvPr>
+          <p:cNvSpPr/>
+          <p:nvPr/>
+        </p:nvSpPr>
+        <p:spPr>
+          <a:xfrm>
+            <a:off x="834715" y="1813175"/>
+            <a:ext cx="10890937" cy="1187997"/>
+          </a:xfrm>
+          <a:prstGeom prst="rect">
+            <a:avLst/>
+          </a:prstGeom>
+          <a:solidFill>
+            <a:schemeClr val="tx2">
+              <a:lumMod val="10000"/>
+              <a:lumOff val="90000"/>
+            </a:schemeClr>
+          </a:solidFill>
+        </p:spPr>
+        <p:style>
+          <a:lnRef idx="2">
+            <a:schemeClr val="accent1">
+              <a:shade val="15000"/>
+            </a:schemeClr>
+          </a:lnRef>
+          <a:fillRef idx="1">
+            <a:schemeClr val="accent1"/>
+          </a:fillRef>
+          <a:effectRef idx="0">
+            <a:schemeClr val="accent1"/>
+          </a:effectRef>
+          <a:fontRef idx="minor">
+            <a:schemeClr val="lt1"/>
+          </a:fontRef>
+        </p:style>
+        <p:txBody>
+          <a:bodyPr rtlCol="0" anchor="ctr"/>
+          <a:lstStyle/>
+          <a:p>
+            <a:pPr algn="ctr"/>
+            <a:endParaRPr lang="en-US" dirty="0"/>
+          </a:p>
+        </p:txBody>
+      </p:sp>
+      <p:sp>
+        <p:nvSpPr>
+          <p:cNvPr id="5" name="Title 1">
+            <a:extLst>
+              <a:ext uri="{FF2B5EF4-FFF2-40B4-BE49-F238E27FC236}">
+                <a16:creationId xmlns:a16="http://schemas.microsoft.com/office/drawing/2014/main" id="{3F8D099D-7725-12F5-4824-27782DD47C40}"/>
+              </a:ext>
+            </a:extLst>
+          </p:cNvPr>
+          <p:cNvSpPr txBox="1">
+            <a:spLocks/>
+          </p:cNvSpPr>
+          <p:nvPr/>
+        </p:nvSpPr>
+        <p:spPr>
+          <a:xfrm>
+            <a:off x="834725" y="1785225"/>
+            <a:ext cx="10890929" cy="1097280"/>
+          </a:xfrm>
+          <a:prstGeom prst="rect">
+            <a:avLst/>
+          </a:prstGeom>
+        </p:spPr>
+        <p:txBody>
+          <a:bodyPr vert="horz" lIns="91440" tIns="45720" rIns="91440" bIns="45720" rtlCol="0" anchor="t">
+            <a:normAutofit/>
+          </a:bodyPr>
+          <a:lstStyle>
+            <a:lvl1pPr algn="l" defTabSz="914400" rtl="0" eaLnBrk="1" latinLnBrk="0" hangingPunct="1">
+              <a:lnSpc>
+                <a:spcPct val="100000"/>
+              </a:lnSpc>
+              <a:spcBef>
+                <a:spcPct val="0"/>
+              </a:spcBef>
+              <a:buNone/>
+              <a:defRPr sz="4000" b="1" kern="1200">
+                <a:solidFill>
+                  <a:schemeClr val="tx1"/>
+                </a:solidFill>
+                <a:latin typeface="+mj-lt"/>
+                <a:ea typeface="+mj-ea"/>
+                <a:cs typeface="+mj-cs"/>
+              </a:defRPr>
+            </a:lvl1pPr>
+          </a:lstStyle>
+          <a:p>
+            <a:r>
+              <a:rPr lang="en-US" sz="3200" dirty="0"/>
+              <a:t>What is </a:t>
+            </a:r>
+            <a:r>
+              <a:rPr lang="en-US" sz="3200" dirty="0" err="1"/>
+              <a:t>openFoam</a:t>
+            </a:r>
+            <a:r>
+              <a:rPr lang="en-US" sz="3200" dirty="0"/>
+              <a:t>?</a:t>
+            </a:r>
+          </a:p>
+        </p:txBody>
+      </p:sp>
+      <p:sp>
+        <p:nvSpPr>
+          <p:cNvPr id="7" name="TextBox 6">
+            <a:extLst>
+              <a:ext uri="{FF2B5EF4-FFF2-40B4-BE49-F238E27FC236}">
+                <a16:creationId xmlns:a16="http://schemas.microsoft.com/office/drawing/2014/main" id="{2A1EE006-DAB7-9708-4FC3-B2582E84AB3B}"/>
+              </a:ext>
+            </a:extLst>
+          </p:cNvPr>
+          <p:cNvSpPr txBox="1"/>
+          <p:nvPr/>
+        </p:nvSpPr>
+        <p:spPr>
+          <a:xfrm>
+            <a:off x="976420" y="2330491"/>
+            <a:ext cx="6167073" cy="646331"/>
+          </a:xfrm>
+          <a:prstGeom prst="rect">
+            <a:avLst/>
+          </a:prstGeom>
+          <a:noFill/>
+        </p:spPr>
+        <p:txBody>
+          <a:bodyPr wrap="none" rtlCol="0">
+            <a:spAutoFit/>
+          </a:bodyPr>
+          <a:lstStyle/>
+          <a:p>
+            <a:pPr marL="285750" indent="-285750">
+              <a:buFont typeface="Arial" panose="020B0604020202020204" pitchFamily="34" charset="0"/>
+              <a:buChar char="•"/>
+            </a:pPr>
+            <a:r>
+              <a:rPr lang="en-US" dirty="0"/>
+              <a:t>Transient, incompressible, laminar Navier-Stokes solver</a:t>
+            </a:r>
+          </a:p>
+          <a:p>
+            <a:pPr marL="285750" indent="-285750">
+              <a:buFont typeface="Arial" panose="020B0604020202020204" pitchFamily="34" charset="0"/>
+              <a:buChar char="•"/>
+            </a:pPr>
+            <a:r>
+              <a:rPr lang="en-US" dirty="0" err="1"/>
+              <a:t>icoFoam</a:t>
+            </a:r>
+            <a:r>
+              <a:rPr lang="en-US" dirty="0"/>
+              <a:t> solver</a:t>
+            </a:r>
+          </a:p>
+        </p:txBody>
+      </p:sp>
+      <p:sp>
+        <p:nvSpPr>
+          <p:cNvPr id="6" name="TextBox 5">
+            <a:extLst>
+              <a:ext uri="{FF2B5EF4-FFF2-40B4-BE49-F238E27FC236}">
+                <a16:creationId xmlns:a16="http://schemas.microsoft.com/office/drawing/2014/main" id="{88187DE0-1B83-2450-878A-A3A41A90E8E4}"/>
+              </a:ext>
+            </a:extLst>
+          </p:cNvPr>
+          <p:cNvSpPr txBox="1"/>
+          <p:nvPr/>
+        </p:nvSpPr>
+        <p:spPr>
+          <a:xfrm>
+            <a:off x="834715" y="2965955"/>
+            <a:ext cx="1327608" cy="646331"/>
+          </a:xfrm>
+          <a:prstGeom prst="rect">
+            <a:avLst/>
+          </a:prstGeom>
+          <a:noFill/>
+        </p:spPr>
+        <p:txBody>
+          <a:bodyPr wrap="none" rtlCol="0">
+            <a:spAutoFit/>
+          </a:bodyPr>
+          <a:lstStyle/>
+          <a:p>
+            <a:r>
+              <a:rPr lang="en-US" dirty="0"/>
+              <a:t>PISO ALGO</a:t>
+            </a:r>
+          </a:p>
+          <a:p>
+            <a:endParaRPr lang="en-US" dirty="0"/>
+          </a:p>
+        </p:txBody>
+      </p:sp>
+      <p:sp>
+        <p:nvSpPr>
+          <p:cNvPr id="12" name="Rectangle 3">
+            <a:extLst>
+              <a:ext uri="{FF2B5EF4-FFF2-40B4-BE49-F238E27FC236}">
+                <a16:creationId xmlns:a16="http://schemas.microsoft.com/office/drawing/2014/main" id="{3D77959E-F728-30B3-4A31-94E2C54DEEE4}"/>
+              </a:ext>
+            </a:extLst>
+          </p:cNvPr>
+          <p:cNvSpPr>
+            <a:spLocks noChangeArrowheads="1"/>
+          </p:cNvSpPr>
+          <p:nvPr/>
+        </p:nvSpPr>
+        <p:spPr bwMode="auto">
+          <a:xfrm>
+            <a:off x="834715" y="3245848"/>
+            <a:ext cx="11126764" cy="3139321"/>
+          </a:xfrm>
+          <a:prstGeom prst="rect">
+            <a:avLst/>
+          </a:prstGeom>
+          <a:noFill/>
+          <a:ln>
+            <a:noFill/>
+          </a:ln>
+          <a:effectLst/>
+          <a:extLst>
+            <a:ext uri="{909E8E84-426E-40DD-AFC4-6F175D3DCCD1}">
+              <a14:hiddenFill xmlns:a14="http://schemas.microsoft.com/office/drawing/2010/main">
+                <a:solidFill>
+                  <a:schemeClr val="accent1"/>
+                </a:solidFill>
+              </a14:hiddenFill>
+            </a:ext>
+            <a:ext uri="{91240B29-F687-4F45-9708-019B960494DF}">
+              <a14:hiddenLine xmlns:a14="http://schemas.microsoft.com/office/drawing/2010/main" w="9525">
+                <a:solidFill>
+                  <a:schemeClr val="tx1"/>
+                </a:solidFill>
+                <a:miter lim="800000"/>
+                <a:headEnd/>
+                <a:tailEnd/>
+              </a14:hiddenLine>
+            </a:ext>
+            <a:ext uri="{AF507438-7753-43E0-B8FC-AC1667EBCBE1}">
+              <a14:hiddenEffects xmlns:a14="http://schemas.microsoft.com/office/drawing/2010/main">
+                <a:effectLst>
+                  <a:outerShdw dist="35921" dir="2700000" algn="ctr" rotWithShape="0">
+                    <a:schemeClr val="bg2"/>
+                  </a:outerShdw>
+                </a:effectLst>
+              </a14:hiddenEffects>
+            </a:ext>
+          </a:extLst>
+        </p:spPr>
+        <p:txBody>
+          <a:bodyPr vert="horz" wrap="none" lIns="91440" tIns="45720" rIns="91440" bIns="45720" numCol="1" anchor="ctr" anchorCtr="0" compatLnSpc="1">
+            <a:prstTxWarp prst="textNoShape">
+              <a:avLst/>
+            </a:prstTxWarp>
+            <a:spAutoFit/>
+          </a:bodyPr>
+          <a:lstStyle/>
+          <a:p>
+            <a:pPr marL="0" marR="0" lvl="0" indent="0" algn="l" defTabSz="914400" rtl="0" eaLnBrk="0" fontAlgn="base" latinLnBrk="0" hangingPunct="0">
+              <a:lnSpc>
+                <a:spcPct val="100000"/>
+              </a:lnSpc>
+              <a:spcBef>
+                <a:spcPct val="0"/>
+              </a:spcBef>
+              <a:spcAft>
+                <a:spcPct val="0"/>
+              </a:spcAft>
+              <a:buClrTx/>
+              <a:buSzTx/>
+              <a:buFontTx/>
+              <a:buChar char="•"/>
+              <a:tabLst/>
+            </a:pPr>
+            <a:r>
+              <a:rPr kumimoji="0" lang="en-NO" altLang="en-NO" sz="1800" b="1" i="0" u="none" strike="noStrike" cap="none" normalizeH="0" baseline="0" dirty="0">
+                <a:ln>
+                  <a:noFill/>
+                </a:ln>
+                <a:solidFill>
+                  <a:schemeClr val="tx1"/>
+                </a:solidFill>
+                <a:effectLst/>
+                <a:latin typeface="Arial" panose="020B0604020202020204" pitchFamily="34" charset="0"/>
+              </a:rPr>
+              <a:t>Predict velocity:</a:t>
+            </a:r>
+            <a:r>
+              <a:rPr kumimoji="0" lang="en-NO" altLang="en-NO" sz="1800" b="0" i="0" u="none" strike="noStrike" cap="none" normalizeH="0" baseline="0" dirty="0">
+                <a:ln>
+                  <a:noFill/>
+                </a:ln>
+                <a:solidFill>
+                  <a:schemeClr val="tx1"/>
+                </a:solidFill>
+                <a:effectLst/>
+                <a:latin typeface="Arial" panose="020B0604020202020204" pitchFamily="34" charset="0"/>
+              </a:rPr>
+              <a:t> </a:t>
+            </a:r>
+          </a:p>
+          <a:p>
+            <a:pPr lvl="1" eaLnBrk="0" fontAlgn="base" hangingPunct="0">
+              <a:spcBef>
+                <a:spcPct val="0"/>
+              </a:spcBef>
+              <a:spcAft>
+                <a:spcPct val="0"/>
+              </a:spcAft>
+              <a:buFontTx/>
+              <a:buChar char="•"/>
+            </a:pPr>
+            <a:r>
+              <a:rPr kumimoji="0" lang="en-NO" altLang="en-NO" b="0" i="0" u="none" strike="noStrike" cap="none" normalizeH="0" baseline="0" dirty="0">
+                <a:ln>
+                  <a:noFill/>
+                </a:ln>
+                <a:solidFill>
+                  <a:schemeClr val="tx1"/>
+                </a:solidFill>
+                <a:effectLst/>
+                <a:latin typeface="Arial" panose="020B0604020202020204" pitchFamily="34" charset="0"/>
+              </a:rPr>
+              <a:t>Solve momentum equation with current pressure, guess p* to get u** </a:t>
+            </a:r>
+          </a:p>
+          <a:p>
+            <a:pPr lvl="1" eaLnBrk="0" fontAlgn="base" hangingPunct="0">
+              <a:spcBef>
+                <a:spcPct val="0"/>
+              </a:spcBef>
+              <a:spcAft>
+                <a:spcPct val="0"/>
+              </a:spcAft>
+              <a:buFontTx/>
+              <a:buChar char="•"/>
+            </a:pPr>
+            <a:r>
+              <a:rPr kumimoji="0" lang="en-NO" altLang="en-NO" b="0" i="0" u="none" strike="noStrike" cap="none" normalizeH="0" baseline="0" dirty="0">
+                <a:ln>
+                  <a:noFill/>
+                </a:ln>
+                <a:solidFill>
+                  <a:schemeClr val="tx1"/>
+                </a:solidFill>
+                <a:effectLst/>
+                <a:latin typeface="Arial" panose="020B0604020202020204" pitchFamily="34" charset="0"/>
+              </a:rPr>
+              <a:t>this satisfies momentum but not continuity (∇·u** ≠ 0). </a:t>
+            </a:r>
+          </a:p>
+          <a:p>
+            <a:pPr marL="0" marR="0" lvl="0" indent="0" algn="l" defTabSz="914400" rtl="0" eaLnBrk="0" fontAlgn="base" latinLnBrk="0" hangingPunct="0">
+              <a:lnSpc>
+                <a:spcPct val="100000"/>
+              </a:lnSpc>
+              <a:spcBef>
+                <a:spcPct val="0"/>
+              </a:spcBef>
+              <a:spcAft>
+                <a:spcPct val="0"/>
+              </a:spcAft>
+              <a:buClrTx/>
+              <a:buSzTx/>
+              <a:buFontTx/>
+              <a:buChar char="•"/>
+              <a:tabLst/>
+            </a:pPr>
+            <a:r>
+              <a:rPr kumimoji="0" lang="en-NO" altLang="en-NO" sz="1800" b="1" i="0" u="none" strike="noStrike" cap="none" normalizeH="0" baseline="0" dirty="0">
+                <a:ln>
+                  <a:noFill/>
+                </a:ln>
+                <a:solidFill>
+                  <a:schemeClr val="tx1"/>
+                </a:solidFill>
+                <a:effectLst/>
+                <a:latin typeface="Arial" panose="020B0604020202020204" pitchFamily="34" charset="0"/>
+              </a:rPr>
+              <a:t>First pressure correction:</a:t>
+            </a:r>
+            <a:endParaRPr lang="en-NO" altLang="en-NO" dirty="0">
+              <a:latin typeface="Arial" panose="020B0604020202020204" pitchFamily="34" charset="0"/>
+            </a:endParaRPr>
+          </a:p>
+          <a:p>
+            <a:pPr lvl="1" eaLnBrk="0" fontAlgn="base" hangingPunct="0">
+              <a:spcBef>
+                <a:spcPct val="0"/>
+              </a:spcBef>
+              <a:spcAft>
+                <a:spcPct val="0"/>
+              </a:spcAft>
+              <a:buFontTx/>
+              <a:buChar char="•"/>
+            </a:pPr>
+            <a:r>
+              <a:rPr kumimoji="0" lang="en-NO" altLang="en-NO" b="0" i="0" u="none" strike="noStrike" cap="none" normalizeH="0" baseline="0" dirty="0">
+                <a:ln>
+                  <a:noFill/>
+                </a:ln>
+                <a:solidFill>
+                  <a:schemeClr val="tx1"/>
+                </a:solidFill>
+                <a:effectLst/>
+                <a:latin typeface="Arial" panose="020B0604020202020204" pitchFamily="34" charset="0"/>
+              </a:rPr>
+              <a:t>Solve a Poisson equation with source ∇·u** to get p’</a:t>
+            </a:r>
+          </a:p>
+          <a:p>
+            <a:pPr lvl="1" eaLnBrk="0" fontAlgn="base" hangingPunct="0">
+              <a:spcBef>
+                <a:spcPct val="0"/>
+              </a:spcBef>
+              <a:spcAft>
+                <a:spcPct val="0"/>
+              </a:spcAft>
+              <a:buFontTx/>
+              <a:buChar char="•"/>
+            </a:pPr>
+            <a:r>
+              <a:rPr kumimoji="0" lang="en-NO" altLang="en-NO" b="0" i="0" u="none" strike="noStrike" cap="none" normalizeH="0" baseline="0" dirty="0">
+                <a:ln>
+                  <a:noFill/>
+                </a:ln>
+                <a:solidFill>
+                  <a:schemeClr val="tx1"/>
+                </a:solidFill>
+                <a:effectLst/>
+                <a:latin typeface="Arial" panose="020B0604020202020204" pitchFamily="34" charset="0"/>
+              </a:rPr>
+              <a:t>update p** = p* + p' and correct the velocity so it satisfies continuity</a:t>
+            </a:r>
+          </a:p>
+          <a:p>
+            <a:pPr lvl="1" eaLnBrk="0" fontAlgn="base" hangingPunct="0">
+              <a:spcBef>
+                <a:spcPct val="0"/>
+              </a:spcBef>
+              <a:spcAft>
+                <a:spcPct val="0"/>
+              </a:spcAft>
+              <a:buFontTx/>
+              <a:buChar char="•"/>
+            </a:pPr>
+            <a:r>
+              <a:rPr kumimoji="0" lang="en-NO" altLang="en-NO" b="0" i="0" u="none" strike="noStrike" cap="none" normalizeH="0" baseline="0" dirty="0">
+                <a:ln>
+                  <a:noFill/>
+                </a:ln>
+                <a:solidFill>
+                  <a:schemeClr val="tx1"/>
+                </a:solidFill>
+                <a:effectLst/>
+                <a:latin typeface="Arial" panose="020B0604020202020204" pitchFamily="34" charset="0"/>
+              </a:rPr>
+              <a:t>but momentum is only approximate since the neighbour coupling H was dropped. </a:t>
+            </a:r>
+          </a:p>
+          <a:p>
+            <a:pPr marL="0" marR="0" lvl="0" indent="0" algn="l" defTabSz="914400" rtl="0" eaLnBrk="0" fontAlgn="base" latinLnBrk="0" hangingPunct="0">
+              <a:lnSpc>
+                <a:spcPct val="100000"/>
+              </a:lnSpc>
+              <a:spcBef>
+                <a:spcPct val="0"/>
+              </a:spcBef>
+              <a:spcAft>
+                <a:spcPct val="0"/>
+              </a:spcAft>
+              <a:buClrTx/>
+              <a:buSzTx/>
+              <a:buFontTx/>
+              <a:buChar char="•"/>
+              <a:tabLst/>
+            </a:pPr>
+            <a:r>
+              <a:rPr kumimoji="0" lang="en-NO" altLang="en-NO" sz="1800" b="1" i="0" u="none" strike="noStrike" cap="none" normalizeH="0" baseline="0" dirty="0">
+                <a:ln>
+                  <a:noFill/>
+                </a:ln>
+                <a:solidFill>
+                  <a:schemeClr val="tx1"/>
+                </a:solidFill>
+                <a:effectLst/>
+                <a:latin typeface="Arial" panose="020B0604020202020204" pitchFamily="34" charset="0"/>
+              </a:rPr>
+              <a:t>Second pressure correction:</a:t>
+            </a:r>
+            <a:r>
+              <a:rPr kumimoji="0" lang="en-NO" altLang="en-NO" sz="1800" b="0" i="0" u="none" strike="noStrike" cap="none" normalizeH="0" baseline="0" dirty="0">
+                <a:ln>
+                  <a:noFill/>
+                </a:ln>
+                <a:solidFill>
+                  <a:schemeClr val="tx1"/>
+                </a:solidFill>
+                <a:effectLst/>
+                <a:latin typeface="Arial" panose="020B0604020202020204" pitchFamily="34" charset="0"/>
+              </a:rPr>
+              <a:t> </a:t>
+            </a:r>
+          </a:p>
+          <a:p>
+            <a:pPr lvl="1" eaLnBrk="0" fontAlgn="base" hangingPunct="0">
+              <a:spcBef>
+                <a:spcPct val="0"/>
+              </a:spcBef>
+              <a:spcAft>
+                <a:spcPct val="0"/>
+              </a:spcAft>
+              <a:buFontTx/>
+              <a:buChar char="•"/>
+            </a:pPr>
+            <a:r>
+              <a:rPr kumimoji="0" lang="en-NO" altLang="en-NO" b="0" i="0" u="none" strike="noStrike" cap="none" normalizeH="0" baseline="0" dirty="0">
+                <a:ln>
+                  <a:noFill/>
+                </a:ln>
+                <a:solidFill>
+                  <a:schemeClr val="tx1"/>
+                </a:solidFill>
+                <a:effectLst/>
+                <a:latin typeface="Arial" panose="020B0604020202020204" pitchFamily="34" charset="0"/>
+              </a:rPr>
+              <a:t>Use the momentum imbalance H(u** − u*)/d as a source for a second Poisson solve for p’’</a:t>
+            </a:r>
+          </a:p>
+          <a:p>
+            <a:pPr lvl="1" eaLnBrk="0" fontAlgn="base" hangingPunct="0">
+              <a:spcBef>
+                <a:spcPct val="0"/>
+              </a:spcBef>
+              <a:spcAft>
+                <a:spcPct val="0"/>
+              </a:spcAft>
+              <a:buFontTx/>
+              <a:buChar char="•"/>
+            </a:pPr>
+            <a:r>
+              <a:rPr kumimoji="0" lang="en-NO" altLang="en-NO" b="0" i="0" u="none" strike="noStrike" cap="none" normalizeH="0" baseline="0" dirty="0">
+                <a:ln>
+                  <a:noFill/>
+                </a:ln>
+                <a:solidFill>
+                  <a:schemeClr val="tx1"/>
+                </a:solidFill>
+                <a:effectLst/>
+                <a:latin typeface="Arial" panose="020B0604020202020204" pitchFamily="34" charset="0"/>
+              </a:rPr>
+              <a:t> giving a velocity and pressure that satisfy both continuity and momentum to much higher accuracy. </a:t>
+            </a:r>
+          </a:p>
+          <a:p>
+            <a:pPr marL="0" marR="0" lvl="0" indent="0" algn="l" defTabSz="914400" rtl="0" eaLnBrk="0" fontAlgn="base" latinLnBrk="0" hangingPunct="0">
+              <a:lnSpc>
+                <a:spcPct val="100000"/>
+              </a:lnSpc>
+              <a:spcBef>
+                <a:spcPct val="0"/>
+              </a:spcBef>
+              <a:spcAft>
+                <a:spcPct val="0"/>
+              </a:spcAft>
+              <a:buClrTx/>
+              <a:buSzTx/>
+              <a:buFontTx/>
+              <a:buChar char="•"/>
+              <a:tabLst/>
+            </a:pPr>
+            <a:r>
+              <a:rPr kumimoji="0" lang="en-NO" altLang="en-NO" sz="1800" b="1" i="0" u="none" strike="noStrike" cap="none" normalizeH="0" baseline="0" dirty="0">
+                <a:ln>
+                  <a:noFill/>
+                </a:ln>
+                <a:solidFill>
+                  <a:schemeClr val="tx1"/>
+                </a:solidFill>
+                <a:effectLst/>
+                <a:latin typeface="Arial" panose="020B0604020202020204" pitchFamily="34" charset="0"/>
+              </a:rPr>
+              <a:t>Advance:</a:t>
+            </a:r>
+            <a:r>
+              <a:rPr kumimoji="0" lang="en-NO" altLang="en-NO" sz="1800" b="0" i="0" u="none" strike="noStrike" cap="none" normalizeH="0" baseline="0" dirty="0">
+                <a:ln>
+                  <a:noFill/>
+                </a:ln>
+                <a:solidFill>
+                  <a:schemeClr val="tx1"/>
+                </a:solidFill>
+                <a:effectLst/>
+                <a:latin typeface="Arial" panose="020B0604020202020204" pitchFamily="34" charset="0"/>
+              </a:rPr>
+              <a:t> Set u* ← u***, p* ← p*** and move to the next time step. </a:t>
+            </a:r>
+            <a:r>
+              <a:rPr lang="en-NO" altLang="en-NO" dirty="0">
+                <a:latin typeface="Arial" panose="020B0604020202020204" pitchFamily="34" charset="0"/>
+              </a:rPr>
+              <a:t>N</a:t>
+            </a:r>
+            <a:r>
+              <a:rPr kumimoji="0" lang="en-NO" altLang="en-NO" sz="1800" b="0" i="0" u="none" strike="noStrike" cap="none" normalizeH="0" baseline="0" dirty="0">
+                <a:ln>
+                  <a:noFill/>
+                </a:ln>
+                <a:solidFill>
+                  <a:schemeClr val="tx1"/>
+                </a:solidFill>
+                <a:effectLst/>
+                <a:latin typeface="Arial" panose="020B0604020202020204" pitchFamily="34" charset="0"/>
+              </a:rPr>
+              <a:t>o outer iteration loop, unlike SIMPLE.</a:t>
+            </a:r>
+          </a:p>
+        </p:txBody>
+      </p:sp>
+    </p:spTree>
+    <p:extLst>
+      <p:ext uri="{BB962C8B-B14F-4D97-AF65-F5344CB8AC3E}">
+        <p14:creationId xmlns:p14="http://schemas.microsoft.com/office/powerpoint/2010/main" val="1463697046"/>
+      </p:ext>
+    </p:extLst>
+  </p:cSld>
+  <p:clrMapOvr>
+    <a:masterClrMapping/>
+  </p:clrMapOvr>
+</p:sld>
+</file>
+
+<file path=ppt/slides/slide5.xml><?xml version="1.0" encoding="utf-8"?>
 <p:sld xmlns:a="http://schemas.openxmlformats.org/drawingml/2006/main" xmlns:r="http://schemas.openxmlformats.org/officeDocument/2006/relationships" xmlns:p="http://schemas.openxmlformats.org/presentationml/2006/main">
   <p:cSld>
     <p:spTree>
@@ -6440,7 +7888,7 @@
           <a:lstStyle/>
           <a:p>
             <a:r>
-              <a:rPr lang="en-US" dirty="0"/>
+              <a:rPr lang="en-US" b="1" u="sng" dirty="0"/>
               <a:t>Backward-Facing Step</a:t>
             </a:r>
           </a:p>
@@ -6475,7 +7923,7 @@
           <a:lstStyle/>
           <a:p>
             <a:r>
-              <a:rPr lang="en-US" dirty="0"/>
+              <a:rPr lang="en-US" b="1" u="sng" dirty="0"/>
               <a:t>Lid Driven Cavity</a:t>
             </a:r>
           </a:p>
@@ -6511,350 +7959,14 @@
           </a:prstGeom>
         </p:spPr>
       </p:pic>
-    </p:spTree>
-    <p:extLst>
-      <p:ext uri="{BB962C8B-B14F-4D97-AF65-F5344CB8AC3E}">
-        <p14:creationId xmlns:p14="http://schemas.microsoft.com/office/powerpoint/2010/main" val="2604914428"/>
-      </p:ext>
-    </p:extLst>
-  </p:cSld>
-  <p:clrMapOvr>
-    <a:masterClrMapping/>
-  </p:clrMapOvr>
-</p:sld>
-</file>
-
-<file path=ppt/slides/slide5.xml><?xml version="1.0" encoding="utf-8"?>
-<p:sld xmlns:a="http://schemas.openxmlformats.org/drawingml/2006/main" xmlns:r="http://schemas.openxmlformats.org/officeDocument/2006/relationships" xmlns:p="http://schemas.openxmlformats.org/presentationml/2006/main">
-  <p:cSld>
-    <p:spTree>
-      <p:nvGrpSpPr>
-        <p:cNvPr id="1" name=""/>
-        <p:cNvGrpSpPr/>
-        <p:nvPr/>
-      </p:nvGrpSpPr>
-      <p:grpSpPr>
-        <a:xfrm>
-          <a:off x="0" y="0"/>
-          <a:ext cx="0" cy="0"/>
-          <a:chOff x="0" y="0"/>
-          <a:chExt cx="0" cy="0"/>
-        </a:xfrm>
-      </p:grpSpPr>
-      <p:sp>
-        <p:nvSpPr>
-          <p:cNvPr id="2" name="Title 1">
-            <a:extLst>
-              <a:ext uri="{FF2B5EF4-FFF2-40B4-BE49-F238E27FC236}">
-                <a16:creationId xmlns:a16="http://schemas.microsoft.com/office/drawing/2014/main" id="{1FF187FB-3826-A13A-27DE-1AD08BEE92BE}"/>
-              </a:ext>
-            </a:extLst>
-          </p:cNvPr>
-          <p:cNvSpPr>
-            <a:spLocks noGrp="1"/>
-          </p:cNvSpPr>
-          <p:nvPr>
-            <p:ph type="title"/>
-          </p:nvPr>
-        </p:nvSpPr>
-        <p:spPr/>
-        <p:txBody>
-          <a:bodyPr/>
-          <a:lstStyle/>
-          <a:p>
-            <a:r>
-              <a:rPr lang="en-US" dirty="0"/>
-              <a:t>Solver 1: </a:t>
-            </a:r>
-            <a:r>
-              <a:rPr lang="en-US" dirty="0" err="1"/>
-              <a:t>OpenFoam</a:t>
-            </a:r>
-            <a:endParaRPr lang="en-US" dirty="0"/>
-          </a:p>
-        </p:txBody>
-      </p:sp>
-      <p:sp>
-        <p:nvSpPr>
-          <p:cNvPr id="9" name="Rectangle 8">
-            <a:extLst>
-              <a:ext uri="{FF2B5EF4-FFF2-40B4-BE49-F238E27FC236}">
-                <a16:creationId xmlns:a16="http://schemas.microsoft.com/office/drawing/2014/main" id="{CA2C8DE6-7EF3-0AEF-CD88-CD8C02BCA828}"/>
-              </a:ext>
-            </a:extLst>
-          </p:cNvPr>
-          <p:cNvSpPr/>
-          <p:nvPr/>
-        </p:nvSpPr>
-        <p:spPr>
-          <a:xfrm>
-            <a:off x="1301069" y="3840479"/>
-            <a:ext cx="10890931" cy="2550382"/>
-          </a:xfrm>
-          <a:prstGeom prst="rect">
-            <a:avLst/>
-          </a:prstGeom>
-          <a:solidFill>
-            <a:schemeClr val="tx2">
-              <a:lumMod val="25000"/>
-              <a:lumOff val="75000"/>
-            </a:schemeClr>
-          </a:solidFill>
-        </p:spPr>
-        <p:style>
-          <a:lnRef idx="2">
-            <a:schemeClr val="accent1">
-              <a:shade val="15000"/>
-            </a:schemeClr>
-          </a:lnRef>
-          <a:fillRef idx="1">
-            <a:schemeClr val="accent1"/>
-          </a:fillRef>
-          <a:effectRef idx="0">
-            <a:schemeClr val="accent1"/>
-          </a:effectRef>
-          <a:fontRef idx="minor">
-            <a:schemeClr val="lt1"/>
-          </a:fontRef>
-        </p:style>
-        <p:txBody>
-          <a:bodyPr rtlCol="0" anchor="ctr"/>
-          <a:lstStyle/>
-          <a:p>
-            <a:pPr algn="ctr"/>
-            <a:endParaRPr lang="en-US" dirty="0"/>
-          </a:p>
-        </p:txBody>
-      </p:sp>
-      <p:sp>
-        <p:nvSpPr>
-          <p:cNvPr id="3" name="Content Placeholder 2">
-            <a:extLst>
-              <a:ext uri="{FF2B5EF4-FFF2-40B4-BE49-F238E27FC236}">
-                <a16:creationId xmlns:a16="http://schemas.microsoft.com/office/drawing/2014/main" id="{B7736C5A-0001-B896-535C-4B88340099F2}"/>
-              </a:ext>
-            </a:extLst>
-          </p:cNvPr>
-          <p:cNvSpPr>
-            <a:spLocks noGrp="1"/>
-          </p:cNvSpPr>
-          <p:nvPr>
-            <p:ph idx="1"/>
-          </p:nvPr>
-        </p:nvSpPr>
-        <p:spPr>
-          <a:xfrm>
-            <a:off x="1301069" y="4434839"/>
-            <a:ext cx="10890929" cy="1886448"/>
-          </a:xfrm>
-        </p:spPr>
-        <p:txBody>
-          <a:bodyPr>
-            <a:normAutofit lnSpcReduction="10000"/>
-          </a:bodyPr>
-          <a:lstStyle/>
-          <a:p>
-            <a:r>
-              <a:rPr lang="en-US" dirty="0"/>
-              <a:t>Integrate PDEs over each control volume (cell)</a:t>
-            </a:r>
-          </a:p>
-          <a:p>
-            <a:r>
-              <a:rPr lang="en-US" dirty="0"/>
-              <a:t>Apply Gauss’ Divergence theorem to convert volume integral to surface integral</a:t>
-            </a:r>
-          </a:p>
-          <a:p>
-            <a:r>
-              <a:rPr lang="en-US" dirty="0"/>
-              <a:t>Momentum equation becomes a linear system per timestep</a:t>
-            </a:r>
-          </a:p>
-          <a:p>
-            <a:r>
-              <a:rPr lang="en-US" dirty="0"/>
-              <a:t>Pressure emerges from continuity.</a:t>
-            </a:r>
-          </a:p>
-        </p:txBody>
-      </p:sp>
-      <p:sp>
-        <p:nvSpPr>
-          <p:cNvPr id="4" name="Title 1">
-            <a:extLst>
-              <a:ext uri="{FF2B5EF4-FFF2-40B4-BE49-F238E27FC236}">
-                <a16:creationId xmlns:a16="http://schemas.microsoft.com/office/drawing/2014/main" id="{5AF153D4-2A99-BF13-549F-DC2FE4CEDD2C}"/>
-              </a:ext>
-            </a:extLst>
-          </p:cNvPr>
-          <p:cNvSpPr txBox="1">
-            <a:spLocks/>
-          </p:cNvSpPr>
-          <p:nvPr/>
-        </p:nvSpPr>
-        <p:spPr>
-          <a:xfrm>
-            <a:off x="1301071" y="3718229"/>
-            <a:ext cx="10890929" cy="1097280"/>
-          </a:xfrm>
-          <a:prstGeom prst="rect">
-            <a:avLst/>
-          </a:prstGeom>
-        </p:spPr>
-        <p:txBody>
-          <a:bodyPr vert="horz" lIns="91440" tIns="45720" rIns="91440" bIns="45720" rtlCol="0" anchor="t">
-            <a:normAutofit/>
-          </a:bodyPr>
-          <a:lstStyle>
-            <a:lvl1pPr algn="l" defTabSz="914400" rtl="0" eaLnBrk="1" latinLnBrk="0" hangingPunct="1">
-              <a:lnSpc>
-                <a:spcPct val="100000"/>
-              </a:lnSpc>
-              <a:spcBef>
-                <a:spcPct val="0"/>
-              </a:spcBef>
-              <a:buNone/>
-              <a:defRPr sz="4000" b="1" kern="1200">
-                <a:solidFill>
-                  <a:schemeClr val="tx1"/>
-                </a:solidFill>
-                <a:latin typeface="+mj-lt"/>
-                <a:ea typeface="+mj-ea"/>
-                <a:cs typeface="+mj-cs"/>
-              </a:defRPr>
-            </a:lvl1pPr>
-          </a:lstStyle>
-          <a:p>
-            <a:r>
-              <a:rPr lang="en-US" sz="3200" dirty="0"/>
-              <a:t>Finite Volume Discretization</a:t>
-            </a:r>
-          </a:p>
-        </p:txBody>
-      </p:sp>
-      <p:sp>
-        <p:nvSpPr>
-          <p:cNvPr id="8" name="Rectangle 7">
-            <a:extLst>
-              <a:ext uri="{FF2B5EF4-FFF2-40B4-BE49-F238E27FC236}">
-                <a16:creationId xmlns:a16="http://schemas.microsoft.com/office/drawing/2014/main" id="{6A49FFFD-19DC-3295-725C-A9ECD324C75C}"/>
-              </a:ext>
-            </a:extLst>
-          </p:cNvPr>
-          <p:cNvSpPr/>
-          <p:nvPr/>
-        </p:nvSpPr>
-        <p:spPr>
-          <a:xfrm>
-            <a:off x="1301069" y="2057400"/>
-            <a:ext cx="10890931" cy="1660829"/>
-          </a:xfrm>
-          <a:prstGeom prst="rect">
-            <a:avLst/>
-          </a:prstGeom>
-          <a:solidFill>
-            <a:schemeClr val="tx2">
-              <a:lumMod val="10000"/>
-              <a:lumOff val="90000"/>
-            </a:schemeClr>
-          </a:solidFill>
-        </p:spPr>
-        <p:style>
-          <a:lnRef idx="2">
-            <a:schemeClr val="accent1">
-              <a:shade val="15000"/>
-            </a:schemeClr>
-          </a:lnRef>
-          <a:fillRef idx="1">
-            <a:schemeClr val="accent1"/>
-          </a:fillRef>
-          <a:effectRef idx="0">
-            <a:schemeClr val="accent1"/>
-          </a:effectRef>
-          <a:fontRef idx="minor">
-            <a:schemeClr val="lt1"/>
-          </a:fontRef>
-        </p:style>
-        <p:txBody>
-          <a:bodyPr rtlCol="0" anchor="ctr"/>
-          <a:lstStyle/>
-          <a:p>
-            <a:pPr algn="ctr"/>
-            <a:endParaRPr lang="en-US"/>
-          </a:p>
-        </p:txBody>
-      </p:sp>
-      <p:sp>
-        <p:nvSpPr>
-          <p:cNvPr id="5" name="Title 1">
-            <a:extLst>
-              <a:ext uri="{FF2B5EF4-FFF2-40B4-BE49-F238E27FC236}">
-                <a16:creationId xmlns:a16="http://schemas.microsoft.com/office/drawing/2014/main" id="{3F8D099D-7725-12F5-4824-27782DD47C40}"/>
-              </a:ext>
-            </a:extLst>
-          </p:cNvPr>
-          <p:cNvSpPr txBox="1">
-            <a:spLocks/>
-          </p:cNvSpPr>
-          <p:nvPr/>
-        </p:nvSpPr>
-        <p:spPr>
-          <a:xfrm>
-            <a:off x="1301070" y="2057400"/>
-            <a:ext cx="10890929" cy="1097280"/>
-          </a:xfrm>
-          <a:prstGeom prst="rect">
-            <a:avLst/>
-          </a:prstGeom>
-        </p:spPr>
-        <p:txBody>
-          <a:bodyPr vert="horz" lIns="91440" tIns="45720" rIns="91440" bIns="45720" rtlCol="0" anchor="t">
-            <a:normAutofit/>
-          </a:bodyPr>
-          <a:lstStyle>
-            <a:lvl1pPr algn="l" defTabSz="914400" rtl="0" eaLnBrk="1" latinLnBrk="0" hangingPunct="1">
-              <a:lnSpc>
-                <a:spcPct val="100000"/>
-              </a:lnSpc>
-              <a:spcBef>
-                <a:spcPct val="0"/>
-              </a:spcBef>
-              <a:buNone/>
-              <a:defRPr sz="4000" b="1" kern="1200">
-                <a:solidFill>
-                  <a:schemeClr val="tx1"/>
-                </a:solidFill>
-                <a:latin typeface="+mj-lt"/>
-                <a:ea typeface="+mj-ea"/>
-                <a:cs typeface="+mj-cs"/>
-              </a:defRPr>
-            </a:lvl1pPr>
-          </a:lstStyle>
-          <a:p>
-            <a:r>
-              <a:rPr lang="en-US" sz="3200" dirty="0"/>
-              <a:t>What is </a:t>
-            </a:r>
-            <a:r>
-              <a:rPr lang="en-US" sz="3200" dirty="0" err="1"/>
-              <a:t>openFoam</a:t>
-            </a:r>
-            <a:r>
-              <a:rPr lang="en-US" sz="3200" dirty="0"/>
-              <a:t>?</a:t>
-            </a:r>
-          </a:p>
-        </p:txBody>
-      </p:sp>
       <mc:AlternateContent xmlns:mc="http://schemas.openxmlformats.org/markup-compatibility/2006" xmlns:a14="http://schemas.microsoft.com/office/drawing/2010/main">
         <mc:Choice Requires="a14">
           <p:sp>
             <p:nvSpPr>
-              <p:cNvPr id="7" name="TextBox 6">
+              <p:cNvPr id="5" name="TextBox 4">
                 <a:extLst>
                   <a:ext uri="{FF2B5EF4-FFF2-40B4-BE49-F238E27FC236}">
-                    <a16:creationId xmlns:a16="http://schemas.microsoft.com/office/drawing/2014/main" id="{2A1EE006-DAB7-9708-4FC3-B2582E84AB3B}"/>
+                    <a16:creationId xmlns:a16="http://schemas.microsoft.com/office/drawing/2014/main" id="{D0A9DD68-A38D-BD3D-5A29-959CFC7FE5A8}"/>
                   </a:ext>
                 </a:extLst>
               </p:cNvPr>
@@ -6863,8 +7975,8 @@
             </p:nvSpPr>
             <p:spPr>
               <a:xfrm>
-                <a:off x="1497628" y="2754140"/>
-                <a:ext cx="6167073" cy="923330"/>
+                <a:off x="5090710" y="5074705"/>
+                <a:ext cx="3077929" cy="1200329"/>
               </a:xfrm>
               <a:prstGeom prst="rect">
                 <a:avLst/>
@@ -6872,7 +7984,7 @@
               <a:noFill/>
             </p:spPr>
             <p:txBody>
-              <a:bodyPr wrap="none" rtlCol="0">
+              <a:bodyPr wrap="square" rtlCol="0">
                 <a:spAutoFit/>
               </a:bodyPr>
               <a:lstStyle/>
@@ -6883,8 +7995,118 @@
                 </a:pPr>
                 <a:r>
                   <a:rPr lang="en-US" dirty="0"/>
-                  <a:t>Transient, incompressible, laminar Navier-Stokes solver</a:t>
+                  <a:t>Moving lid </a:t>
                 </a:r>
+                <a:endParaRPr lang="nb-NO" b="0" i="1" dirty="0">
+                  <a:latin typeface="Cambria Math" panose="02040503050406030204" pitchFamily="18" charset="0"/>
+                </a:endParaRPr>
+              </a:p>
+              <a:p>
+                <a:pPr marL="742950" lvl="1" indent="-285750">
+                  <a:buFont typeface="Arial" panose="020B0604020202020204" pitchFamily="34" charset="0"/>
+                  <a:buChar char="•"/>
+                </a:pPr>
+                <a14:m>
+                  <m:oMath xmlns:m="http://schemas.openxmlformats.org/officeDocument/2006/math">
+                    <m:r>
+                      <a:rPr lang="nb-NO" b="0" i="1" smtClean="0">
+                        <a:latin typeface="Cambria Math" panose="02040503050406030204" pitchFamily="18" charset="0"/>
+                      </a:rPr>
+                      <m:t>𝑢</m:t>
+                    </m:r>
+                    <m:r>
+                      <a:rPr lang="nb-NO" b="0" i="1" smtClean="0">
+                        <a:latin typeface="Cambria Math" panose="02040503050406030204" pitchFamily="18" charset="0"/>
+                      </a:rPr>
+                      <m:t>=</m:t>
+                    </m:r>
+                    <m:sSup>
+                      <m:sSupPr>
+                        <m:ctrlPr>
+                          <a:rPr lang="nb-NO" b="0" i="1" smtClean="0">
+                            <a:latin typeface="Cambria Math" panose="02040503050406030204" pitchFamily="18" charset="0"/>
+                          </a:rPr>
+                        </m:ctrlPr>
+                      </m:sSupPr>
+                      <m:e>
+                        <m:d>
+                          <m:dPr>
+                            <m:ctrlPr>
+                              <a:rPr lang="nb-NO" b="0" i="1" smtClean="0">
+                                <a:latin typeface="Cambria Math" panose="02040503050406030204" pitchFamily="18" charset="0"/>
+                              </a:rPr>
+                            </m:ctrlPr>
+                          </m:dPr>
+                          <m:e>
+                            <m:r>
+                              <a:rPr lang="nb-NO" b="0" i="1" smtClean="0">
+                                <a:latin typeface="Cambria Math" panose="02040503050406030204" pitchFamily="18" charset="0"/>
+                              </a:rPr>
+                              <m:t>1−</m:t>
+                            </m:r>
+                            <m:r>
+                              <a:rPr lang="nb-NO" b="0" i="1" smtClean="0">
+                                <a:latin typeface="Cambria Math" panose="02040503050406030204" pitchFamily="18" charset="0"/>
+                              </a:rPr>
+                              <m:t>𝑥</m:t>
+                            </m:r>
+                          </m:e>
+                        </m:d>
+                      </m:e>
+                      <m:sup>
+                        <m:r>
+                          <a:rPr lang="nb-NO" b="0" i="1" smtClean="0">
+                            <a:latin typeface="Cambria Math" panose="02040503050406030204" pitchFamily="18" charset="0"/>
+                          </a:rPr>
+                          <m:t>2</m:t>
+                        </m:r>
+                      </m:sup>
+                    </m:sSup>
+                    <m:sSup>
+                      <m:sSupPr>
+                        <m:ctrlPr>
+                          <a:rPr lang="nb-NO" b="0" i="1" smtClean="0">
+                            <a:latin typeface="Cambria Math" panose="02040503050406030204" pitchFamily="18" charset="0"/>
+                          </a:rPr>
+                        </m:ctrlPr>
+                      </m:sSupPr>
+                      <m:e>
+                        <m:d>
+                          <m:dPr>
+                            <m:ctrlPr>
+                              <a:rPr lang="nb-NO" b="0" i="1" smtClean="0">
+                                <a:latin typeface="Cambria Math" panose="02040503050406030204" pitchFamily="18" charset="0"/>
+                              </a:rPr>
+                            </m:ctrlPr>
+                          </m:dPr>
+                          <m:e>
+                            <m:r>
+                              <a:rPr lang="nb-NO" b="0" i="1" smtClean="0">
+                                <a:latin typeface="Cambria Math" panose="02040503050406030204" pitchFamily="18" charset="0"/>
+                              </a:rPr>
+                              <m:t>1+</m:t>
+                            </m:r>
+                            <m:r>
+                              <a:rPr lang="nb-NO" b="0" i="1" smtClean="0">
+                                <a:latin typeface="Cambria Math" panose="02040503050406030204" pitchFamily="18" charset="0"/>
+                              </a:rPr>
+                              <m:t>𝑥</m:t>
+                            </m:r>
+                          </m:e>
+                        </m:d>
+                      </m:e>
+                      <m:sup>
+                        <m:r>
+                          <a:rPr lang="nb-NO" b="0" i="1" smtClean="0">
+                            <a:latin typeface="Cambria Math" panose="02040503050406030204" pitchFamily="18" charset="0"/>
+                          </a:rPr>
+                          <m:t>2</m:t>
+                        </m:r>
+                      </m:sup>
+                    </m:sSup>
+                  </m:oMath>
+                </a14:m>
+                <a:endParaRPr lang="en-US" dirty="0"/>
               </a:p>
               <a:p>
                 <a:pPr marL="285750" indent="-285750">
@@ -6893,7 +8115,7 @@
                 </a:pPr>
                 <a:r>
                   <a:rPr lang="en-US" dirty="0"/>
-                  <a:t>Cell-centered u and p with fluxes defined at faces</a:t>
+                  <a:t>No slip on 3 walls</a:t>
                 </a:r>
               </a:p>
               <a:p>
@@ -6901,51 +8123,7 @@
                   <a:buFont typeface="Arial" panose="020B0604020202020204" pitchFamily="34" charset="0"/>
                   <a:buChar char="•"/>
                 </a:pPr>
-                <a:r>
-                  <a:rPr lang="en-US" dirty="0"/>
-                  <a:t>Continuity </a:t>
-                </a:r>
-                <a14:m>
-                  <m:oMath xmlns:m="http://schemas.openxmlformats.org/officeDocument/2006/math">
-                    <m:r>
-                      <a:rPr lang="nb-NO" b="0" i="0" smtClean="0">
-                        <a:latin typeface="Cambria Math" panose="02040503050406030204" pitchFamily="18" charset="0"/>
-                      </a:rPr>
-                      <m:t>(</m:t>
-                    </m:r>
-                    <m:r>
-                      <m:rPr>
-                        <m:sty m:val="p"/>
-                      </m:rPr>
-                      <a:rPr lang="nb-NO" b="0" i="0" smtClean="0">
-                        <a:latin typeface="Cambria Math" panose="02040503050406030204" pitchFamily="18" charset="0"/>
-                      </a:rPr>
-                      <m:t>∇</m:t>
-                    </m:r>
-                    <m:r>
-                      <a:rPr lang="nb-NO" b="0" i="1" smtClean="0">
-                        <a:latin typeface="Cambria Math" panose="02040503050406030204" pitchFamily="18" charset="0"/>
-                      </a:rPr>
-                      <m:t> ⋅</m:t>
-                    </m:r>
-                    <m:r>
-                      <a:rPr lang="nb-NO" b="0" i="1" smtClean="0">
-                        <a:latin typeface="Cambria Math" panose="02040503050406030204" pitchFamily="18" charset="0"/>
-                      </a:rPr>
-                      <m:t>𝐮</m:t>
-                    </m:r>
-                    <m:r>
-                      <a:rPr lang="nb-NO" b="0" i="1" smtClean="0">
-                        <a:latin typeface="Cambria Math" panose="02040503050406030204" pitchFamily="18" charset="0"/>
-                      </a:rPr>
-                      <m:t>)=0</m:t>
-                    </m:r>
-                  </m:oMath>
-                </a14:m>
-                <a:r>
-                  <a:rPr lang="en-US" dirty="0"/>
-                  <a:t> introduces coupling challenge</a:t>
-                </a:r>
+                <a:endParaRPr lang="en-US" dirty="0"/>
               </a:p>
             </p:txBody>
           </p:sp>
@@ -6953,10 +8131,10 @@
         <mc:Fallback xmlns="">
           <p:sp>
             <p:nvSpPr>
-              <p:cNvPr id="7" name="TextBox 6">
+              <p:cNvPr id="5" name="TextBox 4">
                 <a:extLst>
                   <a:ext uri="{FF2B5EF4-FFF2-40B4-BE49-F238E27FC236}">
-                    <a16:creationId xmlns:a16="http://schemas.microsoft.com/office/drawing/2014/main" id="{2A1EE006-DAB7-9708-4FC3-B2582E84AB3B}"/>
+                    <a16:creationId xmlns:a16="http://schemas.microsoft.com/office/drawing/2014/main" id="{D0A9DD68-A38D-BD3D-5A29-959CFC7FE5A8}"/>
                   </a:ext>
                 </a:extLst>
               </p:cNvPr>
@@ -6967,16 +8145,16 @@
             </p:nvSpPr>
             <p:spPr>
               <a:xfrm>
-                <a:off x="1497628" y="2754140"/>
-                <a:ext cx="6167073" cy="923330"/>
+                <a:off x="5090710" y="5074705"/>
+                <a:ext cx="3077929" cy="1200329"/>
               </a:xfrm>
               <a:prstGeom prst="rect">
                 <a:avLst/>
               </a:prstGeom>
               <a:blipFill>
-                <a:blip r:embed="rId2"/>
+                <a:blip r:embed="rId4"/>
                 <a:stretch>
-                  <a:fillRect l="-823" t="-2703" b="-8108"/>
+                  <a:fillRect l="-1230" t="-2105"/>
                 </a:stretch>
               </a:blipFill>
             </p:spPr>
@@ -6995,301 +8173,66 @@
           </p:sp>
         </mc:Fallback>
       </mc:AlternateContent>
-      <mc:AlternateContent xmlns:mc="http://schemas.openxmlformats.org/markup-compatibility/2006" xmlns:a14="http://schemas.microsoft.com/office/drawing/2010/main">
-        <mc:Choice Requires="a14">
-          <p:sp>
-            <p:nvSpPr>
-              <p:cNvPr id="6" name="TextBox 5">
-                <a:extLst>
-                  <a:ext uri="{FF2B5EF4-FFF2-40B4-BE49-F238E27FC236}">
-                    <a16:creationId xmlns:a16="http://schemas.microsoft.com/office/drawing/2014/main" id="{88187DE0-1B83-2450-878A-A3A41A90E8E4}"/>
-                  </a:ext>
-                </a:extLst>
-              </p:cNvPr>
-              <p:cNvSpPr txBox="1"/>
-              <p:nvPr/>
-            </p:nvSpPr>
-            <p:spPr>
-              <a:xfrm>
-                <a:off x="5221224" y="1073829"/>
-                <a:ext cx="8700523" cy="2244140"/>
-              </a:xfrm>
-              <a:prstGeom prst="rect">
-                <a:avLst/>
-              </a:prstGeom>
-              <a:noFill/>
-            </p:spPr>
-            <p:txBody>
-              <a:bodyPr wrap="none" rtlCol="0">
-                <a:spAutoFit/>
-              </a:bodyPr>
-              <a:lstStyle/>
-              <a:p>
-                <a:r>
-                  <a:rPr lang="en-US" dirty="0"/>
-                  <a:t>PISO ALGO</a:t>
-                </a:r>
-              </a:p>
-              <a:p>
-                <a:r>
-                  <a:rPr lang="en-US" dirty="0"/>
-                  <a:t>Predictor: solve momentum equation with lagged pressure. </a:t>
-                </a:r>
-                <a14:m>
-                  <m:oMath xmlns:m="http://schemas.openxmlformats.org/officeDocument/2006/math">
-                    <m:sSup>
-                      <m:sSupPr>
-                        <m:ctrlPr>
-                          <a:rPr lang="nb-NO" i="1">
-                            <a:latin typeface="Cambria Math" panose="02040503050406030204" pitchFamily="18" charset="0"/>
-                          </a:rPr>
-                        </m:ctrlPr>
-                      </m:sSupPr>
-                      <m:e>
-                        <m:r>
-                          <a:rPr lang="nb-NO" i="1">
-                            <a:latin typeface="Cambria Math" panose="02040503050406030204" pitchFamily="18" charset="0"/>
-                          </a:rPr>
-                          <m:t>𝑢</m:t>
-                        </m:r>
-                      </m:e>
-                      <m:sup>
-                        <m:r>
-                          <a:rPr lang="nb-NO" i="1">
-                            <a:latin typeface="Cambria Math" panose="02040503050406030204" pitchFamily="18" charset="0"/>
-                          </a:rPr>
-                          <m:t>∗</m:t>
-                        </m:r>
-                      </m:sup>
-                    </m:sSup>
-                  </m:oMath>
-                </a14:m>
-                <a:r>
-                  <a:rPr lang="en-US" dirty="0"/>
-                  <a:t> is not divergence free.</a:t>
-                </a:r>
-              </a:p>
-              <a:p>
-                <a:r>
-                  <a:rPr lang="en-US" dirty="0"/>
-                  <a:t>Pressure solve: Poisson equation </a:t>
-                </a:r>
-                <a14:m>
-                  <m:oMath xmlns:m="http://schemas.openxmlformats.org/officeDocument/2006/math">
-                    <m:r>
-                      <m:rPr>
-                        <m:sty m:val="p"/>
-                      </m:rPr>
-                      <a:rPr lang="nb-NO">
-                        <a:latin typeface="Cambria Math" panose="02040503050406030204" pitchFamily="18" charset="0"/>
-                      </a:rPr>
-                      <m:t>∇</m:t>
-                    </m:r>
-                    <m:r>
-                      <a:rPr lang="nb-NO" i="1">
-                        <a:latin typeface="Cambria Math" panose="02040503050406030204" pitchFamily="18" charset="0"/>
-                      </a:rPr>
-                      <m:t>⋅</m:t>
-                    </m:r>
-                    <m:d>
-                      <m:dPr>
-                        <m:ctrlPr>
-                          <a:rPr lang="nb-NO" i="1">
-                            <a:latin typeface="Cambria Math" panose="02040503050406030204" pitchFamily="18" charset="0"/>
-                          </a:rPr>
-                        </m:ctrlPr>
-                      </m:dPr>
-                      <m:e>
-                        <m:d>
-                          <m:dPr>
-                            <m:ctrlPr>
-                              <a:rPr lang="nb-NO" i="1">
-                                <a:latin typeface="Cambria Math" panose="02040503050406030204" pitchFamily="18" charset="0"/>
-                              </a:rPr>
-                            </m:ctrlPr>
-                          </m:dPr>
-                          <m:e>
-                            <m:f>
-                              <m:fPr>
-                                <m:ctrlPr>
-                                  <a:rPr lang="nb-NO" i="1">
-                                    <a:latin typeface="Cambria Math" panose="02040503050406030204" pitchFamily="18" charset="0"/>
-                                  </a:rPr>
-                                </m:ctrlPr>
-                              </m:fPr>
-                              <m:num>
-                                <m:r>
-                                  <a:rPr lang="nb-NO" i="1">
-                                    <a:latin typeface="Cambria Math" panose="02040503050406030204" pitchFamily="18" charset="0"/>
-                                  </a:rPr>
-                                  <m:t>1</m:t>
-                                </m:r>
-                              </m:num>
-                              <m:den>
-                                <m:r>
-                                  <a:rPr lang="nb-NO" i="1">
-                                    <a:latin typeface="Cambria Math" panose="02040503050406030204" pitchFamily="18" charset="0"/>
-                                  </a:rPr>
-                                  <m:t>𝐴</m:t>
-                                </m:r>
-                              </m:den>
-                            </m:f>
-                          </m:e>
-                        </m:d>
-                        <m:r>
-                          <m:rPr>
-                            <m:sty m:val="p"/>
-                          </m:rPr>
-                          <a:rPr lang="nb-NO">
-                            <a:latin typeface="Cambria Math" panose="02040503050406030204" pitchFamily="18" charset="0"/>
-                          </a:rPr>
-                          <m:t>∇</m:t>
-                        </m:r>
-                        <m:r>
-                          <a:rPr lang="nb-NO" i="1">
-                            <a:latin typeface="Cambria Math" panose="02040503050406030204" pitchFamily="18" charset="0"/>
-                          </a:rPr>
-                          <m:t>𝑝</m:t>
-                        </m:r>
-                      </m:e>
-                    </m:d>
-                    <m:r>
-                      <a:rPr lang="nb-NO" i="1">
-                        <a:latin typeface="Cambria Math" panose="02040503050406030204" pitchFamily="18" charset="0"/>
-                      </a:rPr>
-                      <m:t>=</m:t>
-                    </m:r>
-                    <m:r>
-                      <m:rPr>
-                        <m:sty m:val="p"/>
-                      </m:rPr>
-                      <a:rPr lang="nb-NO">
-                        <a:latin typeface="Cambria Math" panose="02040503050406030204" pitchFamily="18" charset="0"/>
-                      </a:rPr>
-                      <m:t>∇</m:t>
-                    </m:r>
-                    <m:r>
-                      <a:rPr lang="nb-NO" i="1">
-                        <a:latin typeface="Cambria Math" panose="02040503050406030204" pitchFamily="18" charset="0"/>
-                      </a:rPr>
-                      <m:t>⋅</m:t>
-                    </m:r>
-                    <m:d>
-                      <m:dPr>
-                        <m:ctrlPr>
-                          <a:rPr lang="nb-NO" i="1">
-                            <a:latin typeface="Cambria Math" panose="02040503050406030204" pitchFamily="18" charset="0"/>
-                          </a:rPr>
-                        </m:ctrlPr>
-                      </m:dPr>
-                      <m:e>
-                        <m:f>
-                          <m:fPr>
-                            <m:ctrlPr>
-                              <a:rPr lang="nb-NO" i="1">
-                                <a:latin typeface="Cambria Math" panose="02040503050406030204" pitchFamily="18" charset="0"/>
-                              </a:rPr>
-                            </m:ctrlPr>
-                          </m:fPr>
-                          <m:num>
-                            <m:r>
-                              <a:rPr lang="nb-NO" i="1">
-                                <a:latin typeface="Cambria Math" panose="02040503050406030204" pitchFamily="18" charset="0"/>
-                              </a:rPr>
-                              <m:t>𝐻</m:t>
-                            </m:r>
-                          </m:num>
-                          <m:den>
-                            <m:r>
-                              <a:rPr lang="nb-NO" i="1">
-                                <a:latin typeface="Cambria Math" panose="02040503050406030204" pitchFamily="18" charset="0"/>
-                              </a:rPr>
-                              <m:t>𝐴</m:t>
-                            </m:r>
-                          </m:den>
-                        </m:f>
-                      </m:e>
-                    </m:d>
-                  </m:oMath>
-                </a14:m>
-                <a:r>
-                  <a:rPr lang="en-US" dirty="0"/>
-                  <a:t> enforces continuity</a:t>
-                </a:r>
-              </a:p>
-              <a:p>
-                <a:r>
-                  <a:rPr lang="en-US" dirty="0"/>
-                  <a:t>Corrector: update u and face fluxes with new pressure</a:t>
-                </a:r>
-              </a:p>
-              <a:p>
-                <a:r>
-                  <a:rPr lang="en-US" dirty="0"/>
-                  <a:t>Repeat 2-3 times per timestep to reduce splitting error</a:t>
-                </a:r>
-              </a:p>
-              <a:p>
-                <a:r>
-                  <a:rPr lang="en-US" dirty="0"/>
-                  <a:t>Requires CFL &lt; 1 (Explicit convection)</a:t>
-                </a:r>
-              </a:p>
-              <a:p>
-                <a:endParaRPr lang="en-US" dirty="0"/>
-              </a:p>
-            </p:txBody>
-          </p:sp>
-        </mc:Choice>
-        <mc:Fallback xmlns="">
-          <p:sp>
-            <p:nvSpPr>
-              <p:cNvPr id="6" name="TextBox 5">
-                <a:extLst>
-                  <a:ext uri="{FF2B5EF4-FFF2-40B4-BE49-F238E27FC236}">
-                    <a16:creationId xmlns:a16="http://schemas.microsoft.com/office/drawing/2014/main" id="{88187DE0-1B83-2450-878A-A3A41A90E8E4}"/>
-                  </a:ext>
-                </a:extLst>
-              </p:cNvPr>
-              <p:cNvSpPr txBox="1">
-                <a:spLocks noRot="1" noChangeAspect="1" noMove="1" noResize="1" noEditPoints="1" noAdjustHandles="1" noChangeArrowheads="1" noChangeShapeType="1" noTextEdit="1"/>
-              </p:cNvSpPr>
-              <p:nvPr/>
-            </p:nvSpPr>
-            <p:spPr>
-              <a:xfrm>
-                <a:off x="5221224" y="1073829"/>
-                <a:ext cx="8700523" cy="2244140"/>
-              </a:xfrm>
-              <a:prstGeom prst="rect">
-                <a:avLst/>
-              </a:prstGeom>
-              <a:blipFill>
-                <a:blip r:embed="rId3"/>
-                <a:stretch>
-                  <a:fillRect l="-583" t="-1124"/>
-                </a:stretch>
-              </a:blipFill>
-            </p:spPr>
-            <p:txBody>
-              <a:bodyPr/>
-              <a:lstStyle/>
-              <a:p>
-                <a:r>
-                  <a:rPr lang="en-US">
-                    <a:noFill/>
-                  </a:rPr>
-                  <a:t> </a:t>
-                </a:r>
-              </a:p>
-            </p:txBody>
-          </p:sp>
-        </mc:Fallback>
-      </mc:AlternateContent>
+      <p:sp>
+        <p:nvSpPr>
+          <p:cNvPr id="6" name="TextBox 5">
+            <a:extLst>
+              <a:ext uri="{FF2B5EF4-FFF2-40B4-BE49-F238E27FC236}">
+                <a16:creationId xmlns:a16="http://schemas.microsoft.com/office/drawing/2014/main" id="{2C4706F2-558E-3451-0A18-48E301BB40B2}"/>
+              </a:ext>
+            </a:extLst>
+          </p:cNvPr>
+          <p:cNvSpPr txBox="1"/>
+          <p:nvPr/>
+        </p:nvSpPr>
+        <p:spPr>
+          <a:xfrm>
+            <a:off x="8430259" y="5273457"/>
+            <a:ext cx="2757486" cy="923330"/>
+          </a:xfrm>
+          <a:prstGeom prst="rect">
+            <a:avLst/>
+          </a:prstGeom>
+          <a:noFill/>
+        </p:spPr>
+        <p:txBody>
+          <a:bodyPr wrap="none" rtlCol="0">
+            <a:spAutoFit/>
+          </a:bodyPr>
+          <a:lstStyle/>
+          <a:p>
+            <a:pPr marL="285750" indent="-285750">
+              <a:buFont typeface="Arial" panose="020B0604020202020204" pitchFamily="34" charset="0"/>
+              <a:buChar char="•"/>
+            </a:pPr>
+            <a:r>
+              <a:rPr lang="en-US" dirty="0"/>
+              <a:t>Parabolic inlet velocity</a:t>
+            </a:r>
+          </a:p>
+          <a:p>
+            <a:pPr marL="285750" indent="-285750">
+              <a:buFont typeface="Arial" panose="020B0604020202020204" pitchFamily="34" charset="0"/>
+              <a:buChar char="•"/>
+            </a:pPr>
+            <a:r>
+              <a:rPr lang="en-US" dirty="0"/>
+              <a:t>No slip walls</a:t>
+            </a:r>
+          </a:p>
+          <a:p>
+            <a:pPr marL="285750" indent="-285750">
+              <a:buFont typeface="Arial" panose="020B0604020202020204" pitchFamily="34" charset="0"/>
+              <a:buChar char="•"/>
+            </a:pPr>
+            <a:endParaRPr lang="en-US" dirty="0"/>
+          </a:p>
+        </p:txBody>
+      </p:sp>
     </p:spTree>
     <p:extLst>
       <p:ext uri="{BB962C8B-B14F-4D97-AF65-F5344CB8AC3E}">
-        <p14:creationId xmlns:p14="http://schemas.microsoft.com/office/powerpoint/2010/main" val="1463697046"/>
+        <p14:creationId xmlns:p14="http://schemas.microsoft.com/office/powerpoint/2010/main" val="2604914428"/>
       </p:ext>
     </p:extLst>
   </p:cSld>
@@ -7300,376 +8243,6 @@
 </file>
 
 <file path=ppt/slides/slide6.xml><?xml version="1.0" encoding="utf-8"?>
-<p:sld xmlns:a="http://schemas.openxmlformats.org/drawingml/2006/main" xmlns:r="http://schemas.openxmlformats.org/officeDocument/2006/relationships" xmlns:p="http://schemas.openxmlformats.org/presentationml/2006/main">
-  <p:cSld>
-    <p:spTree>
-      <p:nvGrpSpPr>
-        <p:cNvPr id="1" name=""/>
-        <p:cNvGrpSpPr/>
-        <p:nvPr/>
-      </p:nvGrpSpPr>
-      <p:grpSpPr>
-        <a:xfrm>
-          <a:off x="0" y="0"/>
-          <a:ext cx="0" cy="0"/>
-          <a:chOff x="0" y="0"/>
-          <a:chExt cx="0" cy="0"/>
-        </a:xfrm>
-      </p:grpSpPr>
-      <p:sp>
-        <p:nvSpPr>
-          <p:cNvPr id="2" name="Title 1">
-            <a:extLst>
-              <a:ext uri="{FF2B5EF4-FFF2-40B4-BE49-F238E27FC236}">
-                <a16:creationId xmlns:a16="http://schemas.microsoft.com/office/drawing/2014/main" id="{93D60F15-EB9B-302A-A859-87B8B6C516A4}"/>
-              </a:ext>
-            </a:extLst>
-          </p:cNvPr>
-          <p:cNvSpPr>
-            <a:spLocks noGrp="1"/>
-          </p:cNvSpPr>
-          <p:nvPr>
-            <p:ph type="title"/>
-          </p:nvPr>
-        </p:nvSpPr>
-        <p:spPr/>
-        <p:txBody>
-          <a:bodyPr/>
-          <a:lstStyle/>
-          <a:p>
-            <a:r>
-              <a:rPr lang="en-US" dirty="0"/>
-              <a:t>Solver 2: Physics-Informed Neural Networks</a:t>
-            </a:r>
-          </a:p>
-        </p:txBody>
-      </p:sp>
-      <p:sp>
-        <p:nvSpPr>
-          <p:cNvPr id="4" name="Title 1">
-            <a:extLst>
-              <a:ext uri="{FF2B5EF4-FFF2-40B4-BE49-F238E27FC236}">
-                <a16:creationId xmlns:a16="http://schemas.microsoft.com/office/drawing/2014/main" id="{6B55262A-29F4-2812-2596-FC2B5833BA7F}"/>
-              </a:ext>
-            </a:extLst>
-          </p:cNvPr>
-          <p:cNvSpPr txBox="1">
-            <a:spLocks/>
-          </p:cNvSpPr>
-          <p:nvPr/>
-        </p:nvSpPr>
-        <p:spPr>
-          <a:xfrm>
-            <a:off x="1430280" y="2049450"/>
-            <a:ext cx="10890929" cy="548640"/>
-          </a:xfrm>
-          <a:prstGeom prst="rect">
-            <a:avLst/>
-          </a:prstGeom>
-        </p:spPr>
-        <p:txBody>
-          <a:bodyPr vert="horz" lIns="91440" tIns="45720" rIns="91440" bIns="45720" rtlCol="0" anchor="t">
-            <a:normAutofit lnSpcReduction="10000"/>
-          </a:bodyPr>
-          <a:lstStyle>
-            <a:lvl1pPr algn="l" defTabSz="914400" rtl="0" eaLnBrk="1" latinLnBrk="0" hangingPunct="1">
-              <a:lnSpc>
-                <a:spcPct val="100000"/>
-              </a:lnSpc>
-              <a:spcBef>
-                <a:spcPct val="0"/>
-              </a:spcBef>
-              <a:buNone/>
-              <a:defRPr sz="4000" b="1" kern="1200">
-                <a:solidFill>
-                  <a:schemeClr val="tx1"/>
-                </a:solidFill>
-                <a:latin typeface="+mj-lt"/>
-                <a:ea typeface="+mj-ea"/>
-                <a:cs typeface="+mj-cs"/>
-              </a:defRPr>
-            </a:lvl1pPr>
-          </a:lstStyle>
-          <a:p>
-            <a:r>
-              <a:rPr lang="en-US" sz="3200" dirty="0"/>
-              <a:t>What are PINNs?</a:t>
-            </a:r>
-          </a:p>
-        </p:txBody>
-      </p:sp>
-      <p:sp>
-        <p:nvSpPr>
-          <p:cNvPr id="6" name="TextBox 5">
-            <a:extLst>
-              <a:ext uri="{FF2B5EF4-FFF2-40B4-BE49-F238E27FC236}">
-                <a16:creationId xmlns:a16="http://schemas.microsoft.com/office/drawing/2014/main" id="{4CA5F18F-0867-C81C-0E48-71F66583E933}"/>
-              </a:ext>
-            </a:extLst>
-          </p:cNvPr>
-          <p:cNvSpPr txBox="1"/>
-          <p:nvPr/>
-        </p:nvSpPr>
-        <p:spPr>
-          <a:xfrm>
-            <a:off x="1103243" y="2812774"/>
-            <a:ext cx="6091732" cy="923330"/>
-          </a:xfrm>
-          <a:prstGeom prst="rect">
-            <a:avLst/>
-          </a:prstGeom>
-          <a:noFill/>
-        </p:spPr>
-        <p:txBody>
-          <a:bodyPr wrap="none" rtlCol="0">
-            <a:spAutoFit/>
-          </a:bodyPr>
-          <a:lstStyle/>
-          <a:p>
-            <a:pPr marL="285750" indent="-285750">
-              <a:buFont typeface="Arial" panose="020B0604020202020204" pitchFamily="34" charset="0"/>
-              <a:buChar char="•"/>
-            </a:pPr>
-            <a:r>
-              <a:rPr lang="en-US" dirty="0"/>
-              <a:t>Replaces mesh with a neural network (MLP)</a:t>
-            </a:r>
-          </a:p>
-          <a:p>
-            <a:pPr marL="285750" indent="-285750">
-              <a:buFont typeface="Arial" panose="020B0604020202020204" pitchFamily="34" charset="0"/>
-              <a:buChar char="•"/>
-            </a:pPr>
-            <a:r>
-              <a:rPr lang="en-US" dirty="0"/>
-              <a:t>PDE residual is embedded directly into the loss function</a:t>
-            </a:r>
-          </a:p>
-          <a:p>
-            <a:pPr marL="285750" indent="-285750">
-              <a:buFont typeface="Arial" panose="020B0604020202020204" pitchFamily="34" charset="0"/>
-              <a:buChar char="•"/>
-            </a:pPr>
-            <a:endParaRPr lang="en-US" dirty="0"/>
-          </a:p>
-        </p:txBody>
-      </p:sp>
-      <p:sp>
-        <p:nvSpPr>
-          <p:cNvPr id="7" name="Content Placeholder 6">
-            <a:extLst>
-              <a:ext uri="{FF2B5EF4-FFF2-40B4-BE49-F238E27FC236}">
-                <a16:creationId xmlns:a16="http://schemas.microsoft.com/office/drawing/2014/main" id="{72DD03BC-9155-251C-1667-6DD9FE76B50A}"/>
-              </a:ext>
-            </a:extLst>
-          </p:cNvPr>
-          <p:cNvSpPr>
-            <a:spLocks noGrp="1"/>
-          </p:cNvSpPr>
-          <p:nvPr>
-            <p:ph idx="1"/>
-          </p:nvPr>
-        </p:nvSpPr>
-        <p:spPr/>
-        <p:txBody>
-          <a:bodyPr/>
-          <a:lstStyle/>
-          <a:p>
-            <a:endParaRPr lang="en-US"/>
-          </a:p>
-        </p:txBody>
-      </p:sp>
-    </p:spTree>
-    <p:extLst>
-      <p:ext uri="{BB962C8B-B14F-4D97-AF65-F5344CB8AC3E}">
-        <p14:creationId xmlns:p14="http://schemas.microsoft.com/office/powerpoint/2010/main" val="2598518009"/>
-      </p:ext>
-    </p:extLst>
-  </p:cSld>
-  <p:clrMapOvr>
-    <a:masterClrMapping/>
-  </p:clrMapOvr>
-</p:sld>
-</file>
-
-<file path=ppt/slides/slide7.xml><?xml version="1.0" encoding="utf-8"?>
-<p:sld xmlns:a="http://schemas.openxmlformats.org/drawingml/2006/main" xmlns:r="http://schemas.openxmlformats.org/officeDocument/2006/relationships" xmlns:p="http://schemas.openxmlformats.org/presentationml/2006/main">
-  <p:cSld>
-    <p:spTree>
-      <p:nvGrpSpPr>
-        <p:cNvPr id="1" name=""/>
-        <p:cNvGrpSpPr/>
-        <p:nvPr/>
-      </p:nvGrpSpPr>
-      <p:grpSpPr>
-        <a:xfrm>
-          <a:off x="0" y="0"/>
-          <a:ext cx="0" cy="0"/>
-          <a:chOff x="0" y="0"/>
-          <a:chExt cx="0" cy="0"/>
-        </a:xfrm>
-      </p:grpSpPr>
-      <p:sp>
-        <p:nvSpPr>
-          <p:cNvPr id="3" name="Content Placeholder 2">
-            <a:extLst>
-              <a:ext uri="{FF2B5EF4-FFF2-40B4-BE49-F238E27FC236}">
-                <a16:creationId xmlns:a16="http://schemas.microsoft.com/office/drawing/2014/main" id="{ADA918DA-17C1-9258-D11D-A16A9A6E9DB4}"/>
-              </a:ext>
-            </a:extLst>
-          </p:cNvPr>
-          <p:cNvSpPr>
-            <a:spLocks noGrp="1"/>
-          </p:cNvSpPr>
-          <p:nvPr>
-            <p:ph idx="1"/>
-          </p:nvPr>
-        </p:nvSpPr>
-        <p:spPr/>
-        <p:txBody>
-          <a:bodyPr/>
-          <a:lstStyle/>
-          <a:p>
-            <a:r>
-              <a:rPr lang="en-US" dirty="0"/>
-              <a:t>Network Architecture (MLP):</a:t>
-            </a:r>
-          </a:p>
-          <a:p>
-            <a:pPr lvl="1"/>
-            <a:r>
-              <a:rPr lang="en-US" dirty="0"/>
-              <a:t>4 hidden layers with 128 neurons each using tanh activation</a:t>
-            </a:r>
-          </a:p>
-        </p:txBody>
-      </p:sp>
-      <p:sp>
-        <p:nvSpPr>
-          <p:cNvPr id="4" name="Title 1">
-            <a:extLst>
-              <a:ext uri="{FF2B5EF4-FFF2-40B4-BE49-F238E27FC236}">
-                <a16:creationId xmlns:a16="http://schemas.microsoft.com/office/drawing/2014/main" id="{DAC03048-E37F-AD7E-802E-7E3FBF85BA4E}"/>
-              </a:ext>
-            </a:extLst>
-          </p:cNvPr>
-          <p:cNvSpPr>
-            <a:spLocks noGrp="1"/>
-          </p:cNvSpPr>
-          <p:nvPr>
-            <p:ph type="title"/>
-          </p:nvPr>
-        </p:nvSpPr>
-        <p:spPr/>
-        <p:txBody>
-          <a:bodyPr/>
-          <a:lstStyle/>
-          <a:p>
-            <a:r>
-              <a:rPr lang="en-US" dirty="0"/>
-              <a:t>Solver 2: Physics-Informed Neural Networks</a:t>
-            </a:r>
-          </a:p>
-        </p:txBody>
-      </p:sp>
-      <p:sp>
-        <p:nvSpPr>
-          <p:cNvPr id="5" name="Title 1">
-            <a:extLst>
-              <a:ext uri="{FF2B5EF4-FFF2-40B4-BE49-F238E27FC236}">
-                <a16:creationId xmlns:a16="http://schemas.microsoft.com/office/drawing/2014/main" id="{0533923A-E516-1ED4-235C-868AF0BFC5A5}"/>
-              </a:ext>
-            </a:extLst>
-          </p:cNvPr>
-          <p:cNvSpPr txBox="1">
-            <a:spLocks/>
-          </p:cNvSpPr>
-          <p:nvPr/>
-        </p:nvSpPr>
-        <p:spPr>
-          <a:xfrm>
-            <a:off x="1430280" y="2049450"/>
-            <a:ext cx="10890929" cy="548640"/>
-          </a:xfrm>
-          <a:prstGeom prst="rect">
-            <a:avLst/>
-          </a:prstGeom>
-        </p:spPr>
-        <p:txBody>
-          <a:bodyPr vert="horz" lIns="91440" tIns="45720" rIns="91440" bIns="45720" rtlCol="0" anchor="t">
-            <a:normAutofit lnSpcReduction="10000"/>
-          </a:bodyPr>
-          <a:lstStyle>
-            <a:lvl1pPr algn="l" defTabSz="914400" rtl="0" eaLnBrk="1" latinLnBrk="0" hangingPunct="1">
-              <a:lnSpc>
-                <a:spcPct val="100000"/>
-              </a:lnSpc>
-              <a:spcBef>
-                <a:spcPct val="0"/>
-              </a:spcBef>
-              <a:buNone/>
-              <a:defRPr sz="4000" b="1" kern="1200">
-                <a:solidFill>
-                  <a:schemeClr val="tx1"/>
-                </a:solidFill>
-                <a:latin typeface="+mj-lt"/>
-                <a:ea typeface="+mj-ea"/>
-                <a:cs typeface="+mj-cs"/>
-              </a:defRPr>
-            </a:lvl1pPr>
-          </a:lstStyle>
-          <a:p>
-            <a:r>
-              <a:rPr lang="en-US" sz="3200" dirty="0"/>
-              <a:t>PINN setup</a:t>
-            </a:r>
-          </a:p>
-        </p:txBody>
-      </p:sp>
-      <p:pic>
-        <p:nvPicPr>
-          <p:cNvPr id="2" name="Picture 1">
-            <a:extLst>
-              <a:ext uri="{FF2B5EF4-FFF2-40B4-BE49-F238E27FC236}">
-                <a16:creationId xmlns:a16="http://schemas.microsoft.com/office/drawing/2014/main" id="{F390B86D-0B39-822D-3DBB-69E0CC860331}"/>
-              </a:ext>
-            </a:extLst>
-          </p:cNvPr>
-          <p:cNvPicPr>
-            <a:picLocks noChangeAspect="1"/>
-          </p:cNvPicPr>
-          <p:nvPr/>
-        </p:nvPicPr>
-        <p:blipFill>
-          <a:blip r:embed="rId2"/>
-          <a:stretch>
-            <a:fillRect/>
-          </a:stretch>
-        </p:blipFill>
-        <p:spPr>
-          <a:xfrm>
-            <a:off x="8439531" y="2468881"/>
-            <a:ext cx="3752469" cy="3358033"/>
-          </a:xfrm>
-          <a:prstGeom prst="rect">
-            <a:avLst/>
-          </a:prstGeom>
-        </p:spPr>
-      </p:pic>
-    </p:spTree>
-    <p:extLst>
-      <p:ext uri="{BB962C8B-B14F-4D97-AF65-F5344CB8AC3E}">
-        <p14:creationId xmlns:p14="http://schemas.microsoft.com/office/powerpoint/2010/main" val="1436160802"/>
-      </p:ext>
-    </p:extLst>
-  </p:cSld>
-  <p:clrMapOvr>
-    <a:masterClrMapping/>
-  </p:clrMapOvr>
-</p:sld>
-</file>
-
-<file path=ppt/slides/slide8.xml><?xml version="1.0" encoding="utf-8"?>
 <p:sld xmlns:a="http://schemas.openxmlformats.org/drawingml/2006/main" xmlns:r="http://schemas.openxmlformats.org/officeDocument/2006/relationships" xmlns:p="http://schemas.openxmlformats.org/presentationml/2006/main">
   <p:cSld>
     <p:bg>
@@ -7926,7 +8499,7 @@
 </p:sld>
 </file>
 
-<file path=ppt/slides/slide9.xml><?xml version="1.0" encoding="utf-8"?>
+<file path=ppt/slides/slide7.xml><?xml version="1.0" encoding="utf-8"?>
 <p:sld xmlns:a="http://schemas.openxmlformats.org/drawingml/2006/main" xmlns:r="http://schemas.openxmlformats.org/officeDocument/2006/relationships" xmlns:p="http://schemas.openxmlformats.org/presentationml/2006/main">
   <p:cSld>
     <p:spTree>
@@ -7978,10 +8551,10 @@
       </p:sp>
       <p:pic>
         <p:nvPicPr>
-          <p:cNvPr id="4" name="Picture 3">
-            <a:extLst>
-              <a:ext uri="{FF2B5EF4-FFF2-40B4-BE49-F238E27FC236}">
-                <a16:creationId xmlns:a16="http://schemas.microsoft.com/office/drawing/2014/main" id="{1AFA005F-0380-77E3-480F-52E5143FDC06}"/>
+          <p:cNvPr id="10" name="Picture 9">
+            <a:extLst>
+              <a:ext uri="{FF2B5EF4-FFF2-40B4-BE49-F238E27FC236}">
+                <a16:creationId xmlns:a16="http://schemas.microsoft.com/office/drawing/2014/main" id="{3696B09E-3EFF-2692-B0EA-E08A0D50C213}"/>
               </a:ext>
             </a:extLst>
           </p:cNvPr>
@@ -7998,8 +8571,8 @@
         </p:blipFill>
         <p:spPr>
           <a:xfrm>
-            <a:off x="3117692" y="655982"/>
-            <a:ext cx="9074308" cy="6202018"/>
+            <a:off x="3035099" y="579120"/>
+            <a:ext cx="9214041" cy="6278880"/>
           </a:xfrm>
           <a:prstGeom prst="rect">
             <a:avLst/>
@@ -8008,10 +8581,10 @@
       </p:pic>
       <p:pic>
         <p:nvPicPr>
-          <p:cNvPr id="6" name="Picture 5">
-            <a:extLst>
-              <a:ext uri="{FF2B5EF4-FFF2-40B4-BE49-F238E27FC236}">
-                <a16:creationId xmlns:a16="http://schemas.microsoft.com/office/drawing/2014/main" id="{DF3F95AF-BC93-227B-F608-A0582108FDA2}"/>
+          <p:cNvPr id="12" name="Picture 11">
+            <a:extLst>
+              <a:ext uri="{FF2B5EF4-FFF2-40B4-BE49-F238E27FC236}">
+                <a16:creationId xmlns:a16="http://schemas.microsoft.com/office/drawing/2014/main" id="{B88A3C05-DED7-EE27-23C9-D4C43B8314EE}"/>
               </a:ext>
             </a:extLst>
           </p:cNvPr>
@@ -8028,8 +8601,8 @@
         </p:blipFill>
         <p:spPr>
           <a:xfrm>
-            <a:off x="3117693" y="655982"/>
-            <a:ext cx="9053032" cy="6202018"/>
+            <a:off x="3035098" y="579120"/>
+            <a:ext cx="9156901" cy="6254538"/>
           </a:xfrm>
           <a:prstGeom prst="rect">
             <a:avLst/>
@@ -8038,10 +8611,10 @@
       </p:pic>
       <p:pic>
         <p:nvPicPr>
-          <p:cNvPr id="8" name="Picture 7">
-            <a:extLst>
-              <a:ext uri="{FF2B5EF4-FFF2-40B4-BE49-F238E27FC236}">
-                <a16:creationId xmlns:a16="http://schemas.microsoft.com/office/drawing/2014/main" id="{B15C5632-956D-4B7B-F241-EC75DD37E277}"/>
+          <p:cNvPr id="14" name="Picture 13">
+            <a:extLst>
+              <a:ext uri="{FF2B5EF4-FFF2-40B4-BE49-F238E27FC236}">
+                <a16:creationId xmlns:a16="http://schemas.microsoft.com/office/drawing/2014/main" id="{94F18657-8DED-0744-2D73-C85F114C3EC7}"/>
               </a:ext>
             </a:extLst>
           </p:cNvPr>
@@ -8058,8 +8631,8 @@
         </p:blipFill>
         <p:spPr>
           <a:xfrm>
-            <a:off x="3117691" y="655983"/>
-            <a:ext cx="9053032" cy="6223958"/>
+            <a:off x="3035097" y="579119"/>
+            <a:ext cx="9156900" cy="6269201"/>
           </a:xfrm>
           <a:prstGeom prst="rect">
             <a:avLst/>
@@ -8110,7 +8683,7 @@
                                           </p:stCondLst>
                                         </p:cTn>
                                         <p:tgtEl>
-                                          <p:spTgt spid="6"/>
+                                          <p:spTgt spid="12"/>
                                         </p:tgtEl>
                                         <p:attrNameLst>
                                           <p:attrName>style.visibility</p:attrName>
@@ -8155,7 +8728,396 @@
                                           </p:stCondLst>
                                         </p:cTn>
                                         <p:tgtEl>
-                                          <p:spTgt spid="8"/>
+                                          <p:spTgt spid="14"/>
+                                        </p:tgtEl>
+                                        <p:attrNameLst>
+                                          <p:attrName>style.visibility</p:attrName>
+                                        </p:attrNameLst>
+                                      </p:cBhvr>
+                                      <p:to>
+                                        <p:strVal val="visible"/>
+                                      </p:to>
+                                    </p:set>
+                                  </p:childTnLst>
+                                </p:cTn>
+                              </p:par>
+                            </p:childTnLst>
+                          </p:cTn>
+                        </p:par>
+                      </p:childTnLst>
+                    </p:cTn>
+                  </p:par>
+                </p:childTnLst>
+              </p:cTn>
+              <p:prevCondLst>
+                <p:cond evt="onPrev" delay="0">
+                  <p:tgtEl>
+                    <p:sldTgt/>
+                  </p:tgtEl>
+                </p:cond>
+              </p:prevCondLst>
+              <p:nextCondLst>
+                <p:cond evt="onNext" delay="0">
+                  <p:tgtEl>
+                    <p:sldTgt/>
+                  </p:tgtEl>
+                </p:cond>
+              </p:nextCondLst>
+            </p:seq>
+          </p:childTnLst>
+        </p:cTn>
+      </p:par>
+    </p:tnLst>
+  </p:timing>
+</p:sld>
+</file>
+
+<file path=ppt/slides/slide8.xml><?xml version="1.0" encoding="utf-8"?>
+<p:sld xmlns:a="http://schemas.openxmlformats.org/drawingml/2006/main" xmlns:r="http://schemas.openxmlformats.org/officeDocument/2006/relationships" xmlns:p="http://schemas.openxmlformats.org/presentationml/2006/main">
+  <p:cSld>
+    <p:spTree>
+      <p:nvGrpSpPr>
+        <p:cNvPr id="1" name=""/>
+        <p:cNvGrpSpPr/>
+        <p:nvPr/>
+      </p:nvGrpSpPr>
+      <p:grpSpPr>
+        <a:xfrm>
+          <a:off x="0" y="0"/>
+          <a:ext cx="0" cy="0"/>
+          <a:chOff x="0" y="0"/>
+          <a:chExt cx="0" cy="0"/>
+        </a:xfrm>
+      </p:grpSpPr>
+      <p:pic>
+        <p:nvPicPr>
+          <p:cNvPr id="5" name="Content Placeholder 4">
+            <a:extLst>
+              <a:ext uri="{FF2B5EF4-FFF2-40B4-BE49-F238E27FC236}">
+                <a16:creationId xmlns:a16="http://schemas.microsoft.com/office/drawing/2014/main" id="{363064F7-C31C-C697-7A86-A1E5E667BEE5}"/>
+              </a:ext>
+            </a:extLst>
+          </p:cNvPr>
+          <p:cNvPicPr>
+            <a:picLocks noGrp="1" noChangeAspect="1"/>
+          </p:cNvPicPr>
+          <p:nvPr>
+            <p:ph idx="1"/>
+          </p:nvPr>
+        </p:nvPicPr>
+        <p:blipFill>
+          <a:blip r:embed="rId2"/>
+          <a:stretch>
+            <a:fillRect/>
+          </a:stretch>
+        </p:blipFill>
+        <p:spPr>
+          <a:xfrm>
+            <a:off x="3390481" y="818985"/>
+            <a:ext cx="8133852" cy="5380204"/>
+          </a:xfrm>
+          <a:prstGeom prst="rect">
+            <a:avLst/>
+          </a:prstGeom>
+        </p:spPr>
+      </p:pic>
+      <p:sp>
+        <p:nvSpPr>
+          <p:cNvPr id="6" name="Title 1">
+            <a:extLst>
+              <a:ext uri="{FF2B5EF4-FFF2-40B4-BE49-F238E27FC236}">
+                <a16:creationId xmlns:a16="http://schemas.microsoft.com/office/drawing/2014/main" id="{460AA165-C119-1ED7-6F4E-A8F2F3ED3FEE}"/>
+              </a:ext>
+            </a:extLst>
+          </p:cNvPr>
+          <p:cNvSpPr txBox="1">
+            <a:spLocks/>
+          </p:cNvSpPr>
+          <p:nvPr/>
+        </p:nvSpPr>
+        <p:spPr>
+          <a:xfrm>
+            <a:off x="640079" y="1371600"/>
+            <a:ext cx="3236977" cy="2295143"/>
+          </a:xfrm>
+          <a:prstGeom prst="rect">
+            <a:avLst/>
+          </a:prstGeom>
+        </p:spPr>
+        <p:txBody>
+          <a:bodyPr vert="horz" lIns="91440" tIns="45720" rIns="91440" bIns="45720" rtlCol="0" anchor="t">
+            <a:normAutofit/>
+          </a:bodyPr>
+          <a:lstStyle>
+            <a:lvl1pPr algn="l" defTabSz="914400" rtl="0" eaLnBrk="1" latinLnBrk="0" hangingPunct="1">
+              <a:lnSpc>
+                <a:spcPct val="100000"/>
+              </a:lnSpc>
+              <a:spcBef>
+                <a:spcPct val="0"/>
+              </a:spcBef>
+              <a:buNone/>
+              <a:defRPr sz="4000" b="1" kern="1200">
+                <a:solidFill>
+                  <a:schemeClr val="tx1"/>
+                </a:solidFill>
+                <a:latin typeface="+mj-lt"/>
+                <a:ea typeface="+mj-ea"/>
+                <a:cs typeface="+mj-cs"/>
+              </a:defRPr>
+            </a:lvl1pPr>
+          </a:lstStyle>
+          <a:p>
+            <a:r>
+              <a:rPr lang="en-US" dirty="0"/>
+              <a:t>Lid Driven Cavity Results</a:t>
+            </a:r>
+          </a:p>
+        </p:txBody>
+      </p:sp>
+    </p:spTree>
+    <p:extLst>
+      <p:ext uri="{BB962C8B-B14F-4D97-AF65-F5344CB8AC3E}">
+        <p14:creationId xmlns:p14="http://schemas.microsoft.com/office/powerpoint/2010/main" val="3140568401"/>
+      </p:ext>
+    </p:extLst>
+  </p:cSld>
+  <p:clrMapOvr>
+    <a:masterClrMapping/>
+  </p:clrMapOvr>
+</p:sld>
+</file>
+
+<file path=ppt/slides/slide9.xml><?xml version="1.0" encoding="utf-8"?>
+<p:sld xmlns:a="http://schemas.openxmlformats.org/drawingml/2006/main" xmlns:r="http://schemas.openxmlformats.org/officeDocument/2006/relationships" xmlns:p="http://schemas.openxmlformats.org/presentationml/2006/main">
+  <p:cSld>
+    <p:spTree>
+      <p:nvGrpSpPr>
+        <p:cNvPr id="1" name=""/>
+        <p:cNvGrpSpPr/>
+        <p:nvPr/>
+      </p:nvGrpSpPr>
+      <p:grpSpPr>
+        <a:xfrm>
+          <a:off x="0" y="0"/>
+          <a:ext cx="0" cy="0"/>
+          <a:chOff x="0" y="0"/>
+          <a:chExt cx="0" cy="0"/>
+        </a:xfrm>
+      </p:grpSpPr>
+      <p:sp>
+        <p:nvSpPr>
+          <p:cNvPr id="2" name="Title 1">
+            <a:extLst>
+              <a:ext uri="{FF2B5EF4-FFF2-40B4-BE49-F238E27FC236}">
+                <a16:creationId xmlns:a16="http://schemas.microsoft.com/office/drawing/2014/main" id="{157AB1D0-D432-0681-DC5F-EC7CBCF7AC41}"/>
+              </a:ext>
+            </a:extLst>
+          </p:cNvPr>
+          <p:cNvSpPr>
+            <a:spLocks noGrp="1"/>
+          </p:cNvSpPr>
+          <p:nvPr>
+            <p:ph type="title"/>
+          </p:nvPr>
+        </p:nvSpPr>
+        <p:spPr>
+          <a:xfrm>
+            <a:off x="2257864" y="125205"/>
+            <a:ext cx="9476936" cy="2688335"/>
+          </a:xfrm>
+        </p:spPr>
+        <p:txBody>
+          <a:bodyPr/>
+          <a:lstStyle/>
+          <a:p>
+            <a:r>
+              <a:rPr lang="en-US" dirty="0"/>
+              <a:t>Backward-Facing Step Results</a:t>
+            </a:r>
+          </a:p>
+        </p:txBody>
+      </p:sp>
+      <p:pic>
+        <p:nvPicPr>
+          <p:cNvPr id="5" name="Picture 4">
+            <a:extLst>
+              <a:ext uri="{FF2B5EF4-FFF2-40B4-BE49-F238E27FC236}">
+                <a16:creationId xmlns:a16="http://schemas.microsoft.com/office/drawing/2014/main" id="{279C47A1-DEA1-3AC2-AEF0-142064BBA1BE}"/>
+              </a:ext>
+            </a:extLst>
+          </p:cNvPr>
+          <p:cNvPicPr>
+            <a:picLocks noChangeAspect="1"/>
+          </p:cNvPicPr>
+          <p:nvPr/>
+        </p:nvPicPr>
+        <p:blipFill>
+          <a:blip r:embed="rId2"/>
+          <a:stretch>
+            <a:fillRect/>
+          </a:stretch>
+        </p:blipFill>
+        <p:spPr>
+          <a:xfrm>
+            <a:off x="89891" y="1079646"/>
+            <a:ext cx="12012218" cy="5791200"/>
+          </a:xfrm>
+          <a:prstGeom prst="rect">
+            <a:avLst/>
+          </a:prstGeom>
+        </p:spPr>
+      </p:pic>
+      <p:pic>
+        <p:nvPicPr>
+          <p:cNvPr id="7" name="Picture 6">
+            <a:extLst>
+              <a:ext uri="{FF2B5EF4-FFF2-40B4-BE49-F238E27FC236}">
+                <a16:creationId xmlns:a16="http://schemas.microsoft.com/office/drawing/2014/main" id="{658246FF-74D8-7D84-C772-E6ED9F448A1F}"/>
+              </a:ext>
+            </a:extLst>
+          </p:cNvPr>
+          <p:cNvPicPr>
+            <a:picLocks noChangeAspect="1"/>
+          </p:cNvPicPr>
+          <p:nvPr/>
+        </p:nvPicPr>
+        <p:blipFill>
+          <a:blip r:embed="rId3"/>
+          <a:stretch>
+            <a:fillRect/>
+          </a:stretch>
+        </p:blipFill>
+        <p:spPr>
+          <a:xfrm>
+            <a:off x="0" y="985656"/>
+            <a:ext cx="12102109" cy="5829048"/>
+          </a:xfrm>
+          <a:prstGeom prst="rect">
+            <a:avLst/>
+          </a:prstGeom>
+        </p:spPr>
+      </p:pic>
+      <p:pic>
+        <p:nvPicPr>
+          <p:cNvPr id="9" name="Picture 8">
+            <a:extLst>
+              <a:ext uri="{FF2B5EF4-FFF2-40B4-BE49-F238E27FC236}">
+                <a16:creationId xmlns:a16="http://schemas.microsoft.com/office/drawing/2014/main" id="{1A86C0FF-A705-B78C-03F6-F4561D2F6C8E}"/>
+              </a:ext>
+            </a:extLst>
+          </p:cNvPr>
+          <p:cNvPicPr>
+            <a:picLocks noChangeAspect="1"/>
+          </p:cNvPicPr>
+          <p:nvPr/>
+        </p:nvPicPr>
+        <p:blipFill>
+          <a:blip r:embed="rId4"/>
+          <a:stretch>
+            <a:fillRect/>
+          </a:stretch>
+        </p:blipFill>
+        <p:spPr>
+          <a:xfrm>
+            <a:off x="44945" y="985656"/>
+            <a:ext cx="12012218" cy="5785753"/>
+          </a:xfrm>
+          <a:prstGeom prst="rect">
+            <a:avLst/>
+          </a:prstGeom>
+        </p:spPr>
+      </p:pic>
+    </p:spTree>
+    <p:extLst>
+      <p:ext uri="{BB962C8B-B14F-4D97-AF65-F5344CB8AC3E}">
+        <p14:creationId xmlns:p14="http://schemas.microsoft.com/office/powerpoint/2010/main" val="2537628197"/>
+      </p:ext>
+    </p:extLst>
+  </p:cSld>
+  <p:clrMapOvr>
+    <a:masterClrMapping/>
+  </p:clrMapOvr>
+  <p:timing>
+    <p:tnLst>
+      <p:par>
+        <p:cTn id="1" dur="indefinite" restart="never" nodeType="tmRoot">
+          <p:childTnLst>
+            <p:seq concurrent="1" nextAc="seek">
+              <p:cTn id="2" dur="indefinite" nodeType="mainSeq">
+                <p:childTnLst>
+                  <p:par>
+                    <p:cTn id="3" fill="hold">
+                      <p:stCondLst>
+                        <p:cond delay="indefinite"/>
+                      </p:stCondLst>
+                      <p:childTnLst>
+                        <p:par>
+                          <p:cTn id="4" fill="hold">
+                            <p:stCondLst>
+                              <p:cond delay="0"/>
+                            </p:stCondLst>
+                            <p:childTnLst>
+                              <p:par>
+                                <p:cTn id="5" presetID="1" presetClass="entr" presetSubtype="0" fill="hold" nodeType="clickEffect">
+                                  <p:stCondLst>
+                                    <p:cond delay="0"/>
+                                  </p:stCondLst>
+                                  <p:childTnLst>
+                                    <p:set>
+                                      <p:cBhvr>
+                                        <p:cTn id="6" dur="1" fill="hold">
+                                          <p:stCondLst>
+                                            <p:cond delay="0"/>
+                                          </p:stCondLst>
+                                        </p:cTn>
+                                        <p:tgtEl>
+                                          <p:spTgt spid="7"/>
+                                        </p:tgtEl>
+                                        <p:attrNameLst>
+                                          <p:attrName>style.visibility</p:attrName>
+                                        </p:attrNameLst>
+                                      </p:cBhvr>
+                                      <p:to>
+                                        <p:strVal val="visible"/>
+                                      </p:to>
+                                    </p:set>
+                                  </p:childTnLst>
+                                </p:cTn>
+                              </p:par>
+                            </p:childTnLst>
+                          </p:cTn>
+                        </p:par>
+                      </p:childTnLst>
+                    </p:cTn>
+                  </p:par>
+                  <p:par>
+                    <p:cTn id="7" fill="hold">
+                      <p:stCondLst>
+                        <p:cond delay="indefinite"/>
+                      </p:stCondLst>
+                      <p:childTnLst>
+                        <p:par>
+                          <p:cTn id="8" fill="hold">
+                            <p:stCondLst>
+                              <p:cond delay="0"/>
+                            </p:stCondLst>
+                            <p:childTnLst>
+                              <p:par>
+                                <p:cTn id="9" presetID="1" presetClass="entr" presetSubtype="0" fill="hold" nodeType="clickEffect">
+                                  <p:stCondLst>
+                                    <p:cond delay="0"/>
+                                  </p:stCondLst>
+                                  <p:childTnLst>
+                                    <p:set>
+                                      <p:cBhvr>
+                                        <p:cTn id="10" dur="1" fill="hold">
+                                          <p:stCondLst>
+                                            <p:cond delay="0"/>
+                                          </p:stCondLst>
+                                        </p:cTn>
+                                        <p:tgtEl>
+                                          <p:spTgt spid="9"/>
                                         </p:tgtEl>
                                         <p:attrNameLst>
                                           <p:attrName>style.visibility</p:attrName>
@@ -8398,4 +9360,319 @@
     </a:ext>
   </a:extLst>
 </a:theme>
+</file>
+
+<file path=ppt/theme/theme2.xml><?xml version="1.0" encoding="utf-8"?>
+<a:theme xmlns:a="http://schemas.openxmlformats.org/drawingml/2006/main" name="Office Theme">
+  <a:themeElements>
+    <a:clrScheme name="Office">
+      <a:dk1>
+        <a:sysClr val="windowText" lastClr="000000"/>
+      </a:dk1>
+      <a:lt1>
+        <a:sysClr val="window" lastClr="FFFFFF"/>
+      </a:lt1>
+      <a:dk2>
+        <a:srgbClr val="0E2841"/>
+      </a:dk2>
+      <a:lt2>
+        <a:srgbClr val="E8E8E8"/>
+      </a:lt2>
+      <a:accent1>
+        <a:srgbClr val="156082"/>
+      </a:accent1>
+      <a:accent2>
+        <a:srgbClr val="E97132"/>
+      </a:accent2>
+      <a:accent3>
+        <a:srgbClr val="196B24"/>
+      </a:accent3>
+      <a:accent4>
+        <a:srgbClr val="0F9ED5"/>
+      </a:accent4>
+      <a:accent5>
+        <a:srgbClr val="A02B93"/>
+      </a:accent5>
+      <a:accent6>
+        <a:srgbClr val="4EA72E"/>
+      </a:accent6>
+      <a:hlink>
+        <a:srgbClr val="467886"/>
+      </a:hlink>
+      <a:folHlink>
+        <a:srgbClr val="96607D"/>
+      </a:folHlink>
+    </a:clrScheme>
+    <a:fontScheme name="Office">
+      <a:majorFont>
+        <a:latin typeface="Aptos Display" panose="02110004020202020204"/>
+        <a:ea typeface=""/>
+        <a:cs typeface=""/>
+        <a:font script="Jpan" typeface="游ゴシック Light"/>
+        <a:font script="Hang" typeface="맑은 고딕"/>
+        <a:font script="Hans" typeface="等线 Light"/>
+        <a:font script="Hant" typeface="新細明體"/>
+        <a:font script="Arab" typeface="Times New Roman"/>
+        <a:font script="Hebr" typeface="Times New Roman"/>
+        <a:font script="Thai" typeface="Angsana New"/>
+        <a:font script="Ethi" typeface="Nyala"/>
+        <a:font script="Beng" typeface="Vrinda"/>
+        <a:font script="Gujr" typeface="Shruti"/>
+        <a:font script="Khmr" typeface="MoolBoran"/>
+        <a:font script="Knda" typeface="Tunga"/>
+        <a:font script="Guru" typeface="Raavi"/>
+        <a:font script="Cans" typeface="Euphemia"/>
+        <a:font script="Cher" typeface="Plantagenet Cherokee"/>
+        <a:font script="Yiii" typeface="Microsoft Yi Baiti"/>
+        <a:font script="Tibt" typeface="Microsoft Himalaya"/>
+        <a:font script="Thaa" typeface="MV Boli"/>
+        <a:font script="Deva" typeface="Mangal"/>
+        <a:font script="Telu" typeface="Gautami"/>
+        <a:font script="Taml" typeface="Latha"/>
+        <a:font script="Syrc" typeface="Estrangelo Edessa"/>
+        <a:font script="Orya" typeface="Kalinga"/>
+        <a:font script="Mlym" typeface="Kartika"/>
+        <a:font script="Laoo" typeface="DokChampa"/>
+        <a:font script="Sinh" typeface="Iskoola Pota"/>
+        <a:font script="Mong" typeface="Mongolian Baiti"/>
+        <a:font script="Viet" typeface="Times New Roman"/>
+        <a:font script="Uigh" typeface="Microsoft Uighur"/>
+        <a:font script="Geor" typeface="Sylfaen"/>
+        <a:font script="Armn" typeface="Arial"/>
+        <a:font script="Bugi" typeface="Leelawadee UI"/>
+        <a:font script="Bopo" typeface="Microsoft JhengHei"/>
+        <a:font script="Java" typeface="Javanese Text"/>
+        <a:font script="Lisu" typeface="Segoe UI"/>
+        <a:font script="Mymr" typeface="Myanmar Text"/>
+        <a:font script="Nkoo" typeface="Ebrima"/>
+        <a:font script="Olck" typeface="Nirmala UI"/>
+        <a:font script="Osma" typeface="Ebrima"/>
+        <a:font script="Phag" typeface="Phagspa"/>
+        <a:font script="Syrn" typeface="Estrangelo Edessa"/>
+        <a:font script="Syrj" typeface="Estrangelo Edessa"/>
+        <a:font script="Syre" typeface="Estrangelo Edessa"/>
+        <a:font script="Sora" typeface="Nirmala UI"/>
+        <a:font script="Tale" typeface="Microsoft Tai Le"/>
+        <a:font script="Talu" typeface="Microsoft New Tai Lue"/>
+        <a:font script="Tfng" typeface="Ebrima"/>
+      </a:majorFont>
+      <a:minorFont>
+        <a:latin typeface="Aptos" panose="02110004020202020204"/>
+        <a:ea typeface=""/>
+        <a:cs typeface=""/>
+        <a:font script="Jpan" typeface="游ゴシック"/>
+        <a:font script="Hang" typeface="맑은 고딕"/>
+        <a:font script="Hans" typeface="等线"/>
+        <a:font script="Hant" typeface="新細明體"/>
+        <a:font script="Arab" typeface="Arial"/>
+        <a:font script="Hebr" typeface="Arial"/>
+        <a:font script="Thai" typeface="Cordia New"/>
+        <a:font script="Ethi" typeface="Nyala"/>
+        <a:font script="Beng" typeface="Vrinda"/>
+        <a:font script="Gujr" typeface="Shruti"/>
+        <a:font script="Khmr" typeface="DaunPenh"/>
+        <a:font script="Knda" typeface="Tunga"/>
+        <a:font script="Guru" typeface="Raavi"/>
+        <a:font script="Cans" typeface="Euphemia"/>
+        <a:font script="Cher" typeface="Plantagenet Cherokee"/>
+        <a:font script="Yiii" typeface="Microsoft Yi Baiti"/>
+        <a:font script="Tibt" typeface="Microsoft Himalaya"/>
+        <a:font script="Thaa" typeface="MV Boli"/>
+        <a:font script="Deva" typeface="Mangal"/>
+        <a:font script="Telu" typeface="Gautami"/>
+        <a:font script="Taml" typeface="Latha"/>
+        <a:font script="Syrc" typeface="Estrangelo Edessa"/>
+        <a:font script="Orya" typeface="Kalinga"/>
+        <a:font script="Mlym" typeface="Kartika"/>
+        <a:font script="Laoo" typeface="DokChampa"/>
+        <a:font script="Sinh" typeface="Iskoola Pota"/>
+        <a:font script="Mong" typeface="Mongolian Baiti"/>
+        <a:font script="Viet" typeface="Arial"/>
+        <a:font script="Uigh" typeface="Microsoft Uighur"/>
+        <a:font script="Geor" typeface="Sylfaen"/>
+        <a:font script="Armn" typeface="Arial"/>
+        <a:font script="Bugi" typeface="Leelawadee UI"/>
+        <a:font script="Bopo" typeface="Microsoft JhengHei"/>
+        <a:font script="Java" typeface="Javanese Text"/>
+        <a:font script="Lisu" typeface="Segoe UI"/>
+        <a:font script="Mymr" typeface="Myanmar Text"/>
+        <a:font script="Nkoo" typeface="Ebrima"/>
+        <a:font script="Olck" typeface="Nirmala UI"/>
+        <a:font script="Osma" typeface="Ebrima"/>
+        <a:font script="Phag" typeface="Phagspa"/>
+        <a:font script="Syrn" typeface="Estrangelo Edessa"/>
+        <a:font script="Syrj" typeface="Estrangelo Edessa"/>
+        <a:font script="Syre" typeface="Estrangelo Edessa"/>
+        <a:font script="Sora" typeface="Nirmala UI"/>
+        <a:font script="Tale" typeface="Microsoft Tai Le"/>
+        <a:font script="Talu" typeface="Microsoft New Tai Lue"/>
+        <a:font script="Tfng" typeface="Ebrima"/>
+      </a:minorFont>
+    </a:fontScheme>
+    <a:fmtScheme name="Office">
+      <a:fillStyleLst>
+        <a:solidFill>
+          <a:schemeClr val="phClr"/>
+        </a:solidFill>
+        <a:gradFill rotWithShape="1">
+          <a:gsLst>
+            <a:gs pos="0">
+              <a:schemeClr val="phClr">
+                <a:lumMod val="110000"/>
+                <a:satMod val="105000"/>
+                <a:tint val="67000"/>
+              </a:schemeClr>
+            </a:gs>
+            <a:gs pos="50000">
+              <a:schemeClr val="phClr">
+                <a:lumMod val="105000"/>
+                <a:satMod val="103000"/>
+                <a:tint val="73000"/>
+              </a:schemeClr>
+            </a:gs>
+            <a:gs pos="100000">
+              <a:schemeClr val="phClr">
+                <a:lumMod val="105000"/>
+                <a:satMod val="109000"/>
+                <a:tint val="81000"/>
+              </a:schemeClr>
+            </a:gs>
+          </a:gsLst>
+          <a:lin ang="5400000" scaled="0"/>
+        </a:gradFill>
+        <a:gradFill rotWithShape="1">
+          <a:gsLst>
+            <a:gs pos="0">
+              <a:schemeClr val="phClr">
+                <a:satMod val="103000"/>
+                <a:lumMod val="102000"/>
+                <a:tint val="94000"/>
+              </a:schemeClr>
+            </a:gs>
+            <a:gs pos="50000">
+              <a:schemeClr val="phClr">
+                <a:satMod val="110000"/>
+                <a:lumMod val="100000"/>
+                <a:shade val="100000"/>
+              </a:schemeClr>
+            </a:gs>
+            <a:gs pos="100000">
+              <a:schemeClr val="phClr">
+                <a:lumMod val="99000"/>
+                <a:satMod val="120000"/>
+                <a:shade val="78000"/>
+              </a:schemeClr>
+            </a:gs>
+          </a:gsLst>
+          <a:lin ang="5400000" scaled="0"/>
+        </a:gradFill>
+      </a:fillStyleLst>
+      <a:lnStyleLst>
+        <a:ln w="12700" cap="flat" cmpd="sng" algn="ctr">
+          <a:solidFill>
+            <a:schemeClr val="phClr"/>
+          </a:solidFill>
+          <a:prstDash val="solid"/>
+          <a:miter lim="800000"/>
+        </a:ln>
+        <a:ln w="19050" cap="flat" cmpd="sng" algn="ctr">
+          <a:solidFill>
+            <a:schemeClr val="phClr"/>
+          </a:solidFill>
+          <a:prstDash val="solid"/>
+          <a:miter lim="800000"/>
+        </a:ln>
+        <a:ln w="25400" cap="flat" cmpd="sng" algn="ctr">
+          <a:solidFill>
+            <a:schemeClr val="phClr"/>
+          </a:solidFill>
+          <a:prstDash val="solid"/>
+          <a:miter lim="800000"/>
+        </a:ln>
+      </a:lnStyleLst>
+      <a:effectStyleLst>
+        <a:effectStyle>
+          <a:effectLst/>
+        </a:effectStyle>
+        <a:effectStyle>
+          <a:effectLst/>
+        </a:effectStyle>
+        <a:effectStyle>
+          <a:effectLst>
+            <a:outerShdw blurRad="57150" dist="19050" dir="5400000" algn="ctr" rotWithShape="0">
+              <a:srgbClr val="000000">
+                <a:alpha val="63000"/>
+              </a:srgbClr>
+            </a:outerShdw>
+          </a:effectLst>
+        </a:effectStyle>
+      </a:effectStyleLst>
+      <a:bgFillStyleLst>
+        <a:solidFill>
+          <a:schemeClr val="phClr"/>
+        </a:solidFill>
+        <a:solidFill>
+          <a:schemeClr val="phClr">
+            <a:tint val="95000"/>
+            <a:satMod val="170000"/>
+          </a:schemeClr>
+        </a:solidFill>
+        <a:gradFill rotWithShape="1">
+          <a:gsLst>
+            <a:gs pos="0">
+              <a:schemeClr val="phClr">
+                <a:tint val="93000"/>
+                <a:satMod val="150000"/>
+                <a:shade val="98000"/>
+                <a:lumMod val="102000"/>
+              </a:schemeClr>
+            </a:gs>
+            <a:gs pos="50000">
+              <a:schemeClr val="phClr">
+                <a:tint val="98000"/>
+                <a:satMod val="130000"/>
+                <a:shade val="90000"/>
+                <a:lumMod val="103000"/>
+              </a:schemeClr>
+            </a:gs>
+            <a:gs pos="100000">
+              <a:schemeClr val="phClr">
+                <a:shade val="63000"/>
+                <a:satMod val="120000"/>
+              </a:schemeClr>
+            </a:gs>
+          </a:gsLst>
+          <a:lin ang="5400000" scaled="0"/>
+        </a:gradFill>
+      </a:bgFillStyleLst>
+    </a:fmtScheme>
+  </a:themeElements>
+  <a:objectDefaults>
+    <a:lnDef>
+      <a:spPr/>
+      <a:bodyPr/>
+      <a:lstStyle/>
+      <a:style>
+        <a:lnRef idx="2">
+          <a:schemeClr val="accent1"/>
+        </a:lnRef>
+        <a:fillRef idx="0">
+          <a:schemeClr val="accent1"/>
+        </a:fillRef>
+        <a:effectRef idx="1">
+          <a:schemeClr val="accent1"/>
+        </a:effectRef>
+        <a:fontRef idx="minor">
+          <a:schemeClr val="tx1"/>
+        </a:fontRef>
+      </a:style>
+    </a:lnDef>
+  </a:objectDefaults>
+  <a:extraClrSchemeLst/>
+  <a:extLst>
+    <a:ext uri="{05A4C25C-085E-4340-85A3-A5531E510DB2}">
+      <thm15:themeFamily xmlns:thm15="http://schemas.microsoft.com/office/thememl/2012/main" name="Office Theme" id="{2E142A2C-CD16-42D6-873A-C26D2A0506FA}" vid="{1BDDFF52-6CD6-40A5-AB3C-68EB2F1E4D0A}"/>
+    </a:ext>
+  </a:extLst>
+</a:theme>
 </file>